--- a/발표 이걸로.pptx
+++ b/발표 이걸로.pptx
@@ -6,16 +6,14 @@
   </p:sldMasterIdLst>
   <p:sldIdLst>
     <p:sldId id="256" r:id="rId2"/>
-    <p:sldId id="269" r:id="rId3"/>
-    <p:sldId id="261" r:id="rId4"/>
-    <p:sldId id="262" r:id="rId5"/>
-    <p:sldId id="263" r:id="rId6"/>
-    <p:sldId id="264" r:id="rId7"/>
-    <p:sldId id="270" r:id="rId8"/>
+    <p:sldId id="261" r:id="rId3"/>
+    <p:sldId id="269" r:id="rId4"/>
+    <p:sldId id="263" r:id="rId5"/>
+    <p:sldId id="264" r:id="rId6"/>
+    <p:sldId id="271" r:id="rId7"/>
+    <p:sldId id="266" r:id="rId8"/>
     <p:sldId id="265" r:id="rId9"/>
-    <p:sldId id="266" r:id="rId10"/>
-    <p:sldId id="267" r:id="rId11"/>
-    <p:sldId id="268" r:id="rId12"/>
+    <p:sldId id="267" r:id="rId10"/>
   </p:sldIdLst>
   <p:sldSz cx="9144000" cy="6858000" type="screen4x3"/>
   <p:notesSz cx="6858000" cy="9144000"/>
@@ -674,44 +672,37 @@
       </p:sp>
       <p:grpSp>
         <p:nvGrpSpPr>
-          <p:cNvPr id="11" name="그룹 10"/>
+          <p:cNvPr id="3" name="그룹 2"/>
           <p:cNvGrpSpPr/>
           <p:nvPr/>
         </p:nvGrpSpPr>
         <p:grpSpPr>
           <a:xfrm>
-            <a:off x="1912620" y="2151105"/>
-            <a:ext cx="5310314" cy="2555789"/>
-            <a:chOff x="1912620" y="964233"/>
-            <a:chExt cx="5310314" cy="2555789"/>
+            <a:off x="1912620" y="2501859"/>
+            <a:ext cx="5310314" cy="1923890"/>
+            <a:chOff x="1589560" y="1564818"/>
+            <a:chExt cx="5310314" cy="1923890"/>
           </a:xfrm>
         </p:grpSpPr>
         <p:sp>
           <p:nvSpPr>
-            <p:cNvPr id="10" name="모서리가 둥근 직사각형 9"/>
+            <p:cNvPr id="4" name="직사각형 3"/>
             <p:cNvSpPr/>
             <p:nvPr/>
           </p:nvSpPr>
           <p:spPr>
             <a:xfrm>
-              <a:off x="2176808" y="964233"/>
-              <a:ext cx="4781937" cy="2555789"/>
+              <a:off x="2238699" y="2971433"/>
+              <a:ext cx="4012036" cy="517275"/>
             </a:xfrm>
-            <a:prstGeom prst="roundRect">
-              <a:avLst>
-                <a:gd name="adj" fmla="val 7320"/>
-              </a:avLst>
+            <a:prstGeom prst="rect">
+              <a:avLst/>
             </a:prstGeom>
             <a:solidFill>
-              <a:schemeClr val="bg1">
-                <a:alpha val="50000"/>
-              </a:schemeClr>
+              <a:srgbClr val="3B9AE0"/>
             </a:solidFill>
-            <a:ln w="19050">
-              <a:solidFill>
-                <a:srgbClr val="3B9AE0"/>
-              </a:solidFill>
-              <a:prstDash val="sysDot"/>
+            <a:ln>
+              <a:noFill/>
             </a:ln>
           </p:spPr>
           <p:style>
@@ -736,242 +727,169 @@
             <a:p>
               <a:pPr algn="ctr"/>
               <a:endParaRPr lang="ko-KR" altLang="en-US" dirty="0">
+                <a:solidFill>
+                  <a:schemeClr val="bg1"/>
+                </a:solidFill>
                 <a:latin typeface="맑은 고딕" panose="020B0503020000020004" pitchFamily="50" charset="-127"/>
               </a:endParaRPr>
             </a:p>
           </p:txBody>
         </p:sp>
-        <p:grpSp>
-          <p:nvGrpSpPr>
-            <p:cNvPr id="3" name="그룹 2"/>
-            <p:cNvGrpSpPr/>
+        <p:sp>
+          <p:nvSpPr>
+            <p:cNvPr id="5" name="직사각형 4"/>
+            <p:cNvSpPr>
+              <a:spLocks noChangeArrowheads="1"/>
+            </p:cNvSpPr>
             <p:nvPr/>
-          </p:nvGrpSpPr>
-          <p:grpSpPr>
+          </p:nvSpPr>
+          <p:spPr bwMode="auto">
             <a:xfrm>
-              <a:off x="1912620" y="1314987"/>
-              <a:ext cx="5310314" cy="1651648"/>
-              <a:chOff x="1589560" y="1564818"/>
-              <a:chExt cx="5310314" cy="1651648"/>
+              <a:off x="1589560" y="2282504"/>
+              <a:ext cx="5310314" cy="400110"/>
             </a:xfrm>
-          </p:grpSpPr>
-          <p:sp>
-            <p:nvSpPr>
-              <p:cNvPr id="4" name="직사각형 3"/>
-              <p:cNvSpPr/>
-              <p:nvPr/>
-            </p:nvSpPr>
-            <p:spPr>
-              <a:xfrm>
-                <a:off x="2238699" y="2971433"/>
-                <a:ext cx="4012036" cy="228600"/>
-              </a:xfrm>
-              <a:prstGeom prst="rect">
-                <a:avLst/>
-              </a:prstGeom>
-              <a:solidFill>
-                <a:srgbClr val="3B9AE0"/>
-              </a:solidFill>
-              <a:ln>
-                <a:noFill/>
-              </a:ln>
-            </p:spPr>
-            <p:style>
-              <a:lnRef idx="2">
-                <a:schemeClr val="accent1">
-                  <a:shade val="50000"/>
-                </a:schemeClr>
-              </a:lnRef>
-              <a:fillRef idx="1">
-                <a:schemeClr val="accent1"/>
-              </a:fillRef>
-              <a:effectRef idx="0">
-                <a:schemeClr val="accent1"/>
-              </a:effectRef>
-              <a:fontRef idx="minor">
-                <a:schemeClr val="lt1"/>
-              </a:fontRef>
-            </p:style>
-            <p:txBody>
-              <a:bodyPr rtlCol="0" anchor="ctr"/>
-              <a:lstStyle/>
-              <a:p>
-                <a:pPr algn="ctr"/>
-                <a:endParaRPr lang="ko-KR" altLang="en-US" dirty="0">
+            <a:prstGeom prst="rect">
+              <a:avLst/>
+            </a:prstGeom>
+            <a:noFill/>
+            <a:ln>
+              <a:noFill/>
+            </a:ln>
+            <a:extLst>
+              <a:ext uri="{909E8E84-426E-40DD-AFC4-6F175D3DCCD1}">
+                <a14:hiddenFill xmlns:a14="http://schemas.microsoft.com/office/drawing/2010/main">
                   <a:solidFill>
-                    <a:schemeClr val="bg1"/>
+                    <a:srgbClr val="FFFFFF"/>
                   </a:solidFill>
-                  <a:latin typeface="맑은 고딕" panose="020B0503020000020004" pitchFamily="50" charset="-127"/>
-                </a:endParaRPr>
-              </a:p>
-            </p:txBody>
-          </p:sp>
-          <p:sp>
-            <p:nvSpPr>
-              <p:cNvPr id="5" name="직사각형 4"/>
-              <p:cNvSpPr>
-                <a:spLocks noChangeArrowheads="1"/>
-              </p:cNvSpPr>
-              <p:nvPr/>
-            </p:nvSpPr>
-            <p:spPr bwMode="auto">
-              <a:xfrm>
-                <a:off x="1589560" y="2282504"/>
-                <a:ext cx="5310314" cy="400110"/>
-              </a:xfrm>
-              <a:prstGeom prst="rect">
-                <a:avLst/>
-              </a:prstGeom>
-              <a:noFill/>
-              <a:ln>
-                <a:noFill/>
-              </a:ln>
-              <a:extLst>
-                <a:ext uri="{909E8E84-426E-40DD-AFC4-6F175D3DCCD1}">
-                  <a14:hiddenFill xmlns:a14="http://schemas.microsoft.com/office/drawing/2010/main">
-                    <a:solidFill>
-                      <a:srgbClr val="FFFFFF"/>
-                    </a:solidFill>
-                  </a14:hiddenFill>
-                </a:ext>
-                <a:ext uri="{91240B29-F687-4F45-9708-019B960494DF}">
-                  <a14:hiddenLine xmlns:a14="http://schemas.microsoft.com/office/drawing/2010/main" w="9525">
-                    <a:solidFill>
-                      <a:srgbClr val="000000"/>
-                    </a:solidFill>
-                    <a:miter lim="800000"/>
-                    <a:headEnd/>
-                    <a:tailEnd/>
-                  </a14:hiddenLine>
-                </a:ext>
-              </a:extLst>
-            </p:spPr>
-            <p:txBody>
-              <a:bodyPr wrap="square">
-                <a:spAutoFit/>
-              </a:bodyPr>
-              <a:lstStyle>
-                <a:lvl1pPr>
-                  <a:defRPr>
-                    <a:solidFill>
-                      <a:schemeClr val="tx1"/>
-                    </a:solidFill>
-                    <a:latin typeface="Calibri" panose="020F0502020204030204" pitchFamily="34" charset="0"/>
-                    <a:ea typeface="맑은 고딕" panose="020B0503020000020004" pitchFamily="50" charset="-127"/>
-                  </a:defRPr>
-                </a:lvl1pPr>
-                <a:lvl2pPr marL="742950" indent="-285750">
-                  <a:defRPr>
-                    <a:solidFill>
-                      <a:schemeClr val="tx1"/>
-                    </a:solidFill>
-                    <a:latin typeface="Calibri" panose="020F0502020204030204" pitchFamily="34" charset="0"/>
-                    <a:ea typeface="맑은 고딕" panose="020B0503020000020004" pitchFamily="50" charset="-127"/>
-                  </a:defRPr>
-                </a:lvl2pPr>
-                <a:lvl3pPr marL="1143000" indent="-228600">
-                  <a:defRPr>
-                    <a:solidFill>
-                      <a:schemeClr val="tx1"/>
-                    </a:solidFill>
-                    <a:latin typeface="Calibri" panose="020F0502020204030204" pitchFamily="34" charset="0"/>
-                    <a:ea typeface="맑은 고딕" panose="020B0503020000020004" pitchFamily="50" charset="-127"/>
-                  </a:defRPr>
-                </a:lvl3pPr>
-                <a:lvl4pPr marL="1600200" indent="-228600">
-                  <a:defRPr>
-                    <a:solidFill>
-                      <a:schemeClr val="tx1"/>
-                    </a:solidFill>
-                    <a:latin typeface="Calibri" panose="020F0502020204030204" pitchFamily="34" charset="0"/>
-                    <a:ea typeface="맑은 고딕" panose="020B0503020000020004" pitchFamily="50" charset="-127"/>
-                  </a:defRPr>
-                </a:lvl4pPr>
-                <a:lvl5pPr marL="2057400" indent="-228600">
-                  <a:defRPr>
-                    <a:solidFill>
-                      <a:schemeClr val="tx1"/>
-                    </a:solidFill>
-                    <a:latin typeface="Calibri" panose="020F0502020204030204" pitchFamily="34" charset="0"/>
-                    <a:ea typeface="맑은 고딕" panose="020B0503020000020004" pitchFamily="50" charset="-127"/>
-                  </a:defRPr>
-                </a:lvl5pPr>
-                <a:lvl6pPr marL="2514600" indent="-228600" eaLnBrk="0" fontAlgn="base" hangingPunct="0">
-                  <a:spcBef>
-                    <a:spcPct val="0"/>
-                  </a:spcBef>
-                  <a:spcAft>
-                    <a:spcPct val="0"/>
-                  </a:spcAft>
-                  <a:defRPr>
-                    <a:solidFill>
-                      <a:schemeClr val="tx1"/>
-                    </a:solidFill>
-                    <a:latin typeface="Calibri" panose="020F0502020204030204" pitchFamily="34" charset="0"/>
-                    <a:ea typeface="맑은 고딕" panose="020B0503020000020004" pitchFamily="50" charset="-127"/>
-                  </a:defRPr>
-                </a:lvl6pPr>
-                <a:lvl7pPr marL="2971800" indent="-228600" eaLnBrk="0" fontAlgn="base" hangingPunct="0">
-                  <a:spcBef>
-                    <a:spcPct val="0"/>
-                  </a:spcBef>
-                  <a:spcAft>
-                    <a:spcPct val="0"/>
-                  </a:spcAft>
-                  <a:defRPr>
-                    <a:solidFill>
-                      <a:schemeClr val="tx1"/>
-                    </a:solidFill>
-                    <a:latin typeface="Calibri" panose="020F0502020204030204" pitchFamily="34" charset="0"/>
-                    <a:ea typeface="맑은 고딕" panose="020B0503020000020004" pitchFamily="50" charset="-127"/>
-                  </a:defRPr>
-                </a:lvl7pPr>
-                <a:lvl8pPr marL="3429000" indent="-228600" eaLnBrk="0" fontAlgn="base" hangingPunct="0">
-                  <a:spcBef>
-                    <a:spcPct val="0"/>
-                  </a:spcBef>
-                  <a:spcAft>
-                    <a:spcPct val="0"/>
-                  </a:spcAft>
-                  <a:defRPr>
-                    <a:solidFill>
-                      <a:schemeClr val="tx1"/>
-                    </a:solidFill>
-                    <a:latin typeface="Calibri" panose="020F0502020204030204" pitchFamily="34" charset="0"/>
-                    <a:ea typeface="맑은 고딕" panose="020B0503020000020004" pitchFamily="50" charset="-127"/>
-                  </a:defRPr>
-                </a:lvl8pPr>
-                <a:lvl9pPr marL="3886200" indent="-228600" eaLnBrk="0" fontAlgn="base" hangingPunct="0">
-                  <a:spcBef>
-                    <a:spcPct val="0"/>
-                  </a:spcBef>
-                  <a:spcAft>
-                    <a:spcPct val="0"/>
-                  </a:spcAft>
-                  <a:defRPr>
-                    <a:solidFill>
-                      <a:schemeClr val="tx1"/>
-                    </a:solidFill>
-                    <a:latin typeface="Calibri" panose="020F0502020204030204" pitchFamily="34" charset="0"/>
-                    <a:ea typeface="맑은 고딕" panose="020B0503020000020004" pitchFamily="50" charset="-127"/>
-                  </a:defRPr>
-                </a:lvl9pPr>
-              </a:lstStyle>
-              <a:p>
-                <a:pPr algn="ctr"/>
-                <a:r>
-                  <a:rPr lang="ko-KR" altLang="en-US" sz="2000" b="1" dirty="0">
-                    <a:solidFill>
-                      <a:schemeClr val="tx1">
-                        <a:lumMod val="75000"/>
-                        <a:lumOff val="25000"/>
-                      </a:schemeClr>
-                    </a:solidFill>
-                    <a:latin typeface="맑은 고딕" panose="020B0503020000020004" pitchFamily="50" charset="-127"/>
-                  </a:rPr>
-                  <a:t>환경평가부 물환경사업팀</a:t>
-                </a:r>
-                <a:endParaRPr lang="en-US" altLang="ko-KR" sz="2000" b="1" dirty="0">
+                </a14:hiddenFill>
+              </a:ext>
+              <a:ext uri="{91240B29-F687-4F45-9708-019B960494DF}">
+                <a14:hiddenLine xmlns:a14="http://schemas.microsoft.com/office/drawing/2010/main" w="9525">
+                  <a:solidFill>
+                    <a:srgbClr val="000000"/>
+                  </a:solidFill>
+                  <a:miter lim="800000"/>
+                  <a:headEnd/>
+                  <a:tailEnd/>
+                </a14:hiddenLine>
+              </a:ext>
+            </a:extLst>
+          </p:spPr>
+          <p:txBody>
+            <a:bodyPr wrap="square">
+              <a:spAutoFit/>
+            </a:bodyPr>
+            <a:lstStyle>
+              <a:lvl1pPr>
+                <a:defRPr>
+                  <a:solidFill>
+                    <a:schemeClr val="tx1"/>
+                  </a:solidFill>
+                  <a:latin typeface="Calibri" panose="020F0502020204030204" pitchFamily="34" charset="0"/>
+                  <a:ea typeface="맑은 고딕" panose="020B0503020000020004" pitchFamily="50" charset="-127"/>
+                </a:defRPr>
+              </a:lvl1pPr>
+              <a:lvl2pPr marL="742950" indent="-285750">
+                <a:defRPr>
+                  <a:solidFill>
+                    <a:schemeClr val="tx1"/>
+                  </a:solidFill>
+                  <a:latin typeface="Calibri" panose="020F0502020204030204" pitchFamily="34" charset="0"/>
+                  <a:ea typeface="맑은 고딕" panose="020B0503020000020004" pitchFamily="50" charset="-127"/>
+                </a:defRPr>
+              </a:lvl2pPr>
+              <a:lvl3pPr marL="1143000" indent="-228600">
+                <a:defRPr>
+                  <a:solidFill>
+                    <a:schemeClr val="tx1"/>
+                  </a:solidFill>
+                  <a:latin typeface="Calibri" panose="020F0502020204030204" pitchFamily="34" charset="0"/>
+                  <a:ea typeface="맑은 고딕" panose="020B0503020000020004" pitchFamily="50" charset="-127"/>
+                </a:defRPr>
+              </a:lvl3pPr>
+              <a:lvl4pPr marL="1600200" indent="-228600">
+                <a:defRPr>
+                  <a:solidFill>
+                    <a:schemeClr val="tx1"/>
+                  </a:solidFill>
+                  <a:latin typeface="Calibri" panose="020F0502020204030204" pitchFamily="34" charset="0"/>
+                  <a:ea typeface="맑은 고딕" panose="020B0503020000020004" pitchFamily="50" charset="-127"/>
+                </a:defRPr>
+              </a:lvl4pPr>
+              <a:lvl5pPr marL="2057400" indent="-228600">
+                <a:defRPr>
+                  <a:solidFill>
+                    <a:schemeClr val="tx1"/>
+                  </a:solidFill>
+                  <a:latin typeface="Calibri" panose="020F0502020204030204" pitchFamily="34" charset="0"/>
+                  <a:ea typeface="맑은 고딕" panose="020B0503020000020004" pitchFamily="50" charset="-127"/>
+                </a:defRPr>
+              </a:lvl5pPr>
+              <a:lvl6pPr marL="2514600" indent="-228600" eaLnBrk="0" fontAlgn="base" hangingPunct="0">
+                <a:spcBef>
+                  <a:spcPct val="0"/>
+                </a:spcBef>
+                <a:spcAft>
+                  <a:spcPct val="0"/>
+                </a:spcAft>
+                <a:defRPr>
+                  <a:solidFill>
+                    <a:schemeClr val="tx1"/>
+                  </a:solidFill>
+                  <a:latin typeface="Calibri" panose="020F0502020204030204" pitchFamily="34" charset="0"/>
+                  <a:ea typeface="맑은 고딕" panose="020B0503020000020004" pitchFamily="50" charset="-127"/>
+                </a:defRPr>
+              </a:lvl6pPr>
+              <a:lvl7pPr marL="2971800" indent="-228600" eaLnBrk="0" fontAlgn="base" hangingPunct="0">
+                <a:spcBef>
+                  <a:spcPct val="0"/>
+                </a:spcBef>
+                <a:spcAft>
+                  <a:spcPct val="0"/>
+                </a:spcAft>
+                <a:defRPr>
+                  <a:solidFill>
+                    <a:schemeClr val="tx1"/>
+                  </a:solidFill>
+                  <a:latin typeface="Calibri" panose="020F0502020204030204" pitchFamily="34" charset="0"/>
+                  <a:ea typeface="맑은 고딕" panose="020B0503020000020004" pitchFamily="50" charset="-127"/>
+                </a:defRPr>
+              </a:lvl7pPr>
+              <a:lvl8pPr marL="3429000" indent="-228600" eaLnBrk="0" fontAlgn="base" hangingPunct="0">
+                <a:spcBef>
+                  <a:spcPct val="0"/>
+                </a:spcBef>
+                <a:spcAft>
+                  <a:spcPct val="0"/>
+                </a:spcAft>
+                <a:defRPr>
+                  <a:solidFill>
+                    <a:schemeClr val="tx1"/>
+                  </a:solidFill>
+                  <a:latin typeface="Calibri" panose="020F0502020204030204" pitchFamily="34" charset="0"/>
+                  <a:ea typeface="맑은 고딕" panose="020B0503020000020004" pitchFamily="50" charset="-127"/>
+                </a:defRPr>
+              </a:lvl8pPr>
+              <a:lvl9pPr marL="3886200" indent="-228600" eaLnBrk="0" fontAlgn="base" hangingPunct="0">
+                <a:spcBef>
+                  <a:spcPct val="0"/>
+                </a:spcBef>
+                <a:spcAft>
+                  <a:spcPct val="0"/>
+                </a:spcAft>
+                <a:defRPr>
+                  <a:solidFill>
+                    <a:schemeClr val="tx1"/>
+                  </a:solidFill>
+                  <a:latin typeface="Calibri" panose="020F0502020204030204" pitchFamily="34" charset="0"/>
+                  <a:ea typeface="맑은 고딕" panose="020B0503020000020004" pitchFamily="50" charset="-127"/>
+                </a:defRPr>
+              </a:lvl9pPr>
+            </a:lstStyle>
+            <a:p>
+              <a:pPr algn="ctr"/>
+              <a:r>
+                <a:rPr lang="ko-KR" altLang="en-US" sz="2000" b="1" dirty="0">
                   <a:solidFill>
                     <a:schemeClr val="tx1">
                       <a:lumMod val="75000"/>
@@ -979,178 +897,178 @@
                     </a:schemeClr>
                   </a:solidFill>
                   <a:latin typeface="맑은 고딕" panose="020B0503020000020004" pitchFamily="50" charset="-127"/>
-                </a:endParaRPr>
-              </a:p>
-            </p:txBody>
-          </p:sp>
-          <p:sp>
-            <p:nvSpPr>
-              <p:cNvPr id="6" name="직사각형 5"/>
-              <p:cNvSpPr>
-                <a:spLocks noChangeArrowheads="1"/>
-              </p:cNvSpPr>
-              <p:nvPr/>
-            </p:nvSpPr>
-            <p:spPr bwMode="auto">
-              <a:xfrm>
-                <a:off x="1755231" y="1564818"/>
-                <a:ext cx="4978969" cy="523220"/>
-              </a:xfrm>
-              <a:prstGeom prst="rect">
-                <a:avLst/>
-              </a:prstGeom>
+                </a:rPr>
+                <a:t>환경평가부 물환경사업팀</a:t>
+              </a:r>
+              <a:endParaRPr lang="en-US" altLang="ko-KR" sz="2000" b="1" dirty="0">
+                <a:solidFill>
+                  <a:schemeClr val="tx1">
+                    <a:lumMod val="75000"/>
+                    <a:lumOff val="25000"/>
+                  </a:schemeClr>
+                </a:solidFill>
+                <a:latin typeface="맑은 고딕" panose="020B0503020000020004" pitchFamily="50" charset="-127"/>
+              </a:endParaRPr>
+            </a:p>
+          </p:txBody>
+        </p:sp>
+        <p:sp>
+          <p:nvSpPr>
+            <p:cNvPr id="6" name="직사각형 5"/>
+            <p:cNvSpPr>
+              <a:spLocks noChangeArrowheads="1"/>
+            </p:cNvSpPr>
+            <p:nvPr/>
+          </p:nvSpPr>
+          <p:spPr bwMode="auto">
+            <a:xfrm>
+              <a:off x="1755231" y="1564818"/>
+              <a:ext cx="4978969" cy="523220"/>
+            </a:xfrm>
+            <a:prstGeom prst="rect">
+              <a:avLst/>
+            </a:prstGeom>
+            <a:noFill/>
+            <a:ln>
               <a:noFill/>
-              <a:ln>
-                <a:noFill/>
-              </a:ln>
-              <a:extLst>
-                <a:ext uri="{909E8E84-426E-40DD-AFC4-6F175D3DCCD1}">
-                  <a14:hiddenFill xmlns:a14="http://schemas.microsoft.com/office/drawing/2010/main">
-                    <a:solidFill>
-                      <a:srgbClr val="FFFFFF"/>
-                    </a:solidFill>
-                  </a14:hiddenFill>
-                </a:ext>
-                <a:ext uri="{91240B29-F687-4F45-9708-019B960494DF}">
-                  <a14:hiddenLine xmlns:a14="http://schemas.microsoft.com/office/drawing/2010/main" w="9525">
-                    <a:solidFill>
-                      <a:srgbClr val="000000"/>
-                    </a:solidFill>
-                    <a:miter lim="800000"/>
-                    <a:headEnd/>
-                    <a:tailEnd/>
-                  </a14:hiddenLine>
-                </a:ext>
-              </a:extLst>
-            </p:spPr>
-            <p:txBody>
-              <a:bodyPr wrap="square">
-                <a:spAutoFit/>
-              </a:bodyPr>
-              <a:lstStyle>
-                <a:lvl1pPr latinLnBrk="1">
-                  <a:defRPr>
-                    <a:solidFill>
-                      <a:schemeClr val="tx1"/>
-                    </a:solidFill>
-                    <a:latin typeface="Calibri" panose="020F0502020204030204" pitchFamily="34" charset="0"/>
-                    <a:ea typeface="맑은 고딕" panose="020B0503020000020004" pitchFamily="50" charset="-127"/>
-                  </a:defRPr>
-                </a:lvl1pPr>
-                <a:lvl2pPr marL="742950" indent="-285750" latinLnBrk="1">
-                  <a:defRPr>
-                    <a:solidFill>
-                      <a:schemeClr val="tx1"/>
-                    </a:solidFill>
-                    <a:latin typeface="Calibri" panose="020F0502020204030204" pitchFamily="34" charset="0"/>
-                    <a:ea typeface="맑은 고딕" panose="020B0503020000020004" pitchFamily="50" charset="-127"/>
-                  </a:defRPr>
-                </a:lvl2pPr>
-                <a:lvl3pPr marL="1143000" indent="-228600" latinLnBrk="1">
-                  <a:defRPr>
-                    <a:solidFill>
-                      <a:schemeClr val="tx1"/>
-                    </a:solidFill>
-                    <a:latin typeface="Calibri" panose="020F0502020204030204" pitchFamily="34" charset="0"/>
-                    <a:ea typeface="맑은 고딕" panose="020B0503020000020004" pitchFamily="50" charset="-127"/>
-                  </a:defRPr>
-                </a:lvl3pPr>
-                <a:lvl4pPr marL="1600200" indent="-228600" latinLnBrk="1">
-                  <a:defRPr>
-                    <a:solidFill>
-                      <a:schemeClr val="tx1"/>
-                    </a:solidFill>
-                    <a:latin typeface="Calibri" panose="020F0502020204030204" pitchFamily="34" charset="0"/>
-                    <a:ea typeface="맑은 고딕" panose="020B0503020000020004" pitchFamily="50" charset="-127"/>
-                  </a:defRPr>
-                </a:lvl4pPr>
-                <a:lvl5pPr marL="2057400" indent="-228600" latinLnBrk="1">
-                  <a:defRPr>
-                    <a:solidFill>
-                      <a:schemeClr val="tx1"/>
-                    </a:solidFill>
-                    <a:latin typeface="Calibri" panose="020F0502020204030204" pitchFamily="34" charset="0"/>
-                    <a:ea typeface="맑은 고딕" panose="020B0503020000020004" pitchFamily="50" charset="-127"/>
-                  </a:defRPr>
-                </a:lvl5pPr>
-                <a:lvl6pPr marL="2514600" indent="-228600" fontAlgn="base">
-                  <a:spcBef>
-                    <a:spcPct val="0"/>
-                  </a:spcBef>
-                  <a:spcAft>
-                    <a:spcPct val="0"/>
-                  </a:spcAft>
-                  <a:defRPr>
-                    <a:solidFill>
-                      <a:schemeClr val="tx1"/>
-                    </a:solidFill>
-                    <a:latin typeface="Calibri" panose="020F0502020204030204" pitchFamily="34" charset="0"/>
-                    <a:ea typeface="맑은 고딕" panose="020B0503020000020004" pitchFamily="50" charset="-127"/>
-                  </a:defRPr>
-                </a:lvl6pPr>
-                <a:lvl7pPr marL="2971800" indent="-228600" fontAlgn="base">
-                  <a:spcBef>
-                    <a:spcPct val="0"/>
-                  </a:spcBef>
-                  <a:spcAft>
-                    <a:spcPct val="0"/>
-                  </a:spcAft>
-                  <a:defRPr>
-                    <a:solidFill>
-                      <a:schemeClr val="tx1"/>
-                    </a:solidFill>
-                    <a:latin typeface="Calibri" panose="020F0502020204030204" pitchFamily="34" charset="0"/>
-                    <a:ea typeface="맑은 고딕" panose="020B0503020000020004" pitchFamily="50" charset="-127"/>
-                  </a:defRPr>
-                </a:lvl7pPr>
-                <a:lvl8pPr marL="3429000" indent="-228600" fontAlgn="base">
-                  <a:spcBef>
-                    <a:spcPct val="0"/>
-                  </a:spcBef>
-                  <a:spcAft>
-                    <a:spcPct val="0"/>
-                  </a:spcAft>
-                  <a:defRPr>
-                    <a:solidFill>
-                      <a:schemeClr val="tx1"/>
-                    </a:solidFill>
-                    <a:latin typeface="Calibri" panose="020F0502020204030204" pitchFamily="34" charset="0"/>
-                    <a:ea typeface="맑은 고딕" panose="020B0503020000020004" pitchFamily="50" charset="-127"/>
-                  </a:defRPr>
-                </a:lvl8pPr>
-                <a:lvl9pPr marL="3886200" indent="-228600" fontAlgn="base">
-                  <a:spcBef>
-                    <a:spcPct val="0"/>
-                  </a:spcBef>
-                  <a:spcAft>
-                    <a:spcPct val="0"/>
-                  </a:spcAft>
-                  <a:defRPr>
-                    <a:solidFill>
-                      <a:schemeClr val="tx1"/>
-                    </a:solidFill>
-                    <a:latin typeface="Calibri" panose="020F0502020204030204" pitchFamily="34" charset="0"/>
-                    <a:ea typeface="맑은 고딕" panose="020B0503020000020004" pitchFamily="50" charset="-127"/>
-                  </a:defRPr>
-                </a:lvl9pPr>
-              </a:lstStyle>
-              <a:p>
-                <a:pPr algn="ctr">
-                  <a:defRPr/>
-                </a:pPr>
-                <a:r>
-                  <a:rPr lang="ko-KR" altLang="en-US" sz="2800" b="1" dirty="0">
-                    <a:solidFill>
-                      <a:schemeClr val="tx1">
-                        <a:lumMod val="75000"/>
-                        <a:lumOff val="25000"/>
-                      </a:schemeClr>
-                    </a:solidFill>
-                    <a:latin typeface="맑은 고딕" panose="020B0503020000020004" pitchFamily="50" charset="-127"/>
-                  </a:rPr>
-                  <a:t>스마트 하천 모니터링 시스템</a:t>
-                </a:r>
-                <a:endParaRPr kumimoji="1" lang="en-US" altLang="ko-KR" sz="2800" b="1" dirty="0">
+            </a:ln>
+            <a:extLst>
+              <a:ext uri="{909E8E84-426E-40DD-AFC4-6F175D3DCCD1}">
+                <a14:hiddenFill xmlns:a14="http://schemas.microsoft.com/office/drawing/2010/main">
+                  <a:solidFill>
+                    <a:srgbClr val="FFFFFF"/>
+                  </a:solidFill>
+                </a14:hiddenFill>
+              </a:ext>
+              <a:ext uri="{91240B29-F687-4F45-9708-019B960494DF}">
+                <a14:hiddenLine xmlns:a14="http://schemas.microsoft.com/office/drawing/2010/main" w="9525">
+                  <a:solidFill>
+                    <a:srgbClr val="000000"/>
+                  </a:solidFill>
+                  <a:miter lim="800000"/>
+                  <a:headEnd/>
+                  <a:tailEnd/>
+                </a14:hiddenLine>
+              </a:ext>
+            </a:extLst>
+          </p:spPr>
+          <p:txBody>
+            <a:bodyPr wrap="square">
+              <a:spAutoFit/>
+            </a:bodyPr>
+            <a:lstStyle>
+              <a:lvl1pPr latinLnBrk="1">
+                <a:defRPr>
+                  <a:solidFill>
+                    <a:schemeClr val="tx1"/>
+                  </a:solidFill>
+                  <a:latin typeface="Calibri" panose="020F0502020204030204" pitchFamily="34" charset="0"/>
+                  <a:ea typeface="맑은 고딕" panose="020B0503020000020004" pitchFamily="50" charset="-127"/>
+                </a:defRPr>
+              </a:lvl1pPr>
+              <a:lvl2pPr marL="742950" indent="-285750" latinLnBrk="1">
+                <a:defRPr>
+                  <a:solidFill>
+                    <a:schemeClr val="tx1"/>
+                  </a:solidFill>
+                  <a:latin typeface="Calibri" panose="020F0502020204030204" pitchFamily="34" charset="0"/>
+                  <a:ea typeface="맑은 고딕" panose="020B0503020000020004" pitchFamily="50" charset="-127"/>
+                </a:defRPr>
+              </a:lvl2pPr>
+              <a:lvl3pPr marL="1143000" indent="-228600" latinLnBrk="1">
+                <a:defRPr>
+                  <a:solidFill>
+                    <a:schemeClr val="tx1"/>
+                  </a:solidFill>
+                  <a:latin typeface="Calibri" panose="020F0502020204030204" pitchFamily="34" charset="0"/>
+                  <a:ea typeface="맑은 고딕" panose="020B0503020000020004" pitchFamily="50" charset="-127"/>
+                </a:defRPr>
+              </a:lvl3pPr>
+              <a:lvl4pPr marL="1600200" indent="-228600" latinLnBrk="1">
+                <a:defRPr>
+                  <a:solidFill>
+                    <a:schemeClr val="tx1"/>
+                  </a:solidFill>
+                  <a:latin typeface="Calibri" panose="020F0502020204030204" pitchFamily="34" charset="0"/>
+                  <a:ea typeface="맑은 고딕" panose="020B0503020000020004" pitchFamily="50" charset="-127"/>
+                </a:defRPr>
+              </a:lvl4pPr>
+              <a:lvl5pPr marL="2057400" indent="-228600" latinLnBrk="1">
+                <a:defRPr>
+                  <a:solidFill>
+                    <a:schemeClr val="tx1"/>
+                  </a:solidFill>
+                  <a:latin typeface="Calibri" panose="020F0502020204030204" pitchFamily="34" charset="0"/>
+                  <a:ea typeface="맑은 고딕" panose="020B0503020000020004" pitchFamily="50" charset="-127"/>
+                </a:defRPr>
+              </a:lvl5pPr>
+              <a:lvl6pPr marL="2514600" indent="-228600" fontAlgn="base">
+                <a:spcBef>
+                  <a:spcPct val="0"/>
+                </a:spcBef>
+                <a:spcAft>
+                  <a:spcPct val="0"/>
+                </a:spcAft>
+                <a:defRPr>
+                  <a:solidFill>
+                    <a:schemeClr val="tx1"/>
+                  </a:solidFill>
+                  <a:latin typeface="Calibri" panose="020F0502020204030204" pitchFamily="34" charset="0"/>
+                  <a:ea typeface="맑은 고딕" panose="020B0503020000020004" pitchFamily="50" charset="-127"/>
+                </a:defRPr>
+              </a:lvl6pPr>
+              <a:lvl7pPr marL="2971800" indent="-228600" fontAlgn="base">
+                <a:spcBef>
+                  <a:spcPct val="0"/>
+                </a:spcBef>
+                <a:spcAft>
+                  <a:spcPct val="0"/>
+                </a:spcAft>
+                <a:defRPr>
+                  <a:solidFill>
+                    <a:schemeClr val="tx1"/>
+                  </a:solidFill>
+                  <a:latin typeface="Calibri" panose="020F0502020204030204" pitchFamily="34" charset="0"/>
+                  <a:ea typeface="맑은 고딕" panose="020B0503020000020004" pitchFamily="50" charset="-127"/>
+                </a:defRPr>
+              </a:lvl7pPr>
+              <a:lvl8pPr marL="3429000" indent="-228600" fontAlgn="base">
+                <a:spcBef>
+                  <a:spcPct val="0"/>
+                </a:spcBef>
+                <a:spcAft>
+                  <a:spcPct val="0"/>
+                </a:spcAft>
+                <a:defRPr>
+                  <a:solidFill>
+                    <a:schemeClr val="tx1"/>
+                  </a:solidFill>
+                  <a:latin typeface="Calibri" panose="020F0502020204030204" pitchFamily="34" charset="0"/>
+                  <a:ea typeface="맑은 고딕" panose="020B0503020000020004" pitchFamily="50" charset="-127"/>
+                </a:defRPr>
+              </a:lvl8pPr>
+              <a:lvl9pPr marL="3886200" indent="-228600" fontAlgn="base">
+                <a:spcBef>
+                  <a:spcPct val="0"/>
+                </a:spcBef>
+                <a:spcAft>
+                  <a:spcPct val="0"/>
+                </a:spcAft>
+                <a:defRPr>
+                  <a:solidFill>
+                    <a:schemeClr val="tx1"/>
+                  </a:solidFill>
+                  <a:latin typeface="Calibri" panose="020F0502020204030204" pitchFamily="34" charset="0"/>
+                  <a:ea typeface="맑은 고딕" panose="020B0503020000020004" pitchFamily="50" charset="-127"/>
+                </a:defRPr>
+              </a:lvl9pPr>
+            </a:lstStyle>
+            <a:p>
+              <a:pPr algn="ctr">
+                <a:defRPr/>
+              </a:pPr>
+              <a:r>
+                <a:rPr lang="ko-KR" altLang="en-US" sz="2800" b="1" dirty="0">
                   <a:solidFill>
                     <a:schemeClr val="tx1">
                       <a:lumMod val="75000"/>
@@ -1158,241 +1076,251 @@
                     </a:schemeClr>
                   </a:solidFill>
                   <a:latin typeface="맑은 고딕" panose="020B0503020000020004" pitchFamily="50" charset="-127"/>
-                </a:endParaRPr>
-              </a:p>
-            </p:txBody>
-          </p:sp>
-          <p:sp>
-            <p:nvSpPr>
-              <p:cNvPr id="7" name="직사각형 13"/>
-              <p:cNvSpPr>
-                <a:spLocks noChangeArrowheads="1"/>
-              </p:cNvSpPr>
-              <p:nvPr/>
-            </p:nvSpPr>
-            <p:spPr bwMode="auto">
-              <a:xfrm>
-                <a:off x="2366621" y="2954856"/>
-                <a:ext cx="3756192" cy="261610"/>
-              </a:xfrm>
-              <a:prstGeom prst="rect">
-                <a:avLst/>
-              </a:prstGeom>
+                </a:rPr>
+                <a:t>스마트 하천 모니터링 시스템</a:t>
+              </a:r>
+              <a:endParaRPr kumimoji="1" lang="en-US" altLang="ko-KR" sz="2800" b="1" dirty="0">
+                <a:solidFill>
+                  <a:schemeClr val="tx1">
+                    <a:lumMod val="75000"/>
+                    <a:lumOff val="25000"/>
+                  </a:schemeClr>
+                </a:solidFill>
+                <a:latin typeface="맑은 고딕" panose="020B0503020000020004" pitchFamily="50" charset="-127"/>
+              </a:endParaRPr>
+            </a:p>
+          </p:txBody>
+        </p:sp>
+        <p:sp>
+          <p:nvSpPr>
+            <p:cNvPr id="7" name="직사각형 13"/>
+            <p:cNvSpPr>
+              <a:spLocks noChangeArrowheads="1"/>
+            </p:cNvSpPr>
+            <p:nvPr/>
+          </p:nvSpPr>
+          <p:spPr bwMode="auto">
+            <a:xfrm>
+              <a:off x="2366619" y="3076181"/>
+              <a:ext cx="3756192" cy="307777"/>
+            </a:xfrm>
+            <a:prstGeom prst="rect">
+              <a:avLst/>
+            </a:prstGeom>
+            <a:noFill/>
+            <a:ln>
               <a:noFill/>
-              <a:ln>
-                <a:noFill/>
-              </a:ln>
-              <a:extLst>
-                <a:ext uri="{909E8E84-426E-40DD-AFC4-6F175D3DCCD1}">
-                  <a14:hiddenFill xmlns:a14="http://schemas.microsoft.com/office/drawing/2010/main">
-                    <a:solidFill>
-                      <a:srgbClr val="FFFFFF"/>
-                    </a:solidFill>
-                  </a14:hiddenFill>
-                </a:ext>
-                <a:ext uri="{91240B29-F687-4F45-9708-019B960494DF}">
-                  <a14:hiddenLine xmlns:a14="http://schemas.microsoft.com/office/drawing/2010/main" w="9525">
-                    <a:solidFill>
-                      <a:srgbClr val="000000"/>
-                    </a:solidFill>
-                    <a:miter lim="800000"/>
-                    <a:headEnd/>
-                    <a:tailEnd/>
-                  </a14:hiddenLine>
-                </a:ext>
-              </a:extLst>
-            </p:spPr>
-            <p:txBody>
-              <a:bodyPr wrap="square">
-                <a:spAutoFit/>
-              </a:bodyPr>
-              <a:lstStyle>
-                <a:lvl1pPr latinLnBrk="1">
-                  <a:defRPr>
-                    <a:solidFill>
-                      <a:schemeClr val="tx1"/>
-                    </a:solidFill>
-                    <a:latin typeface="Calibri" panose="020F0502020204030204" pitchFamily="34" charset="0"/>
-                    <a:ea typeface="맑은 고딕" panose="020B0503020000020004" pitchFamily="50" charset="-127"/>
-                  </a:defRPr>
-                </a:lvl1pPr>
-                <a:lvl2pPr marL="742950" indent="-285750" latinLnBrk="1">
-                  <a:defRPr>
-                    <a:solidFill>
-                      <a:schemeClr val="tx1"/>
-                    </a:solidFill>
-                    <a:latin typeface="Calibri" panose="020F0502020204030204" pitchFamily="34" charset="0"/>
-                    <a:ea typeface="맑은 고딕" panose="020B0503020000020004" pitchFamily="50" charset="-127"/>
-                  </a:defRPr>
-                </a:lvl2pPr>
-                <a:lvl3pPr marL="1143000" indent="-228600" latinLnBrk="1">
-                  <a:defRPr>
-                    <a:solidFill>
-                      <a:schemeClr val="tx1"/>
-                    </a:solidFill>
-                    <a:latin typeface="Calibri" panose="020F0502020204030204" pitchFamily="34" charset="0"/>
-                    <a:ea typeface="맑은 고딕" panose="020B0503020000020004" pitchFamily="50" charset="-127"/>
-                  </a:defRPr>
-                </a:lvl3pPr>
-                <a:lvl4pPr marL="1600200" indent="-228600" latinLnBrk="1">
-                  <a:defRPr>
-                    <a:solidFill>
-                      <a:schemeClr val="tx1"/>
-                    </a:solidFill>
-                    <a:latin typeface="Calibri" panose="020F0502020204030204" pitchFamily="34" charset="0"/>
-                    <a:ea typeface="맑은 고딕" panose="020B0503020000020004" pitchFamily="50" charset="-127"/>
-                  </a:defRPr>
-                </a:lvl4pPr>
-                <a:lvl5pPr marL="2057400" indent="-228600" latinLnBrk="1">
-                  <a:defRPr>
-                    <a:solidFill>
-                      <a:schemeClr val="tx1"/>
-                    </a:solidFill>
-                    <a:latin typeface="Calibri" panose="020F0502020204030204" pitchFamily="34" charset="0"/>
-                    <a:ea typeface="맑은 고딕" panose="020B0503020000020004" pitchFamily="50" charset="-127"/>
-                  </a:defRPr>
-                </a:lvl5pPr>
-                <a:lvl6pPr marL="2514600" indent="-228600" fontAlgn="base">
-                  <a:spcBef>
-                    <a:spcPct val="0"/>
-                  </a:spcBef>
-                  <a:spcAft>
-                    <a:spcPct val="0"/>
-                  </a:spcAft>
-                  <a:defRPr>
-                    <a:solidFill>
-                      <a:schemeClr val="tx1"/>
-                    </a:solidFill>
-                    <a:latin typeface="Calibri" panose="020F0502020204030204" pitchFamily="34" charset="0"/>
-                    <a:ea typeface="맑은 고딕" panose="020B0503020000020004" pitchFamily="50" charset="-127"/>
-                  </a:defRPr>
-                </a:lvl6pPr>
-                <a:lvl7pPr marL="2971800" indent="-228600" fontAlgn="base">
-                  <a:spcBef>
-                    <a:spcPct val="0"/>
-                  </a:spcBef>
-                  <a:spcAft>
-                    <a:spcPct val="0"/>
-                  </a:spcAft>
-                  <a:defRPr>
-                    <a:solidFill>
-                      <a:schemeClr val="tx1"/>
-                    </a:solidFill>
-                    <a:latin typeface="Calibri" panose="020F0502020204030204" pitchFamily="34" charset="0"/>
-                    <a:ea typeface="맑은 고딕" panose="020B0503020000020004" pitchFamily="50" charset="-127"/>
-                  </a:defRPr>
-                </a:lvl7pPr>
-                <a:lvl8pPr marL="3429000" indent="-228600" fontAlgn="base">
-                  <a:spcBef>
-                    <a:spcPct val="0"/>
-                  </a:spcBef>
-                  <a:spcAft>
-                    <a:spcPct val="0"/>
-                  </a:spcAft>
-                  <a:defRPr>
-                    <a:solidFill>
-                      <a:schemeClr val="tx1"/>
-                    </a:solidFill>
-                    <a:latin typeface="Calibri" panose="020F0502020204030204" pitchFamily="34" charset="0"/>
-                    <a:ea typeface="맑은 고딕" panose="020B0503020000020004" pitchFamily="50" charset="-127"/>
-                  </a:defRPr>
-                </a:lvl8pPr>
-                <a:lvl9pPr marL="3886200" indent="-228600" fontAlgn="base">
-                  <a:spcBef>
-                    <a:spcPct val="0"/>
-                  </a:spcBef>
-                  <a:spcAft>
-                    <a:spcPct val="0"/>
-                  </a:spcAft>
-                  <a:defRPr>
-                    <a:solidFill>
-                      <a:schemeClr val="tx1"/>
-                    </a:solidFill>
-                    <a:latin typeface="Calibri" panose="020F0502020204030204" pitchFamily="34" charset="0"/>
-                    <a:ea typeface="맑은 고딕" panose="020B0503020000020004" pitchFamily="50" charset="-127"/>
-                  </a:defRPr>
-                </a:lvl9pPr>
-              </a:lstStyle>
-              <a:p>
-                <a:pPr algn="ctr">
-                  <a:defRPr/>
-                </a:pPr>
-                <a:r>
-                  <a:rPr lang="ko-KR" altLang="en-US" sz="1050" dirty="0" err="1">
-                    <a:solidFill>
-                      <a:schemeClr val="bg1"/>
-                    </a:solidFill>
-                    <a:latin typeface="맑은 고딕" panose="020B0503020000020004" pitchFamily="50" charset="-127"/>
-                  </a:rPr>
-                  <a:t>권혁준</a:t>
-                </a:r>
-                <a:r>
-                  <a:rPr lang="ko-KR" altLang="en-US" sz="1050" dirty="0">
-                    <a:solidFill>
-                      <a:schemeClr val="bg1"/>
-                    </a:solidFill>
-                    <a:latin typeface="맑은 고딕" panose="020B0503020000020004" pitchFamily="50" charset="-127"/>
-                  </a:rPr>
-                  <a:t> 대리 </a:t>
-                </a:r>
-                <a:r>
-                  <a:rPr lang="en-US" altLang="ko-KR" sz="1050" dirty="0">
-                    <a:solidFill>
-                      <a:schemeClr val="bg1"/>
-                    </a:solidFill>
-                    <a:latin typeface="맑은 고딕" panose="020B0503020000020004" pitchFamily="50" charset="-127"/>
-                  </a:rPr>
-                  <a:t>/ </a:t>
-                </a:r>
-                <a:r>
-                  <a:rPr lang="ko-KR" altLang="en-US" sz="1050" dirty="0" err="1">
-                    <a:solidFill>
-                      <a:schemeClr val="bg1"/>
-                    </a:solidFill>
-                    <a:latin typeface="맑은 고딕" panose="020B0503020000020004" pitchFamily="50" charset="-127"/>
-                  </a:rPr>
-                  <a:t>노태균</a:t>
-                </a:r>
-                <a:r>
-                  <a:rPr lang="ko-KR" altLang="en-US" sz="1050" dirty="0">
-                    <a:solidFill>
-                      <a:schemeClr val="bg1"/>
-                    </a:solidFill>
-                    <a:latin typeface="맑은 고딕" panose="020B0503020000020004" pitchFamily="50" charset="-127"/>
-                  </a:rPr>
-                  <a:t> 과장 </a:t>
-                </a:r>
-                <a:r>
-                  <a:rPr lang="en-US" altLang="ko-KR" sz="1050" dirty="0">
-                    <a:solidFill>
-                      <a:schemeClr val="bg1"/>
-                    </a:solidFill>
-                    <a:latin typeface="맑은 고딕" panose="020B0503020000020004" pitchFamily="50" charset="-127"/>
-                  </a:rPr>
-                  <a:t>/ </a:t>
-                </a:r>
-                <a:r>
-                  <a:rPr lang="ko-KR" altLang="en-US" sz="1050" dirty="0" err="1">
-                    <a:solidFill>
-                      <a:schemeClr val="bg1"/>
-                    </a:solidFill>
-                    <a:latin typeface="맑은 고딕" panose="020B0503020000020004" pitchFamily="50" charset="-127"/>
-                  </a:rPr>
-                  <a:t>정용락</a:t>
-                </a:r>
-                <a:r>
-                  <a:rPr lang="ko-KR" altLang="en-US" sz="1050" dirty="0">
-                    <a:solidFill>
-                      <a:schemeClr val="bg1"/>
-                    </a:solidFill>
-                    <a:latin typeface="맑은 고딕" panose="020B0503020000020004" pitchFamily="50" charset="-127"/>
-                  </a:rPr>
-                  <a:t> 부장</a:t>
-                </a:r>
-              </a:p>
-            </p:txBody>
-          </p:sp>
-        </p:grpSp>
+            </a:ln>
+            <a:extLst>
+              <a:ext uri="{909E8E84-426E-40DD-AFC4-6F175D3DCCD1}">
+                <a14:hiddenFill xmlns:a14="http://schemas.microsoft.com/office/drawing/2010/main">
+                  <a:solidFill>
+                    <a:srgbClr val="FFFFFF"/>
+                  </a:solidFill>
+                </a14:hiddenFill>
+              </a:ext>
+              <a:ext uri="{91240B29-F687-4F45-9708-019B960494DF}">
+                <a14:hiddenLine xmlns:a14="http://schemas.microsoft.com/office/drawing/2010/main" w="9525">
+                  <a:solidFill>
+                    <a:srgbClr val="000000"/>
+                  </a:solidFill>
+                  <a:miter lim="800000"/>
+                  <a:headEnd/>
+                  <a:tailEnd/>
+                </a14:hiddenLine>
+              </a:ext>
+            </a:extLst>
+          </p:spPr>
+          <p:txBody>
+            <a:bodyPr wrap="square">
+              <a:spAutoFit/>
+            </a:bodyPr>
+            <a:lstStyle>
+              <a:lvl1pPr latinLnBrk="1">
+                <a:defRPr>
+                  <a:solidFill>
+                    <a:schemeClr val="tx1"/>
+                  </a:solidFill>
+                  <a:latin typeface="Calibri" panose="020F0502020204030204" pitchFamily="34" charset="0"/>
+                  <a:ea typeface="맑은 고딕" panose="020B0503020000020004" pitchFamily="50" charset="-127"/>
+                </a:defRPr>
+              </a:lvl1pPr>
+              <a:lvl2pPr marL="742950" indent="-285750" latinLnBrk="1">
+                <a:defRPr>
+                  <a:solidFill>
+                    <a:schemeClr val="tx1"/>
+                  </a:solidFill>
+                  <a:latin typeface="Calibri" panose="020F0502020204030204" pitchFamily="34" charset="0"/>
+                  <a:ea typeface="맑은 고딕" panose="020B0503020000020004" pitchFamily="50" charset="-127"/>
+                </a:defRPr>
+              </a:lvl2pPr>
+              <a:lvl3pPr marL="1143000" indent="-228600" latinLnBrk="1">
+                <a:defRPr>
+                  <a:solidFill>
+                    <a:schemeClr val="tx1"/>
+                  </a:solidFill>
+                  <a:latin typeface="Calibri" panose="020F0502020204030204" pitchFamily="34" charset="0"/>
+                  <a:ea typeface="맑은 고딕" panose="020B0503020000020004" pitchFamily="50" charset="-127"/>
+                </a:defRPr>
+              </a:lvl3pPr>
+              <a:lvl4pPr marL="1600200" indent="-228600" latinLnBrk="1">
+                <a:defRPr>
+                  <a:solidFill>
+                    <a:schemeClr val="tx1"/>
+                  </a:solidFill>
+                  <a:latin typeface="Calibri" panose="020F0502020204030204" pitchFamily="34" charset="0"/>
+                  <a:ea typeface="맑은 고딕" panose="020B0503020000020004" pitchFamily="50" charset="-127"/>
+                </a:defRPr>
+              </a:lvl4pPr>
+              <a:lvl5pPr marL="2057400" indent="-228600" latinLnBrk="1">
+                <a:defRPr>
+                  <a:solidFill>
+                    <a:schemeClr val="tx1"/>
+                  </a:solidFill>
+                  <a:latin typeface="Calibri" panose="020F0502020204030204" pitchFamily="34" charset="0"/>
+                  <a:ea typeface="맑은 고딕" panose="020B0503020000020004" pitchFamily="50" charset="-127"/>
+                </a:defRPr>
+              </a:lvl5pPr>
+              <a:lvl6pPr marL="2514600" indent="-228600" fontAlgn="base">
+                <a:spcBef>
+                  <a:spcPct val="0"/>
+                </a:spcBef>
+                <a:spcAft>
+                  <a:spcPct val="0"/>
+                </a:spcAft>
+                <a:defRPr>
+                  <a:solidFill>
+                    <a:schemeClr val="tx1"/>
+                  </a:solidFill>
+                  <a:latin typeface="Calibri" panose="020F0502020204030204" pitchFamily="34" charset="0"/>
+                  <a:ea typeface="맑은 고딕" panose="020B0503020000020004" pitchFamily="50" charset="-127"/>
+                </a:defRPr>
+              </a:lvl6pPr>
+              <a:lvl7pPr marL="2971800" indent="-228600" fontAlgn="base">
+                <a:spcBef>
+                  <a:spcPct val="0"/>
+                </a:spcBef>
+                <a:spcAft>
+                  <a:spcPct val="0"/>
+                </a:spcAft>
+                <a:defRPr>
+                  <a:solidFill>
+                    <a:schemeClr val="tx1"/>
+                  </a:solidFill>
+                  <a:latin typeface="Calibri" panose="020F0502020204030204" pitchFamily="34" charset="0"/>
+                  <a:ea typeface="맑은 고딕" panose="020B0503020000020004" pitchFamily="50" charset="-127"/>
+                </a:defRPr>
+              </a:lvl7pPr>
+              <a:lvl8pPr marL="3429000" indent="-228600" fontAlgn="base">
+                <a:spcBef>
+                  <a:spcPct val="0"/>
+                </a:spcBef>
+                <a:spcAft>
+                  <a:spcPct val="0"/>
+                </a:spcAft>
+                <a:defRPr>
+                  <a:solidFill>
+                    <a:schemeClr val="tx1"/>
+                  </a:solidFill>
+                  <a:latin typeface="Calibri" panose="020F0502020204030204" pitchFamily="34" charset="0"/>
+                  <a:ea typeface="맑은 고딕" panose="020B0503020000020004" pitchFamily="50" charset="-127"/>
+                </a:defRPr>
+              </a:lvl8pPr>
+              <a:lvl9pPr marL="3886200" indent="-228600" fontAlgn="base">
+                <a:spcBef>
+                  <a:spcPct val="0"/>
+                </a:spcBef>
+                <a:spcAft>
+                  <a:spcPct val="0"/>
+                </a:spcAft>
+                <a:defRPr>
+                  <a:solidFill>
+                    <a:schemeClr val="tx1"/>
+                  </a:solidFill>
+                  <a:latin typeface="Calibri" panose="020F0502020204030204" pitchFamily="34" charset="0"/>
+                  <a:ea typeface="맑은 고딕" panose="020B0503020000020004" pitchFamily="50" charset="-127"/>
+                </a:defRPr>
+              </a:lvl9pPr>
+            </a:lstStyle>
+            <a:p>
+              <a:pPr algn="ctr">
+                <a:defRPr/>
+              </a:pPr>
+              <a:r>
+                <a:rPr lang="ko-KR" altLang="en-US" sz="1400" b="1" dirty="0" err="1">
+                  <a:solidFill>
+                    <a:schemeClr val="bg1"/>
+                  </a:solidFill>
+                  <a:latin typeface="맑은 고딕" panose="020B0503020000020004" pitchFamily="50" charset="-127"/>
+                </a:rPr>
+                <a:t>권혁준</a:t>
+              </a:r>
+              <a:r>
+                <a:rPr lang="ko-KR" altLang="en-US" sz="1400" b="1" dirty="0">
+                  <a:solidFill>
+                    <a:schemeClr val="bg1"/>
+                  </a:solidFill>
+                  <a:latin typeface="맑은 고딕" panose="020B0503020000020004" pitchFamily="50" charset="-127"/>
+                </a:rPr>
+                <a:t> 대리 </a:t>
+              </a:r>
+              <a:r>
+                <a:rPr lang="en-US" altLang="ko-KR" sz="1400" b="1" dirty="0">
+                  <a:solidFill>
+                    <a:schemeClr val="bg1"/>
+                  </a:solidFill>
+                  <a:latin typeface="맑은 고딕" panose="020B0503020000020004" pitchFamily="50" charset="-127"/>
+                </a:rPr>
+                <a:t>/ </a:t>
+              </a:r>
+              <a:r>
+                <a:rPr lang="ko-KR" altLang="en-US" sz="1400" b="1" dirty="0" err="1">
+                  <a:solidFill>
+                    <a:schemeClr val="bg1"/>
+                  </a:solidFill>
+                  <a:latin typeface="맑은 고딕" panose="020B0503020000020004" pitchFamily="50" charset="-127"/>
+                </a:rPr>
+                <a:t>노태균</a:t>
+              </a:r>
+              <a:r>
+                <a:rPr lang="ko-KR" altLang="en-US" sz="1400" b="1" dirty="0">
+                  <a:solidFill>
+                    <a:schemeClr val="bg1"/>
+                  </a:solidFill>
+                  <a:latin typeface="맑은 고딕" panose="020B0503020000020004" pitchFamily="50" charset="-127"/>
+                </a:rPr>
+                <a:t> 과장 </a:t>
+              </a:r>
+              <a:r>
+                <a:rPr lang="en-US" altLang="ko-KR" sz="1400" b="1" dirty="0">
+                  <a:solidFill>
+                    <a:schemeClr val="bg1"/>
+                  </a:solidFill>
+                  <a:latin typeface="맑은 고딕" panose="020B0503020000020004" pitchFamily="50" charset="-127"/>
+                </a:rPr>
+                <a:t>/ </a:t>
+              </a:r>
+              <a:r>
+                <a:rPr lang="ko-KR" altLang="en-US" sz="1400" b="1" dirty="0" err="1">
+                  <a:solidFill>
+                    <a:schemeClr val="bg1"/>
+                  </a:solidFill>
+                  <a:latin typeface="맑은 고딕" panose="020B0503020000020004" pitchFamily="50" charset="-127"/>
+                </a:rPr>
+                <a:t>정용락</a:t>
+              </a:r>
+              <a:r>
+                <a:rPr lang="ko-KR" altLang="en-US" sz="1400" b="1" dirty="0">
+                  <a:solidFill>
+                    <a:schemeClr val="bg1"/>
+                  </a:solidFill>
+                  <a:latin typeface="맑은 고딕" panose="020B0503020000020004" pitchFamily="50" charset="-127"/>
+                </a:rPr>
+                <a:t> 부장</a:t>
+              </a:r>
+            </a:p>
+          </p:txBody>
+        </p:sp>
       </p:grpSp>
     </p:spTree>
     <p:extLst>
@@ -1407,7 +1335,7 @@
 </p:sld>
 </file>
 
-<file path=ppt/slides/slide10.xml><?xml version="1.0" encoding="utf-8"?>
+<file path=ppt/slides/slide2.xml><?xml version="1.0" encoding="utf-8"?>
 <p:sld xmlns:a="http://schemas.openxmlformats.org/drawingml/2006/main" xmlns:r="http://schemas.openxmlformats.org/officeDocument/2006/relationships" xmlns:p="http://schemas.openxmlformats.org/presentationml/2006/main">
   <p:cSld>
     <p:spTree>
@@ -1459,7 +1387,7 @@
                 <a:latin typeface="KoPubWorld돋움체 Medium" panose="00000600000000000000" pitchFamily="2" charset="-127"/>
                 <a:ea typeface="KoPubWorld돋움체 Medium" panose="00000600000000000000" pitchFamily="2" charset="-127"/>
               </a:rPr>
-              <a:t>향후 계획</a:t>
+              <a:t>개발 배경</a:t>
             </a:r>
           </a:p>
         </p:txBody>
@@ -1635,7 +1563,7 @@
                 <a:ea typeface="KoPubWorld돋움체 Medium" panose="00000600000000000000" pitchFamily="2" charset="-127"/>
                 <a:cs typeface="KoPubWorld돋움체 Medium" panose="00000600000000000000" pitchFamily="2" charset="-127"/>
               </a:rPr>
-              <a:t>1.7 </a:t>
+              <a:t>1.1 </a:t>
             </a:r>
             <a:r>
               <a:rPr lang="ko-KR" altLang="en-US" sz="2800" b="1" dirty="0">
@@ -1646,7 +1574,7 @@
                 <a:ea typeface="KoPubWorld돋움체 Medium" panose="00000600000000000000" pitchFamily="2" charset="-127"/>
                 <a:cs typeface="KoPubWorld돋움체 Medium" panose="00000600000000000000" pitchFamily="2" charset="-127"/>
               </a:rPr>
-              <a:t>향후 계획</a:t>
+              <a:t>개발배경</a:t>
             </a:r>
           </a:p>
         </p:txBody>
@@ -1665,8 +1593,8 @@
         </p:nvSpPr>
         <p:spPr>
           <a:xfrm>
-            <a:off x="346481" y="1353285"/>
-            <a:ext cx="8451038" cy="1875690"/>
+            <a:off x="346481" y="1404308"/>
+            <a:ext cx="8451038" cy="1271570"/>
           </a:xfrm>
           <a:prstGeom prst="roundRect">
             <a:avLst/>
@@ -1725,8 +1653,8 @@
         </p:nvSpPr>
         <p:spPr bwMode="auto">
           <a:xfrm>
-            <a:off x="445634" y="1602104"/>
-            <a:ext cx="8466964" cy="1474471"/>
+            <a:off x="426578" y="1516379"/>
+            <a:ext cx="8466964" cy="1027239"/>
           </a:xfrm>
           <a:prstGeom prst="rect">
             <a:avLst/>
@@ -1761,8 +1689,37 @@
                 <a:ea typeface="KoPubWorld돋움체 Light" panose="00000300000000000000" pitchFamily="2" charset="-127"/>
                 <a:cs typeface="KoPubWorld돋움체 Light" panose="00000300000000000000" pitchFamily="2" charset="-127"/>
               </a:rPr>
-              <a:t> 1, 2</a:t>
-            </a:r>
+              <a:t> (</a:t>
+            </a:r>
+            <a:r>
+              <a:rPr lang="ko-KR" altLang="en-US" sz="1400" dirty="0">
+                <a:latin typeface="KoPubWorld돋움체 Light" panose="00000300000000000000" pitchFamily="2" charset="-127"/>
+                <a:ea typeface="KoPubWorld돋움체 Light" panose="00000300000000000000" pitchFamily="2" charset="-127"/>
+                <a:cs typeface="KoPubWorld돋움체 Light" panose="00000300000000000000" pitchFamily="2" charset="-127"/>
+              </a:rPr>
+              <a:t>강우 변동성</a:t>
+            </a:r>
+            <a:r>
+              <a:rPr lang="en-US" altLang="ko-KR" sz="1400" dirty="0">
+                <a:latin typeface="KoPubWorld돋움체 Light" panose="00000300000000000000" pitchFamily="2" charset="-127"/>
+                <a:ea typeface="KoPubWorld돋움체 Light" panose="00000300000000000000" pitchFamily="2" charset="-127"/>
+                <a:cs typeface="KoPubWorld돋움체 Light" panose="00000300000000000000" pitchFamily="2" charset="-127"/>
+              </a:rPr>
+              <a:t>) </a:t>
+            </a:r>
+            <a:r>
+              <a:rPr lang="ko-KR" altLang="en-US" sz="1400" dirty="0">
+                <a:latin typeface="KoPubWorld돋움체 Light" panose="00000300000000000000" pitchFamily="2" charset="-127"/>
+                <a:ea typeface="KoPubWorld돋움체 Light" panose="00000300000000000000" pitchFamily="2" charset="-127"/>
+                <a:cs typeface="KoPubWorld돋움체 Light" panose="00000300000000000000" pitchFamily="2" charset="-127"/>
+              </a:rPr>
+              <a:t>강우 변동성 및 예측의 어려움으로 비점오염원 모니터링 수행 제약 발생</a:t>
+            </a:r>
+            <a:endParaRPr lang="en-US" altLang="ko-KR" sz="1400" b="1" dirty="0">
+              <a:latin typeface="KoPubWorld돋움체 Light" panose="00000300000000000000" pitchFamily="2" charset="-127"/>
+              <a:ea typeface="KoPubWorld돋움체 Light" panose="00000300000000000000" pitchFamily="2" charset="-127"/>
+              <a:cs typeface="KoPubWorld돋움체 Light" panose="00000300000000000000" pitchFamily="2" charset="-127"/>
+            </a:endParaRPr>
           </a:p>
           <a:p>
             <a:pPr marL="285750" indent="-104775">
@@ -1777,13 +1734,74 @@
               <a:defRPr/>
             </a:pPr>
             <a:r>
-              <a:rPr lang="en-US" altLang="ko-KR" sz="1400" b="1" dirty="0">
-                <a:latin typeface="KoPubWorld돋움체 Light" panose="00000300000000000000" pitchFamily="2" charset="-127"/>
-                <a:ea typeface="KoPubWorld돋움체 Light" panose="00000300000000000000" pitchFamily="2" charset="-127"/>
-                <a:cs typeface="KoPubWorld돋움체 Light" panose="00000300000000000000" pitchFamily="2" charset="-127"/>
-              </a:rPr>
-              <a:t> 1</a:t>
-            </a:r>
+              <a:rPr lang="en-US" altLang="ko-KR" sz="1400" dirty="0">
+                <a:latin typeface="KoPubWorld돋움체 Light" panose="00000300000000000000" pitchFamily="2" charset="-127"/>
+                <a:ea typeface="KoPubWorld돋움체 Light" panose="00000300000000000000" pitchFamily="2" charset="-127"/>
+                <a:cs typeface="KoPubWorld돋움체 Light" panose="00000300000000000000" pitchFamily="2" charset="-127"/>
+              </a:rPr>
+              <a:t> (</a:t>
+            </a:r>
+            <a:r>
+              <a:rPr lang="ko-KR" altLang="en-US" sz="1400" dirty="0">
+                <a:latin typeface="KoPubWorld돋움체 Light" panose="00000300000000000000" pitchFamily="2" charset="-127"/>
+                <a:ea typeface="KoPubWorld돋움체 Light" panose="00000300000000000000" pitchFamily="2" charset="-127"/>
+                <a:cs typeface="KoPubWorld돋움체 Light" panose="00000300000000000000" pitchFamily="2" charset="-127"/>
+              </a:rPr>
+              <a:t>데이터 파편화</a:t>
+            </a:r>
+            <a:r>
+              <a:rPr lang="en-US" altLang="ko-KR" sz="1400" dirty="0">
+                <a:latin typeface="KoPubWorld돋움체 Light" panose="00000300000000000000" pitchFamily="2" charset="-127"/>
+                <a:ea typeface="KoPubWorld돋움체 Light" panose="00000300000000000000" pitchFamily="2" charset="-127"/>
+                <a:cs typeface="KoPubWorld돋움체 Light" panose="00000300000000000000" pitchFamily="2" charset="-127"/>
+              </a:rPr>
+              <a:t>) </a:t>
+            </a:r>
+            <a:r>
+              <a:rPr lang="ko-KR" altLang="en-US" sz="1400" dirty="0">
+                <a:latin typeface="KoPubWorld돋움체 Light" panose="00000300000000000000" pitchFamily="2" charset="-127"/>
+                <a:ea typeface="KoPubWorld돋움체 Light" panose="00000300000000000000" pitchFamily="2" charset="-127"/>
+                <a:cs typeface="KoPubWorld돋움체 Light" panose="00000300000000000000" pitchFamily="2" charset="-127"/>
+              </a:rPr>
+              <a:t>기상청 단기예보</a:t>
+            </a:r>
+            <a:r>
+              <a:rPr lang="en-US" altLang="ko-KR" sz="1400" dirty="0">
+                <a:latin typeface="KoPubWorld돋움체 Light" panose="00000300000000000000" pitchFamily="2" charset="-127"/>
+                <a:ea typeface="KoPubWorld돋움체 Light" panose="00000300000000000000" pitchFamily="2" charset="-127"/>
+                <a:cs typeface="KoPubWorld돋움체 Light" panose="00000300000000000000" pitchFamily="2" charset="-127"/>
+              </a:rPr>
+              <a:t>, </a:t>
+            </a:r>
+            <a:r>
+              <a:rPr lang="ko-KR" altLang="en-US" sz="1400" dirty="0">
+                <a:latin typeface="KoPubWorld돋움체 Light" panose="00000300000000000000" pitchFamily="2" charset="-127"/>
+                <a:ea typeface="KoPubWorld돋움체 Light" panose="00000300000000000000" pitchFamily="2" charset="-127"/>
+                <a:cs typeface="KoPubWorld돋움체 Light" panose="00000300000000000000" pitchFamily="2" charset="-127"/>
+              </a:rPr>
+              <a:t>레이더</a:t>
+            </a:r>
+            <a:r>
+              <a:rPr lang="en-US" altLang="ko-KR" sz="1400" dirty="0">
+                <a:latin typeface="KoPubWorld돋움체 Light" panose="00000300000000000000" pitchFamily="2" charset="-127"/>
+                <a:ea typeface="KoPubWorld돋움체 Light" panose="00000300000000000000" pitchFamily="2" charset="-127"/>
+                <a:cs typeface="KoPubWorld돋움체 Light" panose="00000300000000000000" pitchFamily="2" charset="-127"/>
+              </a:rPr>
+              <a:t>, </a:t>
+            </a:r>
+            <a:r>
+              <a:rPr lang="ko-KR" altLang="en-US" sz="1400" dirty="0">
+                <a:latin typeface="KoPubWorld돋움체 Light" panose="00000300000000000000" pitchFamily="2" charset="-127"/>
+                <a:ea typeface="KoPubWorld돋움체 Light" panose="00000300000000000000" pitchFamily="2" charset="-127"/>
+                <a:cs typeface="KoPubWorld돋움체 Light" panose="00000300000000000000" pitchFamily="2" charset="-127"/>
+              </a:rPr>
+              <a:t>해외 기상자료 등 다양한 데이터를 개별적으로 확인 필요</a:t>
+            </a:r>
+            <a:endParaRPr lang="en-US" altLang="ko-KR" sz="1400" dirty="0">
+              <a:latin typeface="KoPubWorld돋움체 Light" panose="00000300000000000000" pitchFamily="2" charset="-127"/>
+              <a:ea typeface="KoPubWorld돋움체 Light" panose="00000300000000000000" pitchFamily="2" charset="-127"/>
+              <a:cs typeface="KoPubWorld돋움체 Light" panose="00000300000000000000" pitchFamily="2" charset="-127"/>
+            </a:endParaRPr>
           </a:p>
           <a:p>
             <a:pPr marL="285750" indent="-104775">
@@ -1798,14 +1816,215 @@
               <a:defRPr/>
             </a:pPr>
             <a:r>
-              <a:rPr lang="en-US" altLang="ko-KR" sz="1400" b="1" dirty="0">
-                <a:latin typeface="KoPubWorld돋움체 Light" panose="00000300000000000000" pitchFamily="2" charset="-127"/>
-                <a:ea typeface="KoPubWorld돋움체 Light" panose="00000300000000000000" pitchFamily="2" charset="-127"/>
-                <a:cs typeface="KoPubWorld돋움체 Light" panose="00000300000000000000" pitchFamily="2" charset="-127"/>
-              </a:rPr>
-              <a:t> 2</a:t>
-            </a:r>
-          </a:p>
+              <a:rPr lang="en-US" altLang="ko-KR" sz="1400" dirty="0">
+                <a:latin typeface="KoPubWorld돋움체 Light" panose="00000300000000000000" pitchFamily="2" charset="-127"/>
+                <a:ea typeface="KoPubWorld돋움체 Light" panose="00000300000000000000" pitchFamily="2" charset="-127"/>
+                <a:cs typeface="KoPubWorld돋움체 Light" panose="00000300000000000000" pitchFamily="2" charset="-127"/>
+              </a:rPr>
+              <a:t> (</a:t>
+            </a:r>
+            <a:r>
+              <a:rPr lang="ko-KR" altLang="en-US" sz="1400" dirty="0">
+                <a:latin typeface="KoPubWorld돋움체 Light" panose="00000300000000000000" pitchFamily="2" charset="-127"/>
+                <a:ea typeface="KoPubWorld돋움체 Light" panose="00000300000000000000" pitchFamily="2" charset="-127"/>
+                <a:cs typeface="KoPubWorld돋움체 Light" panose="00000300000000000000" pitchFamily="2" charset="-127"/>
+              </a:rPr>
+              <a:t>주관적 판단의 한계</a:t>
+            </a:r>
+            <a:r>
+              <a:rPr lang="en-US" altLang="ko-KR" sz="1400" dirty="0">
+                <a:latin typeface="KoPubWorld돋움체 Light" panose="00000300000000000000" pitchFamily="2" charset="-127"/>
+                <a:ea typeface="KoPubWorld돋움체 Light" panose="00000300000000000000" pitchFamily="2" charset="-127"/>
+                <a:cs typeface="KoPubWorld돋움체 Light" panose="00000300000000000000" pitchFamily="2" charset="-127"/>
+              </a:rPr>
+              <a:t>) </a:t>
+            </a:r>
+            <a:r>
+              <a:rPr lang="ko-KR" altLang="en-US" sz="1400" dirty="0">
+                <a:latin typeface="KoPubWorld돋움체 Light" panose="00000300000000000000" pitchFamily="2" charset="-127"/>
+                <a:ea typeface="KoPubWorld돋움체 Light" panose="00000300000000000000" pitchFamily="2" charset="-127"/>
+                <a:cs typeface="KoPubWorld돋움체 Light" panose="00000300000000000000" pitchFamily="2" charset="-127"/>
+              </a:rPr>
+              <a:t>담당자 경험에 의존한 출동 결정</a:t>
+            </a:r>
+            <a:r>
+              <a:rPr lang="en-US" altLang="ko-KR" sz="1400" dirty="0">
+                <a:latin typeface="KoPubWorld돋움체 Light" panose="00000300000000000000" pitchFamily="2" charset="-127"/>
+                <a:ea typeface="KoPubWorld돋움체 Light" panose="00000300000000000000" pitchFamily="2" charset="-127"/>
+                <a:cs typeface="KoPubWorld돋움체 Light" panose="00000300000000000000" pitchFamily="2" charset="-127"/>
+              </a:rPr>
+              <a:t>, </a:t>
+            </a:r>
+            <a:r>
+              <a:rPr lang="ko-KR" altLang="en-US" sz="1400" dirty="0">
+                <a:latin typeface="KoPubWorld돋움체 Light" panose="00000300000000000000" pitchFamily="2" charset="-127"/>
+                <a:ea typeface="KoPubWorld돋움체 Light" panose="00000300000000000000" pitchFamily="2" charset="-127"/>
+                <a:cs typeface="KoPubWorld돋움체 Light" panose="00000300000000000000" pitchFamily="2" charset="-127"/>
+              </a:rPr>
+              <a:t>명확한 기준 설정의 어려움</a:t>
+            </a:r>
+            <a:r>
+              <a:rPr lang="en-US" altLang="ko-KR" sz="1400" dirty="0">
+                <a:latin typeface="KoPubWorld돋움체 Light" panose="00000300000000000000" pitchFamily="2" charset="-127"/>
+                <a:ea typeface="KoPubWorld돋움체 Light" panose="00000300000000000000" pitchFamily="2" charset="-127"/>
+                <a:cs typeface="KoPubWorld돋움체 Light" panose="00000300000000000000" pitchFamily="2" charset="-127"/>
+              </a:rPr>
+              <a:t> </a:t>
+            </a:r>
+            <a:r>
+              <a:rPr lang="ko-KR" altLang="en-US" sz="1400" dirty="0">
+                <a:latin typeface="KoPubWorld돋움체 Light" panose="00000300000000000000" pitchFamily="2" charset="-127"/>
+                <a:ea typeface="KoPubWorld돋움체 Light" panose="00000300000000000000" pitchFamily="2" charset="-127"/>
+                <a:cs typeface="KoPubWorld돋움체 Light" panose="00000300000000000000" pitchFamily="2" charset="-127"/>
+              </a:rPr>
+              <a:t>존재</a:t>
+            </a:r>
+            <a:endParaRPr lang="en-US" altLang="ko-KR" sz="1400" dirty="0">
+              <a:latin typeface="KoPubWorld돋움체 Light" panose="00000300000000000000" pitchFamily="2" charset="-127"/>
+              <a:ea typeface="KoPubWorld돋움체 Light" panose="00000300000000000000" pitchFamily="2" charset="-127"/>
+              <a:cs typeface="KoPubWorld돋움체 Light" panose="00000300000000000000" pitchFamily="2" charset="-127"/>
+            </a:endParaRPr>
+          </a:p>
+        </p:txBody>
+      </p:sp>
+      <p:sp>
+        <p:nvSpPr>
+          <p:cNvPr id="19" name="화살표: 아래쪽 18">
+            <a:extLst>
+              <a:ext uri="{FF2B5EF4-FFF2-40B4-BE49-F238E27FC236}">
+                <a16:creationId xmlns:a16="http://schemas.microsoft.com/office/drawing/2014/main" id="{887B3C7D-F408-EE3F-A8E1-5E0C0998E06B}"/>
+              </a:ext>
+            </a:extLst>
+          </p:cNvPr>
+          <p:cNvSpPr/>
+          <p:nvPr/>
+        </p:nvSpPr>
+        <p:spPr>
+          <a:xfrm>
+            <a:off x="4281487" y="4366904"/>
+            <a:ext cx="581025" cy="533400"/>
+          </a:xfrm>
+          <a:prstGeom prst="downArrow">
+            <a:avLst/>
+          </a:prstGeom>
+        </p:spPr>
+        <p:style>
+          <a:lnRef idx="2">
+            <a:schemeClr val="accent1">
+              <a:shade val="15000"/>
+            </a:schemeClr>
+          </a:lnRef>
+          <a:fillRef idx="1">
+            <a:schemeClr val="accent1"/>
+          </a:fillRef>
+          <a:effectRef idx="0">
+            <a:schemeClr val="accent1"/>
+          </a:effectRef>
+          <a:fontRef idx="minor">
+            <a:schemeClr val="lt1"/>
+          </a:fontRef>
+        </p:style>
+        <p:txBody>
+          <a:bodyPr rtlCol="0" anchor="ctr"/>
+          <a:lstStyle/>
+          <a:p>
+            <a:pPr algn="ctr"/>
+            <a:endParaRPr lang="ko-KR" altLang="en-US"/>
+          </a:p>
+        </p:txBody>
+      </p:sp>
+      <p:sp>
+        <p:nvSpPr>
+          <p:cNvPr id="3" name="사각형: 둥근 모서리 2">
+            <a:extLst>
+              <a:ext uri="{FF2B5EF4-FFF2-40B4-BE49-F238E27FC236}">
+                <a16:creationId xmlns:a16="http://schemas.microsoft.com/office/drawing/2014/main" id="{D85EC833-8444-2777-E2FA-3A1737BAB8B6}"/>
+              </a:ext>
+            </a:extLst>
+          </p:cNvPr>
+          <p:cNvSpPr/>
+          <p:nvPr/>
+        </p:nvSpPr>
+        <p:spPr>
+          <a:xfrm>
+            <a:off x="346481" y="5177467"/>
+            <a:ext cx="8451038" cy="940605"/>
+          </a:xfrm>
+          <a:prstGeom prst="roundRect">
+            <a:avLst/>
+          </a:prstGeom>
+          <a:solidFill>
+            <a:schemeClr val="bg1">
+              <a:lumMod val="95000"/>
+              <a:alpha val="90000"/>
+            </a:schemeClr>
+          </a:solidFill>
+          <a:ln w="19050">
+            <a:solidFill>
+              <a:schemeClr val="tx1"/>
+            </a:solidFill>
+            <a:prstDash val="sysDot"/>
+          </a:ln>
+        </p:spPr>
+        <p:style>
+          <a:lnRef idx="2">
+            <a:schemeClr val="accent1">
+              <a:shade val="15000"/>
+            </a:schemeClr>
+          </a:lnRef>
+          <a:fillRef idx="1">
+            <a:schemeClr val="accent1"/>
+          </a:fillRef>
+          <a:effectRef idx="0">
+            <a:schemeClr val="accent1"/>
+          </a:effectRef>
+          <a:fontRef idx="minor">
+            <a:schemeClr val="lt1"/>
+          </a:fontRef>
+        </p:style>
+        <p:txBody>
+          <a:bodyPr rtlCol="0" anchor="ctr"/>
+          <a:lstStyle/>
+          <a:p>
+            <a:pPr algn="ctr"/>
+            <a:endParaRPr lang="ko-KR" altLang="en-US"/>
+          </a:p>
+        </p:txBody>
+      </p:sp>
+      <p:sp>
+        <p:nvSpPr>
+          <p:cNvPr id="12" name="Rectangle 40">
+            <a:extLst>
+              <a:ext uri="{FF2B5EF4-FFF2-40B4-BE49-F238E27FC236}">
+                <a16:creationId xmlns:a16="http://schemas.microsoft.com/office/drawing/2014/main" id="{B9D122AD-4083-D3E4-1212-B69D5C8A2850}"/>
+              </a:ext>
+            </a:extLst>
+          </p:cNvPr>
+          <p:cNvSpPr>
+            <a:spLocks noChangeArrowheads="1"/>
+          </p:cNvSpPr>
+          <p:nvPr/>
+        </p:nvSpPr>
+        <p:spPr bwMode="auto">
+          <a:xfrm>
+            <a:off x="445634" y="5292926"/>
+            <a:ext cx="8466964" cy="1106802"/>
+          </a:xfrm>
+          <a:prstGeom prst="rect">
+            <a:avLst/>
+          </a:prstGeom>
+          <a:noFill/>
+          <a:ln w="9525" algn="ctr">
+            <a:noFill/>
+            <a:miter lim="800000"/>
+            <a:headEnd/>
+            <a:tailEnd/>
+          </a:ln>
+          <a:effectLst/>
+        </p:spPr>
+        <p:txBody>
+          <a:bodyPr lIns="0" tIns="0" rIns="0" bIns="0"/>
+          <a:lstStyle/>
           <a:p>
             <a:pPr marL="285750" indent="-104775">
               <a:lnSpc>
@@ -1819,13 +2038,368 @@
               <a:defRPr/>
             </a:pPr>
             <a:r>
-              <a:rPr lang="en-US" altLang="ko-KR" sz="1400" b="1" dirty="0">
-                <a:latin typeface="KoPubWorld돋움체 Light" panose="00000300000000000000" pitchFamily="2" charset="-127"/>
-                <a:ea typeface="KoPubWorld돋움체 Light" panose="00000300000000000000" pitchFamily="2" charset="-127"/>
-                <a:cs typeface="KoPubWorld돋움체 Light" panose="00000300000000000000" pitchFamily="2" charset="-127"/>
-              </a:rPr>
-              <a:t> 3</a:t>
-            </a:r>
+              <a:rPr lang="ko-KR" altLang="en-US" sz="1400" dirty="0">
+                <a:latin typeface="KoPubWorld돋움체 Light" panose="00000300000000000000" pitchFamily="2" charset="-127"/>
+                <a:ea typeface="KoPubWorld돋움체 Light" panose="00000300000000000000" pitchFamily="2" charset="-127"/>
+                <a:cs typeface="KoPubWorld돋움체 Light" panose="00000300000000000000" pitchFamily="2" charset="-127"/>
+              </a:rPr>
+              <a:t> 비용 및 행정력 낭비를 줄이며 정확한 시점에 수질 </a:t>
+            </a:r>
+            <a:r>
+              <a:rPr lang="ko-KR" altLang="en-US" sz="1400" dirty="0" err="1">
+                <a:latin typeface="KoPubWorld돋움체 Light" panose="00000300000000000000" pitchFamily="2" charset="-127"/>
+                <a:ea typeface="KoPubWorld돋움체 Light" panose="00000300000000000000" pitchFamily="2" charset="-127"/>
+                <a:cs typeface="KoPubWorld돋움체 Light" panose="00000300000000000000" pitchFamily="2" charset="-127"/>
+              </a:rPr>
+              <a:t>채수를</a:t>
+            </a:r>
+            <a:r>
+              <a:rPr lang="ko-KR" altLang="en-US" sz="1400" dirty="0">
+                <a:latin typeface="KoPubWorld돋움체 Light" panose="00000300000000000000" pitchFamily="2" charset="-127"/>
+                <a:ea typeface="KoPubWorld돋움체 Light" panose="00000300000000000000" pitchFamily="2" charset="-127"/>
+                <a:cs typeface="KoPubWorld돋움체 Light" panose="00000300000000000000" pitchFamily="2" charset="-127"/>
+              </a:rPr>
+              <a:t> 할 수 있게 하는 모니터링 프로그램 개발 필요</a:t>
+            </a:r>
+            <a:endParaRPr lang="en-US" altLang="ko-KR" sz="1400" dirty="0">
+              <a:latin typeface="KoPubWorld돋움체 Light" panose="00000300000000000000" pitchFamily="2" charset="-127"/>
+              <a:ea typeface="KoPubWorld돋움체 Light" panose="00000300000000000000" pitchFamily="2" charset="-127"/>
+              <a:cs typeface="KoPubWorld돋움체 Light" panose="00000300000000000000" pitchFamily="2" charset="-127"/>
+            </a:endParaRPr>
+          </a:p>
+          <a:p>
+            <a:pPr marL="285750" indent="-104775">
+              <a:lnSpc>
+                <a:spcPct val="120000"/>
+              </a:lnSpc>
+              <a:spcBef>
+                <a:spcPct val="50000"/>
+              </a:spcBef>
+              <a:buFont typeface="Arial" panose="020B0604020202020204" pitchFamily="34" charset="0"/>
+              <a:buChar char="•"/>
+              <a:defRPr/>
+            </a:pPr>
+            <a:r>
+              <a:rPr lang="ko-KR" altLang="en-US" sz="1400" dirty="0">
+                <a:latin typeface="KoPubWorld돋움체 Light" panose="00000300000000000000" pitchFamily="2" charset="-127"/>
+                <a:ea typeface="KoPubWorld돋움체 Light" panose="00000300000000000000" pitchFamily="2" charset="-127"/>
+                <a:cs typeface="KoPubWorld돋움체 Light" panose="00000300000000000000" pitchFamily="2" charset="-127"/>
+              </a:rPr>
+              <a:t> 지도 기반에서 기상</a:t>
+            </a:r>
+            <a:r>
+              <a:rPr lang="en-US" altLang="ko-KR" sz="1400" dirty="0">
+                <a:latin typeface="KoPubWorld돋움체 Light" panose="00000300000000000000" pitchFamily="2" charset="-127"/>
+                <a:ea typeface="KoPubWorld돋움체 Light" panose="00000300000000000000" pitchFamily="2" charset="-127"/>
+                <a:cs typeface="KoPubWorld돋움체 Light" panose="00000300000000000000" pitchFamily="2" charset="-127"/>
+              </a:rPr>
+              <a:t>·</a:t>
+            </a:r>
+            <a:r>
+              <a:rPr lang="ko-KR" altLang="en-US" sz="1400" dirty="0">
+                <a:latin typeface="KoPubWorld돋움체 Light" panose="00000300000000000000" pitchFamily="2" charset="-127"/>
+                <a:ea typeface="KoPubWorld돋움체 Light" panose="00000300000000000000" pitchFamily="2" charset="-127"/>
+                <a:cs typeface="KoPubWorld돋움체 Light" panose="00000300000000000000" pitchFamily="2" charset="-127"/>
+              </a:rPr>
+              <a:t>수위</a:t>
+            </a:r>
+            <a:r>
+              <a:rPr lang="en-US" altLang="ko-KR" sz="1400" dirty="0">
+                <a:latin typeface="KoPubWorld돋움체 Light" panose="00000300000000000000" pitchFamily="2" charset="-127"/>
+                <a:ea typeface="KoPubWorld돋움체 Light" panose="00000300000000000000" pitchFamily="2" charset="-127"/>
+                <a:cs typeface="KoPubWorld돋움체 Light" panose="00000300000000000000" pitchFamily="2" charset="-127"/>
+              </a:rPr>
+              <a:t>·</a:t>
+            </a:r>
+            <a:r>
+              <a:rPr lang="ko-KR" altLang="en-US" sz="1400" dirty="0">
+                <a:latin typeface="KoPubWorld돋움체 Light" panose="00000300000000000000" pitchFamily="2" charset="-127"/>
+                <a:ea typeface="KoPubWorld돋움체 Light" panose="00000300000000000000" pitchFamily="2" charset="-127"/>
+                <a:cs typeface="KoPubWorld돋움체 Light" panose="00000300000000000000" pitchFamily="2" charset="-127"/>
+              </a:rPr>
+              <a:t>수질 정보를 통합 확인할 수 있는 </a:t>
+            </a:r>
+            <a:r>
+              <a:rPr lang="en-US" altLang="ko-KR" sz="1400" dirty="0">
+                <a:latin typeface="KoPubWorld돋움체 Light" panose="00000300000000000000" pitchFamily="2" charset="-127"/>
+                <a:ea typeface="KoPubWorld돋움체 Light" panose="00000300000000000000" pitchFamily="2" charset="-127"/>
+                <a:cs typeface="KoPubWorld돋움체 Light" panose="00000300000000000000" pitchFamily="2" charset="-127"/>
+              </a:rPr>
+              <a:t>“One-stop” </a:t>
+            </a:r>
+            <a:r>
+              <a:rPr lang="ko-KR" altLang="en-US" sz="1400" dirty="0">
+                <a:latin typeface="KoPubWorld돋움체 Light" panose="00000300000000000000" pitchFamily="2" charset="-127"/>
+                <a:ea typeface="KoPubWorld돋움체 Light" panose="00000300000000000000" pitchFamily="2" charset="-127"/>
+                <a:cs typeface="KoPubWorld돋움체 Light" panose="00000300000000000000" pitchFamily="2" charset="-127"/>
+              </a:rPr>
+              <a:t>프로그램 개발</a:t>
+            </a:r>
+            <a:endParaRPr lang="en-US" altLang="ko-KR" sz="1400" b="1" dirty="0">
+              <a:latin typeface="KoPubWorld돋움체 Light" panose="00000300000000000000" pitchFamily="2" charset="-127"/>
+              <a:ea typeface="KoPubWorld돋움체 Light" panose="00000300000000000000" pitchFamily="2" charset="-127"/>
+              <a:cs typeface="KoPubWorld돋움체 Light" panose="00000300000000000000" pitchFamily="2" charset="-127"/>
+            </a:endParaRPr>
+          </a:p>
+        </p:txBody>
+      </p:sp>
+      <p:sp>
+        <p:nvSpPr>
+          <p:cNvPr id="22" name="사각형: 둥근 모서리 21">
+            <a:extLst>
+              <a:ext uri="{FF2B5EF4-FFF2-40B4-BE49-F238E27FC236}">
+                <a16:creationId xmlns:a16="http://schemas.microsoft.com/office/drawing/2014/main" id="{A90B751E-DFF3-D27D-A22B-71D1FC9B2B75}"/>
+              </a:ext>
+            </a:extLst>
+          </p:cNvPr>
+          <p:cNvSpPr/>
+          <p:nvPr/>
+        </p:nvSpPr>
+        <p:spPr>
+          <a:xfrm>
+            <a:off x="346480" y="2803588"/>
+            <a:ext cx="8451038" cy="1271570"/>
+          </a:xfrm>
+          <a:prstGeom prst="roundRect">
+            <a:avLst/>
+          </a:prstGeom>
+          <a:solidFill>
+            <a:schemeClr val="bg1">
+              <a:lumMod val="95000"/>
+              <a:alpha val="90000"/>
+            </a:schemeClr>
+          </a:solidFill>
+          <a:ln w="19050">
+            <a:solidFill>
+              <a:schemeClr val="tx1"/>
+            </a:solidFill>
+            <a:prstDash val="sysDot"/>
+          </a:ln>
+        </p:spPr>
+        <p:style>
+          <a:lnRef idx="2">
+            <a:schemeClr val="accent1">
+              <a:shade val="15000"/>
+            </a:schemeClr>
+          </a:lnRef>
+          <a:fillRef idx="1">
+            <a:schemeClr val="accent1"/>
+          </a:fillRef>
+          <a:effectRef idx="0">
+            <a:schemeClr val="accent1"/>
+          </a:effectRef>
+          <a:fontRef idx="minor">
+            <a:schemeClr val="lt1"/>
+          </a:fontRef>
+        </p:style>
+        <p:txBody>
+          <a:bodyPr rtlCol="0" anchor="ctr"/>
+          <a:lstStyle/>
+          <a:p>
+            <a:pPr algn="ctr"/>
+            <a:endParaRPr lang="ko-KR" altLang="en-US"/>
+          </a:p>
+        </p:txBody>
+      </p:sp>
+      <p:sp>
+        <p:nvSpPr>
+          <p:cNvPr id="21" name="Rectangle 40">
+            <a:extLst>
+              <a:ext uri="{FF2B5EF4-FFF2-40B4-BE49-F238E27FC236}">
+                <a16:creationId xmlns:a16="http://schemas.microsoft.com/office/drawing/2014/main" id="{0A2EC932-D453-3B8F-18ED-6CBBC14A528C}"/>
+              </a:ext>
+            </a:extLst>
+          </p:cNvPr>
+          <p:cNvSpPr>
+            <a:spLocks noChangeArrowheads="1"/>
+          </p:cNvSpPr>
+          <p:nvPr/>
+        </p:nvSpPr>
+        <p:spPr bwMode="auto">
+          <a:xfrm>
+            <a:off x="445634" y="2954618"/>
+            <a:ext cx="8466964" cy="1027239"/>
+          </a:xfrm>
+          <a:prstGeom prst="rect">
+            <a:avLst/>
+          </a:prstGeom>
+          <a:noFill/>
+          <a:ln w="9525" algn="ctr">
+            <a:noFill/>
+            <a:miter lim="800000"/>
+            <a:headEnd/>
+            <a:tailEnd/>
+          </a:ln>
+          <a:effectLst/>
+        </p:spPr>
+        <p:txBody>
+          <a:bodyPr lIns="0" tIns="0" rIns="0" bIns="0"/>
+          <a:lstStyle/>
+          <a:p>
+            <a:pPr marL="285750" indent="-104775">
+              <a:lnSpc>
+                <a:spcPct val="120000"/>
+              </a:lnSpc>
+              <a:spcBef>
+                <a:spcPct val="50000"/>
+              </a:spcBef>
+              <a:buFont typeface="Arial" panose="020B0604020202020204" pitchFamily="34" charset="0"/>
+              <a:buChar char="•"/>
+              <a:defRPr/>
+            </a:pPr>
+            <a:r>
+              <a:rPr lang="en-US" altLang="ko-KR" sz="1400" dirty="0">
+                <a:latin typeface="KoPubWorld돋움체 Light" panose="00000300000000000000" pitchFamily="2" charset="-127"/>
+                <a:ea typeface="KoPubWorld돋움체 Light" panose="00000300000000000000" pitchFamily="2" charset="-127"/>
+                <a:cs typeface="KoPubWorld돋움체 Light" panose="00000300000000000000" pitchFamily="2" charset="-127"/>
+              </a:rPr>
+              <a:t> (</a:t>
+            </a:r>
+            <a:r>
+              <a:rPr lang="ko-KR" altLang="en-US" sz="1400" dirty="0">
+                <a:latin typeface="KoPubWorld돋움체 Light" panose="00000300000000000000" pitchFamily="2" charset="-127"/>
+                <a:ea typeface="KoPubWorld돋움체 Light" panose="00000300000000000000" pitchFamily="2" charset="-127"/>
+                <a:cs typeface="KoPubWorld돋움체 Light" panose="00000300000000000000" pitchFamily="2" charset="-127"/>
+              </a:rPr>
+              <a:t>대기시간 낭비</a:t>
+            </a:r>
+            <a:r>
+              <a:rPr lang="en-US" altLang="ko-KR" sz="1400" dirty="0">
+                <a:latin typeface="KoPubWorld돋움체 Light" panose="00000300000000000000" pitchFamily="2" charset="-127"/>
+                <a:ea typeface="KoPubWorld돋움체 Light" panose="00000300000000000000" pitchFamily="2" charset="-127"/>
+                <a:cs typeface="KoPubWorld돋움체 Light" panose="00000300000000000000" pitchFamily="2" charset="-127"/>
+              </a:rPr>
+              <a:t>) </a:t>
+            </a:r>
+            <a:r>
+              <a:rPr lang="ko-KR" altLang="en-US" sz="1400" dirty="0">
+                <a:latin typeface="KoPubWorld돋움체 Light" panose="00000300000000000000" pitchFamily="2" charset="-127"/>
+                <a:ea typeface="KoPubWorld돋움체 Light" panose="00000300000000000000" pitchFamily="2" charset="-127"/>
+                <a:cs typeface="KoPubWorld돋움체 Light" panose="00000300000000000000" pitchFamily="2" charset="-127"/>
+              </a:rPr>
+              <a:t>기상 데이터 확인 후 조기 출동 시 현장에서의 무한대기 발생</a:t>
+            </a:r>
+            <a:endParaRPr lang="en-US" altLang="ko-KR" sz="1400" dirty="0">
+              <a:latin typeface="KoPubWorld돋움체 Light" panose="00000300000000000000" pitchFamily="2" charset="-127"/>
+              <a:ea typeface="KoPubWorld돋움체 Light" panose="00000300000000000000" pitchFamily="2" charset="-127"/>
+              <a:cs typeface="KoPubWorld돋움체 Light" panose="00000300000000000000" pitchFamily="2" charset="-127"/>
+            </a:endParaRPr>
+          </a:p>
+          <a:p>
+            <a:pPr marL="285750" indent="-104775">
+              <a:lnSpc>
+                <a:spcPct val="120000"/>
+              </a:lnSpc>
+              <a:spcBef>
+                <a:spcPct val="50000"/>
+              </a:spcBef>
+              <a:buFont typeface="Arial" panose="020B0604020202020204" pitchFamily="34" charset="0"/>
+              <a:buChar char="•"/>
+              <a:defRPr/>
+            </a:pPr>
+            <a:r>
+              <a:rPr lang="en-US" altLang="ko-KR" sz="1400" dirty="0">
+                <a:latin typeface="KoPubWorld돋움체 Light" panose="00000300000000000000" pitchFamily="2" charset="-127"/>
+                <a:ea typeface="KoPubWorld돋움체 Light" panose="00000300000000000000" pitchFamily="2" charset="-127"/>
+                <a:cs typeface="KoPubWorld돋움체 Light" panose="00000300000000000000" pitchFamily="2" charset="-127"/>
+              </a:rPr>
+              <a:t> (</a:t>
+            </a:r>
+            <a:r>
+              <a:rPr lang="ko-KR" altLang="en-US" sz="1400" dirty="0">
+                <a:latin typeface="KoPubWorld돋움체 Light" panose="00000300000000000000" pitchFamily="2" charset="-127"/>
+                <a:ea typeface="KoPubWorld돋움체 Light" panose="00000300000000000000" pitchFamily="2" charset="-127"/>
+                <a:cs typeface="KoPubWorld돋움체 Light" panose="00000300000000000000" pitchFamily="2" charset="-127"/>
+              </a:rPr>
+              <a:t>품질 저하</a:t>
+            </a:r>
+            <a:r>
+              <a:rPr lang="en-US" altLang="ko-KR" sz="1400" dirty="0">
+                <a:latin typeface="KoPubWorld돋움체 Light" panose="00000300000000000000" pitchFamily="2" charset="-127"/>
+                <a:ea typeface="KoPubWorld돋움체 Light" panose="00000300000000000000" pitchFamily="2" charset="-127"/>
+                <a:cs typeface="KoPubWorld돋움체 Light" panose="00000300000000000000" pitchFamily="2" charset="-127"/>
+              </a:rPr>
+              <a:t>) </a:t>
+            </a:r>
+            <a:r>
+              <a:rPr lang="ko-KR" altLang="en-US" sz="1400" dirty="0">
+                <a:latin typeface="KoPubWorld돋움체 Light" panose="00000300000000000000" pitchFamily="2" charset="-127"/>
+                <a:ea typeface="KoPubWorld돋움체 Light" panose="00000300000000000000" pitchFamily="2" charset="-127"/>
+                <a:cs typeface="KoPubWorld돋움체 Light" panose="00000300000000000000" pitchFamily="2" charset="-127"/>
+              </a:rPr>
+              <a:t>판단 지연 시 초기 우수 </a:t>
+            </a:r>
+            <a:r>
+              <a:rPr lang="ko-KR" altLang="en-US" sz="1400" dirty="0" err="1">
+                <a:latin typeface="KoPubWorld돋움체 Light" panose="00000300000000000000" pitchFamily="2" charset="-127"/>
+                <a:ea typeface="KoPubWorld돋움체 Light" panose="00000300000000000000" pitchFamily="2" charset="-127"/>
+                <a:cs typeface="KoPubWorld돋움체 Light" panose="00000300000000000000" pitchFamily="2" charset="-127"/>
+              </a:rPr>
+              <a:t>채수</a:t>
+            </a:r>
+            <a:r>
+              <a:rPr lang="ko-KR" altLang="en-US" sz="1400" dirty="0">
+                <a:latin typeface="KoPubWorld돋움체 Light" panose="00000300000000000000" pitchFamily="2" charset="-127"/>
+                <a:ea typeface="KoPubWorld돋움체 Light" panose="00000300000000000000" pitchFamily="2" charset="-127"/>
+                <a:cs typeface="KoPubWorld돋움체 Light" panose="00000300000000000000" pitchFamily="2" charset="-127"/>
+              </a:rPr>
+              <a:t> 기회 상실</a:t>
+            </a:r>
+            <a:endParaRPr lang="en-US" altLang="ko-KR" sz="1400" dirty="0">
+              <a:latin typeface="KoPubWorld돋움체 Light" panose="00000300000000000000" pitchFamily="2" charset="-127"/>
+              <a:ea typeface="KoPubWorld돋움체 Light" panose="00000300000000000000" pitchFamily="2" charset="-127"/>
+              <a:cs typeface="KoPubWorld돋움체 Light" panose="00000300000000000000" pitchFamily="2" charset="-127"/>
+            </a:endParaRPr>
+          </a:p>
+          <a:p>
+            <a:pPr marL="285750" indent="-104775">
+              <a:lnSpc>
+                <a:spcPct val="120000"/>
+              </a:lnSpc>
+              <a:spcBef>
+                <a:spcPct val="50000"/>
+              </a:spcBef>
+              <a:buFont typeface="Arial" panose="020B0604020202020204" pitchFamily="34" charset="0"/>
+              <a:buChar char="•"/>
+              <a:defRPr/>
+            </a:pPr>
+            <a:r>
+              <a:rPr lang="en-US" altLang="ko-KR" sz="1400" dirty="0">
+                <a:latin typeface="KoPubWorld돋움체 Light" panose="00000300000000000000" pitchFamily="2" charset="-127"/>
+                <a:ea typeface="KoPubWorld돋움체 Light" panose="00000300000000000000" pitchFamily="2" charset="-127"/>
+                <a:cs typeface="KoPubWorld돋움체 Light" panose="00000300000000000000" pitchFamily="2" charset="-127"/>
+              </a:rPr>
+              <a:t> (</a:t>
+            </a:r>
+            <a:r>
+              <a:rPr lang="ko-KR" altLang="en-US" sz="1400" dirty="0">
+                <a:latin typeface="KoPubWorld돋움체 Light" panose="00000300000000000000" pitchFamily="2" charset="-127"/>
+                <a:ea typeface="KoPubWorld돋움체 Light" panose="00000300000000000000" pitchFamily="2" charset="-127"/>
+                <a:cs typeface="KoPubWorld돋움체 Light" panose="00000300000000000000" pitchFamily="2" charset="-127"/>
+              </a:rPr>
+              <a:t>비용 낭비</a:t>
+            </a:r>
+            <a:r>
+              <a:rPr lang="en-US" altLang="ko-KR" sz="1400" dirty="0">
+                <a:latin typeface="KoPubWorld돋움체 Light" panose="00000300000000000000" pitchFamily="2" charset="-127"/>
+                <a:ea typeface="KoPubWorld돋움체 Light" panose="00000300000000000000" pitchFamily="2" charset="-127"/>
+                <a:cs typeface="KoPubWorld돋움체 Light" panose="00000300000000000000" pitchFamily="2" charset="-127"/>
+              </a:rPr>
+              <a:t>) </a:t>
+            </a:r>
+            <a:r>
+              <a:rPr lang="ko-KR" altLang="en-US" sz="1400" dirty="0">
+                <a:latin typeface="KoPubWorld돋움체 Light" panose="00000300000000000000" pitchFamily="2" charset="-127"/>
+                <a:ea typeface="KoPubWorld돋움체 Light" panose="00000300000000000000" pitchFamily="2" charset="-127"/>
+                <a:cs typeface="KoPubWorld돋움체 Light" panose="00000300000000000000" pitchFamily="2" charset="-127"/>
+              </a:rPr>
+              <a:t>강우량이 미미할 경우 불필요한 현장 출동으로 인한 행정력 낭비 발생</a:t>
+            </a:r>
+            <a:endParaRPr lang="en-US" altLang="ko-KR" sz="1400" dirty="0">
+              <a:latin typeface="KoPubWorld돋움체 Light" panose="00000300000000000000" pitchFamily="2" charset="-127"/>
+              <a:ea typeface="KoPubWorld돋움체 Light" panose="00000300000000000000" pitchFamily="2" charset="-127"/>
+              <a:cs typeface="KoPubWorld돋움체 Light" panose="00000300000000000000" pitchFamily="2" charset="-127"/>
+            </a:endParaRPr>
           </a:p>
           <a:p>
             <a:pPr>
@@ -1848,7 +2422,7 @@
     </p:spTree>
     <p:extLst>
       <p:ext uri="{BB962C8B-B14F-4D97-AF65-F5344CB8AC3E}">
-        <p14:creationId xmlns:p14="http://schemas.microsoft.com/office/powerpoint/2010/main" val="1556603261"/>
+        <p14:creationId xmlns:p14="http://schemas.microsoft.com/office/powerpoint/2010/main" val="1057216729"/>
       </p:ext>
     </p:extLst>
   </p:cSld>
@@ -1858,7 +2432,7 @@
 </p:sld>
 </file>
 
-<file path=ppt/slides/slide11.xml><?xml version="1.0" encoding="utf-8"?>
+<file path=ppt/slides/slide3.xml><?xml version="1.0" encoding="utf-8"?>
 <p:sld xmlns:a="http://schemas.openxmlformats.org/drawingml/2006/main" xmlns:r="http://schemas.openxmlformats.org/officeDocument/2006/relationships" xmlns:p="http://schemas.openxmlformats.org/presentationml/2006/main">
   <p:cSld>
     <p:spTree>
@@ -1890,7 +2464,7 @@
         <p:spPr>
           <a:xfrm>
             <a:off x="838393" y="924599"/>
-            <a:ext cx="1733167" cy="369332"/>
+            <a:ext cx="1463862" cy="369332"/>
           </a:xfrm>
           <a:prstGeom prst="rect">
             <a:avLst/>
@@ -1910,7 +2484,7 @@
                 <a:latin typeface="KoPubWorld돋움체 Medium" panose="00000600000000000000" pitchFamily="2" charset="-127"/>
                 <a:ea typeface="KoPubWorld돋움체 Medium" panose="00000600000000000000" pitchFamily="2" charset="-127"/>
               </a:rPr>
-              <a:t>배포 가능성 검토</a:t>
+              <a:t>프로그램 개요</a:t>
             </a:r>
           </a:p>
         </p:txBody>
@@ -2086,7 +2660,7 @@
                 <a:ea typeface="KoPubWorld돋움체 Medium" panose="00000600000000000000" pitchFamily="2" charset="-127"/>
                 <a:cs typeface="KoPubWorld돋움체 Medium" panose="00000600000000000000" pitchFamily="2" charset="-127"/>
               </a:rPr>
-              <a:t>1.8 </a:t>
+              <a:t>1.1 </a:t>
             </a:r>
             <a:r>
               <a:rPr lang="ko-KR" altLang="en-US" sz="2800" b="1" dirty="0">
@@ -2097,7 +2671,7 @@
                 <a:ea typeface="KoPubWorld돋움체 Medium" panose="00000600000000000000" pitchFamily="2" charset="-127"/>
                 <a:cs typeface="KoPubWorld돋움체 Medium" panose="00000600000000000000" pitchFamily="2" charset="-127"/>
               </a:rPr>
-              <a:t>기타</a:t>
+              <a:t>개발배경</a:t>
             </a:r>
           </a:p>
         </p:txBody>
@@ -2117,7 +2691,7 @@
         <p:spPr>
           <a:xfrm>
             <a:off x="346481" y="1353285"/>
-            <a:ext cx="8451038" cy="1875690"/>
+            <a:ext cx="8451038" cy="1615710"/>
           </a:xfrm>
           <a:prstGeom prst="roundRect">
             <a:avLst/>
@@ -2176,7 +2750,7 @@
         </p:nvSpPr>
         <p:spPr bwMode="auto">
           <a:xfrm>
-            <a:off x="445634" y="1602104"/>
+            <a:off x="445634" y="1494524"/>
             <a:ext cx="8466964" cy="1474471"/>
           </a:xfrm>
           <a:prstGeom prst="rect">
@@ -2212,8 +2786,37 @@
                 <a:ea typeface="KoPubWorld돋움체 Light" panose="00000300000000000000" pitchFamily="2" charset="-127"/>
                 <a:cs typeface="KoPubWorld돋움체 Light" panose="00000300000000000000" pitchFamily="2" charset="-127"/>
               </a:rPr>
-              <a:t> 1, 2</a:t>
-            </a:r>
+              <a:t> (</a:t>
+            </a:r>
+            <a:r>
+              <a:rPr lang="ko-KR" altLang="en-US" sz="1400" dirty="0">
+                <a:latin typeface="KoPubWorld돋움체 Light" panose="00000300000000000000" pitchFamily="2" charset="-127"/>
+                <a:ea typeface="KoPubWorld돋움체 Light" panose="00000300000000000000" pitchFamily="2" charset="-127"/>
+                <a:cs typeface="KoPubWorld돋움체 Light" panose="00000300000000000000" pitchFamily="2" charset="-127"/>
+              </a:rPr>
+              <a:t>개발 프로그램</a:t>
+            </a:r>
+            <a:r>
+              <a:rPr lang="en-US" altLang="ko-KR" sz="1400" dirty="0">
+                <a:latin typeface="KoPubWorld돋움체 Light" panose="00000300000000000000" pitchFamily="2" charset="-127"/>
+                <a:ea typeface="KoPubWorld돋움체 Light" panose="00000300000000000000" pitchFamily="2" charset="-127"/>
+                <a:cs typeface="KoPubWorld돋움체 Light" panose="00000300000000000000" pitchFamily="2" charset="-127"/>
+              </a:rPr>
+              <a:t>) </a:t>
+            </a:r>
+            <a:r>
+              <a:rPr lang="ko-KR" altLang="en-US" sz="1400" dirty="0">
+                <a:latin typeface="KoPubWorld돋움체 Light" panose="00000300000000000000" pitchFamily="2" charset="-127"/>
+                <a:ea typeface="KoPubWorld돋움체 Light" panose="00000300000000000000" pitchFamily="2" charset="-127"/>
+                <a:cs typeface="KoPubWorld돋움체 Light" panose="00000300000000000000" pitchFamily="2" charset="-127"/>
+              </a:rPr>
+              <a:t>스마트 하천 모니터링 시스템</a:t>
+            </a:r>
+            <a:endParaRPr lang="en-US" altLang="ko-KR" sz="1400" dirty="0">
+              <a:latin typeface="KoPubWorld돋움체 Light" panose="00000300000000000000" pitchFamily="2" charset="-127"/>
+              <a:ea typeface="KoPubWorld돋움체 Light" panose="00000300000000000000" pitchFamily="2" charset="-127"/>
+              <a:cs typeface="KoPubWorld돋움체 Light" panose="00000300000000000000" pitchFamily="2" charset="-127"/>
+            </a:endParaRPr>
           </a:p>
           <a:p>
             <a:pPr marL="285750" indent="-104775">
@@ -2233,50 +2836,256 @@
                 <a:ea typeface="KoPubWorld돋움체 Light" panose="00000300000000000000" pitchFamily="2" charset="-127"/>
                 <a:cs typeface="KoPubWorld돋움체 Light" panose="00000300000000000000" pitchFamily="2" charset="-127"/>
               </a:rPr>
-              <a:t> 1</a:t>
-            </a:r>
-          </a:p>
-          <a:p>
-            <a:pPr marL="285750" indent="-104775">
+              <a:t> </a:t>
+            </a:r>
+            <a:r>
+              <a:rPr lang="en-US" altLang="ko-KR" sz="1400" dirty="0">
+                <a:latin typeface="KoPubWorld돋움체 Light" panose="00000300000000000000" pitchFamily="2" charset="-127"/>
+                <a:ea typeface="KoPubWorld돋움체 Light" panose="00000300000000000000" pitchFamily="2" charset="-127"/>
+                <a:cs typeface="KoPubWorld돋움체 Light" panose="00000300000000000000" pitchFamily="2" charset="-127"/>
+              </a:rPr>
+              <a:t>(</a:t>
+            </a:r>
+            <a:r>
+              <a:rPr lang="ko-KR" altLang="en-US" sz="1400" dirty="0">
+                <a:latin typeface="KoPubWorld돋움체 Light" panose="00000300000000000000" pitchFamily="2" charset="-127"/>
+                <a:ea typeface="KoPubWorld돋움체 Light" panose="00000300000000000000" pitchFamily="2" charset="-127"/>
+                <a:cs typeface="KoPubWorld돋움체 Light" panose="00000300000000000000" pitchFamily="2" charset="-127"/>
+              </a:rPr>
+              <a:t>주요 기능</a:t>
+            </a:r>
+            <a:r>
+              <a:rPr lang="en-US" altLang="ko-KR" sz="1400" dirty="0">
+                <a:latin typeface="KoPubWorld돋움체 Light" panose="00000300000000000000" pitchFamily="2" charset="-127"/>
+                <a:ea typeface="KoPubWorld돋움체 Light" panose="00000300000000000000" pitchFamily="2" charset="-127"/>
+                <a:cs typeface="KoPubWorld돋움체 Light" panose="00000300000000000000" pitchFamily="2" charset="-127"/>
+              </a:rPr>
+              <a:t>) </a:t>
+            </a:r>
+            <a:r>
+              <a:rPr lang="ko-KR" altLang="en-US" sz="1400" dirty="0">
+                <a:latin typeface="KoPubWorld돋움체 Light" panose="00000300000000000000" pitchFamily="2" charset="-127"/>
+                <a:ea typeface="KoPubWorld돋움체 Light" panose="00000300000000000000" pitchFamily="2" charset="-127"/>
+                <a:cs typeface="KoPubWorld돋움체 Light" panose="00000300000000000000" pitchFamily="2" charset="-127"/>
+              </a:rPr>
+              <a:t>강우 시 비점오염원 모니터링 전 출장 의사결정</a:t>
+            </a:r>
+            <a:r>
+              <a:rPr lang="en-US" altLang="ko-KR" sz="1400" dirty="0">
+                <a:latin typeface="KoPubWorld돋움체 Light" panose="00000300000000000000" pitchFamily="2" charset="-127"/>
+                <a:ea typeface="KoPubWorld돋움체 Light" panose="00000300000000000000" pitchFamily="2" charset="-127"/>
+                <a:cs typeface="KoPubWorld돋움체 Light" panose="00000300000000000000" pitchFamily="2" charset="-127"/>
+              </a:rPr>
+              <a:t>, </a:t>
+            </a:r>
+            <a:r>
+              <a:rPr lang="ko-KR" altLang="en-US" sz="1400" dirty="0">
+                <a:latin typeface="KoPubWorld돋움체 Light" panose="00000300000000000000" pitchFamily="2" charset="-127"/>
+                <a:ea typeface="KoPubWorld돋움체 Light" panose="00000300000000000000" pitchFamily="2" charset="-127"/>
+                <a:cs typeface="KoPubWorld돋움체 Light" panose="00000300000000000000" pitchFamily="2" charset="-127"/>
+              </a:rPr>
+              <a:t>모니터링 시 주요 현황 확인</a:t>
+            </a:r>
+            <a:r>
+              <a:rPr lang="en-US" altLang="ko-KR" sz="1400" dirty="0">
+                <a:latin typeface="KoPubWorld돋움체 Light" panose="00000300000000000000" pitchFamily="2" charset="-127"/>
+                <a:ea typeface="KoPubWorld돋움체 Light" panose="00000300000000000000" pitchFamily="2" charset="-127"/>
+                <a:cs typeface="KoPubWorld돋움체 Light" panose="00000300000000000000" pitchFamily="2" charset="-127"/>
+              </a:rPr>
+              <a:t> </a:t>
+            </a:r>
+          </a:p>
+          <a:p>
+            <a:pPr marL="180975">
               <a:lnSpc>
                 <a:spcPct val="120000"/>
               </a:lnSpc>
               <a:spcBef>
                 <a:spcPct val="50000"/>
               </a:spcBef>
-              <a:buFont typeface="Arial" panose="020B0604020202020204" pitchFamily="34" charset="0"/>
-              <a:buChar char="•"/>
               <a:defRPr/>
             </a:pPr>
             <a:r>
-              <a:rPr lang="en-US" altLang="ko-KR" sz="1400" b="1" dirty="0">
-                <a:latin typeface="KoPubWorld돋움체 Light" panose="00000300000000000000" pitchFamily="2" charset="-127"/>
-                <a:ea typeface="KoPubWorld돋움체 Light" panose="00000300000000000000" pitchFamily="2" charset="-127"/>
-                <a:cs typeface="KoPubWorld돋움체 Light" panose="00000300000000000000" pitchFamily="2" charset="-127"/>
-              </a:rPr>
-              <a:t> 2</a:t>
-            </a:r>
-          </a:p>
-          <a:p>
-            <a:pPr marL="285750" indent="-104775">
+              <a:rPr lang="en-US" altLang="ko-KR" sz="1400" dirty="0">
+                <a:latin typeface="KoPubWorld돋움체 Light" panose="00000300000000000000" pitchFamily="2" charset="-127"/>
+                <a:ea typeface="KoPubWorld돋움체 Light" panose="00000300000000000000" pitchFamily="2" charset="-127"/>
+                <a:cs typeface="KoPubWorld돋움체 Light" panose="00000300000000000000" pitchFamily="2" charset="-127"/>
+              </a:rPr>
+              <a:t> - (</a:t>
+            </a:r>
+            <a:r>
+              <a:rPr lang="ko-KR" altLang="en-US" sz="1400" dirty="0">
+                <a:latin typeface="KoPubWorld돋움체 Light" panose="00000300000000000000" pitchFamily="2" charset="-127"/>
+                <a:ea typeface="KoPubWorld돋움체 Light" panose="00000300000000000000" pitchFamily="2" charset="-127"/>
+                <a:cs typeface="KoPubWorld돋움체 Light" panose="00000300000000000000" pitchFamily="2" charset="-127"/>
+              </a:rPr>
+              <a:t>모니터링 전</a:t>
+            </a:r>
+            <a:r>
+              <a:rPr lang="en-US" altLang="ko-KR" sz="1400" dirty="0">
+                <a:latin typeface="KoPubWorld돋움체 Light" panose="00000300000000000000" pitchFamily="2" charset="-127"/>
+                <a:ea typeface="KoPubWorld돋움체 Light" panose="00000300000000000000" pitchFamily="2" charset="-127"/>
+                <a:cs typeface="KoPubWorld돋움체 Light" panose="00000300000000000000" pitchFamily="2" charset="-127"/>
+              </a:rPr>
+              <a:t>) ~12, ~24, ~72</a:t>
+            </a:r>
+            <a:r>
+              <a:rPr lang="ko-KR" altLang="en-US" sz="1400" dirty="0">
+                <a:latin typeface="KoPubWorld돋움체 Light" panose="00000300000000000000" pitchFamily="2" charset="-127"/>
+                <a:ea typeface="KoPubWorld돋움체 Light" panose="00000300000000000000" pitchFamily="2" charset="-127"/>
+                <a:cs typeface="KoPubWorld돋움체 Light" panose="00000300000000000000" pitchFamily="2" charset="-127"/>
+              </a:rPr>
+              <a:t>시간 내 강수량</a:t>
+            </a:r>
+            <a:r>
+              <a:rPr lang="en-US" altLang="ko-KR" sz="1400" dirty="0">
+                <a:latin typeface="KoPubWorld돋움체 Light" panose="00000300000000000000" pitchFamily="2" charset="-127"/>
+                <a:ea typeface="KoPubWorld돋움체 Light" panose="00000300000000000000" pitchFamily="2" charset="-127"/>
+                <a:cs typeface="KoPubWorld돋움체 Light" panose="00000300000000000000" pitchFamily="2" charset="-127"/>
+              </a:rPr>
+              <a:t>, </a:t>
+            </a:r>
+            <a:r>
+              <a:rPr lang="ko-KR" altLang="en-US" sz="1400" dirty="0">
+                <a:latin typeface="KoPubWorld돋움체 Light" panose="00000300000000000000" pitchFamily="2" charset="-127"/>
+                <a:ea typeface="KoPubWorld돋움체 Light" panose="00000300000000000000" pitchFamily="2" charset="-127"/>
+                <a:cs typeface="KoPubWorld돋움체 Light" panose="00000300000000000000" pitchFamily="2" charset="-127"/>
+              </a:rPr>
+              <a:t>최근 강수이력</a:t>
+            </a:r>
+            <a:r>
+              <a:rPr lang="en-US" altLang="ko-KR" sz="1400" dirty="0">
+                <a:latin typeface="KoPubWorld돋움체 Light" panose="00000300000000000000" pitchFamily="2" charset="-127"/>
+                <a:ea typeface="KoPubWorld돋움체 Light" panose="00000300000000000000" pitchFamily="2" charset="-127"/>
+                <a:cs typeface="KoPubWorld돋움체 Light" panose="00000300000000000000" pitchFamily="2" charset="-127"/>
+              </a:rPr>
+              <a:t>, </a:t>
+            </a:r>
+            <a:r>
+              <a:rPr lang="ko-KR" altLang="en-US" sz="1400" dirty="0" err="1">
+                <a:latin typeface="KoPubWorld돋움체 Light" panose="00000300000000000000" pitchFamily="2" charset="-127"/>
+                <a:ea typeface="KoPubWorld돋움체 Light" panose="00000300000000000000" pitchFamily="2" charset="-127"/>
+                <a:cs typeface="KoPubWorld돋움체 Light" panose="00000300000000000000" pitchFamily="2" charset="-127"/>
+              </a:rPr>
+              <a:t>선행무강우일수</a:t>
+            </a:r>
+            <a:r>
+              <a:rPr lang="en-US" altLang="ko-KR" sz="1400" dirty="0">
+                <a:latin typeface="KoPubWorld돋움체 Light" panose="00000300000000000000" pitchFamily="2" charset="-127"/>
+                <a:ea typeface="KoPubWorld돋움체 Light" panose="00000300000000000000" pitchFamily="2" charset="-127"/>
+                <a:cs typeface="KoPubWorld돋움체 Light" panose="00000300000000000000" pitchFamily="2" charset="-127"/>
+              </a:rPr>
+              <a:t>,</a:t>
+            </a:r>
+            <a:r>
+              <a:rPr lang="ko-KR" altLang="en-US" sz="1400" dirty="0">
+                <a:latin typeface="KoPubWorld돋움체 Light" panose="00000300000000000000" pitchFamily="2" charset="-127"/>
+                <a:ea typeface="KoPubWorld돋움체 Light" panose="00000300000000000000" pitchFamily="2" charset="-127"/>
+                <a:cs typeface="KoPubWorld돋움체 Light" panose="00000300000000000000" pitchFamily="2" charset="-127"/>
+              </a:rPr>
+              <a:t> 강수확률 확인</a:t>
+            </a:r>
+            <a:endParaRPr lang="en-US" altLang="ko-KR" sz="1400" dirty="0">
+              <a:latin typeface="KoPubWorld돋움체 Light" panose="00000300000000000000" pitchFamily="2" charset="-127"/>
+              <a:ea typeface="KoPubWorld돋움체 Light" panose="00000300000000000000" pitchFamily="2" charset="-127"/>
+              <a:cs typeface="KoPubWorld돋움체 Light" panose="00000300000000000000" pitchFamily="2" charset="-127"/>
+            </a:endParaRPr>
+          </a:p>
+          <a:p>
+            <a:pPr marL="180975">
               <a:lnSpc>
                 <a:spcPct val="120000"/>
               </a:lnSpc>
               <a:spcBef>
                 <a:spcPct val="50000"/>
               </a:spcBef>
-              <a:buFont typeface="Arial" panose="020B0604020202020204" pitchFamily="34" charset="0"/>
-              <a:buChar char="•"/>
               <a:defRPr/>
             </a:pPr>
             <a:r>
-              <a:rPr lang="en-US" altLang="ko-KR" sz="1400" b="1" dirty="0">
-                <a:latin typeface="KoPubWorld돋움체 Light" panose="00000300000000000000" pitchFamily="2" charset="-127"/>
-                <a:ea typeface="KoPubWorld돋움체 Light" panose="00000300000000000000" pitchFamily="2" charset="-127"/>
-                <a:cs typeface="KoPubWorld돋움체 Light" panose="00000300000000000000" pitchFamily="2" charset="-127"/>
-              </a:rPr>
-              <a:t> 3</a:t>
-            </a:r>
+              <a:rPr lang="en-US" altLang="ko-KR" sz="1400" dirty="0">
+                <a:latin typeface="KoPubWorld돋움체 Light" panose="00000300000000000000" pitchFamily="2" charset="-127"/>
+                <a:ea typeface="KoPubWorld돋움체 Light" panose="00000300000000000000" pitchFamily="2" charset="-127"/>
+                <a:cs typeface="KoPubWorld돋움체 Light" panose="00000300000000000000" pitchFamily="2" charset="-127"/>
+              </a:rPr>
+              <a:t> - (</a:t>
+            </a:r>
+            <a:r>
+              <a:rPr lang="ko-KR" altLang="en-US" sz="1400" dirty="0">
+                <a:latin typeface="KoPubWorld돋움체 Light" panose="00000300000000000000" pitchFamily="2" charset="-127"/>
+                <a:ea typeface="KoPubWorld돋움체 Light" panose="00000300000000000000" pitchFamily="2" charset="-127"/>
+                <a:cs typeface="KoPubWorld돋움체 Light" panose="00000300000000000000" pitchFamily="2" charset="-127"/>
+              </a:rPr>
+              <a:t>모니터링 시</a:t>
+            </a:r>
+            <a:r>
+              <a:rPr lang="en-US" altLang="ko-KR" sz="1400" dirty="0">
+                <a:latin typeface="KoPubWorld돋움체 Light" panose="00000300000000000000" pitchFamily="2" charset="-127"/>
+                <a:ea typeface="KoPubWorld돋움체 Light" panose="00000300000000000000" pitchFamily="2" charset="-127"/>
+                <a:cs typeface="KoPubWorld돋움체 Light" panose="00000300000000000000" pitchFamily="2" charset="-127"/>
+              </a:rPr>
+              <a:t>) </a:t>
+            </a:r>
+            <a:r>
+              <a:rPr lang="ko-KR" altLang="en-US" sz="1400" dirty="0">
+                <a:latin typeface="KoPubWorld돋움체 Light" panose="00000300000000000000" pitchFamily="2" charset="-127"/>
+                <a:ea typeface="KoPubWorld돋움체 Light" panose="00000300000000000000" pitchFamily="2" charset="-127"/>
+                <a:cs typeface="KoPubWorld돋움체 Light" panose="00000300000000000000" pitchFamily="2" charset="-127"/>
+              </a:rPr>
+              <a:t>강우 시작 시간</a:t>
+            </a:r>
+            <a:r>
+              <a:rPr lang="en-US" altLang="ko-KR" sz="1400" dirty="0">
+                <a:latin typeface="KoPubWorld돋움체 Light" panose="00000300000000000000" pitchFamily="2" charset="-127"/>
+                <a:ea typeface="KoPubWorld돋움체 Light" panose="00000300000000000000" pitchFamily="2" charset="-127"/>
+                <a:cs typeface="KoPubWorld돋움체 Light" panose="00000300000000000000" pitchFamily="2" charset="-127"/>
+              </a:rPr>
+              <a:t>, </a:t>
+            </a:r>
+            <a:r>
+              <a:rPr lang="ko-KR" altLang="en-US" sz="1400" dirty="0">
+                <a:latin typeface="KoPubWorld돋움체 Light" panose="00000300000000000000" pitchFamily="2" charset="-127"/>
+                <a:ea typeface="KoPubWorld돋움체 Light" panose="00000300000000000000" pitchFamily="2" charset="-127"/>
+                <a:cs typeface="KoPubWorld돋움체 Light" panose="00000300000000000000" pitchFamily="2" charset="-127"/>
+              </a:rPr>
+              <a:t>예상 총 강수량</a:t>
+            </a:r>
+            <a:r>
+              <a:rPr lang="en-US" altLang="ko-KR" sz="1400" dirty="0">
+                <a:latin typeface="KoPubWorld돋움체 Light" panose="00000300000000000000" pitchFamily="2" charset="-127"/>
+                <a:ea typeface="KoPubWorld돋움체 Light" panose="00000300000000000000" pitchFamily="2" charset="-127"/>
+                <a:cs typeface="KoPubWorld돋움체 Light" panose="00000300000000000000" pitchFamily="2" charset="-127"/>
+              </a:rPr>
+              <a:t>, </a:t>
+            </a:r>
+            <a:r>
+              <a:rPr lang="ko-KR" altLang="en-US" sz="1400" dirty="0">
+                <a:latin typeface="KoPubWorld돋움체 Light" panose="00000300000000000000" pitchFamily="2" charset="-127"/>
+                <a:ea typeface="KoPubWorld돋움체 Light" panose="00000300000000000000" pitchFamily="2" charset="-127"/>
+                <a:cs typeface="KoPubWorld돋움체 Light" panose="00000300000000000000" pitchFamily="2" charset="-127"/>
+              </a:rPr>
+              <a:t>현 누적 강수량</a:t>
+            </a:r>
+            <a:r>
+              <a:rPr lang="en-US" altLang="ko-KR" sz="1400" dirty="0">
+                <a:latin typeface="KoPubWorld돋움체 Light" panose="00000300000000000000" pitchFamily="2" charset="-127"/>
+                <a:ea typeface="KoPubWorld돋움체 Light" panose="00000300000000000000" pitchFamily="2" charset="-127"/>
+                <a:cs typeface="KoPubWorld돋움체 Light" panose="00000300000000000000" pitchFamily="2" charset="-127"/>
+              </a:rPr>
+              <a:t>, </a:t>
+            </a:r>
+            <a:r>
+              <a:rPr lang="ko-KR" altLang="en-US" sz="1400" dirty="0">
+                <a:latin typeface="KoPubWorld돋움체 Light" panose="00000300000000000000" pitchFamily="2" charset="-127"/>
+                <a:ea typeface="KoPubWorld돋움체 Light" panose="00000300000000000000" pitchFamily="2" charset="-127"/>
+                <a:cs typeface="KoPubWorld돋움체 Light" panose="00000300000000000000" pitchFamily="2" charset="-127"/>
+              </a:rPr>
+              <a:t>평균 강우강도 확인</a:t>
+            </a:r>
+            <a:endParaRPr lang="en-US" altLang="ko-KR" sz="1400" dirty="0">
+              <a:latin typeface="KoPubWorld돋움체 Light" panose="00000300000000000000" pitchFamily="2" charset="-127"/>
+              <a:ea typeface="KoPubWorld돋움체 Light" panose="00000300000000000000" pitchFamily="2" charset="-127"/>
+              <a:cs typeface="KoPubWorld돋움체 Light" panose="00000300000000000000" pitchFamily="2" charset="-127"/>
+            </a:endParaRPr>
           </a:p>
           <a:p>
             <a:pPr>
@@ -2296,10 +3105,40 @@
           </a:p>
         </p:txBody>
       </p:sp>
+      <p:pic>
+        <p:nvPicPr>
+          <p:cNvPr id="3" name="그림 2">
+            <a:extLst>
+              <a:ext uri="{FF2B5EF4-FFF2-40B4-BE49-F238E27FC236}">
+                <a16:creationId xmlns:a16="http://schemas.microsoft.com/office/drawing/2014/main" id="{1413408B-BB0D-F983-4EFB-17D808A24C44}"/>
+              </a:ext>
+            </a:extLst>
+          </p:cNvPr>
+          <p:cNvPicPr>
+            <a:picLocks noChangeAspect="1"/>
+          </p:cNvPicPr>
+          <p:nvPr/>
+        </p:nvPicPr>
+        <p:blipFill>
+          <a:blip r:embed="rId3"/>
+          <a:stretch>
+            <a:fillRect/>
+          </a:stretch>
+        </p:blipFill>
+        <p:spPr>
+          <a:xfrm>
+            <a:off x="475192" y="3109560"/>
+            <a:ext cx="8193616" cy="3619134"/>
+          </a:xfrm>
+          <a:prstGeom prst="rect">
+            <a:avLst/>
+          </a:prstGeom>
+        </p:spPr>
+      </p:pic>
     </p:spTree>
     <p:extLst>
       <p:ext uri="{BB962C8B-B14F-4D97-AF65-F5344CB8AC3E}">
-        <p14:creationId xmlns:p14="http://schemas.microsoft.com/office/powerpoint/2010/main" val="629302503"/>
+        <p14:creationId xmlns:p14="http://schemas.microsoft.com/office/powerpoint/2010/main" val="3181292703"/>
       </p:ext>
     </p:extLst>
   </p:cSld>
@@ -2309,7 +3148,7 @@
 </p:sld>
 </file>
 
-<file path=ppt/slides/slide2.xml><?xml version="1.0" encoding="utf-8"?>
+<file path=ppt/slides/slide4.xml><?xml version="1.0" encoding="utf-8"?>
 <p:sld xmlns:a="http://schemas.openxmlformats.org/drawingml/2006/main" xmlns:r="http://schemas.openxmlformats.org/officeDocument/2006/relationships" xmlns:p="http://schemas.openxmlformats.org/presentationml/2006/main">
   <p:cSld>
     <p:spTree>
@@ -2341,7 +3180,7 @@
         <p:spPr>
           <a:xfrm>
             <a:off x="838393" y="924599"/>
-            <a:ext cx="1463862" cy="369332"/>
+            <a:ext cx="1059906" cy="369332"/>
           </a:xfrm>
           <a:prstGeom prst="rect">
             <a:avLst/>
@@ -2361,7 +3200,7 @@
                 <a:latin typeface="KoPubWorld돋움체 Medium" panose="00000600000000000000" pitchFamily="2" charset="-127"/>
                 <a:ea typeface="KoPubWorld돋움체 Medium" panose="00000600000000000000" pitchFamily="2" charset="-127"/>
               </a:rPr>
-              <a:t>프로그램 개요</a:t>
+              <a:t>개발 도구</a:t>
             </a:r>
           </a:p>
         </p:txBody>
@@ -2537,7 +3376,7 @@
                 <a:ea typeface="KoPubWorld돋움체 Medium" panose="00000600000000000000" pitchFamily="2" charset="-127"/>
                 <a:cs typeface="KoPubWorld돋움체 Medium" panose="00000600000000000000" pitchFamily="2" charset="-127"/>
               </a:rPr>
-              <a:t>1.1 </a:t>
+              <a:t>1.3 </a:t>
             </a:r>
             <a:r>
               <a:rPr lang="ko-KR" altLang="en-US" sz="2800" b="1" dirty="0">
@@ -2548,7 +3387,7 @@
                 <a:ea typeface="KoPubWorld돋움체 Medium" panose="00000600000000000000" pitchFamily="2" charset="-127"/>
                 <a:cs typeface="KoPubWorld돋움체 Medium" panose="00000600000000000000" pitchFamily="2" charset="-127"/>
               </a:rPr>
-              <a:t>개발배경</a:t>
+              <a:t>활용도구</a:t>
             </a:r>
           </a:p>
         </p:txBody>
@@ -2568,7 +3407,7 @@
         <p:spPr>
           <a:xfrm>
             <a:off x="346481" y="1353285"/>
-            <a:ext cx="8451038" cy="1615710"/>
+            <a:ext cx="8451038" cy="1474471"/>
           </a:xfrm>
           <a:prstGeom prst="roundRect">
             <a:avLst/>
@@ -2627,7 +3466,7 @@
         </p:nvSpPr>
         <p:spPr bwMode="auto">
           <a:xfrm>
-            <a:off x="445634" y="1494524"/>
+            <a:off x="445634" y="1449699"/>
             <a:ext cx="8466964" cy="1474471"/>
           </a:xfrm>
           <a:prstGeom prst="rect">
@@ -2658,119 +3497,74 @@
               <a:defRPr/>
             </a:pPr>
             <a:r>
-              <a:rPr lang="en-US" altLang="ko-KR" sz="1400" dirty="0">
-                <a:latin typeface="KoPubWorld돋움체 Light" panose="00000300000000000000" pitchFamily="2" charset="-127"/>
-                <a:ea typeface="KoPubWorld돋움체 Light" panose="00000300000000000000" pitchFamily="2" charset="-127"/>
-                <a:cs typeface="KoPubWorld돋움체 Light" panose="00000300000000000000" pitchFamily="2" charset="-127"/>
-              </a:rPr>
-              <a:t> (</a:t>
-            </a:r>
-            <a:r>
-              <a:rPr lang="ko-KR" altLang="en-US" sz="1400" dirty="0">
-                <a:latin typeface="KoPubWorld돋움체 Light" panose="00000300000000000000" pitchFamily="2" charset="-127"/>
-                <a:ea typeface="KoPubWorld돋움체 Light" panose="00000300000000000000" pitchFamily="2" charset="-127"/>
-                <a:cs typeface="KoPubWorld돋움체 Light" panose="00000300000000000000" pitchFamily="2" charset="-127"/>
-              </a:rPr>
-              <a:t>개발 프로그램</a:t>
-            </a:r>
-            <a:r>
-              <a:rPr lang="en-US" altLang="ko-KR" sz="1400" dirty="0">
-                <a:latin typeface="KoPubWorld돋움체 Light" panose="00000300000000000000" pitchFamily="2" charset="-127"/>
-                <a:ea typeface="KoPubWorld돋움체 Light" panose="00000300000000000000" pitchFamily="2" charset="-127"/>
-                <a:cs typeface="KoPubWorld돋움체 Light" panose="00000300000000000000" pitchFamily="2" charset="-127"/>
-              </a:rPr>
-              <a:t>) </a:t>
-            </a:r>
-            <a:r>
-              <a:rPr lang="ko-KR" altLang="en-US" sz="1400" dirty="0">
-                <a:latin typeface="KoPubWorld돋움체 Light" panose="00000300000000000000" pitchFamily="2" charset="-127"/>
-                <a:ea typeface="KoPubWorld돋움체 Light" panose="00000300000000000000" pitchFamily="2" charset="-127"/>
-                <a:cs typeface="KoPubWorld돋움체 Light" panose="00000300000000000000" pitchFamily="2" charset="-127"/>
-              </a:rPr>
-              <a:t>스마트 하천 모니터링 시스템</a:t>
-            </a:r>
-            <a:endParaRPr lang="en-US" altLang="ko-KR" sz="1400" dirty="0">
+              <a:rPr lang="en-US" altLang="ko-KR" sz="1400" b="1" dirty="0">
+                <a:latin typeface="KoPubWorld돋움체 Light" panose="00000300000000000000" pitchFamily="2" charset="-127"/>
+                <a:ea typeface="KoPubWorld돋움체 Light" panose="00000300000000000000" pitchFamily="2" charset="-127"/>
+                <a:cs typeface="KoPubWorld돋움체 Light" panose="00000300000000000000" pitchFamily="2" charset="-127"/>
+              </a:rPr>
+              <a:t> (Google Antigravity) LLM </a:t>
+            </a:r>
+            <a:r>
+              <a:rPr lang="ko-KR" altLang="en-US" sz="1400" b="1" dirty="0">
+                <a:latin typeface="KoPubWorld돋움체 Light" panose="00000300000000000000" pitchFamily="2" charset="-127"/>
+                <a:ea typeface="KoPubWorld돋움체 Light" panose="00000300000000000000" pitchFamily="2" charset="-127"/>
+                <a:cs typeface="KoPubWorld돋움체 Light" panose="00000300000000000000" pitchFamily="2" charset="-127"/>
+              </a:rPr>
+              <a:t>탑재</a:t>
+            </a:r>
+            <a:r>
+              <a:rPr lang="en-US" altLang="ko-KR" sz="1400" b="1" dirty="0">
+                <a:latin typeface="KoPubWorld돋움체 Light" panose="00000300000000000000" pitchFamily="2" charset="-127"/>
+                <a:ea typeface="KoPubWorld돋움체 Light" panose="00000300000000000000" pitchFamily="2" charset="-127"/>
+                <a:cs typeface="KoPubWorld돋움체 Light" panose="00000300000000000000" pitchFamily="2" charset="-127"/>
+              </a:rPr>
+              <a:t>, AI</a:t>
+            </a:r>
+            <a:r>
+              <a:rPr lang="ko-KR" altLang="en-US" sz="1400" b="1" dirty="0">
+                <a:latin typeface="KoPubWorld돋움체 Light" panose="00000300000000000000" pitchFamily="2" charset="-127"/>
+                <a:ea typeface="KoPubWorld돋움체 Light" panose="00000300000000000000" pitchFamily="2" charset="-127"/>
+                <a:cs typeface="KoPubWorld돋움체 Light" panose="00000300000000000000" pitchFamily="2" charset="-127"/>
+              </a:rPr>
+              <a:t>가 계획을 세우고 코드 작성</a:t>
+            </a:r>
+            <a:r>
+              <a:rPr lang="en-US" altLang="ko-KR" sz="1400" b="1" dirty="0">
+                <a:latin typeface="KoPubWorld돋움체 Light" panose="00000300000000000000" pitchFamily="2" charset="-127"/>
+                <a:ea typeface="KoPubWorld돋움체 Light" panose="00000300000000000000" pitchFamily="2" charset="-127"/>
+                <a:cs typeface="KoPubWorld돋움체 Light" panose="00000300000000000000" pitchFamily="2" charset="-127"/>
+              </a:rPr>
+              <a:t>·</a:t>
+            </a:r>
+            <a:r>
+              <a:rPr lang="ko-KR" altLang="en-US" sz="1400" b="1" dirty="0">
+                <a:latin typeface="KoPubWorld돋움체 Light" panose="00000300000000000000" pitchFamily="2" charset="-127"/>
+                <a:ea typeface="KoPubWorld돋움체 Light" panose="00000300000000000000" pitchFamily="2" charset="-127"/>
+                <a:cs typeface="KoPubWorld돋움체 Light" panose="00000300000000000000" pitchFamily="2" charset="-127"/>
+              </a:rPr>
+              <a:t>테스트</a:t>
+            </a:r>
+            <a:r>
+              <a:rPr lang="en-US" altLang="ko-KR" sz="1400" b="1" dirty="0">
+                <a:latin typeface="KoPubWorld돋움체 Light" panose="00000300000000000000" pitchFamily="2" charset="-127"/>
+                <a:ea typeface="KoPubWorld돋움체 Light" panose="00000300000000000000" pitchFamily="2" charset="-127"/>
+                <a:cs typeface="KoPubWorld돋움체 Light" panose="00000300000000000000" pitchFamily="2" charset="-127"/>
+              </a:rPr>
+              <a:t>·</a:t>
+            </a:r>
+            <a:r>
+              <a:rPr lang="ko-KR" altLang="en-US" sz="1400" b="1" dirty="0">
+                <a:latin typeface="KoPubWorld돋움체 Light" panose="00000300000000000000" pitchFamily="2" charset="-127"/>
+                <a:ea typeface="KoPubWorld돋움체 Light" panose="00000300000000000000" pitchFamily="2" charset="-127"/>
+                <a:cs typeface="KoPubWorld돋움체 Light" panose="00000300000000000000" pitchFamily="2" charset="-127"/>
+              </a:rPr>
+              <a:t>웹 작업까지 도와주는 개발 프로그램</a:t>
+            </a:r>
+            <a:endParaRPr lang="en-US" altLang="ko-KR" sz="1400" b="1" dirty="0">
               <a:latin typeface="KoPubWorld돋움체 Light" panose="00000300000000000000" pitchFamily="2" charset="-127"/>
               <a:ea typeface="KoPubWorld돋움체 Light" panose="00000300000000000000" pitchFamily="2" charset="-127"/>
               <a:cs typeface="KoPubWorld돋움체 Light" panose="00000300000000000000" pitchFamily="2" charset="-127"/>
             </a:endParaRPr>
-          </a:p>
-          <a:p>
-            <a:pPr marL="285750" indent="-104775">
-              <a:lnSpc>
-                <a:spcPct val="120000"/>
-              </a:lnSpc>
-              <a:spcBef>
-                <a:spcPct val="50000"/>
-              </a:spcBef>
-              <a:buFont typeface="Arial" panose="020B0604020202020204" pitchFamily="34" charset="0"/>
-              <a:buChar char="•"/>
-              <a:defRPr/>
-            </a:pPr>
-            <a:r>
-              <a:rPr lang="en-US" altLang="ko-KR" sz="1400" b="1" dirty="0">
-                <a:latin typeface="KoPubWorld돋움체 Light" panose="00000300000000000000" pitchFamily="2" charset="-127"/>
-                <a:ea typeface="KoPubWorld돋움체 Light" panose="00000300000000000000" pitchFamily="2" charset="-127"/>
-                <a:cs typeface="KoPubWorld돋움체 Light" panose="00000300000000000000" pitchFamily="2" charset="-127"/>
-              </a:rPr>
-              <a:t> </a:t>
-            </a:r>
-            <a:r>
-              <a:rPr lang="en-US" altLang="ko-KR" sz="1400" dirty="0">
-                <a:latin typeface="KoPubWorld돋움체 Light" panose="00000300000000000000" pitchFamily="2" charset="-127"/>
-                <a:ea typeface="KoPubWorld돋움체 Light" panose="00000300000000000000" pitchFamily="2" charset="-127"/>
-                <a:cs typeface="KoPubWorld돋움체 Light" panose="00000300000000000000" pitchFamily="2" charset="-127"/>
-              </a:rPr>
-              <a:t>(</a:t>
-            </a:r>
-            <a:r>
-              <a:rPr lang="ko-KR" altLang="en-US" sz="1400" dirty="0">
-                <a:latin typeface="KoPubWorld돋움체 Light" panose="00000300000000000000" pitchFamily="2" charset="-127"/>
-                <a:ea typeface="KoPubWorld돋움체 Light" panose="00000300000000000000" pitchFamily="2" charset="-127"/>
-                <a:cs typeface="KoPubWorld돋움체 Light" panose="00000300000000000000" pitchFamily="2" charset="-127"/>
-              </a:rPr>
-              <a:t>주요 기능</a:t>
-            </a:r>
-            <a:r>
-              <a:rPr lang="en-US" altLang="ko-KR" sz="1400" dirty="0">
-                <a:latin typeface="KoPubWorld돋움체 Light" panose="00000300000000000000" pitchFamily="2" charset="-127"/>
-                <a:ea typeface="KoPubWorld돋움체 Light" panose="00000300000000000000" pitchFamily="2" charset="-127"/>
-                <a:cs typeface="KoPubWorld돋움체 Light" panose="00000300000000000000" pitchFamily="2" charset="-127"/>
-              </a:rPr>
-              <a:t>) </a:t>
-            </a:r>
-            <a:r>
-              <a:rPr lang="ko-KR" altLang="en-US" sz="1400" dirty="0">
-                <a:latin typeface="KoPubWorld돋움체 Light" panose="00000300000000000000" pitchFamily="2" charset="-127"/>
-                <a:ea typeface="KoPubWorld돋움체 Light" panose="00000300000000000000" pitchFamily="2" charset="-127"/>
-                <a:cs typeface="KoPubWorld돋움체 Light" panose="00000300000000000000" pitchFamily="2" charset="-127"/>
-              </a:rPr>
-              <a:t>강우 시 비점오염원 모니터링 전 출장 의사결정</a:t>
-            </a:r>
-            <a:r>
-              <a:rPr lang="en-US" altLang="ko-KR" sz="1400" dirty="0">
-                <a:latin typeface="KoPubWorld돋움체 Light" panose="00000300000000000000" pitchFamily="2" charset="-127"/>
-                <a:ea typeface="KoPubWorld돋움체 Light" panose="00000300000000000000" pitchFamily="2" charset="-127"/>
-                <a:cs typeface="KoPubWorld돋움체 Light" panose="00000300000000000000" pitchFamily="2" charset="-127"/>
-              </a:rPr>
-              <a:t>, </a:t>
-            </a:r>
-            <a:r>
-              <a:rPr lang="ko-KR" altLang="en-US" sz="1400" dirty="0">
-                <a:latin typeface="KoPubWorld돋움체 Light" panose="00000300000000000000" pitchFamily="2" charset="-127"/>
-                <a:ea typeface="KoPubWorld돋움체 Light" panose="00000300000000000000" pitchFamily="2" charset="-127"/>
-                <a:cs typeface="KoPubWorld돋움체 Light" panose="00000300000000000000" pitchFamily="2" charset="-127"/>
-              </a:rPr>
-              <a:t>모니터링 시 주요 현황 확인</a:t>
-            </a:r>
-            <a:r>
-              <a:rPr lang="en-US" altLang="ko-KR" sz="1400" dirty="0">
-                <a:latin typeface="KoPubWorld돋움체 Light" panose="00000300000000000000" pitchFamily="2" charset="-127"/>
-                <a:ea typeface="KoPubWorld돋움체 Light" panose="00000300000000000000" pitchFamily="2" charset="-127"/>
-                <a:cs typeface="KoPubWorld돋움체 Light" panose="00000300000000000000" pitchFamily="2" charset="-127"/>
-              </a:rPr>
-              <a:t> </a:t>
-            </a:r>
           </a:p>
           <a:p>
             <a:pPr marL="180975">
@@ -2788,85 +3582,40 @@
                 <a:ea typeface="KoPubWorld돋움체 Light" panose="00000300000000000000" pitchFamily="2" charset="-127"/>
                 <a:cs typeface="KoPubWorld돋움체 Light" panose="00000300000000000000" pitchFamily="2" charset="-127"/>
               </a:rPr>
-              <a:t> - (</a:t>
-            </a:r>
-            <a:r>
-              <a:rPr lang="ko-KR" altLang="en-US" sz="1400" dirty="0">
-                <a:latin typeface="KoPubWorld돋움체 Light" panose="00000300000000000000" pitchFamily="2" charset="-127"/>
-                <a:ea typeface="KoPubWorld돋움체 Light" panose="00000300000000000000" pitchFamily="2" charset="-127"/>
-                <a:cs typeface="KoPubWorld돋움체 Light" panose="00000300000000000000" pitchFamily="2" charset="-127"/>
-              </a:rPr>
-              <a:t>강우 전</a:t>
-            </a:r>
-            <a:r>
-              <a:rPr lang="en-US" altLang="ko-KR" sz="1400" dirty="0">
-                <a:latin typeface="KoPubWorld돋움체 Light" panose="00000300000000000000" pitchFamily="2" charset="-127"/>
-                <a:ea typeface="KoPubWorld돋움체 Light" panose="00000300000000000000" pitchFamily="2" charset="-127"/>
-                <a:cs typeface="KoPubWorld돋움체 Light" panose="00000300000000000000" pitchFamily="2" charset="-127"/>
-              </a:rPr>
-              <a:t>) ~12, ~24, ~72</a:t>
-            </a:r>
-            <a:r>
-              <a:rPr lang="ko-KR" altLang="en-US" sz="1400" dirty="0">
-                <a:latin typeface="KoPubWorld돋움체 Light" panose="00000300000000000000" pitchFamily="2" charset="-127"/>
-                <a:ea typeface="KoPubWorld돋움체 Light" panose="00000300000000000000" pitchFamily="2" charset="-127"/>
-                <a:cs typeface="KoPubWorld돋움체 Light" panose="00000300000000000000" pitchFamily="2" charset="-127"/>
-              </a:rPr>
-              <a:t>시간 내 강수량</a:t>
-            </a:r>
-            <a:r>
-              <a:rPr lang="en-US" altLang="ko-KR" sz="1400" dirty="0">
-                <a:latin typeface="KoPubWorld돋움체 Light" panose="00000300000000000000" pitchFamily="2" charset="-127"/>
-                <a:ea typeface="KoPubWorld돋움체 Light" panose="00000300000000000000" pitchFamily="2" charset="-127"/>
-                <a:cs typeface="KoPubWorld돋움체 Light" panose="00000300000000000000" pitchFamily="2" charset="-127"/>
-              </a:rPr>
-              <a:t>, </a:t>
-            </a:r>
-            <a:r>
-              <a:rPr lang="ko-KR" altLang="en-US" sz="1400" dirty="0">
-                <a:latin typeface="KoPubWorld돋움체 Light" panose="00000300000000000000" pitchFamily="2" charset="-127"/>
-                <a:ea typeface="KoPubWorld돋움체 Light" panose="00000300000000000000" pitchFamily="2" charset="-127"/>
-                <a:cs typeface="KoPubWorld돋움체 Light" panose="00000300000000000000" pitchFamily="2" charset="-127"/>
-              </a:rPr>
-              <a:t>최근 강수이력</a:t>
-            </a:r>
-            <a:r>
-              <a:rPr lang="en-US" altLang="ko-KR" sz="1400" dirty="0">
-                <a:latin typeface="KoPubWorld돋움체 Light" panose="00000300000000000000" pitchFamily="2" charset="-127"/>
-                <a:ea typeface="KoPubWorld돋움체 Light" panose="00000300000000000000" pitchFamily="2" charset="-127"/>
-                <a:cs typeface="KoPubWorld돋움체 Light" panose="00000300000000000000" pitchFamily="2" charset="-127"/>
-              </a:rPr>
-              <a:t>, </a:t>
-            </a:r>
-            <a:r>
-              <a:rPr lang="ko-KR" altLang="en-US" sz="1400" dirty="0" err="1">
-                <a:latin typeface="KoPubWorld돋움체 Light" panose="00000300000000000000" pitchFamily="2" charset="-127"/>
-                <a:ea typeface="KoPubWorld돋움체 Light" panose="00000300000000000000" pitchFamily="2" charset="-127"/>
-                <a:cs typeface="KoPubWorld돋움체 Light" panose="00000300000000000000" pitchFamily="2" charset="-127"/>
-              </a:rPr>
-              <a:t>선행무강우일수</a:t>
-            </a:r>
-            <a:r>
-              <a:rPr lang="en-US" altLang="ko-KR" sz="1400" dirty="0">
-                <a:latin typeface="KoPubWorld돋움체 Light" panose="00000300000000000000" pitchFamily="2" charset="-127"/>
-                <a:ea typeface="KoPubWorld돋움체 Light" panose="00000300000000000000" pitchFamily="2" charset="-127"/>
-                <a:cs typeface="KoPubWorld돋움체 Light" panose="00000300000000000000" pitchFamily="2" charset="-127"/>
-              </a:rPr>
-              <a:t>,</a:t>
-            </a:r>
-            <a:r>
-              <a:rPr lang="ko-KR" altLang="en-US" sz="1400" dirty="0">
-                <a:latin typeface="KoPubWorld돋움체 Light" panose="00000300000000000000" pitchFamily="2" charset="-127"/>
-                <a:ea typeface="KoPubWorld돋움체 Light" panose="00000300000000000000" pitchFamily="2" charset="-127"/>
-                <a:cs typeface="KoPubWorld돋움체 Light" panose="00000300000000000000" pitchFamily="2" charset="-127"/>
-              </a:rPr>
-              <a:t> 강수확률 확인</a:t>
-            </a:r>
-            <a:endParaRPr lang="en-US" altLang="ko-KR" sz="1400" dirty="0">
-              <a:latin typeface="KoPubWorld돋움체 Light" panose="00000300000000000000" pitchFamily="2" charset="-127"/>
-              <a:ea typeface="KoPubWorld돋움체 Light" panose="00000300000000000000" pitchFamily="2" charset="-127"/>
-              <a:cs typeface="KoPubWorld돋움체 Light" panose="00000300000000000000" pitchFamily="2" charset="-127"/>
-            </a:endParaRPr>
+              <a:t> - </a:t>
+            </a:r>
+            <a:r>
+              <a:rPr lang="ko-KR" altLang="en-US" sz="1400" dirty="0">
+                <a:latin typeface="KoPubWorld돋움체 Light" panose="00000300000000000000" pitchFamily="2" charset="-127"/>
+                <a:ea typeface="KoPubWorld돋움체 Light" panose="00000300000000000000" pitchFamily="2" charset="-127"/>
+                <a:cs typeface="KoPubWorld돋움체 Light" panose="00000300000000000000" pitchFamily="2" charset="-127"/>
+              </a:rPr>
+              <a:t>내장된 </a:t>
+            </a:r>
+            <a:r>
+              <a:rPr lang="en-US" altLang="ko-KR" sz="1400" dirty="0">
+                <a:latin typeface="KoPubWorld돋움체 Light" panose="00000300000000000000" pitchFamily="2" charset="-127"/>
+                <a:ea typeface="KoPubWorld돋움체 Light" panose="00000300000000000000" pitchFamily="2" charset="-127"/>
+                <a:cs typeface="KoPubWorld돋움체 Light" panose="00000300000000000000" pitchFamily="2" charset="-127"/>
+              </a:rPr>
+              <a:t>LLM(Gemini, Claude, GPT) </a:t>
+            </a:r>
+            <a:r>
+              <a:rPr lang="ko-KR" altLang="en-US" sz="1400" dirty="0">
+                <a:latin typeface="KoPubWorld돋움체 Light" panose="00000300000000000000" pitchFamily="2" charset="-127"/>
+                <a:ea typeface="KoPubWorld돋움체 Light" panose="00000300000000000000" pitchFamily="2" charset="-127"/>
+                <a:cs typeface="KoPubWorld돋움체 Light" panose="00000300000000000000" pitchFamily="2" charset="-127"/>
+              </a:rPr>
+              <a:t>기반 대화하는 형식</a:t>
+            </a:r>
+            <a:r>
+              <a:rPr lang="en-US" altLang="ko-KR" sz="1400" dirty="0">
+                <a:latin typeface="KoPubWorld돋움체 Light" panose="00000300000000000000" pitchFamily="2" charset="-127"/>
+                <a:ea typeface="KoPubWorld돋움체 Light" panose="00000300000000000000" pitchFamily="2" charset="-127"/>
+                <a:cs typeface="KoPubWorld돋움체 Light" panose="00000300000000000000" pitchFamily="2" charset="-127"/>
+              </a:rPr>
+              <a:t> </a:t>
+            </a:r>
           </a:p>
           <a:p>
             <a:pPr marL="180975">
@@ -2884,79 +3633,15 @@
                 <a:ea typeface="KoPubWorld돋움체 Light" panose="00000300000000000000" pitchFamily="2" charset="-127"/>
                 <a:cs typeface="KoPubWorld돋움체 Light" panose="00000300000000000000" pitchFamily="2" charset="-127"/>
               </a:rPr>
-              <a:t> - (</a:t>
-            </a:r>
-            <a:r>
-              <a:rPr lang="ko-KR" altLang="en-US" sz="1400" dirty="0">
-                <a:latin typeface="KoPubWorld돋움체 Light" panose="00000300000000000000" pitchFamily="2" charset="-127"/>
-                <a:ea typeface="KoPubWorld돋움체 Light" panose="00000300000000000000" pitchFamily="2" charset="-127"/>
-                <a:cs typeface="KoPubWorld돋움체 Light" panose="00000300000000000000" pitchFamily="2" charset="-127"/>
-              </a:rPr>
-              <a:t>강우 시</a:t>
-            </a:r>
-            <a:r>
-              <a:rPr lang="en-US" altLang="ko-KR" sz="1400" dirty="0">
-                <a:latin typeface="KoPubWorld돋움체 Light" panose="00000300000000000000" pitchFamily="2" charset="-127"/>
-                <a:ea typeface="KoPubWorld돋움체 Light" panose="00000300000000000000" pitchFamily="2" charset="-127"/>
-                <a:cs typeface="KoPubWorld돋움체 Light" panose="00000300000000000000" pitchFamily="2" charset="-127"/>
-              </a:rPr>
-              <a:t>) </a:t>
-            </a:r>
-            <a:r>
-              <a:rPr lang="ko-KR" altLang="en-US" sz="1400" dirty="0">
-                <a:latin typeface="KoPubWorld돋움체 Light" panose="00000300000000000000" pitchFamily="2" charset="-127"/>
-                <a:ea typeface="KoPubWorld돋움체 Light" panose="00000300000000000000" pitchFamily="2" charset="-127"/>
-                <a:cs typeface="KoPubWorld돋움체 Light" panose="00000300000000000000" pitchFamily="2" charset="-127"/>
-              </a:rPr>
-              <a:t>강우 시작 시간</a:t>
-            </a:r>
-            <a:r>
-              <a:rPr lang="en-US" altLang="ko-KR" sz="1400" dirty="0">
-                <a:latin typeface="KoPubWorld돋움체 Light" panose="00000300000000000000" pitchFamily="2" charset="-127"/>
-                <a:ea typeface="KoPubWorld돋움체 Light" panose="00000300000000000000" pitchFamily="2" charset="-127"/>
-                <a:cs typeface="KoPubWorld돋움체 Light" panose="00000300000000000000" pitchFamily="2" charset="-127"/>
-              </a:rPr>
-              <a:t>, </a:t>
-            </a:r>
-            <a:r>
-              <a:rPr lang="ko-KR" altLang="en-US" sz="1400" dirty="0">
-                <a:latin typeface="KoPubWorld돋움체 Light" panose="00000300000000000000" pitchFamily="2" charset="-127"/>
-                <a:ea typeface="KoPubWorld돋움체 Light" panose="00000300000000000000" pitchFamily="2" charset="-127"/>
-                <a:cs typeface="KoPubWorld돋움체 Light" panose="00000300000000000000" pitchFamily="2" charset="-127"/>
-              </a:rPr>
-              <a:t>예상 총 강수량</a:t>
-            </a:r>
-            <a:r>
-              <a:rPr lang="en-US" altLang="ko-KR" sz="1400" dirty="0">
-                <a:latin typeface="KoPubWorld돋움체 Light" panose="00000300000000000000" pitchFamily="2" charset="-127"/>
-                <a:ea typeface="KoPubWorld돋움체 Light" panose="00000300000000000000" pitchFamily="2" charset="-127"/>
-                <a:cs typeface="KoPubWorld돋움체 Light" panose="00000300000000000000" pitchFamily="2" charset="-127"/>
-              </a:rPr>
-              <a:t>, </a:t>
-            </a:r>
-            <a:r>
-              <a:rPr lang="ko-KR" altLang="en-US" sz="1400" dirty="0">
-                <a:latin typeface="KoPubWorld돋움체 Light" panose="00000300000000000000" pitchFamily="2" charset="-127"/>
-                <a:ea typeface="KoPubWorld돋움체 Light" panose="00000300000000000000" pitchFamily="2" charset="-127"/>
-                <a:cs typeface="KoPubWorld돋움체 Light" panose="00000300000000000000" pitchFamily="2" charset="-127"/>
-              </a:rPr>
-              <a:t>현 누적 강수량</a:t>
-            </a:r>
-            <a:r>
-              <a:rPr lang="en-US" altLang="ko-KR" sz="1400" dirty="0">
-                <a:latin typeface="KoPubWorld돋움체 Light" panose="00000300000000000000" pitchFamily="2" charset="-127"/>
-                <a:ea typeface="KoPubWorld돋움체 Light" panose="00000300000000000000" pitchFamily="2" charset="-127"/>
-                <a:cs typeface="KoPubWorld돋움체 Light" panose="00000300000000000000" pitchFamily="2" charset="-127"/>
-              </a:rPr>
-              <a:t>, </a:t>
-            </a:r>
-            <a:r>
-              <a:rPr lang="ko-KR" altLang="en-US" sz="1400" dirty="0">
-                <a:latin typeface="KoPubWorld돋움체 Light" panose="00000300000000000000" pitchFamily="2" charset="-127"/>
-                <a:ea typeface="KoPubWorld돋움체 Light" panose="00000300000000000000" pitchFamily="2" charset="-127"/>
-                <a:cs typeface="KoPubWorld돋움체 Light" panose="00000300000000000000" pitchFamily="2" charset="-127"/>
-              </a:rPr>
-              <a:t>평균 강우강도 확인</a:t>
+              <a:t> - </a:t>
+            </a:r>
+            <a:r>
+              <a:rPr lang="ko-KR" altLang="en-US" sz="1400" dirty="0">
+                <a:latin typeface="KoPubWorld돋움체 Light" panose="00000300000000000000" pitchFamily="2" charset="-127"/>
+                <a:ea typeface="KoPubWorld돋움체 Light" panose="00000300000000000000" pitchFamily="2" charset="-127"/>
+                <a:cs typeface="KoPubWorld돋움체 Light" panose="00000300000000000000" pitchFamily="2" charset="-127"/>
+              </a:rPr>
+              <a:t>코드를 직접 입력하지 않고 만들어 줌</a:t>
             </a:r>
             <a:endParaRPr lang="en-US" altLang="ko-KR" sz="1400" dirty="0">
               <a:latin typeface="KoPubWorld돋움체 Light" panose="00000300000000000000" pitchFamily="2" charset="-127"/>
@@ -2965,7 +3650,7 @@
             </a:endParaRPr>
           </a:p>
           <a:p>
-            <a:pPr>
+            <a:pPr marL="180975">
               <a:lnSpc>
                 <a:spcPct val="120000"/>
               </a:lnSpc>
@@ -2974,11 +3659,62 @@
               </a:spcBef>
               <a:defRPr/>
             </a:pPr>
-            <a:endParaRPr lang="ko-KR" altLang="en-US" sz="1400" b="1" dirty="0">
-              <a:latin typeface="KoPubWorld돋움체 Light" panose="00000300000000000000" pitchFamily="2" charset="-127"/>
-              <a:ea typeface="KoPubWorld돋움체 Light" panose="00000300000000000000" pitchFamily="2" charset="-127"/>
-              <a:cs typeface="KoPubWorld돋움체 Light" panose="00000300000000000000" pitchFamily="2" charset="-127"/>
-            </a:endParaRPr>
+            <a:r>
+              <a:rPr lang="en-US" altLang="ko-KR" sz="1400" dirty="0">
+                <a:latin typeface="KoPubWorld돋움체 Light" panose="00000300000000000000" pitchFamily="2" charset="-127"/>
+                <a:ea typeface="KoPubWorld돋움체 Light" panose="00000300000000000000" pitchFamily="2" charset="-127"/>
+                <a:cs typeface="KoPubWorld돋움체 Light" panose="00000300000000000000" pitchFamily="2" charset="-127"/>
+              </a:rPr>
+              <a:t> - </a:t>
+            </a:r>
+            <a:r>
+              <a:rPr lang="ko-KR" altLang="en-US" sz="1400" dirty="0">
+                <a:latin typeface="KoPubWorld돋움체 Light" panose="00000300000000000000" pitchFamily="2" charset="-127"/>
+                <a:ea typeface="KoPubWorld돋움체 Light" panose="00000300000000000000" pitchFamily="2" charset="-127"/>
+                <a:cs typeface="KoPubWorld돋움체 Light" panose="00000300000000000000" pitchFamily="2" charset="-127"/>
+              </a:rPr>
+              <a:t>유사 프로그램</a:t>
+            </a:r>
+            <a:r>
+              <a:rPr lang="en-US" altLang="ko-KR" sz="1400" dirty="0">
+                <a:latin typeface="KoPubWorld돋움체 Light" panose="00000300000000000000" pitchFamily="2" charset="-127"/>
+                <a:ea typeface="KoPubWorld돋움체 Light" panose="00000300000000000000" pitchFamily="2" charset="-127"/>
+                <a:cs typeface="KoPubWorld돋움체 Light" panose="00000300000000000000" pitchFamily="2" charset="-127"/>
+              </a:rPr>
+              <a:t>: Vibe coding, Claude</a:t>
+            </a:r>
+            <a:r>
+              <a:rPr lang="ko-KR" altLang="en-US" sz="1400" dirty="0">
+                <a:latin typeface="KoPubWorld돋움체 Light" panose="00000300000000000000" pitchFamily="2" charset="-127"/>
+                <a:ea typeface="KoPubWorld돋움체 Light" panose="00000300000000000000" pitchFamily="2" charset="-127"/>
+                <a:cs typeface="KoPubWorld돋움체 Light" panose="00000300000000000000" pitchFamily="2" charset="-127"/>
+              </a:rPr>
+              <a:t> </a:t>
+            </a:r>
+            <a:r>
+              <a:rPr lang="en-US" altLang="ko-KR" sz="1400" dirty="0">
+                <a:latin typeface="KoPubWorld돋움체 Light" panose="00000300000000000000" pitchFamily="2" charset="-127"/>
+                <a:ea typeface="KoPubWorld돋움체 Light" panose="00000300000000000000" pitchFamily="2" charset="-127"/>
+                <a:cs typeface="KoPubWorld돋움체 Light" panose="00000300000000000000" pitchFamily="2" charset="-127"/>
+              </a:rPr>
+              <a:t>code, Cursor</a:t>
+            </a:r>
+            <a:r>
+              <a:rPr lang="ko-KR" altLang="en-US" sz="1400" dirty="0">
+                <a:latin typeface="KoPubWorld돋움체 Light" panose="00000300000000000000" pitchFamily="2" charset="-127"/>
+                <a:ea typeface="KoPubWorld돋움체 Light" panose="00000300000000000000" pitchFamily="2" charset="-127"/>
+                <a:cs typeface="KoPubWorld돋움체 Light" panose="00000300000000000000" pitchFamily="2" charset="-127"/>
+              </a:rPr>
+              <a:t> </a:t>
+            </a:r>
+            <a:r>
+              <a:rPr lang="en-US" altLang="ko-KR" sz="1400" dirty="0">
+                <a:latin typeface="KoPubWorld돋움체 Light" panose="00000300000000000000" pitchFamily="2" charset="-127"/>
+                <a:ea typeface="KoPubWorld돋움체 Light" panose="00000300000000000000" pitchFamily="2" charset="-127"/>
+                <a:cs typeface="KoPubWorld돋움체 Light" panose="00000300000000000000" pitchFamily="2" charset="-127"/>
+              </a:rPr>
+              <a:t>ai</a:t>
+            </a:r>
           </a:p>
         </p:txBody>
       </p:sp>
@@ -2987,7 +3723,7 @@
           <p:cNvPr id="3" name="그림 2">
             <a:extLst>
               <a:ext uri="{FF2B5EF4-FFF2-40B4-BE49-F238E27FC236}">
-                <a16:creationId xmlns:a16="http://schemas.microsoft.com/office/drawing/2014/main" id="{1413408B-BB0D-F983-4EFB-17D808A24C44}"/>
+                <a16:creationId xmlns:a16="http://schemas.microsoft.com/office/drawing/2014/main" id="{64F8C9C1-EFAF-5436-7F6D-35716AAA9CFC}"/>
               </a:ext>
             </a:extLst>
           </p:cNvPr>
@@ -3004,8 +3740,8 @@
         </p:blipFill>
         <p:spPr>
           <a:xfrm>
-            <a:off x="475192" y="3109560"/>
-            <a:ext cx="8193616" cy="3619134"/>
+            <a:off x="885539" y="2924170"/>
+            <a:ext cx="7191661" cy="3825032"/>
           </a:xfrm>
           <a:prstGeom prst="rect">
             <a:avLst/>
@@ -3015,7 +3751,7 @@
     </p:spTree>
     <p:extLst>
       <p:ext uri="{BB962C8B-B14F-4D97-AF65-F5344CB8AC3E}">
-        <p14:creationId xmlns:p14="http://schemas.microsoft.com/office/powerpoint/2010/main" val="3181292703"/>
+        <p14:creationId xmlns:p14="http://schemas.microsoft.com/office/powerpoint/2010/main" val="4131414197"/>
       </p:ext>
     </p:extLst>
   </p:cSld>
@@ -3025,7 +3761,7 @@
 </p:sld>
 </file>
 
-<file path=ppt/slides/slide3.xml><?xml version="1.0" encoding="utf-8"?>
+<file path=ppt/slides/slide5.xml><?xml version="1.0" encoding="utf-8"?>
 <p:sld xmlns:a="http://schemas.openxmlformats.org/drawingml/2006/main" xmlns:r="http://schemas.openxmlformats.org/officeDocument/2006/relationships" xmlns:p="http://schemas.openxmlformats.org/presentationml/2006/main">
   <p:cSld>
     <p:spTree>
@@ -3057,7 +3793,7 @@
         <p:spPr>
           <a:xfrm>
             <a:off x="838393" y="924599"/>
-            <a:ext cx="1059906" cy="369332"/>
+            <a:ext cx="992579" cy="369332"/>
           </a:xfrm>
           <a:prstGeom prst="rect">
             <a:avLst/>
@@ -3077,7 +3813,7 @@
                 <a:latin typeface="KoPubWorld돋움체 Medium" panose="00000600000000000000" pitchFamily="2" charset="-127"/>
                 <a:ea typeface="KoPubWorld돋움체 Medium" panose="00000600000000000000" pitchFamily="2" charset="-127"/>
               </a:rPr>
-              <a:t>개발 배경</a:t>
+              <a:t>기능설명</a:t>
             </a:r>
           </a:p>
         </p:txBody>
@@ -3253,7 +3989,7 @@
                 <a:ea typeface="KoPubWorld돋움체 Medium" panose="00000600000000000000" pitchFamily="2" charset="-127"/>
                 <a:cs typeface="KoPubWorld돋움체 Medium" panose="00000600000000000000" pitchFamily="2" charset="-127"/>
               </a:rPr>
-              <a:t>1.1 </a:t>
+              <a:t>1.4 </a:t>
             </a:r>
             <a:r>
               <a:rPr lang="ko-KR" altLang="en-US" sz="2800" b="1" dirty="0">
@@ -3264,7 +4000,7 @@
                 <a:ea typeface="KoPubWorld돋움체 Medium" panose="00000600000000000000" pitchFamily="2" charset="-127"/>
                 <a:cs typeface="KoPubWorld돋움체 Medium" panose="00000600000000000000" pitchFamily="2" charset="-127"/>
               </a:rPr>
-              <a:t>개발배경</a:t>
+              <a:t>기능설명</a:t>
             </a:r>
           </a:p>
         </p:txBody>
@@ -3283,8 +4019,8 @@
         </p:nvSpPr>
         <p:spPr>
           <a:xfrm>
-            <a:off x="346481" y="1404308"/>
-            <a:ext cx="8451038" cy="1271570"/>
+            <a:off x="346481" y="1353284"/>
+            <a:ext cx="8451038" cy="2075715"/>
           </a:xfrm>
           <a:prstGeom prst="roundRect">
             <a:avLst/>
@@ -3343,8 +4079,8 @@
         </p:nvSpPr>
         <p:spPr bwMode="auto">
           <a:xfrm>
-            <a:off x="426578" y="1516379"/>
-            <a:ext cx="8466964" cy="1027239"/>
+            <a:off x="445634" y="1564004"/>
+            <a:ext cx="8466964" cy="1692427"/>
           </a:xfrm>
           <a:prstGeom prst="rect">
             <a:avLst/>
@@ -3374,36 +4110,36 @@
               <a:defRPr/>
             </a:pPr>
             <a:r>
-              <a:rPr lang="en-US" altLang="ko-KR" sz="1400" dirty="0">
-                <a:latin typeface="KoPubWorld돋움체 Light" panose="00000300000000000000" pitchFamily="2" charset="-127"/>
-                <a:ea typeface="KoPubWorld돋움체 Light" panose="00000300000000000000" pitchFamily="2" charset="-127"/>
-                <a:cs typeface="KoPubWorld돋움체 Light" panose="00000300000000000000" pitchFamily="2" charset="-127"/>
-              </a:rPr>
-              <a:t> (</a:t>
-            </a:r>
-            <a:r>
-              <a:rPr lang="ko-KR" altLang="en-US" sz="1400" dirty="0">
-                <a:latin typeface="KoPubWorld돋움체 Light" panose="00000300000000000000" pitchFamily="2" charset="-127"/>
-                <a:ea typeface="KoPubWorld돋움체 Light" panose="00000300000000000000" pitchFamily="2" charset="-127"/>
-                <a:cs typeface="KoPubWorld돋움체 Light" panose="00000300000000000000" pitchFamily="2" charset="-127"/>
-              </a:rPr>
-              <a:t>강우 변동성</a:t>
-            </a:r>
-            <a:r>
-              <a:rPr lang="en-US" altLang="ko-KR" sz="1400" dirty="0">
-                <a:latin typeface="KoPubWorld돋움체 Light" panose="00000300000000000000" pitchFamily="2" charset="-127"/>
-                <a:ea typeface="KoPubWorld돋움체 Light" panose="00000300000000000000" pitchFamily="2" charset="-127"/>
-                <a:cs typeface="KoPubWorld돋움체 Light" panose="00000300000000000000" pitchFamily="2" charset="-127"/>
-              </a:rPr>
-              <a:t>) </a:t>
-            </a:r>
-            <a:r>
-              <a:rPr lang="ko-KR" altLang="en-US" sz="1400" dirty="0">
-                <a:latin typeface="KoPubWorld돋움체 Light" panose="00000300000000000000" pitchFamily="2" charset="-127"/>
-                <a:ea typeface="KoPubWorld돋움체 Light" panose="00000300000000000000" pitchFamily="2" charset="-127"/>
-                <a:cs typeface="KoPubWorld돋움체 Light" panose="00000300000000000000" pitchFamily="2" charset="-127"/>
-              </a:rPr>
-              <a:t>강우 변동성 및 예측의 어려움으로 비점오염원 모니터링 수행 제약 발생</a:t>
+              <a:rPr lang="en-US" altLang="ko-KR" sz="1400" b="1" dirty="0">
+                <a:latin typeface="KoPubWorld돋움체 Light" panose="00000300000000000000" pitchFamily="2" charset="-127"/>
+                <a:ea typeface="KoPubWorld돋움체 Light" panose="00000300000000000000" pitchFamily="2" charset="-127"/>
+                <a:cs typeface="KoPubWorld돋움체 Light" panose="00000300000000000000" pitchFamily="2" charset="-127"/>
+              </a:rPr>
+              <a:t> (User Interface) Google Antigravity </a:t>
+            </a:r>
+            <a:r>
+              <a:rPr lang="ko-KR" altLang="en-US" sz="1400" b="1" dirty="0">
+                <a:latin typeface="KoPubWorld돋움체 Light" panose="00000300000000000000" pitchFamily="2" charset="-127"/>
+                <a:ea typeface="KoPubWorld돋움체 Light" panose="00000300000000000000" pitchFamily="2" charset="-127"/>
+                <a:cs typeface="KoPubWorld돋움체 Light" panose="00000300000000000000" pitchFamily="2" charset="-127"/>
+              </a:rPr>
+              <a:t>기반 코딩 → </a:t>
+            </a:r>
+            <a:r>
+              <a:rPr lang="en-US" altLang="ko-KR" sz="1400" b="1" dirty="0">
+                <a:latin typeface="KoPubWorld돋움체 Light" panose="00000300000000000000" pitchFamily="2" charset="-127"/>
+                <a:ea typeface="KoPubWorld돋움체 Light" panose="00000300000000000000" pitchFamily="2" charset="-127"/>
+                <a:cs typeface="KoPubWorld돋움체 Light" panose="00000300000000000000" pitchFamily="2" charset="-127"/>
+              </a:rPr>
+              <a:t>html </a:t>
+            </a:r>
+            <a:r>
+              <a:rPr lang="ko-KR" altLang="en-US" sz="1400" b="1" dirty="0">
+                <a:latin typeface="KoPubWorld돋움체 Light" panose="00000300000000000000" pitchFamily="2" charset="-127"/>
+                <a:ea typeface="KoPubWorld돋움체 Light" panose="00000300000000000000" pitchFamily="2" charset="-127"/>
+                <a:cs typeface="KoPubWorld돋움체 Light" panose="00000300000000000000" pitchFamily="2" charset="-127"/>
+              </a:rPr>
+              <a:t>생성</a:t>
             </a:r>
             <a:endParaRPr lang="en-US" altLang="ko-KR" sz="1400" b="1" dirty="0">
               <a:latin typeface="KoPubWorld돋움체 Light" panose="00000300000000000000" pitchFamily="2" charset="-127"/>
@@ -3424,7 +4160,7 @@
               <a:defRPr/>
             </a:pPr>
             <a:r>
-              <a:rPr lang="en-US" altLang="ko-KR" sz="1400" dirty="0">
+              <a:rPr lang="en-US" altLang="ko-KR" sz="1400" b="1" dirty="0">
                 <a:latin typeface="KoPubWorld돋움체 Light" panose="00000300000000000000" pitchFamily="2" charset="-127"/>
                 <a:ea typeface="KoPubWorld돋움체 Light" panose="00000300000000000000" pitchFamily="2" charset="-127"/>
                 <a:cs typeface="KoPubWorld돋움체 Light" panose="00000300000000000000" pitchFamily="2" charset="-127"/>
@@ -3432,15 +4168,15 @@
               <a:t> (</a:t>
             </a:r>
             <a:r>
-              <a:rPr lang="ko-KR" altLang="en-US" sz="1400" dirty="0">
-                <a:latin typeface="KoPubWorld돋움체 Light" panose="00000300000000000000" pitchFamily="2" charset="-127"/>
-                <a:ea typeface="KoPubWorld돋움체 Light" panose="00000300000000000000" pitchFamily="2" charset="-127"/>
-                <a:cs typeface="KoPubWorld돋움체 Light" panose="00000300000000000000" pitchFamily="2" charset="-127"/>
-              </a:rPr>
-              <a:t>데이터 파편화</a:t>
-            </a:r>
-            <a:r>
-              <a:rPr lang="en-US" altLang="ko-KR" sz="1400" dirty="0">
+              <a:rPr lang="ko-KR" altLang="en-US" sz="1400" b="1" dirty="0">
+                <a:latin typeface="KoPubWorld돋움체 Light" panose="00000300000000000000" pitchFamily="2" charset="-127"/>
+                <a:ea typeface="KoPubWorld돋움체 Light" panose="00000300000000000000" pitchFamily="2" charset="-127"/>
+                <a:cs typeface="KoPubWorld돋움체 Light" panose="00000300000000000000" pitchFamily="2" charset="-127"/>
+              </a:rPr>
+              <a:t>강수자료</a:t>
+            </a:r>
+            <a:r>
+              <a:rPr lang="en-US" altLang="ko-KR" sz="1400" b="1" dirty="0">
                 <a:latin typeface="KoPubWorld돋움체 Light" panose="00000300000000000000" pitchFamily="2" charset="-127"/>
                 <a:ea typeface="KoPubWorld돋움체 Light" panose="00000300000000000000" pitchFamily="2" charset="-127"/>
                 <a:cs typeface="KoPubWorld돋움체 Light" panose="00000300000000000000" pitchFamily="2" charset="-127"/>
@@ -3453,39 +4189,103 @@
                 <a:ea typeface="KoPubWorld돋움체 Light" panose="00000300000000000000" pitchFamily="2" charset="-127"/>
                 <a:cs typeface="KoPubWorld돋움체 Light" panose="00000300000000000000" pitchFamily="2" charset="-127"/>
               </a:rPr>
-              <a:t>기상청 단기예보</a:t>
-            </a:r>
-            <a:r>
-              <a:rPr lang="en-US" altLang="ko-KR" sz="1400" dirty="0">
-                <a:latin typeface="KoPubWorld돋움체 Light" panose="00000300000000000000" pitchFamily="2" charset="-127"/>
-                <a:ea typeface="KoPubWorld돋움체 Light" panose="00000300000000000000" pitchFamily="2" charset="-127"/>
-                <a:cs typeface="KoPubWorld돋움체 Light" panose="00000300000000000000" pitchFamily="2" charset="-127"/>
-              </a:rPr>
-              <a:t>, </a:t>
-            </a:r>
-            <a:r>
-              <a:rPr lang="ko-KR" altLang="en-US" sz="1400" dirty="0">
-                <a:latin typeface="KoPubWorld돋움체 Light" panose="00000300000000000000" pitchFamily="2" charset="-127"/>
-                <a:ea typeface="KoPubWorld돋움체 Light" panose="00000300000000000000" pitchFamily="2" charset="-127"/>
-                <a:cs typeface="KoPubWorld돋움체 Light" panose="00000300000000000000" pitchFamily="2" charset="-127"/>
-              </a:rPr>
-              <a:t>레이더</a:t>
-            </a:r>
-            <a:r>
-              <a:rPr lang="en-US" altLang="ko-KR" sz="1400" dirty="0">
-                <a:latin typeface="KoPubWorld돋움체 Light" panose="00000300000000000000" pitchFamily="2" charset="-127"/>
-                <a:ea typeface="KoPubWorld돋움체 Light" panose="00000300000000000000" pitchFamily="2" charset="-127"/>
-                <a:cs typeface="KoPubWorld돋움체 Light" panose="00000300000000000000" pitchFamily="2" charset="-127"/>
-              </a:rPr>
-              <a:t>, </a:t>
-            </a:r>
-            <a:r>
-              <a:rPr lang="ko-KR" altLang="en-US" sz="1400" dirty="0">
-                <a:latin typeface="KoPubWorld돋움체 Light" panose="00000300000000000000" pitchFamily="2" charset="-127"/>
-                <a:ea typeface="KoPubWorld돋움체 Light" panose="00000300000000000000" pitchFamily="2" charset="-127"/>
-                <a:cs typeface="KoPubWorld돋움체 Light" panose="00000300000000000000" pitchFamily="2" charset="-127"/>
-              </a:rPr>
-              <a:t>해외 기상자료 등 다양한 데이터를 개별적으로 확인 필요</a:t>
+              <a:t>기상청 </a:t>
+            </a:r>
+            <a:r>
+              <a:rPr lang="en-US" altLang="ko-KR" sz="1400" dirty="0">
+                <a:latin typeface="KoPubWorld돋움체 Light" panose="00000300000000000000" pitchFamily="2" charset="-127"/>
+                <a:ea typeface="KoPubWorld돋움체 Light" panose="00000300000000000000" pitchFamily="2" charset="-127"/>
+                <a:cs typeface="KoPubWorld돋움체 Light" panose="00000300000000000000" pitchFamily="2" charset="-127"/>
+              </a:rPr>
+              <a:t>API </a:t>
+            </a:r>
+            <a:r>
+              <a:rPr lang="ko-KR" altLang="en-US" sz="1400" dirty="0">
+                <a:latin typeface="KoPubWorld돋움체 Light" panose="00000300000000000000" pitchFamily="2" charset="-127"/>
+                <a:ea typeface="KoPubWorld돋움체 Light" panose="00000300000000000000" pitchFamily="2" charset="-127"/>
+                <a:cs typeface="KoPubWorld돋움체 Light" panose="00000300000000000000" pitchFamily="2" charset="-127"/>
+              </a:rPr>
+              <a:t>데이터 일 </a:t>
+            </a:r>
+            <a:r>
+              <a:rPr lang="en-US" altLang="ko-KR" sz="1400" dirty="0">
+                <a:latin typeface="KoPubWorld돋움체 Light" panose="00000300000000000000" pitchFamily="2" charset="-127"/>
+                <a:ea typeface="KoPubWorld돋움체 Light" panose="00000300000000000000" pitchFamily="2" charset="-127"/>
+                <a:cs typeface="KoPubWorld돋움체 Light" panose="00000300000000000000" pitchFamily="2" charset="-127"/>
+              </a:rPr>
+              <a:t>10,000</a:t>
+            </a:r>
+            <a:r>
+              <a:rPr lang="ko-KR" altLang="en-US" sz="1400" dirty="0">
+                <a:latin typeface="KoPubWorld돋움체 Light" panose="00000300000000000000" pitchFamily="2" charset="-127"/>
+                <a:ea typeface="KoPubWorld돋움체 Light" panose="00000300000000000000" pitchFamily="2" charset="-127"/>
+                <a:cs typeface="KoPubWorld돋움체 Light" panose="00000300000000000000" pitchFamily="2" charset="-127"/>
+              </a:rPr>
+              <a:t>건 호출 가능</a:t>
+            </a:r>
+            <a:r>
+              <a:rPr lang="en-US" altLang="ko-KR" sz="1400" dirty="0">
+                <a:latin typeface="KoPubWorld돋움체 Light" panose="00000300000000000000" pitchFamily="2" charset="-127"/>
+                <a:ea typeface="KoPubWorld돋움체 Light" panose="00000300000000000000" pitchFamily="2" charset="-127"/>
+                <a:cs typeface="KoPubWorld돋움체 Light" panose="00000300000000000000" pitchFamily="2" charset="-127"/>
+              </a:rPr>
+              <a:t>, Open </a:t>
+            </a:r>
+            <a:r>
+              <a:rPr lang="en-US" altLang="ko-KR" sz="1400" dirty="0" err="1">
+                <a:latin typeface="KoPubWorld돋움체 Light" panose="00000300000000000000" pitchFamily="2" charset="-127"/>
+                <a:ea typeface="KoPubWorld돋움체 Light" panose="00000300000000000000" pitchFamily="2" charset="-127"/>
+                <a:cs typeface="KoPubWorld돋움체 Light" panose="00000300000000000000" pitchFamily="2" charset="-127"/>
+              </a:rPr>
+              <a:t>Meteo</a:t>
+            </a:r>
+            <a:r>
+              <a:rPr lang="en-US" altLang="ko-KR" sz="1400" dirty="0">
+                <a:latin typeface="KoPubWorld돋움체 Light" panose="00000300000000000000" pitchFamily="2" charset="-127"/>
+                <a:ea typeface="KoPubWorld돋움체 Light" panose="00000300000000000000" pitchFamily="2" charset="-127"/>
+                <a:cs typeface="KoPubWorld돋움체 Light" panose="00000300000000000000" pitchFamily="2" charset="-127"/>
+              </a:rPr>
+              <a:t> </a:t>
+            </a:r>
+            <a:r>
+              <a:rPr lang="ko-KR" altLang="en-US" sz="1400" dirty="0">
+                <a:latin typeface="KoPubWorld돋움체 Light" panose="00000300000000000000" pitchFamily="2" charset="-127"/>
+                <a:ea typeface="KoPubWorld돋움체 Light" panose="00000300000000000000" pitchFamily="2" charset="-127"/>
+                <a:cs typeface="KoPubWorld돋움체 Light" panose="00000300000000000000" pitchFamily="2" charset="-127"/>
+              </a:rPr>
+              <a:t>기상자료</a:t>
+            </a:r>
+            <a:r>
+              <a:rPr lang="en-US" altLang="ko-KR" sz="1400" dirty="0">
+                <a:latin typeface="KoPubWorld돋움체 Light" panose="00000300000000000000" pitchFamily="2" charset="-127"/>
+                <a:ea typeface="KoPubWorld돋움체 Light" panose="00000300000000000000" pitchFamily="2" charset="-127"/>
+                <a:cs typeface="KoPubWorld돋움체 Light" panose="00000300000000000000" pitchFamily="2" charset="-127"/>
+              </a:rPr>
+              <a:t>(</a:t>
+            </a:r>
+            <a:r>
+              <a:rPr lang="ko-KR" altLang="en-US" sz="1400" dirty="0">
+                <a:latin typeface="KoPubWorld돋움체 Light" panose="00000300000000000000" pitchFamily="2" charset="-127"/>
+                <a:ea typeface="KoPubWorld돋움체 Light" panose="00000300000000000000" pitchFamily="2" charset="-127"/>
+                <a:cs typeface="KoPubWorld돋움체 Light" panose="00000300000000000000" pitchFamily="2" charset="-127"/>
+              </a:rPr>
+              <a:t>한국</a:t>
+            </a:r>
+            <a:r>
+              <a:rPr lang="en-US" altLang="ko-KR" sz="1400" dirty="0">
+                <a:latin typeface="KoPubWorld돋움체 Light" panose="00000300000000000000" pitchFamily="2" charset="-127"/>
+                <a:ea typeface="KoPubWorld돋움체 Light" panose="00000300000000000000" pitchFamily="2" charset="-127"/>
+                <a:cs typeface="KoPubWorld돋움체 Light" panose="00000300000000000000" pitchFamily="2" charset="-127"/>
+              </a:rPr>
+              <a:t>), Windy </a:t>
+            </a:r>
+            <a:r>
+              <a:rPr lang="ko-KR" altLang="en-US" sz="1400" dirty="0">
+                <a:latin typeface="KoPubWorld돋움체 Light" panose="00000300000000000000" pitchFamily="2" charset="-127"/>
+                <a:ea typeface="KoPubWorld돋움체 Light" panose="00000300000000000000" pitchFamily="2" charset="-127"/>
+                <a:cs typeface="KoPubWorld돋움체 Light" panose="00000300000000000000" pitchFamily="2" charset="-127"/>
+              </a:rPr>
+              <a:t>기상자료</a:t>
             </a:r>
             <a:endParaRPr lang="en-US" altLang="ko-KR" sz="1400" dirty="0">
               <a:latin typeface="KoPubWorld돋움체 Light" panose="00000300000000000000" pitchFamily="2" charset="-127"/>
@@ -3506,7 +4306,7 @@
               <a:defRPr/>
             </a:pPr>
             <a:r>
-              <a:rPr lang="en-US" altLang="ko-KR" sz="1400" dirty="0">
+              <a:rPr lang="en-US" altLang="ko-KR" sz="1400" b="1" dirty="0">
                 <a:latin typeface="KoPubWorld돋움체 Light" panose="00000300000000000000" pitchFamily="2" charset="-127"/>
                 <a:ea typeface="KoPubWorld돋움체 Light" panose="00000300000000000000" pitchFamily="2" charset="-127"/>
                 <a:cs typeface="KoPubWorld돋움체 Light" panose="00000300000000000000" pitchFamily="2" charset="-127"/>
@@ -3514,15 +4314,15 @@
               <a:t> (</a:t>
             </a:r>
             <a:r>
-              <a:rPr lang="ko-KR" altLang="en-US" sz="1400" dirty="0">
-                <a:latin typeface="KoPubWorld돋움체 Light" panose="00000300000000000000" pitchFamily="2" charset="-127"/>
-                <a:ea typeface="KoPubWorld돋움체 Light" panose="00000300000000000000" pitchFamily="2" charset="-127"/>
-                <a:cs typeface="KoPubWorld돋움체 Light" panose="00000300000000000000" pitchFamily="2" charset="-127"/>
-              </a:rPr>
-              <a:t>주관적 판단의 한계</a:t>
-            </a:r>
-            <a:r>
-              <a:rPr lang="en-US" altLang="ko-KR" sz="1400" dirty="0">
+              <a:rPr lang="ko-KR" altLang="en-US" sz="1400" b="1" dirty="0">
+                <a:latin typeface="KoPubWorld돋움체 Light" panose="00000300000000000000" pitchFamily="2" charset="-127"/>
+                <a:ea typeface="KoPubWorld돋움체 Light" panose="00000300000000000000" pitchFamily="2" charset="-127"/>
+                <a:cs typeface="KoPubWorld돋움체 Light" panose="00000300000000000000" pitchFamily="2" charset="-127"/>
+              </a:rPr>
+              <a:t>수질자료</a:t>
+            </a:r>
+            <a:r>
+              <a:rPr lang="en-US" altLang="ko-KR" sz="1400" b="1" dirty="0">
                 <a:latin typeface="KoPubWorld돋움체 Light" panose="00000300000000000000" pitchFamily="2" charset="-127"/>
                 <a:ea typeface="KoPubWorld돋움체 Light" panose="00000300000000000000" pitchFamily="2" charset="-127"/>
                 <a:cs typeface="KoPubWorld돋움체 Light" panose="00000300000000000000" pitchFamily="2" charset="-127"/>
@@ -3535,39 +4335,39 @@
                 <a:ea typeface="KoPubWorld돋움체 Light" panose="00000300000000000000" pitchFamily="2" charset="-127"/>
                 <a:cs typeface="KoPubWorld돋움체 Light" panose="00000300000000000000" pitchFamily="2" charset="-127"/>
               </a:rPr>
-              <a:t>담당자 경험에 의존한 출동 결정</a:t>
-            </a:r>
-            <a:r>
-              <a:rPr lang="en-US" altLang="ko-KR" sz="1400" dirty="0">
-                <a:latin typeface="KoPubWorld돋움체 Light" panose="00000300000000000000" pitchFamily="2" charset="-127"/>
-                <a:ea typeface="KoPubWorld돋움체 Light" panose="00000300000000000000" pitchFamily="2" charset="-127"/>
-                <a:cs typeface="KoPubWorld돋움체 Light" panose="00000300000000000000" pitchFamily="2" charset="-127"/>
-              </a:rPr>
-              <a:t>, </a:t>
-            </a:r>
-            <a:r>
-              <a:rPr lang="ko-KR" altLang="en-US" sz="1400" dirty="0">
-                <a:latin typeface="KoPubWorld돋움체 Light" panose="00000300000000000000" pitchFamily="2" charset="-127"/>
-                <a:ea typeface="KoPubWorld돋움체 Light" panose="00000300000000000000" pitchFamily="2" charset="-127"/>
-                <a:cs typeface="KoPubWorld돋움체 Light" panose="00000300000000000000" pitchFamily="2" charset="-127"/>
-              </a:rPr>
-              <a:t>명확한 기준 설정의 어려움</a:t>
-            </a:r>
-            <a:r>
-              <a:rPr lang="en-US" altLang="ko-KR" sz="1400" dirty="0">
-                <a:latin typeface="KoPubWorld돋움체 Light" panose="00000300000000000000" pitchFamily="2" charset="-127"/>
-                <a:ea typeface="KoPubWorld돋움체 Light" panose="00000300000000000000" pitchFamily="2" charset="-127"/>
-                <a:cs typeface="KoPubWorld돋움체 Light" panose="00000300000000000000" pitchFamily="2" charset="-127"/>
-              </a:rPr>
-              <a:t> </a:t>
-            </a:r>
-            <a:r>
-              <a:rPr lang="ko-KR" altLang="en-US" sz="1400" dirty="0">
-                <a:latin typeface="KoPubWorld돋움체 Light" panose="00000300000000000000" pitchFamily="2" charset="-127"/>
-                <a:ea typeface="KoPubWorld돋움체 Light" panose="00000300000000000000" pitchFamily="2" charset="-127"/>
-                <a:cs typeface="KoPubWorld돋움체 Light" panose="00000300000000000000" pitchFamily="2" charset="-127"/>
-              </a:rPr>
-              <a:t>존재</a:t>
+              <a:t>물환경정보시스템 </a:t>
+            </a:r>
+            <a:r>
+              <a:rPr lang="en-US" altLang="ko-KR" sz="1400" dirty="0">
+                <a:latin typeface="KoPubWorld돋움체 Light" panose="00000300000000000000" pitchFamily="2" charset="-127"/>
+                <a:ea typeface="KoPubWorld돋움체 Light" panose="00000300000000000000" pitchFamily="2" charset="-127"/>
+                <a:cs typeface="KoPubWorld돋움체 Light" panose="00000300000000000000" pitchFamily="2" charset="-127"/>
+              </a:rPr>
+              <a:t>API </a:t>
+            </a:r>
+            <a:r>
+              <a:rPr lang="ko-KR" altLang="en-US" sz="1400" dirty="0">
+                <a:latin typeface="KoPubWorld돋움체 Light" panose="00000300000000000000" pitchFamily="2" charset="-127"/>
+                <a:ea typeface="KoPubWorld돋움체 Light" panose="00000300000000000000" pitchFamily="2" charset="-127"/>
+                <a:cs typeface="KoPubWorld돋움체 Light" panose="00000300000000000000" pitchFamily="2" charset="-127"/>
+              </a:rPr>
+              <a:t>데이터 일 </a:t>
+            </a:r>
+            <a:r>
+              <a:rPr lang="en-US" altLang="ko-KR" sz="1400" dirty="0">
+                <a:latin typeface="KoPubWorld돋움체 Light" panose="00000300000000000000" pitchFamily="2" charset="-127"/>
+                <a:ea typeface="KoPubWorld돋움체 Light" panose="00000300000000000000" pitchFamily="2" charset="-127"/>
+                <a:cs typeface="KoPubWorld돋움체 Light" panose="00000300000000000000" pitchFamily="2" charset="-127"/>
+              </a:rPr>
+              <a:t>10,000</a:t>
+            </a:r>
+            <a:r>
+              <a:rPr lang="ko-KR" altLang="en-US" sz="1400" dirty="0">
+                <a:latin typeface="KoPubWorld돋움체 Light" panose="00000300000000000000" pitchFamily="2" charset="-127"/>
+                <a:ea typeface="KoPubWorld돋움체 Light" panose="00000300000000000000" pitchFamily="2" charset="-127"/>
+                <a:cs typeface="KoPubWorld돋움체 Light" panose="00000300000000000000" pitchFamily="2" charset="-127"/>
+              </a:rPr>
+              <a:t>건 호출 가능</a:t>
             </a:r>
             <a:endParaRPr lang="en-US" altLang="ko-KR" sz="1400" dirty="0">
               <a:latin typeface="KoPubWorld돋움체 Light" panose="00000300000000000000" pitchFamily="2" charset="-127"/>
@@ -3575,146 +4375,6 @@
               <a:cs typeface="KoPubWorld돋움체 Light" panose="00000300000000000000" pitchFamily="2" charset="-127"/>
             </a:endParaRPr>
           </a:p>
-        </p:txBody>
-      </p:sp>
-      <p:sp>
-        <p:nvSpPr>
-          <p:cNvPr id="19" name="화살표: 아래쪽 18">
-            <a:extLst>
-              <a:ext uri="{FF2B5EF4-FFF2-40B4-BE49-F238E27FC236}">
-                <a16:creationId xmlns:a16="http://schemas.microsoft.com/office/drawing/2014/main" id="{887B3C7D-F408-EE3F-A8E1-5E0C0998E06B}"/>
-              </a:ext>
-            </a:extLst>
-          </p:cNvPr>
-          <p:cNvSpPr/>
-          <p:nvPr/>
-        </p:nvSpPr>
-        <p:spPr>
-          <a:xfrm>
-            <a:off x="4281487" y="4366904"/>
-            <a:ext cx="581025" cy="533400"/>
-          </a:xfrm>
-          <a:prstGeom prst="downArrow">
-            <a:avLst/>
-          </a:prstGeom>
-        </p:spPr>
-        <p:style>
-          <a:lnRef idx="2">
-            <a:schemeClr val="accent1">
-              <a:shade val="15000"/>
-            </a:schemeClr>
-          </a:lnRef>
-          <a:fillRef idx="1">
-            <a:schemeClr val="accent1"/>
-          </a:fillRef>
-          <a:effectRef idx="0">
-            <a:schemeClr val="accent1"/>
-          </a:effectRef>
-          <a:fontRef idx="minor">
-            <a:schemeClr val="lt1"/>
-          </a:fontRef>
-        </p:style>
-        <p:txBody>
-          <a:bodyPr rtlCol="0" anchor="ctr"/>
-          <a:lstStyle/>
-          <a:p>
-            <a:pPr algn="ctr"/>
-            <a:endParaRPr lang="ko-KR" altLang="en-US"/>
-          </a:p>
-        </p:txBody>
-      </p:sp>
-      <p:sp>
-        <p:nvSpPr>
-          <p:cNvPr id="3" name="사각형: 둥근 모서리 2">
-            <a:extLst>
-              <a:ext uri="{FF2B5EF4-FFF2-40B4-BE49-F238E27FC236}">
-                <a16:creationId xmlns:a16="http://schemas.microsoft.com/office/drawing/2014/main" id="{D85EC833-8444-2777-E2FA-3A1737BAB8B6}"/>
-              </a:ext>
-            </a:extLst>
-          </p:cNvPr>
-          <p:cNvSpPr/>
-          <p:nvPr/>
-        </p:nvSpPr>
-        <p:spPr>
-          <a:xfrm>
-            <a:off x="346481" y="5177467"/>
-            <a:ext cx="8451038" cy="1222262"/>
-          </a:xfrm>
-          <a:prstGeom prst="roundRect">
-            <a:avLst/>
-          </a:prstGeom>
-          <a:solidFill>
-            <a:schemeClr val="bg1">
-              <a:lumMod val="95000"/>
-              <a:alpha val="90000"/>
-            </a:schemeClr>
-          </a:solidFill>
-          <a:ln w="19050">
-            <a:solidFill>
-              <a:schemeClr val="tx1"/>
-            </a:solidFill>
-            <a:prstDash val="sysDot"/>
-          </a:ln>
-        </p:spPr>
-        <p:style>
-          <a:lnRef idx="2">
-            <a:schemeClr val="accent1">
-              <a:shade val="15000"/>
-            </a:schemeClr>
-          </a:lnRef>
-          <a:fillRef idx="1">
-            <a:schemeClr val="accent1"/>
-          </a:fillRef>
-          <a:effectRef idx="0">
-            <a:schemeClr val="accent1"/>
-          </a:effectRef>
-          <a:fontRef idx="minor">
-            <a:schemeClr val="lt1"/>
-          </a:fontRef>
-        </p:style>
-        <p:txBody>
-          <a:bodyPr rtlCol="0" anchor="ctr"/>
-          <a:lstStyle/>
-          <a:p>
-            <a:pPr algn="ctr"/>
-            <a:endParaRPr lang="ko-KR" altLang="en-US"/>
-          </a:p>
-        </p:txBody>
-      </p:sp>
-      <p:sp>
-        <p:nvSpPr>
-          <p:cNvPr id="12" name="Rectangle 40">
-            <a:extLst>
-              <a:ext uri="{FF2B5EF4-FFF2-40B4-BE49-F238E27FC236}">
-                <a16:creationId xmlns:a16="http://schemas.microsoft.com/office/drawing/2014/main" id="{B9D122AD-4083-D3E4-1212-B69D5C8A2850}"/>
-              </a:ext>
-            </a:extLst>
-          </p:cNvPr>
-          <p:cNvSpPr>
-            <a:spLocks noChangeArrowheads="1"/>
-          </p:cNvSpPr>
-          <p:nvPr/>
-        </p:nvSpPr>
-        <p:spPr bwMode="auto">
-          <a:xfrm>
-            <a:off x="445634" y="5292926"/>
-            <a:ext cx="8466964" cy="1106802"/>
-          </a:xfrm>
-          <a:prstGeom prst="rect">
-            <a:avLst/>
-          </a:prstGeom>
-          <a:noFill/>
-          <a:ln w="9525" algn="ctr">
-            <a:noFill/>
-            <a:miter lim="800000"/>
-            <a:headEnd/>
-            <a:tailEnd/>
-          </a:ln>
-          <a:effectLst/>
-        </p:spPr>
-        <p:txBody>
-          <a:bodyPr lIns="0" tIns="0" rIns="0" bIns="0"/>
-          <a:lstStyle/>
           <a:p>
             <a:pPr marL="285750" indent="-104775">
               <a:lnSpc>
@@ -3728,70 +4388,78 @@
               <a:defRPr/>
             </a:pPr>
             <a:r>
-              <a:rPr lang="ko-KR" altLang="en-US" sz="1400" dirty="0">
-                <a:latin typeface="KoPubWorld돋움체 Light" panose="00000300000000000000" pitchFamily="2" charset="-127"/>
-                <a:ea typeface="KoPubWorld돋움체 Light" panose="00000300000000000000" pitchFamily="2" charset="-127"/>
-                <a:cs typeface="KoPubWorld돋움체 Light" panose="00000300000000000000" pitchFamily="2" charset="-127"/>
-              </a:rPr>
-              <a:t> 지도 기반에서 기상</a:t>
-            </a:r>
-            <a:r>
-              <a:rPr lang="en-US" altLang="ko-KR" sz="1400" dirty="0">
-                <a:latin typeface="KoPubWorld돋움체 Light" panose="00000300000000000000" pitchFamily="2" charset="-127"/>
-                <a:ea typeface="KoPubWorld돋움체 Light" panose="00000300000000000000" pitchFamily="2" charset="-127"/>
-                <a:cs typeface="KoPubWorld돋움체 Light" panose="00000300000000000000" pitchFamily="2" charset="-127"/>
-              </a:rPr>
-              <a:t>·</a:t>
-            </a:r>
-            <a:r>
-              <a:rPr lang="ko-KR" altLang="en-US" sz="1400" dirty="0">
-                <a:latin typeface="KoPubWorld돋움체 Light" panose="00000300000000000000" pitchFamily="2" charset="-127"/>
-                <a:ea typeface="KoPubWorld돋움체 Light" panose="00000300000000000000" pitchFamily="2" charset="-127"/>
-                <a:cs typeface="KoPubWorld돋움체 Light" panose="00000300000000000000" pitchFamily="2" charset="-127"/>
-              </a:rPr>
-              <a:t>수위</a:t>
-            </a:r>
-            <a:r>
-              <a:rPr lang="en-US" altLang="ko-KR" sz="1400" dirty="0">
-                <a:latin typeface="KoPubWorld돋움체 Light" panose="00000300000000000000" pitchFamily="2" charset="-127"/>
-                <a:ea typeface="KoPubWorld돋움체 Light" panose="00000300000000000000" pitchFamily="2" charset="-127"/>
-                <a:cs typeface="KoPubWorld돋움체 Light" panose="00000300000000000000" pitchFamily="2" charset="-127"/>
-              </a:rPr>
-              <a:t>·</a:t>
-            </a:r>
-            <a:r>
-              <a:rPr lang="ko-KR" altLang="en-US" sz="1400" dirty="0">
-                <a:latin typeface="KoPubWorld돋움체 Light" panose="00000300000000000000" pitchFamily="2" charset="-127"/>
-                <a:ea typeface="KoPubWorld돋움체 Light" panose="00000300000000000000" pitchFamily="2" charset="-127"/>
-                <a:cs typeface="KoPubWorld돋움체 Light" panose="00000300000000000000" pitchFamily="2" charset="-127"/>
-              </a:rPr>
-              <a:t>수질 정보를 통합 확인할 수 있는 </a:t>
-            </a:r>
-            <a:r>
-              <a:rPr lang="en-US" altLang="ko-KR" sz="1400" dirty="0">
-                <a:latin typeface="KoPubWorld돋움체 Light" panose="00000300000000000000" pitchFamily="2" charset="-127"/>
-                <a:ea typeface="KoPubWorld돋움체 Light" panose="00000300000000000000" pitchFamily="2" charset="-127"/>
-                <a:cs typeface="KoPubWorld돋움체 Light" panose="00000300000000000000" pitchFamily="2" charset="-127"/>
-              </a:rPr>
-              <a:t>One-stop </a:t>
-            </a:r>
-            <a:r>
-              <a:rPr lang="ko-KR" altLang="en-US" sz="1400" dirty="0">
-                <a:latin typeface="KoPubWorld돋움체 Light" panose="00000300000000000000" pitchFamily="2" charset="-127"/>
-                <a:ea typeface="KoPubWorld돋움체 Light" panose="00000300000000000000" pitchFamily="2" charset="-127"/>
-                <a:cs typeface="KoPubWorld돋움체 Light" panose="00000300000000000000" pitchFamily="2" charset="-127"/>
-              </a:rPr>
-              <a:t>프로그램 필요</a:t>
-            </a:r>
-            <a:r>
-              <a:rPr lang="en-US" altLang="ko-KR" sz="1400" dirty="0">
+              <a:rPr lang="en-US" altLang="ko-KR" sz="1400" b="1" dirty="0">
+                <a:latin typeface="KoPubWorld돋움체 Light" panose="00000300000000000000" pitchFamily="2" charset="-127"/>
+                <a:ea typeface="KoPubWorld돋움체 Light" panose="00000300000000000000" pitchFamily="2" charset="-127"/>
+                <a:cs typeface="KoPubWorld돋움체 Light" panose="00000300000000000000" pitchFamily="2" charset="-127"/>
+              </a:rPr>
+              <a:t> (</a:t>
+            </a:r>
+            <a:r>
+              <a:rPr lang="ko-KR" altLang="en-US" sz="1400" b="1" dirty="0">
+                <a:latin typeface="KoPubWorld돋움체 Light" panose="00000300000000000000" pitchFamily="2" charset="-127"/>
+                <a:ea typeface="KoPubWorld돋움체 Light" panose="00000300000000000000" pitchFamily="2" charset="-127"/>
+                <a:cs typeface="KoPubWorld돋움체 Light" panose="00000300000000000000" pitchFamily="2" charset="-127"/>
+              </a:rPr>
+              <a:t>수위자료</a:t>
+            </a:r>
+            <a:r>
+              <a:rPr lang="en-US" altLang="ko-KR" sz="1400" b="1" dirty="0">
+                <a:latin typeface="KoPubWorld돋움체 Light" panose="00000300000000000000" pitchFamily="2" charset="-127"/>
+                <a:ea typeface="KoPubWorld돋움체 Light" panose="00000300000000000000" pitchFamily="2" charset="-127"/>
+                <a:cs typeface="KoPubWorld돋움체 Light" panose="00000300000000000000" pitchFamily="2" charset="-127"/>
+              </a:rPr>
+              <a:t>) </a:t>
+            </a:r>
+            <a:r>
+              <a:rPr lang="ko-KR" altLang="en-US" sz="1400" dirty="0" err="1">
+                <a:latin typeface="KoPubWorld돋움체 Light" panose="00000300000000000000" pitchFamily="2" charset="-127"/>
+                <a:ea typeface="KoPubWorld돋움체 Light" panose="00000300000000000000" pitchFamily="2" charset="-127"/>
+                <a:cs typeface="KoPubWorld돋움체 Light" panose="00000300000000000000" pitchFamily="2" charset="-127"/>
+              </a:rPr>
+              <a:t>한강홍수통제소</a:t>
+            </a:r>
+            <a:r>
+              <a:rPr lang="ko-KR" altLang="en-US" sz="1400" dirty="0">
                 <a:latin typeface="KoPubWorld돋움체 Light" panose="00000300000000000000" pitchFamily="2" charset="-127"/>
                 <a:ea typeface="KoPubWorld돋움체 Light" panose="00000300000000000000" pitchFamily="2" charset="-127"/>
                 <a:cs typeface="KoPubWorld돋움체 Light" panose="00000300000000000000" pitchFamily="2" charset="-127"/>
               </a:rPr>
               <a:t> </a:t>
             </a:r>
-            <a:endParaRPr lang="en-US" altLang="ko-KR" sz="1400" b="1" dirty="0">
+            <a:r>
+              <a:rPr lang="en-US" altLang="ko-KR" sz="1400" dirty="0">
+                <a:latin typeface="KoPubWorld돋움체 Light" panose="00000300000000000000" pitchFamily="2" charset="-127"/>
+                <a:ea typeface="KoPubWorld돋움체 Light" panose="00000300000000000000" pitchFamily="2" charset="-127"/>
+                <a:cs typeface="KoPubWorld돋움체 Light" panose="00000300000000000000" pitchFamily="2" charset="-127"/>
+              </a:rPr>
+              <a:t>API </a:t>
+            </a:r>
+            <a:r>
+              <a:rPr lang="ko-KR" altLang="en-US" sz="1400" dirty="0">
+                <a:latin typeface="KoPubWorld돋움체 Light" panose="00000300000000000000" pitchFamily="2" charset="-127"/>
+                <a:ea typeface="KoPubWorld돋움체 Light" panose="00000300000000000000" pitchFamily="2" charset="-127"/>
+                <a:cs typeface="KoPubWorld돋움체 Light" panose="00000300000000000000" pitchFamily="2" charset="-127"/>
+              </a:rPr>
+              <a:t>데이터 일 </a:t>
+            </a:r>
+            <a:r>
+              <a:rPr lang="en-US" altLang="ko-KR" sz="1400" dirty="0">
+                <a:latin typeface="KoPubWorld돋움체 Light" panose="00000300000000000000" pitchFamily="2" charset="-127"/>
+                <a:ea typeface="KoPubWorld돋움체 Light" panose="00000300000000000000" pitchFamily="2" charset="-127"/>
+                <a:cs typeface="KoPubWorld돋움체 Light" panose="00000300000000000000" pitchFamily="2" charset="-127"/>
+              </a:rPr>
+              <a:t>10,000</a:t>
+            </a:r>
+            <a:r>
+              <a:rPr lang="ko-KR" altLang="en-US" sz="1400" dirty="0">
+                <a:latin typeface="KoPubWorld돋움체 Light" panose="00000300000000000000" pitchFamily="2" charset="-127"/>
+                <a:ea typeface="KoPubWorld돋움체 Light" panose="00000300000000000000" pitchFamily="2" charset="-127"/>
+                <a:cs typeface="KoPubWorld돋움체 Light" panose="00000300000000000000" pitchFamily="2" charset="-127"/>
+              </a:rPr>
+              <a:t>건 호출 가능</a:t>
+            </a:r>
+            <a:endParaRPr lang="en-US" altLang="ko-KR" sz="1400" dirty="0">
               <a:latin typeface="KoPubWorld돋움체 Light" panose="00000300000000000000" pitchFamily="2" charset="-127"/>
               <a:ea typeface="KoPubWorld돋움체 Light" panose="00000300000000000000" pitchFamily="2" charset="-127"/>
               <a:cs typeface="KoPubWorld돋움체 Light" panose="00000300000000000000" pitchFamily="2" charset="-127"/>
@@ -3810,34 +4478,90 @@
               <a:defRPr/>
             </a:pPr>
             <a:r>
-              <a:rPr lang="en-US" altLang="ko-KR" sz="1400" dirty="0">
-                <a:latin typeface="KoPubWorld돋움체 Light" panose="00000300000000000000" pitchFamily="2" charset="-127"/>
-                <a:ea typeface="KoPubWorld돋움체 Light" panose="00000300000000000000" pitchFamily="2" charset="-127"/>
-                <a:cs typeface="KoPubWorld돋움체 Light" panose="00000300000000000000" pitchFamily="2" charset="-127"/>
-              </a:rPr>
-              <a:t> 1</a:t>
-            </a:r>
-          </a:p>
-          <a:p>
-            <a:pPr marL="285750" indent="-104775">
+              <a:rPr lang="ko-KR" altLang="en-US" sz="1400" b="1" dirty="0">
+                <a:latin typeface="KoPubWorld돋움체 Light" panose="00000300000000000000" pitchFamily="2" charset="-127"/>
+                <a:ea typeface="KoPubWorld돋움체 Light" panose="00000300000000000000" pitchFamily="2" charset="-127"/>
+                <a:cs typeface="KoPubWorld돋움체 Light" panose="00000300000000000000" pitchFamily="2" charset="-127"/>
+              </a:rPr>
+              <a:t> </a:t>
+            </a:r>
+            <a:r>
+              <a:rPr lang="en-US" altLang="ko-KR" sz="1400" b="1" dirty="0">
+                <a:latin typeface="KoPubWorld돋움체 Light" panose="00000300000000000000" pitchFamily="2" charset="-127"/>
+                <a:ea typeface="KoPubWorld돋움체 Light" panose="00000300000000000000" pitchFamily="2" charset="-127"/>
+                <a:cs typeface="KoPubWorld돋움체 Light" panose="00000300000000000000" pitchFamily="2" charset="-127"/>
+              </a:rPr>
+              <a:t>(</a:t>
+            </a:r>
+            <a:r>
+              <a:rPr lang="ko-KR" altLang="en-US" sz="1400" b="1" dirty="0">
+                <a:latin typeface="KoPubWorld돋움체 Light" panose="00000300000000000000" pitchFamily="2" charset="-127"/>
+                <a:ea typeface="KoPubWorld돋움체 Light" panose="00000300000000000000" pitchFamily="2" charset="-127"/>
+                <a:cs typeface="KoPubWorld돋움체 Light" panose="00000300000000000000" pitchFamily="2" charset="-127"/>
+              </a:rPr>
+              <a:t>지도</a:t>
+            </a:r>
+            <a:r>
+              <a:rPr lang="en-US" altLang="ko-KR" sz="1400" b="1" dirty="0">
+                <a:latin typeface="KoPubWorld돋움체 Light" panose="00000300000000000000" pitchFamily="2" charset="-127"/>
+                <a:ea typeface="KoPubWorld돋움체 Light" panose="00000300000000000000" pitchFamily="2" charset="-127"/>
+                <a:cs typeface="KoPubWorld돋움체 Light" panose="00000300000000000000" pitchFamily="2" charset="-127"/>
+              </a:rPr>
+              <a:t>) </a:t>
+            </a:r>
+            <a:r>
+              <a:rPr lang="ko-KR" altLang="en-US" sz="1400" dirty="0" err="1">
+                <a:latin typeface="KoPubWorld돋움체 Light" panose="00000300000000000000" pitchFamily="2" charset="-127"/>
+                <a:ea typeface="KoPubWorld돋움체 Light" panose="00000300000000000000" pitchFamily="2" charset="-127"/>
+                <a:cs typeface="KoPubWorld돋움체 Light" panose="00000300000000000000" pitchFamily="2" charset="-127"/>
+              </a:rPr>
+              <a:t>브이월드</a:t>
+            </a:r>
+            <a:r>
+              <a:rPr lang="en-US" altLang="ko-KR" sz="1400" dirty="0">
+                <a:latin typeface="KoPubWorld돋움체 Light" panose="00000300000000000000" pitchFamily="2" charset="-127"/>
+                <a:ea typeface="KoPubWorld돋움체 Light" panose="00000300000000000000" pitchFamily="2" charset="-127"/>
+                <a:cs typeface="KoPubWorld돋움체 Light" panose="00000300000000000000" pitchFamily="2" charset="-127"/>
+              </a:rPr>
+              <a:t>,</a:t>
+            </a:r>
+            <a:r>
+              <a:rPr lang="ko-KR" altLang="en-US" sz="1400" dirty="0">
+                <a:latin typeface="KoPubWorld돋움체 Light" panose="00000300000000000000" pitchFamily="2" charset="-127"/>
+                <a:ea typeface="KoPubWorld돋움체 Light" panose="00000300000000000000" pitchFamily="2" charset="-127"/>
+                <a:cs typeface="KoPubWorld돋움체 Light" panose="00000300000000000000" pitchFamily="2" charset="-127"/>
+              </a:rPr>
+              <a:t> </a:t>
+            </a:r>
+            <a:r>
+              <a:rPr lang="en-US" altLang="ko-KR" sz="1400" dirty="0" err="1">
+                <a:latin typeface="KoPubWorld돋움체 Light" panose="00000300000000000000" pitchFamily="2" charset="-127"/>
+                <a:ea typeface="KoPubWorld돋움체 Light" panose="00000300000000000000" pitchFamily="2" charset="-127"/>
+                <a:cs typeface="KoPubWorld돋움체 Light" panose="00000300000000000000" pitchFamily="2" charset="-127"/>
+              </a:rPr>
+              <a:t>Openstreetmap</a:t>
+            </a:r>
+            <a:endParaRPr lang="en-US" altLang="ko-KR" sz="1400" dirty="0">
+              <a:latin typeface="KoPubWorld돋움체 Light" panose="00000300000000000000" pitchFamily="2" charset="-127"/>
+              <a:ea typeface="KoPubWorld돋움체 Light" panose="00000300000000000000" pitchFamily="2" charset="-127"/>
+              <a:cs typeface="KoPubWorld돋움체 Light" panose="00000300000000000000" pitchFamily="2" charset="-127"/>
+            </a:endParaRPr>
+          </a:p>
+          <a:p>
+            <a:pPr marL="180975">
               <a:lnSpc>
                 <a:spcPct val="120000"/>
               </a:lnSpc>
               <a:spcBef>
                 <a:spcPct val="50000"/>
               </a:spcBef>
-              <a:buFont typeface="Arial" panose="020B0604020202020204" pitchFamily="34" charset="0"/>
-              <a:buChar char="•"/>
               <a:defRPr/>
             </a:pPr>
-            <a:r>
-              <a:rPr lang="en-US" altLang="ko-KR" sz="1400" dirty="0">
-                <a:latin typeface="KoPubWorld돋움체 Light" panose="00000300000000000000" pitchFamily="2" charset="-127"/>
-                <a:ea typeface="KoPubWorld돋움체 Light" panose="00000300000000000000" pitchFamily="2" charset="-127"/>
-                <a:cs typeface="KoPubWorld돋움체 Light" panose="00000300000000000000" pitchFamily="2" charset="-127"/>
-              </a:rPr>
-              <a:t> 1</a:t>
-            </a:r>
+            <a:endParaRPr lang="en-US" altLang="ko-KR" sz="1400" dirty="0">
+              <a:latin typeface="KoPubWorld돋움체 Light" panose="00000300000000000000" pitchFamily="2" charset="-127"/>
+              <a:ea typeface="KoPubWorld돋움체 Light" panose="00000300000000000000" pitchFamily="2" charset="-127"/>
+              <a:cs typeface="KoPubWorld돋움체 Light" panose="00000300000000000000" pitchFamily="2" charset="-127"/>
+            </a:endParaRPr>
           </a:p>
           <a:p>
             <a:pPr>
@@ -3849,7 +4573,7 @@
               </a:spcBef>
               <a:defRPr/>
             </a:pPr>
-            <a:endParaRPr lang="ko-KR" altLang="en-US" sz="1400" b="1" dirty="0">
+            <a:endParaRPr lang="ko-KR" altLang="en-US" sz="1400" dirty="0">
               <a:latin typeface="KoPubWorld돋움체 Light" panose="00000300000000000000" pitchFamily="2" charset="-127"/>
               <a:ea typeface="KoPubWorld돋움체 Light" panose="00000300000000000000" pitchFamily="2" charset="-127"/>
               <a:cs typeface="KoPubWorld돋움체 Light" panose="00000300000000000000" pitchFamily="2" charset="-127"/>
@@ -3857,286 +4581,99 @@
           </a:p>
         </p:txBody>
       </p:sp>
-      <p:sp>
-        <p:nvSpPr>
-          <p:cNvPr id="22" name="사각형: 둥근 모서리 21">
+      <p:pic>
+        <p:nvPicPr>
+          <p:cNvPr id="3" name="그림 2">
             <a:extLst>
               <a:ext uri="{FF2B5EF4-FFF2-40B4-BE49-F238E27FC236}">
-                <a16:creationId xmlns:a16="http://schemas.microsoft.com/office/drawing/2014/main" id="{A90B751E-DFF3-D27D-A22B-71D1FC9B2B75}"/>
+                <a16:creationId xmlns:a16="http://schemas.microsoft.com/office/drawing/2014/main" id="{68975FA1-52E0-D2E1-B4F9-21C2DAE44B41}"/>
               </a:ext>
             </a:extLst>
           </p:cNvPr>
-          <p:cNvSpPr/>
+          <p:cNvPicPr>
+            <a:picLocks noChangeAspect="1"/>
+          </p:cNvPicPr>
           <p:nvPr/>
-        </p:nvSpPr>
+        </p:nvPicPr>
+        <p:blipFill>
+          <a:blip r:embed="rId3"/>
+          <a:srcRect t="14505"/>
+          <a:stretch/>
+        </p:blipFill>
         <p:spPr>
           <a:xfrm>
-            <a:off x="346480" y="2803588"/>
-            <a:ext cx="8451038" cy="1271570"/>
-          </a:xfrm>
-          <a:prstGeom prst="roundRect">
-            <a:avLst/>
-          </a:prstGeom>
-          <a:solidFill>
-            <a:schemeClr val="bg1">
-              <a:lumMod val="95000"/>
-              <a:alpha val="90000"/>
-            </a:schemeClr>
-          </a:solidFill>
-          <a:ln w="19050">
-            <a:solidFill>
-              <a:schemeClr val="tx1"/>
-            </a:solidFill>
-            <a:prstDash val="sysDot"/>
-          </a:ln>
-        </p:spPr>
-        <p:style>
-          <a:lnRef idx="2">
-            <a:schemeClr val="accent1">
-              <a:shade val="15000"/>
-            </a:schemeClr>
-          </a:lnRef>
-          <a:fillRef idx="1">
-            <a:schemeClr val="accent1"/>
-          </a:fillRef>
-          <a:effectRef idx="0">
-            <a:schemeClr val="accent1"/>
-          </a:effectRef>
-          <a:fontRef idx="minor">
-            <a:schemeClr val="lt1"/>
-          </a:fontRef>
-        </p:style>
-        <p:txBody>
-          <a:bodyPr rtlCol="0" anchor="ctr"/>
-          <a:lstStyle/>
-          <a:p>
-            <a:pPr algn="ctr"/>
-            <a:endParaRPr lang="ko-KR" altLang="en-US"/>
-          </a:p>
-        </p:txBody>
-      </p:sp>
-      <p:sp>
-        <p:nvSpPr>
-          <p:cNvPr id="21" name="Rectangle 40">
-            <a:extLst>
-              <a:ext uri="{FF2B5EF4-FFF2-40B4-BE49-F238E27FC236}">
-                <a16:creationId xmlns:a16="http://schemas.microsoft.com/office/drawing/2014/main" id="{0A2EC932-D453-3B8F-18ED-6CBBC14A528C}"/>
-              </a:ext>
-            </a:extLst>
-          </p:cNvPr>
-          <p:cNvSpPr>
-            <a:spLocks noChangeArrowheads="1"/>
-          </p:cNvSpPr>
-          <p:nvPr/>
-        </p:nvSpPr>
-        <p:spPr bwMode="auto">
-          <a:xfrm>
-            <a:off x="445634" y="2954618"/>
-            <a:ext cx="8466964" cy="1027239"/>
+            <a:off x="527456" y="3677819"/>
+            <a:ext cx="2109848" cy="2780234"/>
           </a:xfrm>
           <a:prstGeom prst="rect">
             <a:avLst/>
           </a:prstGeom>
-          <a:noFill/>
-          <a:ln w="9525" algn="ctr">
-            <a:noFill/>
-            <a:miter lim="800000"/>
-            <a:headEnd/>
-            <a:tailEnd/>
-          </a:ln>
-          <a:effectLst/>
         </p:spPr>
-        <p:txBody>
-          <a:bodyPr lIns="0" tIns="0" rIns="0" bIns="0"/>
-          <a:lstStyle/>
-          <a:p>
-            <a:pPr marL="285750" indent="-104775">
-              <a:lnSpc>
-                <a:spcPct val="120000"/>
-              </a:lnSpc>
-              <a:spcBef>
-                <a:spcPct val="50000"/>
-              </a:spcBef>
-              <a:buFont typeface="Arial" panose="020B0604020202020204" pitchFamily="34" charset="0"/>
-              <a:buChar char="•"/>
-              <a:defRPr/>
-            </a:pPr>
-            <a:r>
-              <a:rPr lang="en-US" altLang="ko-KR" sz="1400" dirty="0">
-                <a:latin typeface="KoPubWorld돋움체 Light" panose="00000300000000000000" pitchFamily="2" charset="-127"/>
-                <a:ea typeface="KoPubWorld돋움체 Light" panose="00000300000000000000" pitchFamily="2" charset="-127"/>
-                <a:cs typeface="KoPubWorld돋움체 Light" panose="00000300000000000000" pitchFamily="2" charset="-127"/>
-              </a:rPr>
-              <a:t> (</a:t>
-            </a:r>
-            <a:r>
-              <a:rPr lang="ko-KR" altLang="en-US" sz="1400" dirty="0">
-                <a:latin typeface="KoPubWorld돋움체 Light" panose="00000300000000000000" pitchFamily="2" charset="-127"/>
-                <a:ea typeface="KoPubWorld돋움체 Light" panose="00000300000000000000" pitchFamily="2" charset="-127"/>
-                <a:cs typeface="KoPubWorld돋움체 Light" panose="00000300000000000000" pitchFamily="2" charset="-127"/>
-              </a:rPr>
-              <a:t>대기시간 낭비</a:t>
-            </a:r>
-            <a:r>
-              <a:rPr lang="en-US" altLang="ko-KR" sz="1400" dirty="0">
-                <a:latin typeface="KoPubWorld돋움체 Light" panose="00000300000000000000" pitchFamily="2" charset="-127"/>
-                <a:ea typeface="KoPubWorld돋움체 Light" panose="00000300000000000000" pitchFamily="2" charset="-127"/>
-                <a:cs typeface="KoPubWorld돋움체 Light" panose="00000300000000000000" pitchFamily="2" charset="-127"/>
-              </a:rPr>
-              <a:t>) </a:t>
-            </a:r>
-            <a:r>
-              <a:rPr lang="ko-KR" altLang="en-US" sz="1400" dirty="0">
-                <a:latin typeface="KoPubWorld돋움체 Light" panose="00000300000000000000" pitchFamily="2" charset="-127"/>
-                <a:ea typeface="KoPubWorld돋움체 Light" panose="00000300000000000000" pitchFamily="2" charset="-127"/>
-                <a:cs typeface="KoPubWorld돋움체 Light" panose="00000300000000000000" pitchFamily="2" charset="-127"/>
-              </a:rPr>
-              <a:t>기상 데이터 확인 후 조기 출동 시 현장에서의 무한대기 발생</a:t>
-            </a:r>
-            <a:endParaRPr lang="en-US" altLang="ko-KR" sz="1400" dirty="0">
-              <a:latin typeface="KoPubWorld돋움체 Light" panose="00000300000000000000" pitchFamily="2" charset="-127"/>
-              <a:ea typeface="KoPubWorld돋움체 Light" panose="00000300000000000000" pitchFamily="2" charset="-127"/>
-              <a:cs typeface="KoPubWorld돋움체 Light" panose="00000300000000000000" pitchFamily="2" charset="-127"/>
-            </a:endParaRPr>
-          </a:p>
-          <a:p>
-            <a:pPr marL="285750" indent="-104775">
-              <a:lnSpc>
-                <a:spcPct val="120000"/>
-              </a:lnSpc>
-              <a:spcBef>
-                <a:spcPct val="50000"/>
-              </a:spcBef>
-              <a:buFont typeface="Arial" panose="020B0604020202020204" pitchFamily="34" charset="0"/>
-              <a:buChar char="•"/>
-              <a:defRPr/>
-            </a:pPr>
-            <a:r>
-              <a:rPr lang="en-US" altLang="ko-KR" sz="1400" dirty="0">
-                <a:latin typeface="KoPubWorld돋움체 Light" panose="00000300000000000000" pitchFamily="2" charset="-127"/>
-                <a:ea typeface="KoPubWorld돋움체 Light" panose="00000300000000000000" pitchFamily="2" charset="-127"/>
-                <a:cs typeface="KoPubWorld돋움체 Light" panose="00000300000000000000" pitchFamily="2" charset="-127"/>
-              </a:rPr>
-              <a:t> (</a:t>
-            </a:r>
-            <a:r>
-              <a:rPr lang="ko-KR" altLang="en-US" sz="1400" dirty="0">
-                <a:latin typeface="KoPubWorld돋움체 Light" panose="00000300000000000000" pitchFamily="2" charset="-127"/>
-                <a:ea typeface="KoPubWorld돋움체 Light" panose="00000300000000000000" pitchFamily="2" charset="-127"/>
-                <a:cs typeface="KoPubWorld돋움체 Light" panose="00000300000000000000" pitchFamily="2" charset="-127"/>
-              </a:rPr>
-              <a:t>품질 저하</a:t>
-            </a:r>
-            <a:r>
-              <a:rPr lang="en-US" altLang="ko-KR" sz="1400" dirty="0">
-                <a:latin typeface="KoPubWorld돋움체 Light" panose="00000300000000000000" pitchFamily="2" charset="-127"/>
-                <a:ea typeface="KoPubWorld돋움체 Light" panose="00000300000000000000" pitchFamily="2" charset="-127"/>
-                <a:cs typeface="KoPubWorld돋움체 Light" panose="00000300000000000000" pitchFamily="2" charset="-127"/>
-              </a:rPr>
-              <a:t>) </a:t>
-            </a:r>
-            <a:r>
-              <a:rPr lang="ko-KR" altLang="en-US" sz="1400" dirty="0">
-                <a:latin typeface="KoPubWorld돋움체 Light" panose="00000300000000000000" pitchFamily="2" charset="-127"/>
-                <a:ea typeface="KoPubWorld돋움체 Light" panose="00000300000000000000" pitchFamily="2" charset="-127"/>
-                <a:cs typeface="KoPubWorld돋움체 Light" panose="00000300000000000000" pitchFamily="2" charset="-127"/>
-              </a:rPr>
-              <a:t>판단 지연 시 초기 우수 </a:t>
-            </a:r>
-            <a:r>
-              <a:rPr lang="ko-KR" altLang="en-US" sz="1400" dirty="0" err="1">
-                <a:latin typeface="KoPubWorld돋움체 Light" panose="00000300000000000000" pitchFamily="2" charset="-127"/>
-                <a:ea typeface="KoPubWorld돋움체 Light" panose="00000300000000000000" pitchFamily="2" charset="-127"/>
-                <a:cs typeface="KoPubWorld돋움체 Light" panose="00000300000000000000" pitchFamily="2" charset="-127"/>
-              </a:rPr>
-              <a:t>채수</a:t>
-            </a:r>
-            <a:r>
-              <a:rPr lang="ko-KR" altLang="en-US" sz="1400" dirty="0">
-                <a:latin typeface="KoPubWorld돋움체 Light" panose="00000300000000000000" pitchFamily="2" charset="-127"/>
-                <a:ea typeface="KoPubWorld돋움체 Light" panose="00000300000000000000" pitchFamily="2" charset="-127"/>
-                <a:cs typeface="KoPubWorld돋움체 Light" panose="00000300000000000000" pitchFamily="2" charset="-127"/>
-              </a:rPr>
-              <a:t> 기회 상실</a:t>
-            </a:r>
-            <a:endParaRPr lang="en-US" altLang="ko-KR" sz="1400" dirty="0">
-              <a:latin typeface="KoPubWorld돋움체 Light" panose="00000300000000000000" pitchFamily="2" charset="-127"/>
-              <a:ea typeface="KoPubWorld돋움체 Light" panose="00000300000000000000" pitchFamily="2" charset="-127"/>
-              <a:cs typeface="KoPubWorld돋움체 Light" panose="00000300000000000000" pitchFamily="2" charset="-127"/>
-            </a:endParaRPr>
-          </a:p>
-          <a:p>
-            <a:pPr marL="285750" indent="-104775">
-              <a:lnSpc>
-                <a:spcPct val="120000"/>
-              </a:lnSpc>
-              <a:spcBef>
-                <a:spcPct val="50000"/>
-              </a:spcBef>
-              <a:buFont typeface="Arial" panose="020B0604020202020204" pitchFamily="34" charset="0"/>
-              <a:buChar char="•"/>
-              <a:defRPr/>
-            </a:pPr>
-            <a:r>
-              <a:rPr lang="en-US" altLang="ko-KR" sz="1400" dirty="0">
-                <a:latin typeface="KoPubWorld돋움체 Light" panose="00000300000000000000" pitchFamily="2" charset="-127"/>
-                <a:ea typeface="KoPubWorld돋움체 Light" panose="00000300000000000000" pitchFamily="2" charset="-127"/>
-                <a:cs typeface="KoPubWorld돋움체 Light" panose="00000300000000000000" pitchFamily="2" charset="-127"/>
-              </a:rPr>
-              <a:t> (</a:t>
-            </a:r>
-            <a:r>
-              <a:rPr lang="ko-KR" altLang="en-US" sz="1400" dirty="0">
-                <a:latin typeface="KoPubWorld돋움체 Light" panose="00000300000000000000" pitchFamily="2" charset="-127"/>
-                <a:ea typeface="KoPubWorld돋움체 Light" panose="00000300000000000000" pitchFamily="2" charset="-127"/>
-                <a:cs typeface="KoPubWorld돋움체 Light" panose="00000300000000000000" pitchFamily="2" charset="-127"/>
-              </a:rPr>
-              <a:t>비용 낭비</a:t>
-            </a:r>
-            <a:r>
-              <a:rPr lang="en-US" altLang="ko-KR" sz="1400" dirty="0">
-                <a:latin typeface="KoPubWorld돋움체 Light" panose="00000300000000000000" pitchFamily="2" charset="-127"/>
-                <a:ea typeface="KoPubWorld돋움체 Light" panose="00000300000000000000" pitchFamily="2" charset="-127"/>
-                <a:cs typeface="KoPubWorld돋움체 Light" panose="00000300000000000000" pitchFamily="2" charset="-127"/>
-              </a:rPr>
-              <a:t>) </a:t>
-            </a:r>
-            <a:r>
-              <a:rPr lang="ko-KR" altLang="en-US" sz="1400" dirty="0">
-                <a:latin typeface="KoPubWorld돋움체 Light" panose="00000300000000000000" pitchFamily="2" charset="-127"/>
-                <a:ea typeface="KoPubWorld돋움체 Light" panose="00000300000000000000" pitchFamily="2" charset="-127"/>
-                <a:cs typeface="KoPubWorld돋움체 Light" panose="00000300000000000000" pitchFamily="2" charset="-127"/>
-              </a:rPr>
-              <a:t>강우량이 미미할 경우 불필요한 현장 출동으로 인한 행정력 낭비 발생</a:t>
-            </a:r>
-            <a:endParaRPr lang="en-US" altLang="ko-KR" sz="1400" dirty="0">
-              <a:latin typeface="KoPubWorld돋움체 Light" panose="00000300000000000000" pitchFamily="2" charset="-127"/>
-              <a:ea typeface="KoPubWorld돋움체 Light" panose="00000300000000000000" pitchFamily="2" charset="-127"/>
-              <a:cs typeface="KoPubWorld돋움체 Light" panose="00000300000000000000" pitchFamily="2" charset="-127"/>
-            </a:endParaRPr>
-          </a:p>
-          <a:p>
-            <a:pPr>
-              <a:lnSpc>
-                <a:spcPct val="120000"/>
-              </a:lnSpc>
-              <a:spcBef>
-                <a:spcPct val="50000"/>
-              </a:spcBef>
-              <a:defRPr/>
-            </a:pPr>
-            <a:endParaRPr lang="ko-KR" altLang="en-US" sz="1400" b="1" dirty="0">
-              <a:latin typeface="KoPubWorld돋움체 Light" panose="00000300000000000000" pitchFamily="2" charset="-127"/>
-              <a:ea typeface="KoPubWorld돋움체 Light" panose="00000300000000000000" pitchFamily="2" charset="-127"/>
-              <a:cs typeface="KoPubWorld돋움체 Light" panose="00000300000000000000" pitchFamily="2" charset="-127"/>
-            </a:endParaRPr>
-          </a:p>
-        </p:txBody>
-      </p:sp>
+      </p:pic>
+      <p:pic>
+        <p:nvPicPr>
+          <p:cNvPr id="15" name="그림 14">
+            <a:extLst>
+              <a:ext uri="{FF2B5EF4-FFF2-40B4-BE49-F238E27FC236}">
+                <a16:creationId xmlns:a16="http://schemas.microsoft.com/office/drawing/2014/main" id="{F220E859-73E8-900D-C626-C97CF9993C0E}"/>
+              </a:ext>
+            </a:extLst>
+          </p:cNvPr>
+          <p:cNvPicPr>
+            <a:picLocks noChangeAspect="1"/>
+          </p:cNvPicPr>
+          <p:nvPr/>
+        </p:nvPicPr>
+        <p:blipFill>
+          <a:blip r:embed="rId4"/>
+          <a:stretch>
+            <a:fillRect/>
+          </a:stretch>
+        </p:blipFill>
+        <p:spPr>
+          <a:xfrm>
+            <a:off x="5608304" y="3677819"/>
+            <a:ext cx="2959880" cy="2780234"/>
+          </a:xfrm>
+          <a:prstGeom prst="rect">
+            <a:avLst/>
+          </a:prstGeom>
+        </p:spPr>
+      </p:pic>
+      <p:pic>
+        <p:nvPicPr>
+          <p:cNvPr id="17" name="그림 16">
+            <a:extLst>
+              <a:ext uri="{FF2B5EF4-FFF2-40B4-BE49-F238E27FC236}">
+                <a16:creationId xmlns:a16="http://schemas.microsoft.com/office/drawing/2014/main" id="{C5E78F7D-5572-ACC5-C1C7-FE076D10BAE9}"/>
+              </a:ext>
+            </a:extLst>
+          </p:cNvPr>
+          <p:cNvPicPr>
+            <a:picLocks noChangeAspect="1"/>
+          </p:cNvPicPr>
+          <p:nvPr/>
+        </p:nvPicPr>
+        <p:blipFill>
+          <a:blip r:embed="rId5"/>
+          <a:stretch>
+            <a:fillRect/>
+          </a:stretch>
+        </p:blipFill>
+        <p:spPr>
+          <a:xfrm>
+            <a:off x="3163035" y="3677819"/>
+            <a:ext cx="1919538" cy="2780234"/>
+          </a:xfrm>
+          <a:prstGeom prst="rect">
+            <a:avLst/>
+          </a:prstGeom>
+        </p:spPr>
+      </p:pic>
     </p:spTree>
     <p:extLst>
       <p:ext uri="{BB962C8B-B14F-4D97-AF65-F5344CB8AC3E}">
-        <p14:creationId xmlns:p14="http://schemas.microsoft.com/office/powerpoint/2010/main" val="1057216729"/>
+        <p14:creationId xmlns:p14="http://schemas.microsoft.com/office/powerpoint/2010/main" val="3115642044"/>
       </p:ext>
     </p:extLst>
   </p:cSld>
@@ -4146,7 +4683,7 @@
 </p:sld>
 </file>
 
-<file path=ppt/slides/slide4.xml><?xml version="1.0" encoding="utf-8"?>
+<file path=ppt/slides/slide6.xml><?xml version="1.0" encoding="utf-8"?>
 <p:sld xmlns:a="http://schemas.openxmlformats.org/drawingml/2006/main" xmlns:r="http://schemas.openxmlformats.org/officeDocument/2006/relationships" xmlns:p="http://schemas.openxmlformats.org/presentationml/2006/main">
   <p:cSld>
     <p:spTree>
@@ -4178,7 +4715,7 @@
         <p:spPr>
           <a:xfrm>
             <a:off x="838393" y="924599"/>
-            <a:ext cx="588623" cy="369332"/>
+            <a:ext cx="992579" cy="369332"/>
           </a:xfrm>
           <a:prstGeom prst="rect">
             <a:avLst/>
@@ -4198,7 +4735,7 @@
                 <a:latin typeface="KoPubWorld돋움체 Medium" panose="00000600000000000000" pitchFamily="2" charset="-127"/>
                 <a:ea typeface="KoPubWorld돋움체 Medium" panose="00000600000000000000" pitchFamily="2" charset="-127"/>
               </a:rPr>
-              <a:t>목적</a:t>
+              <a:t>기능설명</a:t>
             </a:r>
           </a:p>
         </p:txBody>
@@ -4374,7 +4911,7 @@
                 <a:ea typeface="KoPubWorld돋움체 Medium" panose="00000600000000000000" pitchFamily="2" charset="-127"/>
                 <a:cs typeface="KoPubWorld돋움체 Medium" panose="00000600000000000000" pitchFamily="2" charset="-127"/>
               </a:rPr>
-              <a:t>1.2 </a:t>
+              <a:t>1.4 </a:t>
             </a:r>
             <a:r>
               <a:rPr lang="ko-KR" altLang="en-US" sz="2800" b="1" dirty="0">
@@ -4385,7 +4922,7 @@
                 <a:ea typeface="KoPubWorld돋움체 Medium" panose="00000600000000000000" pitchFamily="2" charset="-127"/>
                 <a:cs typeface="KoPubWorld돋움체 Medium" panose="00000600000000000000" pitchFamily="2" charset="-127"/>
               </a:rPr>
-              <a:t>개발목적</a:t>
+              <a:t>기능설명</a:t>
             </a:r>
           </a:p>
         </p:txBody>
@@ -4404,8 +4941,8 @@
         </p:nvSpPr>
         <p:spPr>
           <a:xfrm>
-            <a:off x="346481" y="1353285"/>
-            <a:ext cx="8451038" cy="1875690"/>
+            <a:off x="346481" y="1353284"/>
+            <a:ext cx="8451038" cy="5083375"/>
           </a:xfrm>
           <a:prstGeom prst="roundRect">
             <a:avLst/>
@@ -4465,7 +5002,7 @@
         <p:spPr bwMode="auto">
           <a:xfrm>
             <a:off x="445634" y="1602104"/>
-            <a:ext cx="8466964" cy="1474471"/>
+            <a:ext cx="8466964" cy="4843522"/>
           </a:xfrm>
           <a:prstGeom prst="rect">
             <a:avLst/>
@@ -4495,13 +5032,42 @@
               <a:defRPr/>
             </a:pPr>
             <a:r>
-              <a:rPr lang="en-US" altLang="ko-KR" sz="1400" dirty="0">
-                <a:latin typeface="KoPubWorld돋움체 Light" panose="00000300000000000000" pitchFamily="2" charset="-127"/>
-                <a:ea typeface="KoPubWorld돋움체 Light" panose="00000300000000000000" pitchFamily="2" charset="-127"/>
-                <a:cs typeface="KoPubWorld돋움체 Light" panose="00000300000000000000" pitchFamily="2" charset="-127"/>
-              </a:rPr>
-              <a:t> 1, 2</a:t>
-            </a:r>
+              <a:rPr lang="en-US" altLang="ko-KR" sz="1400" b="1" dirty="0">
+                <a:latin typeface="KoPubWorld돋움체 Light" panose="00000300000000000000" pitchFamily="2" charset="-127"/>
+                <a:ea typeface="KoPubWorld돋움체 Light" panose="00000300000000000000" pitchFamily="2" charset="-127"/>
+                <a:cs typeface="KoPubWorld돋움체 Light" panose="00000300000000000000" pitchFamily="2" charset="-127"/>
+              </a:rPr>
+              <a:t> (User Interface) Google Antigravity </a:t>
+            </a:r>
+            <a:r>
+              <a:rPr lang="ko-KR" altLang="en-US" sz="1400" b="1" dirty="0">
+                <a:latin typeface="KoPubWorld돋움체 Light" panose="00000300000000000000" pitchFamily="2" charset="-127"/>
+                <a:ea typeface="KoPubWorld돋움체 Light" panose="00000300000000000000" pitchFamily="2" charset="-127"/>
+                <a:cs typeface="KoPubWorld돋움체 Light" panose="00000300000000000000" pitchFamily="2" charset="-127"/>
+              </a:rPr>
+              <a:t>기반 코딩 → </a:t>
+            </a:r>
+            <a:r>
+              <a:rPr lang="en-US" altLang="ko-KR" sz="1400" b="1" dirty="0">
+                <a:latin typeface="KoPubWorld돋움체 Light" panose="00000300000000000000" pitchFamily="2" charset="-127"/>
+                <a:ea typeface="KoPubWorld돋움체 Light" panose="00000300000000000000" pitchFamily="2" charset="-127"/>
+                <a:cs typeface="KoPubWorld돋움체 Light" panose="00000300000000000000" pitchFamily="2" charset="-127"/>
+              </a:rPr>
+              <a:t>html </a:t>
+            </a:r>
+            <a:r>
+              <a:rPr lang="ko-KR" altLang="en-US" sz="1400" b="1" dirty="0">
+                <a:latin typeface="KoPubWorld돋움체 Light" panose="00000300000000000000" pitchFamily="2" charset="-127"/>
+                <a:ea typeface="KoPubWorld돋움체 Light" panose="00000300000000000000" pitchFamily="2" charset="-127"/>
+                <a:cs typeface="KoPubWorld돋움체 Light" panose="00000300000000000000" pitchFamily="2" charset="-127"/>
+              </a:rPr>
+              <a:t>생성</a:t>
+            </a:r>
+            <a:endParaRPr lang="en-US" altLang="ko-KR" sz="1400" b="1" dirty="0">
+              <a:latin typeface="KoPubWorld돋움체 Light" panose="00000300000000000000" pitchFamily="2" charset="-127"/>
+              <a:ea typeface="KoPubWorld돋움체 Light" panose="00000300000000000000" pitchFamily="2" charset="-127"/>
+              <a:cs typeface="KoPubWorld돋움체 Light" panose="00000300000000000000" pitchFamily="2" charset="-127"/>
+            </a:endParaRPr>
           </a:p>
           <a:p>
             <a:pPr marL="285750" indent="-104775">
@@ -4516,13 +5082,405 @@
               <a:defRPr/>
             </a:pPr>
             <a:r>
-              <a:rPr lang="en-US" altLang="ko-KR" sz="1400" b="1" dirty="0">
-                <a:latin typeface="KoPubWorld돋움체 Light" panose="00000300000000000000" pitchFamily="2" charset="-127"/>
-                <a:ea typeface="KoPubWorld돋움체 Light" panose="00000300000000000000" pitchFamily="2" charset="-127"/>
-                <a:cs typeface="KoPubWorld돋움체 Light" panose="00000300000000000000" pitchFamily="2" charset="-127"/>
-              </a:rPr>
-              <a:t> 1</a:t>
-            </a:r>
+              <a:rPr lang="en-US" altLang="ko-KR" sz="1400" dirty="0">
+                <a:latin typeface="KoPubWorld돋움체 Light" panose="00000300000000000000" pitchFamily="2" charset="-127"/>
+                <a:ea typeface="KoPubWorld돋움체 Light" panose="00000300000000000000" pitchFamily="2" charset="-127"/>
+                <a:cs typeface="KoPubWorld돋움체 Light" panose="00000300000000000000" pitchFamily="2" charset="-127"/>
+              </a:rPr>
+              <a:t> (</a:t>
+            </a:r>
+            <a:r>
+              <a:rPr lang="ko-KR" altLang="en-US" sz="1400" dirty="0">
+                <a:latin typeface="KoPubWorld돋움체 Light" panose="00000300000000000000" pitchFamily="2" charset="-127"/>
+                <a:ea typeface="KoPubWorld돋움체 Light" panose="00000300000000000000" pitchFamily="2" charset="-127"/>
+                <a:cs typeface="KoPubWorld돋움체 Light" panose="00000300000000000000" pitchFamily="2" charset="-127"/>
+              </a:rPr>
+              <a:t>강수자료</a:t>
+            </a:r>
+            <a:r>
+              <a:rPr lang="en-US" altLang="ko-KR" sz="1400" dirty="0">
+                <a:latin typeface="KoPubWorld돋움체 Light" panose="00000300000000000000" pitchFamily="2" charset="-127"/>
+                <a:ea typeface="KoPubWorld돋움체 Light" panose="00000300000000000000" pitchFamily="2" charset="-127"/>
+                <a:cs typeface="KoPubWorld돋움체 Light" panose="00000300000000000000" pitchFamily="2" charset="-127"/>
+              </a:rPr>
+              <a:t>) </a:t>
+            </a:r>
+            <a:r>
+              <a:rPr lang="ko-KR" altLang="en-US" sz="1400" dirty="0">
+                <a:latin typeface="KoPubWorld돋움체 Light" panose="00000300000000000000" pitchFamily="2" charset="-127"/>
+                <a:ea typeface="KoPubWorld돋움체 Light" panose="00000300000000000000" pitchFamily="2" charset="-127"/>
+                <a:cs typeface="KoPubWorld돋움체 Light" panose="00000300000000000000" pitchFamily="2" charset="-127"/>
+              </a:rPr>
+              <a:t>기상청 </a:t>
+            </a:r>
+            <a:r>
+              <a:rPr lang="en-US" altLang="ko-KR" sz="1400" dirty="0">
+                <a:latin typeface="KoPubWorld돋움체 Light" panose="00000300000000000000" pitchFamily="2" charset="-127"/>
+                <a:ea typeface="KoPubWorld돋움체 Light" panose="00000300000000000000" pitchFamily="2" charset="-127"/>
+                <a:cs typeface="KoPubWorld돋움체 Light" panose="00000300000000000000" pitchFamily="2" charset="-127"/>
+              </a:rPr>
+              <a:t>API </a:t>
+            </a:r>
+            <a:r>
+              <a:rPr lang="ko-KR" altLang="en-US" sz="1400" dirty="0">
+                <a:latin typeface="KoPubWorld돋움체 Light" panose="00000300000000000000" pitchFamily="2" charset="-127"/>
+                <a:ea typeface="KoPubWorld돋움체 Light" panose="00000300000000000000" pitchFamily="2" charset="-127"/>
+                <a:cs typeface="KoPubWorld돋움체 Light" panose="00000300000000000000" pitchFamily="2" charset="-127"/>
+              </a:rPr>
+              <a:t>데이터</a:t>
+            </a:r>
+            <a:r>
+              <a:rPr lang="en-US" altLang="ko-KR" sz="1400" dirty="0">
+                <a:latin typeface="KoPubWorld돋움체 Light" panose="00000300000000000000" pitchFamily="2" charset="-127"/>
+                <a:ea typeface="KoPubWorld돋움체 Light" panose="00000300000000000000" pitchFamily="2" charset="-127"/>
+                <a:cs typeface="KoPubWorld돋움체 Light" panose="00000300000000000000" pitchFamily="2" charset="-127"/>
+              </a:rPr>
+              <a:t>, Open </a:t>
+            </a:r>
+            <a:r>
+              <a:rPr lang="en-US" altLang="ko-KR" sz="1400" dirty="0" err="1">
+                <a:latin typeface="KoPubWorld돋움체 Light" panose="00000300000000000000" pitchFamily="2" charset="-127"/>
+                <a:ea typeface="KoPubWorld돋움체 Light" panose="00000300000000000000" pitchFamily="2" charset="-127"/>
+                <a:cs typeface="KoPubWorld돋움체 Light" panose="00000300000000000000" pitchFamily="2" charset="-127"/>
+              </a:rPr>
+              <a:t>Meteo</a:t>
+            </a:r>
+            <a:r>
+              <a:rPr lang="en-US" altLang="ko-KR" sz="1400" dirty="0">
+                <a:latin typeface="KoPubWorld돋움체 Light" panose="00000300000000000000" pitchFamily="2" charset="-127"/>
+                <a:ea typeface="KoPubWorld돋움체 Light" panose="00000300000000000000" pitchFamily="2" charset="-127"/>
+                <a:cs typeface="KoPubWorld돋움체 Light" panose="00000300000000000000" pitchFamily="2" charset="-127"/>
+              </a:rPr>
+              <a:t> </a:t>
+            </a:r>
+            <a:r>
+              <a:rPr lang="ko-KR" altLang="en-US" sz="1400" dirty="0">
+                <a:latin typeface="KoPubWorld돋움체 Light" panose="00000300000000000000" pitchFamily="2" charset="-127"/>
+                <a:ea typeface="KoPubWorld돋움체 Light" panose="00000300000000000000" pitchFamily="2" charset="-127"/>
+                <a:cs typeface="KoPubWorld돋움체 Light" panose="00000300000000000000" pitchFamily="2" charset="-127"/>
+              </a:rPr>
+              <a:t>기상자료</a:t>
+            </a:r>
+            <a:r>
+              <a:rPr lang="en-US" altLang="ko-KR" sz="1400" dirty="0">
+                <a:latin typeface="KoPubWorld돋움체 Light" panose="00000300000000000000" pitchFamily="2" charset="-127"/>
+                <a:ea typeface="KoPubWorld돋움체 Light" panose="00000300000000000000" pitchFamily="2" charset="-127"/>
+                <a:cs typeface="KoPubWorld돋움체 Light" panose="00000300000000000000" pitchFamily="2" charset="-127"/>
+              </a:rPr>
+              <a:t>(</a:t>
+            </a:r>
+            <a:r>
+              <a:rPr lang="ko-KR" altLang="en-US" sz="1400" dirty="0">
+                <a:latin typeface="KoPubWorld돋움체 Light" panose="00000300000000000000" pitchFamily="2" charset="-127"/>
+                <a:ea typeface="KoPubWorld돋움체 Light" panose="00000300000000000000" pitchFamily="2" charset="-127"/>
+                <a:cs typeface="KoPubWorld돋움체 Light" panose="00000300000000000000" pitchFamily="2" charset="-127"/>
+              </a:rPr>
+              <a:t>한국</a:t>
+            </a:r>
+            <a:r>
+              <a:rPr lang="en-US" altLang="ko-KR" sz="1400" dirty="0">
+                <a:latin typeface="KoPubWorld돋움체 Light" panose="00000300000000000000" pitchFamily="2" charset="-127"/>
+                <a:ea typeface="KoPubWorld돋움체 Light" panose="00000300000000000000" pitchFamily="2" charset="-127"/>
+                <a:cs typeface="KoPubWorld돋움체 Light" panose="00000300000000000000" pitchFamily="2" charset="-127"/>
+              </a:rPr>
+              <a:t>), Windy </a:t>
+            </a:r>
+            <a:r>
+              <a:rPr lang="ko-KR" altLang="en-US" sz="1400" dirty="0">
+                <a:latin typeface="KoPubWorld돋움체 Light" panose="00000300000000000000" pitchFamily="2" charset="-127"/>
+                <a:ea typeface="KoPubWorld돋움체 Light" panose="00000300000000000000" pitchFamily="2" charset="-127"/>
+                <a:cs typeface="KoPubWorld돋움체 Light" panose="00000300000000000000" pitchFamily="2" charset="-127"/>
+              </a:rPr>
+              <a:t>기상자료</a:t>
+            </a:r>
+            <a:endParaRPr lang="en-US" altLang="ko-KR" sz="1400" dirty="0">
+              <a:latin typeface="KoPubWorld돋움체 Light" panose="00000300000000000000" pitchFamily="2" charset="-127"/>
+              <a:ea typeface="KoPubWorld돋움체 Light" panose="00000300000000000000" pitchFamily="2" charset="-127"/>
+              <a:cs typeface="KoPubWorld돋움체 Light" panose="00000300000000000000" pitchFamily="2" charset="-127"/>
+            </a:endParaRPr>
+          </a:p>
+          <a:p>
+            <a:pPr marL="180975">
+              <a:lnSpc>
+                <a:spcPct val="120000"/>
+              </a:lnSpc>
+              <a:spcBef>
+                <a:spcPct val="50000"/>
+              </a:spcBef>
+              <a:defRPr/>
+            </a:pPr>
+            <a:r>
+              <a:rPr lang="en-US" altLang="ko-KR" sz="1400" dirty="0">
+                <a:latin typeface="KoPubWorld돋움체 Light" panose="00000300000000000000" pitchFamily="2" charset="-127"/>
+                <a:ea typeface="KoPubWorld돋움체 Light" panose="00000300000000000000" pitchFamily="2" charset="-127"/>
+                <a:cs typeface="KoPubWorld돋움체 Light" panose="00000300000000000000" pitchFamily="2" charset="-127"/>
+              </a:rPr>
+              <a:t> - ~12, ~24, ~72</a:t>
+            </a:r>
+            <a:r>
+              <a:rPr lang="ko-KR" altLang="en-US" sz="1400" dirty="0">
+                <a:latin typeface="KoPubWorld돋움체 Light" panose="00000300000000000000" pitchFamily="2" charset="-127"/>
+                <a:ea typeface="KoPubWorld돋움체 Light" panose="00000300000000000000" pitchFamily="2" charset="-127"/>
+                <a:cs typeface="KoPubWorld돋움체 Light" panose="00000300000000000000" pitchFamily="2" charset="-127"/>
+              </a:rPr>
+              <a:t>시간 내 강수량 조회</a:t>
+            </a:r>
+            <a:endParaRPr lang="en-US" altLang="ko-KR" sz="1400" dirty="0">
+              <a:latin typeface="KoPubWorld돋움체 Light" panose="00000300000000000000" pitchFamily="2" charset="-127"/>
+              <a:ea typeface="KoPubWorld돋움체 Light" panose="00000300000000000000" pitchFamily="2" charset="-127"/>
+              <a:cs typeface="KoPubWorld돋움체 Light" panose="00000300000000000000" pitchFamily="2" charset="-127"/>
+            </a:endParaRPr>
+          </a:p>
+          <a:p>
+            <a:pPr marL="180975">
+              <a:lnSpc>
+                <a:spcPct val="120000"/>
+              </a:lnSpc>
+              <a:spcBef>
+                <a:spcPct val="50000"/>
+              </a:spcBef>
+              <a:defRPr/>
+            </a:pPr>
+            <a:r>
+              <a:rPr lang="en-US" altLang="ko-KR" sz="1400" dirty="0">
+                <a:latin typeface="KoPubWorld돋움체 Light" panose="00000300000000000000" pitchFamily="2" charset="-127"/>
+                <a:ea typeface="KoPubWorld돋움체 Light" panose="00000300000000000000" pitchFamily="2" charset="-127"/>
+                <a:cs typeface="KoPubWorld돋움체 Light" panose="00000300000000000000" pitchFamily="2" charset="-127"/>
+              </a:rPr>
+              <a:t> - </a:t>
+            </a:r>
+            <a:r>
+              <a:rPr lang="ko-KR" altLang="en-US" sz="1400" dirty="0">
+                <a:latin typeface="KoPubWorld돋움체 Light" panose="00000300000000000000" pitchFamily="2" charset="-127"/>
+                <a:ea typeface="KoPubWorld돋움체 Light" panose="00000300000000000000" pitchFamily="2" charset="-127"/>
+                <a:cs typeface="KoPubWorld돋움체 Light" panose="00000300000000000000" pitchFamily="2" charset="-127"/>
+              </a:rPr>
+              <a:t>최근 </a:t>
+            </a:r>
+            <a:r>
+              <a:rPr lang="en-US" altLang="ko-KR" sz="1400" dirty="0">
+                <a:latin typeface="KoPubWorld돋움체 Light" panose="00000300000000000000" pitchFamily="2" charset="-127"/>
+                <a:ea typeface="KoPubWorld돋움체 Light" panose="00000300000000000000" pitchFamily="2" charset="-127"/>
+                <a:cs typeface="KoPubWorld돋움체 Light" panose="00000300000000000000" pitchFamily="2" charset="-127"/>
+              </a:rPr>
+              <a:t>5</a:t>
+            </a:r>
+            <a:r>
+              <a:rPr lang="ko-KR" altLang="en-US" sz="1400" dirty="0">
+                <a:latin typeface="KoPubWorld돋움체 Light" panose="00000300000000000000" pitchFamily="2" charset="-127"/>
+                <a:ea typeface="KoPubWorld돋움체 Light" panose="00000300000000000000" pitchFamily="2" charset="-127"/>
+                <a:cs typeface="KoPubWorld돋움체 Light" panose="00000300000000000000" pitchFamily="2" charset="-127"/>
+              </a:rPr>
+              <a:t>회 강수 이력</a:t>
+            </a:r>
+            <a:r>
+              <a:rPr lang="en-US" altLang="ko-KR" sz="1400" dirty="0">
+                <a:latin typeface="KoPubWorld돋움체 Light" panose="00000300000000000000" pitchFamily="2" charset="-127"/>
+                <a:ea typeface="KoPubWorld돋움체 Light" panose="00000300000000000000" pitchFamily="2" charset="-127"/>
+                <a:cs typeface="KoPubWorld돋움체 Light" panose="00000300000000000000" pitchFamily="2" charset="-127"/>
+              </a:rPr>
+              <a:t> </a:t>
+            </a:r>
+            <a:r>
+              <a:rPr lang="ko-KR" altLang="en-US" sz="1400" dirty="0">
+                <a:latin typeface="KoPubWorld돋움체 Light" panose="00000300000000000000" pitchFamily="2" charset="-127"/>
+                <a:ea typeface="KoPubWorld돋움체 Light" panose="00000300000000000000" pitchFamily="2" charset="-127"/>
+                <a:cs typeface="KoPubWorld돋움체 Light" panose="00000300000000000000" pitchFamily="2" charset="-127"/>
+              </a:rPr>
+              <a:t>조회</a:t>
+            </a:r>
+            <a:r>
+              <a:rPr lang="en-US" altLang="ko-KR" sz="1400" dirty="0">
+                <a:latin typeface="KoPubWorld돋움체 Light" panose="00000300000000000000" pitchFamily="2" charset="-127"/>
+                <a:ea typeface="KoPubWorld돋움체 Light" panose="00000300000000000000" pitchFamily="2" charset="-127"/>
+                <a:cs typeface="KoPubWorld돋움체 Light" panose="00000300000000000000" pitchFamily="2" charset="-127"/>
+              </a:rPr>
+              <a:t> </a:t>
+            </a:r>
+          </a:p>
+          <a:p>
+            <a:pPr marL="180975">
+              <a:lnSpc>
+                <a:spcPct val="120000"/>
+              </a:lnSpc>
+              <a:spcBef>
+                <a:spcPct val="50000"/>
+              </a:spcBef>
+              <a:defRPr/>
+            </a:pPr>
+            <a:r>
+              <a:rPr lang="en-US" altLang="ko-KR" sz="1400" dirty="0">
+                <a:latin typeface="KoPubWorld돋움체 Light" panose="00000300000000000000" pitchFamily="2" charset="-127"/>
+                <a:ea typeface="KoPubWorld돋움체 Light" panose="00000300000000000000" pitchFamily="2" charset="-127"/>
+                <a:cs typeface="KoPubWorld돋움체 Light" panose="00000300000000000000" pitchFamily="2" charset="-127"/>
+              </a:rPr>
+              <a:t> - </a:t>
+            </a:r>
+            <a:r>
+              <a:rPr lang="ko-KR" altLang="en-US" sz="1400" dirty="0">
+                <a:latin typeface="KoPubWorld돋움체 Light" panose="00000300000000000000" pitchFamily="2" charset="-127"/>
+                <a:ea typeface="KoPubWorld돋움체 Light" panose="00000300000000000000" pitchFamily="2" charset="-127"/>
+                <a:cs typeface="KoPubWorld돋움체 Light" panose="00000300000000000000" pitchFamily="2" charset="-127"/>
+              </a:rPr>
+              <a:t>강우 시작시간 표시</a:t>
+            </a:r>
+            <a:endParaRPr lang="en-US" altLang="ko-KR" sz="1400" dirty="0">
+              <a:latin typeface="KoPubWorld돋움체 Light" panose="00000300000000000000" pitchFamily="2" charset="-127"/>
+              <a:ea typeface="KoPubWorld돋움체 Light" panose="00000300000000000000" pitchFamily="2" charset="-127"/>
+              <a:cs typeface="KoPubWorld돋움체 Light" panose="00000300000000000000" pitchFamily="2" charset="-127"/>
+            </a:endParaRPr>
+          </a:p>
+          <a:p>
+            <a:pPr marL="180975">
+              <a:lnSpc>
+                <a:spcPct val="120000"/>
+              </a:lnSpc>
+              <a:spcBef>
+                <a:spcPct val="50000"/>
+              </a:spcBef>
+              <a:defRPr/>
+            </a:pPr>
+            <a:r>
+              <a:rPr lang="en-US" altLang="ko-KR" sz="1400" dirty="0">
+                <a:latin typeface="KoPubWorld돋움체 Light" panose="00000300000000000000" pitchFamily="2" charset="-127"/>
+                <a:ea typeface="KoPubWorld돋움체 Light" panose="00000300000000000000" pitchFamily="2" charset="-127"/>
+                <a:cs typeface="KoPubWorld돋움체 Light" panose="00000300000000000000" pitchFamily="2" charset="-127"/>
+              </a:rPr>
+              <a:t> - </a:t>
+            </a:r>
+            <a:r>
+              <a:rPr lang="ko-KR" altLang="en-US" sz="1400" dirty="0">
+                <a:latin typeface="KoPubWorld돋움체 Light" panose="00000300000000000000" pitchFamily="2" charset="-127"/>
+                <a:ea typeface="KoPubWorld돋움체 Light" panose="00000300000000000000" pitchFamily="2" charset="-127"/>
+                <a:cs typeface="KoPubWorld돋움체 Light" panose="00000300000000000000" pitchFamily="2" charset="-127"/>
+              </a:rPr>
+              <a:t>모니터링 </a:t>
+            </a:r>
+            <a:r>
+              <a:rPr lang="ko-KR" altLang="en-US" sz="1400" dirty="0" err="1">
+                <a:latin typeface="KoPubWorld돋움체 Light" panose="00000300000000000000" pitchFamily="2" charset="-127"/>
+                <a:ea typeface="KoPubWorld돋움체 Light" panose="00000300000000000000" pitchFamily="2" charset="-127"/>
+                <a:cs typeface="KoPubWorld돋움체 Light" panose="00000300000000000000" pitchFamily="2" charset="-127"/>
+              </a:rPr>
+              <a:t>현황판</a:t>
+            </a:r>
+            <a:r>
+              <a:rPr lang="en-US" altLang="ko-KR" sz="1400" dirty="0">
+                <a:latin typeface="KoPubWorld돋움체 Light" panose="00000300000000000000" pitchFamily="2" charset="-127"/>
+                <a:ea typeface="KoPubWorld돋움체 Light" panose="00000300000000000000" pitchFamily="2" charset="-127"/>
+                <a:cs typeface="KoPubWorld돋움체 Light" panose="00000300000000000000" pitchFamily="2" charset="-127"/>
+              </a:rPr>
+              <a:t>: </a:t>
+            </a:r>
+            <a:r>
+              <a:rPr lang="ko-KR" altLang="en-US" sz="1400" dirty="0">
+                <a:latin typeface="KoPubWorld돋움체 Light" panose="00000300000000000000" pitchFamily="2" charset="-127"/>
+                <a:ea typeface="KoPubWorld돋움체 Light" panose="00000300000000000000" pitchFamily="2" charset="-127"/>
+                <a:cs typeface="KoPubWorld돋움체 Light" panose="00000300000000000000" pitchFamily="2" charset="-127"/>
+              </a:rPr>
+              <a:t>예상 총 강우량</a:t>
+            </a:r>
+            <a:r>
+              <a:rPr lang="en-US" altLang="ko-KR" sz="1400" dirty="0">
+                <a:latin typeface="KoPubWorld돋움체 Light" panose="00000300000000000000" pitchFamily="2" charset="-127"/>
+                <a:ea typeface="KoPubWorld돋움체 Light" panose="00000300000000000000" pitchFamily="2" charset="-127"/>
+                <a:cs typeface="KoPubWorld돋움체 Light" panose="00000300000000000000" pitchFamily="2" charset="-127"/>
+              </a:rPr>
+              <a:t>, </a:t>
+            </a:r>
+            <a:r>
+              <a:rPr lang="ko-KR" altLang="en-US" sz="1400" dirty="0">
+                <a:latin typeface="KoPubWorld돋움체 Light" panose="00000300000000000000" pitchFamily="2" charset="-127"/>
+                <a:ea typeface="KoPubWorld돋움체 Light" panose="00000300000000000000" pitchFamily="2" charset="-127"/>
+                <a:cs typeface="KoPubWorld돋움체 Light" panose="00000300000000000000" pitchFamily="2" charset="-127"/>
+              </a:rPr>
+              <a:t>현 누적 강수량</a:t>
+            </a:r>
+            <a:r>
+              <a:rPr lang="en-US" altLang="ko-KR" sz="1400" dirty="0">
+                <a:latin typeface="KoPubWorld돋움체 Light" panose="00000300000000000000" pitchFamily="2" charset="-127"/>
+                <a:ea typeface="KoPubWorld돋움체 Light" panose="00000300000000000000" pitchFamily="2" charset="-127"/>
+                <a:cs typeface="KoPubWorld돋움체 Light" panose="00000300000000000000" pitchFamily="2" charset="-127"/>
+              </a:rPr>
+              <a:t>, </a:t>
+            </a:r>
+            <a:r>
+              <a:rPr lang="ko-KR" altLang="en-US" sz="1400" dirty="0">
+                <a:latin typeface="KoPubWorld돋움체 Light" panose="00000300000000000000" pitchFamily="2" charset="-127"/>
+                <a:ea typeface="KoPubWorld돋움체 Light" panose="00000300000000000000" pitchFamily="2" charset="-127"/>
+                <a:cs typeface="KoPubWorld돋움체 Light" panose="00000300000000000000" pitchFamily="2" charset="-127"/>
+              </a:rPr>
+              <a:t>평균 강우강도 조회</a:t>
+            </a:r>
+            <a:endParaRPr lang="en-US" altLang="ko-KR" sz="1400" dirty="0">
+              <a:latin typeface="KoPubWorld돋움체 Light" panose="00000300000000000000" pitchFamily="2" charset="-127"/>
+              <a:ea typeface="KoPubWorld돋움체 Light" panose="00000300000000000000" pitchFamily="2" charset="-127"/>
+              <a:cs typeface="KoPubWorld돋움체 Light" panose="00000300000000000000" pitchFamily="2" charset="-127"/>
+            </a:endParaRPr>
+          </a:p>
+          <a:p>
+            <a:pPr marL="180975">
+              <a:lnSpc>
+                <a:spcPct val="120000"/>
+              </a:lnSpc>
+              <a:spcBef>
+                <a:spcPct val="50000"/>
+              </a:spcBef>
+              <a:defRPr/>
+            </a:pPr>
+            <a:r>
+              <a:rPr lang="en-US" altLang="ko-KR" sz="1400" dirty="0">
+                <a:latin typeface="KoPubWorld돋움체 Light" panose="00000300000000000000" pitchFamily="2" charset="-127"/>
+                <a:ea typeface="KoPubWorld돋움체 Light" panose="00000300000000000000" pitchFamily="2" charset="-127"/>
+                <a:cs typeface="KoPubWorld돋움체 Light" panose="00000300000000000000" pitchFamily="2" charset="-127"/>
+              </a:rPr>
+              <a:t> - </a:t>
+            </a:r>
+            <a:r>
+              <a:rPr lang="ko-KR" altLang="en-US" sz="1400" dirty="0">
+                <a:latin typeface="KoPubWorld돋움체 Light" panose="00000300000000000000" pitchFamily="2" charset="-127"/>
+                <a:ea typeface="KoPubWorld돋움체 Light" panose="00000300000000000000" pitchFamily="2" charset="-127"/>
+                <a:cs typeface="KoPubWorld돋움체 Light" panose="00000300000000000000" pitchFamily="2" charset="-127"/>
+              </a:rPr>
+              <a:t>지도 내 기상 레이더 표시</a:t>
+            </a:r>
+            <a:r>
+              <a:rPr lang="en-US" altLang="ko-KR" sz="1400" dirty="0">
+                <a:latin typeface="KoPubWorld돋움체 Light" panose="00000300000000000000" pitchFamily="2" charset="-127"/>
+                <a:ea typeface="KoPubWorld돋움체 Light" panose="00000300000000000000" pitchFamily="2" charset="-127"/>
+                <a:cs typeface="KoPubWorld돋움체 Light" panose="00000300000000000000" pitchFamily="2" charset="-127"/>
+              </a:rPr>
+              <a:t>(</a:t>
+            </a:r>
+            <a:r>
+              <a:rPr lang="ko-KR" altLang="en-US" sz="1400" dirty="0">
+                <a:latin typeface="KoPubWorld돋움체 Light" panose="00000300000000000000" pitchFamily="2" charset="-127"/>
+                <a:ea typeface="KoPubWorld돋움체 Light" panose="00000300000000000000" pitchFamily="2" charset="-127"/>
+                <a:cs typeface="KoPubWorld돋움체 Light" panose="00000300000000000000" pitchFamily="2" charset="-127"/>
+              </a:rPr>
+              <a:t>기상청</a:t>
+            </a:r>
+            <a:r>
+              <a:rPr lang="en-US" altLang="ko-KR" sz="1400" dirty="0">
+                <a:latin typeface="KoPubWorld돋움체 Light" panose="00000300000000000000" pitchFamily="2" charset="-127"/>
+                <a:ea typeface="KoPubWorld돋움체 Light" panose="00000300000000000000" pitchFamily="2" charset="-127"/>
+                <a:cs typeface="KoPubWorld돋움체 Light" panose="00000300000000000000" pitchFamily="2" charset="-127"/>
+              </a:rPr>
+              <a:t>), Windy </a:t>
+            </a:r>
+            <a:r>
+              <a:rPr lang="ko-KR" altLang="en-US" sz="1400" dirty="0">
+                <a:latin typeface="KoPubWorld돋움체 Light" panose="00000300000000000000" pitchFamily="2" charset="-127"/>
+                <a:ea typeface="KoPubWorld돋움체 Light" panose="00000300000000000000" pitchFamily="2" charset="-127"/>
+                <a:cs typeface="KoPubWorld돋움체 Light" panose="00000300000000000000" pitchFamily="2" charset="-127"/>
+              </a:rPr>
+              <a:t>레이더 표시</a:t>
+            </a:r>
+            <a:endParaRPr lang="en-US" altLang="ko-KR" sz="1400" dirty="0">
+              <a:latin typeface="KoPubWorld돋움체 Light" panose="00000300000000000000" pitchFamily="2" charset="-127"/>
+              <a:ea typeface="KoPubWorld돋움체 Light" panose="00000300000000000000" pitchFamily="2" charset="-127"/>
+              <a:cs typeface="KoPubWorld돋움체 Light" panose="00000300000000000000" pitchFamily="2" charset="-127"/>
+            </a:endParaRPr>
           </a:p>
           <a:p>
             <a:pPr marL="285750" indent="-104775">
@@ -4542,7 +5500,87 @@
                 <a:ea typeface="KoPubWorld돋움체 Light" panose="00000300000000000000" pitchFamily="2" charset="-127"/>
                 <a:cs typeface="KoPubWorld돋움체 Light" panose="00000300000000000000" pitchFamily="2" charset="-127"/>
               </a:rPr>
-              <a:t> 2</a:t>
+              <a:t> (</a:t>
+            </a:r>
+            <a:r>
+              <a:rPr lang="ko-KR" altLang="en-US" sz="1400" b="1" dirty="0">
+                <a:latin typeface="KoPubWorld돋움체 Light" panose="00000300000000000000" pitchFamily="2" charset="-127"/>
+                <a:ea typeface="KoPubWorld돋움체 Light" panose="00000300000000000000" pitchFamily="2" charset="-127"/>
+                <a:cs typeface="KoPubWorld돋움체 Light" panose="00000300000000000000" pitchFamily="2" charset="-127"/>
+              </a:rPr>
+              <a:t>수질자료</a:t>
+            </a:r>
+            <a:r>
+              <a:rPr lang="en-US" altLang="ko-KR" sz="1400" b="1" dirty="0">
+                <a:latin typeface="KoPubWorld돋움체 Light" panose="00000300000000000000" pitchFamily="2" charset="-127"/>
+                <a:ea typeface="KoPubWorld돋움체 Light" panose="00000300000000000000" pitchFamily="2" charset="-127"/>
+                <a:cs typeface="KoPubWorld돋움체 Light" panose="00000300000000000000" pitchFamily="2" charset="-127"/>
+              </a:rPr>
+              <a:t>) </a:t>
+            </a:r>
+            <a:r>
+              <a:rPr lang="ko-KR" altLang="en-US" sz="1400" b="1" dirty="0">
+                <a:latin typeface="KoPubWorld돋움체 Light" panose="00000300000000000000" pitchFamily="2" charset="-127"/>
+                <a:ea typeface="KoPubWorld돋움체 Light" panose="00000300000000000000" pitchFamily="2" charset="-127"/>
+                <a:cs typeface="KoPubWorld돋움체 Light" panose="00000300000000000000" pitchFamily="2" charset="-127"/>
+              </a:rPr>
+              <a:t>물환경정보시스템 </a:t>
+            </a:r>
+            <a:r>
+              <a:rPr lang="en-US" altLang="ko-KR" sz="1400" b="1" dirty="0">
+                <a:latin typeface="KoPubWorld돋움체 Light" panose="00000300000000000000" pitchFamily="2" charset="-127"/>
+                <a:ea typeface="KoPubWorld돋움체 Light" panose="00000300000000000000" pitchFamily="2" charset="-127"/>
+                <a:cs typeface="KoPubWorld돋움체 Light" panose="00000300000000000000" pitchFamily="2" charset="-127"/>
+              </a:rPr>
+              <a:t>API </a:t>
+            </a:r>
+            <a:r>
+              <a:rPr lang="ko-KR" altLang="en-US" sz="1400" b="1" dirty="0">
+                <a:latin typeface="KoPubWorld돋움체 Light" panose="00000300000000000000" pitchFamily="2" charset="-127"/>
+                <a:ea typeface="KoPubWorld돋움체 Light" panose="00000300000000000000" pitchFamily="2" charset="-127"/>
+                <a:cs typeface="KoPubWorld돋움체 Light" panose="00000300000000000000" pitchFamily="2" charset="-127"/>
+              </a:rPr>
+              <a:t>데이터</a:t>
+            </a:r>
+            <a:endParaRPr lang="en-US" altLang="ko-KR" sz="1400" b="1" dirty="0">
+              <a:latin typeface="KoPubWorld돋움체 Light" panose="00000300000000000000" pitchFamily="2" charset="-127"/>
+              <a:ea typeface="KoPubWorld돋움체 Light" panose="00000300000000000000" pitchFamily="2" charset="-127"/>
+              <a:cs typeface="KoPubWorld돋움체 Light" panose="00000300000000000000" pitchFamily="2" charset="-127"/>
+            </a:endParaRPr>
+          </a:p>
+          <a:p>
+            <a:pPr marL="180975">
+              <a:lnSpc>
+                <a:spcPct val="120000"/>
+              </a:lnSpc>
+              <a:spcBef>
+                <a:spcPct val="50000"/>
+              </a:spcBef>
+              <a:defRPr/>
+            </a:pPr>
+            <a:r>
+              <a:rPr lang="en-US" altLang="ko-KR" sz="1400" dirty="0">
+                <a:latin typeface="KoPubWorld돋움체 Light" panose="00000300000000000000" pitchFamily="2" charset="-127"/>
+                <a:ea typeface="KoPubWorld돋움체 Light" panose="00000300000000000000" pitchFamily="2" charset="-127"/>
+                <a:cs typeface="KoPubWorld돋움체 Light" panose="00000300000000000000" pitchFamily="2" charset="-127"/>
+              </a:rPr>
+              <a:t> - </a:t>
+            </a:r>
+            <a:r>
+              <a:rPr lang="ko-KR" altLang="en-US" sz="1400" dirty="0">
+                <a:latin typeface="KoPubWorld돋움체 Light" panose="00000300000000000000" pitchFamily="2" charset="-127"/>
+                <a:ea typeface="KoPubWorld돋움체 Light" panose="00000300000000000000" pitchFamily="2" charset="-127"/>
+                <a:cs typeface="KoPubWorld돋움체 Light" panose="00000300000000000000" pitchFamily="2" charset="-127"/>
+              </a:rPr>
+              <a:t>수질측정망 최근 자료 조회 기능</a:t>
+            </a:r>
+            <a:r>
+              <a:rPr lang="en-US" altLang="ko-KR" sz="1400" dirty="0">
+                <a:latin typeface="KoPubWorld돋움체 Light" panose="00000300000000000000" pitchFamily="2" charset="-127"/>
+                <a:ea typeface="KoPubWorld돋움체 Light" panose="00000300000000000000" pitchFamily="2" charset="-127"/>
+                <a:cs typeface="KoPubWorld돋움체 Light" panose="00000300000000000000" pitchFamily="2" charset="-127"/>
+              </a:rPr>
+              <a:t>(TOC, BOD, T-P)</a:t>
             </a:r>
           </a:p>
           <a:p>
@@ -4563,8 +5601,239 @@
                 <a:ea typeface="KoPubWorld돋움체 Light" panose="00000300000000000000" pitchFamily="2" charset="-127"/>
                 <a:cs typeface="KoPubWorld돋움체 Light" panose="00000300000000000000" pitchFamily="2" charset="-127"/>
               </a:rPr>
-              <a:t> 3</a:t>
-            </a:r>
+              <a:t> (</a:t>
+            </a:r>
+            <a:r>
+              <a:rPr lang="ko-KR" altLang="en-US" sz="1400" b="1" dirty="0">
+                <a:latin typeface="KoPubWorld돋움체 Light" panose="00000300000000000000" pitchFamily="2" charset="-127"/>
+                <a:ea typeface="KoPubWorld돋움체 Light" panose="00000300000000000000" pitchFamily="2" charset="-127"/>
+                <a:cs typeface="KoPubWorld돋움체 Light" panose="00000300000000000000" pitchFamily="2" charset="-127"/>
+              </a:rPr>
+              <a:t>수위자료</a:t>
+            </a:r>
+            <a:r>
+              <a:rPr lang="en-US" altLang="ko-KR" sz="1400" b="1" dirty="0">
+                <a:latin typeface="KoPubWorld돋움체 Light" panose="00000300000000000000" pitchFamily="2" charset="-127"/>
+                <a:ea typeface="KoPubWorld돋움체 Light" panose="00000300000000000000" pitchFamily="2" charset="-127"/>
+                <a:cs typeface="KoPubWorld돋움체 Light" panose="00000300000000000000" pitchFamily="2" charset="-127"/>
+              </a:rPr>
+              <a:t>) </a:t>
+            </a:r>
+            <a:r>
+              <a:rPr lang="ko-KR" altLang="en-US" sz="1400" b="1" dirty="0" err="1">
+                <a:latin typeface="KoPubWorld돋움체 Light" panose="00000300000000000000" pitchFamily="2" charset="-127"/>
+                <a:ea typeface="KoPubWorld돋움체 Light" panose="00000300000000000000" pitchFamily="2" charset="-127"/>
+                <a:cs typeface="KoPubWorld돋움체 Light" panose="00000300000000000000" pitchFamily="2" charset="-127"/>
+              </a:rPr>
+              <a:t>한강홍수통제소</a:t>
+            </a:r>
+            <a:r>
+              <a:rPr lang="ko-KR" altLang="en-US" sz="1400" b="1" dirty="0">
+                <a:latin typeface="KoPubWorld돋움체 Light" panose="00000300000000000000" pitchFamily="2" charset="-127"/>
+                <a:ea typeface="KoPubWorld돋움체 Light" panose="00000300000000000000" pitchFamily="2" charset="-127"/>
+                <a:cs typeface="KoPubWorld돋움체 Light" panose="00000300000000000000" pitchFamily="2" charset="-127"/>
+              </a:rPr>
+              <a:t> </a:t>
+            </a:r>
+            <a:r>
+              <a:rPr lang="en-US" altLang="ko-KR" sz="1400" b="1" dirty="0">
+                <a:latin typeface="KoPubWorld돋움체 Light" panose="00000300000000000000" pitchFamily="2" charset="-127"/>
+                <a:ea typeface="KoPubWorld돋움체 Light" panose="00000300000000000000" pitchFamily="2" charset="-127"/>
+                <a:cs typeface="KoPubWorld돋움체 Light" panose="00000300000000000000" pitchFamily="2" charset="-127"/>
+              </a:rPr>
+              <a:t>API </a:t>
+            </a:r>
+            <a:r>
+              <a:rPr lang="ko-KR" altLang="en-US" sz="1400" b="1" dirty="0">
+                <a:latin typeface="KoPubWorld돋움체 Light" panose="00000300000000000000" pitchFamily="2" charset="-127"/>
+                <a:ea typeface="KoPubWorld돋움체 Light" panose="00000300000000000000" pitchFamily="2" charset="-127"/>
+                <a:cs typeface="KoPubWorld돋움체 Light" panose="00000300000000000000" pitchFamily="2" charset="-127"/>
+              </a:rPr>
+              <a:t>데이터</a:t>
+            </a:r>
+            <a:endParaRPr lang="en-US" altLang="ko-KR" sz="1400" b="1" dirty="0">
+              <a:latin typeface="KoPubWorld돋움체 Light" panose="00000300000000000000" pitchFamily="2" charset="-127"/>
+              <a:ea typeface="KoPubWorld돋움체 Light" panose="00000300000000000000" pitchFamily="2" charset="-127"/>
+              <a:cs typeface="KoPubWorld돋움체 Light" panose="00000300000000000000" pitchFamily="2" charset="-127"/>
+            </a:endParaRPr>
+          </a:p>
+          <a:p>
+            <a:pPr marL="180975">
+              <a:lnSpc>
+                <a:spcPct val="120000"/>
+              </a:lnSpc>
+              <a:spcBef>
+                <a:spcPct val="50000"/>
+              </a:spcBef>
+              <a:defRPr/>
+            </a:pPr>
+            <a:r>
+              <a:rPr lang="en-US" altLang="ko-KR" sz="1400" dirty="0">
+                <a:latin typeface="KoPubWorld돋움체 Light" panose="00000300000000000000" pitchFamily="2" charset="-127"/>
+                <a:ea typeface="KoPubWorld돋움체 Light" panose="00000300000000000000" pitchFamily="2" charset="-127"/>
+                <a:cs typeface="KoPubWorld돋움체 Light" panose="00000300000000000000" pitchFamily="2" charset="-127"/>
+              </a:rPr>
+              <a:t> - </a:t>
+            </a:r>
+            <a:r>
+              <a:rPr lang="ko-KR" altLang="en-US" sz="1400" dirty="0">
+                <a:latin typeface="KoPubWorld돋움체 Light" panose="00000300000000000000" pitchFamily="2" charset="-127"/>
+                <a:ea typeface="KoPubWorld돋움체 Light" panose="00000300000000000000" pitchFamily="2" charset="-127"/>
+                <a:cs typeface="KoPubWorld돋움체 Light" panose="00000300000000000000" pitchFamily="2" charset="-127"/>
+              </a:rPr>
+              <a:t>수위 측정지점</a:t>
+            </a:r>
+            <a:r>
+              <a:rPr lang="en-US" altLang="ko-KR" sz="1400" dirty="0">
+                <a:latin typeface="KoPubWorld돋움체 Light" panose="00000300000000000000" pitchFamily="2" charset="-127"/>
+                <a:ea typeface="KoPubWorld돋움체 Light" panose="00000300000000000000" pitchFamily="2" charset="-127"/>
+                <a:cs typeface="KoPubWorld돋움체 Light" panose="00000300000000000000" pitchFamily="2" charset="-127"/>
+              </a:rPr>
+              <a:t> </a:t>
+            </a:r>
+            <a:r>
+              <a:rPr lang="ko-KR" altLang="en-US" sz="1400" dirty="0">
+                <a:latin typeface="KoPubWorld돋움체 Light" panose="00000300000000000000" pitchFamily="2" charset="-127"/>
+                <a:ea typeface="KoPubWorld돋움체 Light" panose="00000300000000000000" pitchFamily="2" charset="-127"/>
+                <a:cs typeface="KoPubWorld돋움체 Light" panose="00000300000000000000" pitchFamily="2" charset="-127"/>
+              </a:rPr>
+              <a:t>해발 수위 및 유량 조회 기능</a:t>
+            </a:r>
+            <a:endParaRPr lang="en-US" altLang="ko-KR" sz="1400" dirty="0">
+              <a:latin typeface="KoPubWorld돋움체 Light" panose="00000300000000000000" pitchFamily="2" charset="-127"/>
+              <a:ea typeface="KoPubWorld돋움체 Light" panose="00000300000000000000" pitchFamily="2" charset="-127"/>
+              <a:cs typeface="KoPubWorld돋움체 Light" panose="00000300000000000000" pitchFamily="2" charset="-127"/>
+            </a:endParaRPr>
+          </a:p>
+          <a:p>
+            <a:pPr marL="285750" indent="-104775">
+              <a:lnSpc>
+                <a:spcPct val="120000"/>
+              </a:lnSpc>
+              <a:spcBef>
+                <a:spcPct val="50000"/>
+              </a:spcBef>
+              <a:buFont typeface="Arial" panose="020B0604020202020204" pitchFamily="34" charset="0"/>
+              <a:buChar char="•"/>
+              <a:defRPr/>
+            </a:pPr>
+            <a:r>
+              <a:rPr lang="ko-KR" altLang="en-US" sz="1400" b="1" dirty="0">
+                <a:latin typeface="KoPubWorld돋움체 Light" panose="00000300000000000000" pitchFamily="2" charset="-127"/>
+                <a:ea typeface="KoPubWorld돋움체 Light" panose="00000300000000000000" pitchFamily="2" charset="-127"/>
+                <a:cs typeface="KoPubWorld돋움체 Light" panose="00000300000000000000" pitchFamily="2" charset="-127"/>
+              </a:rPr>
+              <a:t> </a:t>
+            </a:r>
+            <a:r>
+              <a:rPr lang="en-US" altLang="ko-KR" sz="1400" b="1" dirty="0">
+                <a:latin typeface="KoPubWorld돋움체 Light" panose="00000300000000000000" pitchFamily="2" charset="-127"/>
+                <a:ea typeface="KoPubWorld돋움체 Light" panose="00000300000000000000" pitchFamily="2" charset="-127"/>
+                <a:cs typeface="KoPubWorld돋움체 Light" panose="00000300000000000000" pitchFamily="2" charset="-127"/>
+              </a:rPr>
+              <a:t>(</a:t>
+            </a:r>
+            <a:r>
+              <a:rPr lang="ko-KR" altLang="en-US" sz="1400" b="1" dirty="0">
+                <a:latin typeface="KoPubWorld돋움체 Light" panose="00000300000000000000" pitchFamily="2" charset="-127"/>
+                <a:ea typeface="KoPubWorld돋움체 Light" panose="00000300000000000000" pitchFamily="2" charset="-127"/>
+                <a:cs typeface="KoPubWorld돋움체 Light" panose="00000300000000000000" pitchFamily="2" charset="-127"/>
+              </a:rPr>
+              <a:t>지도</a:t>
+            </a:r>
+            <a:r>
+              <a:rPr lang="en-US" altLang="ko-KR" sz="1400" b="1" dirty="0">
+                <a:latin typeface="KoPubWorld돋움체 Light" panose="00000300000000000000" pitchFamily="2" charset="-127"/>
+                <a:ea typeface="KoPubWorld돋움체 Light" panose="00000300000000000000" pitchFamily="2" charset="-127"/>
+                <a:cs typeface="KoPubWorld돋움체 Light" panose="00000300000000000000" pitchFamily="2" charset="-127"/>
+              </a:rPr>
+              <a:t>) </a:t>
+            </a:r>
+            <a:r>
+              <a:rPr lang="ko-KR" altLang="en-US" sz="1400" b="1" dirty="0" err="1">
+                <a:latin typeface="KoPubWorld돋움체 Light" panose="00000300000000000000" pitchFamily="2" charset="-127"/>
+                <a:ea typeface="KoPubWorld돋움체 Light" panose="00000300000000000000" pitchFamily="2" charset="-127"/>
+                <a:cs typeface="KoPubWorld돋움체 Light" panose="00000300000000000000" pitchFamily="2" charset="-127"/>
+              </a:rPr>
+              <a:t>브이월드</a:t>
+            </a:r>
+            <a:r>
+              <a:rPr lang="en-US" altLang="ko-KR" sz="1400" b="1" dirty="0">
+                <a:latin typeface="KoPubWorld돋움체 Light" panose="00000300000000000000" pitchFamily="2" charset="-127"/>
+                <a:ea typeface="KoPubWorld돋움체 Light" panose="00000300000000000000" pitchFamily="2" charset="-127"/>
+                <a:cs typeface="KoPubWorld돋움체 Light" panose="00000300000000000000" pitchFamily="2" charset="-127"/>
+              </a:rPr>
+              <a:t>,</a:t>
+            </a:r>
+            <a:r>
+              <a:rPr lang="ko-KR" altLang="en-US" sz="1400" b="1" dirty="0">
+                <a:latin typeface="KoPubWorld돋움체 Light" panose="00000300000000000000" pitchFamily="2" charset="-127"/>
+                <a:ea typeface="KoPubWorld돋움체 Light" panose="00000300000000000000" pitchFamily="2" charset="-127"/>
+                <a:cs typeface="KoPubWorld돋움체 Light" panose="00000300000000000000" pitchFamily="2" charset="-127"/>
+              </a:rPr>
+              <a:t> </a:t>
+            </a:r>
+            <a:r>
+              <a:rPr lang="en-US" altLang="ko-KR" sz="1400" b="1" dirty="0" err="1">
+                <a:latin typeface="KoPubWorld돋움체 Light" panose="00000300000000000000" pitchFamily="2" charset="-127"/>
+                <a:ea typeface="KoPubWorld돋움체 Light" panose="00000300000000000000" pitchFamily="2" charset="-127"/>
+                <a:cs typeface="KoPubWorld돋움체 Light" panose="00000300000000000000" pitchFamily="2" charset="-127"/>
+              </a:rPr>
+              <a:t>Openstreetmap</a:t>
+            </a:r>
+            <a:endParaRPr lang="en-US" altLang="ko-KR" sz="1400" b="1" dirty="0">
+              <a:latin typeface="KoPubWorld돋움체 Light" panose="00000300000000000000" pitchFamily="2" charset="-127"/>
+              <a:ea typeface="KoPubWorld돋움체 Light" panose="00000300000000000000" pitchFamily="2" charset="-127"/>
+              <a:cs typeface="KoPubWorld돋움체 Light" panose="00000300000000000000" pitchFamily="2" charset="-127"/>
+            </a:endParaRPr>
+          </a:p>
+          <a:p>
+            <a:pPr marL="180975">
+              <a:lnSpc>
+                <a:spcPct val="120000"/>
+              </a:lnSpc>
+              <a:spcBef>
+                <a:spcPct val="50000"/>
+              </a:spcBef>
+              <a:defRPr/>
+            </a:pPr>
+            <a:r>
+              <a:rPr lang="en-US" altLang="ko-KR" sz="1400" dirty="0">
+                <a:latin typeface="KoPubWorld돋움체 Light" panose="00000300000000000000" pitchFamily="2" charset="-127"/>
+                <a:ea typeface="KoPubWorld돋움체 Light" panose="00000300000000000000" pitchFamily="2" charset="-127"/>
+                <a:cs typeface="KoPubWorld돋움체 Light" panose="00000300000000000000" pitchFamily="2" charset="-127"/>
+              </a:rPr>
+              <a:t> - </a:t>
+            </a:r>
+            <a:r>
+              <a:rPr lang="ko-KR" altLang="en-US" sz="1400" dirty="0">
+                <a:latin typeface="KoPubWorld돋움체 Light" panose="00000300000000000000" pitchFamily="2" charset="-127"/>
+                <a:ea typeface="KoPubWorld돋움체 Light" panose="00000300000000000000" pitchFamily="2" charset="-127"/>
+                <a:cs typeface="KoPubWorld돋움체 Light" panose="00000300000000000000" pitchFamily="2" charset="-127"/>
+              </a:rPr>
+              <a:t>좌표기반 즐겨찾기 지점 표시</a:t>
+            </a:r>
+            <a:endParaRPr lang="en-US" altLang="ko-KR" sz="1400" dirty="0">
+              <a:latin typeface="KoPubWorld돋움체 Light" panose="00000300000000000000" pitchFamily="2" charset="-127"/>
+              <a:ea typeface="KoPubWorld돋움체 Light" panose="00000300000000000000" pitchFamily="2" charset="-127"/>
+              <a:cs typeface="KoPubWorld돋움체 Light" panose="00000300000000000000" pitchFamily="2" charset="-127"/>
+            </a:endParaRPr>
+          </a:p>
+          <a:p>
+            <a:pPr marL="180975">
+              <a:lnSpc>
+                <a:spcPct val="120000"/>
+              </a:lnSpc>
+              <a:spcBef>
+                <a:spcPct val="50000"/>
+              </a:spcBef>
+              <a:defRPr/>
+            </a:pPr>
+            <a:endParaRPr lang="en-US" altLang="ko-KR" sz="1400" dirty="0">
+              <a:latin typeface="KoPubWorld돋움체 Light" panose="00000300000000000000" pitchFamily="2" charset="-127"/>
+              <a:ea typeface="KoPubWorld돋움체 Light" panose="00000300000000000000" pitchFamily="2" charset="-127"/>
+              <a:cs typeface="KoPubWorld돋움체 Light" panose="00000300000000000000" pitchFamily="2" charset="-127"/>
+            </a:endParaRPr>
           </a:p>
           <a:p>
             <a:pPr>
@@ -4576,7 +5845,7 @@
               </a:spcBef>
               <a:defRPr/>
             </a:pPr>
-            <a:endParaRPr lang="ko-KR" altLang="en-US" sz="1400" b="1" dirty="0">
+            <a:endParaRPr lang="ko-KR" altLang="en-US" sz="1400" dirty="0">
               <a:latin typeface="KoPubWorld돋움체 Light" panose="00000300000000000000" pitchFamily="2" charset="-127"/>
               <a:ea typeface="KoPubWorld돋움체 Light" panose="00000300000000000000" pitchFamily="2" charset="-127"/>
               <a:cs typeface="KoPubWorld돋움체 Light" panose="00000300000000000000" pitchFamily="2" charset="-127"/>
@@ -4584,10 +5853,40 @@
           </a:p>
         </p:txBody>
       </p:sp>
+      <p:pic>
+        <p:nvPicPr>
+          <p:cNvPr id="3" name="그림 2">
+            <a:extLst>
+              <a:ext uri="{FF2B5EF4-FFF2-40B4-BE49-F238E27FC236}">
+                <a16:creationId xmlns:a16="http://schemas.microsoft.com/office/drawing/2014/main" id="{68975FA1-52E0-D2E1-B4F9-21C2DAE44B41}"/>
+              </a:ext>
+            </a:extLst>
+          </p:cNvPr>
+          <p:cNvPicPr>
+            <a:picLocks noChangeAspect="1"/>
+          </p:cNvPicPr>
+          <p:nvPr/>
+        </p:nvPicPr>
+        <p:blipFill>
+          <a:blip r:embed="rId3"/>
+          <a:stretch>
+            <a:fillRect/>
+          </a:stretch>
+        </p:blipFill>
+        <p:spPr>
+          <a:xfrm>
+            <a:off x="6073868" y="2407025"/>
+            <a:ext cx="2340510" cy="3607453"/>
+          </a:xfrm>
+          <a:prstGeom prst="rect">
+            <a:avLst/>
+          </a:prstGeom>
+        </p:spPr>
+      </p:pic>
     </p:spTree>
     <p:extLst>
       <p:ext uri="{BB962C8B-B14F-4D97-AF65-F5344CB8AC3E}">
-        <p14:creationId xmlns:p14="http://schemas.microsoft.com/office/powerpoint/2010/main" val="2235330515"/>
+        <p14:creationId xmlns:p14="http://schemas.microsoft.com/office/powerpoint/2010/main" val="803362818"/>
       </p:ext>
     </p:extLst>
   </p:cSld>
@@ -4597,7 +5896,7 @@
 </p:sld>
 </file>
 
-<file path=ppt/slides/slide5.xml><?xml version="1.0" encoding="utf-8"?>
+<file path=ppt/slides/slide7.xml><?xml version="1.0" encoding="utf-8"?>
 <p:sld xmlns:a="http://schemas.openxmlformats.org/drawingml/2006/main" xmlns:r="http://schemas.openxmlformats.org/officeDocument/2006/relationships" xmlns:p="http://schemas.openxmlformats.org/presentationml/2006/main">
   <p:cSld>
     <p:spTree>
@@ -4629,7 +5928,7 @@
         <p:spPr>
           <a:xfrm>
             <a:off x="838393" y="924599"/>
-            <a:ext cx="1059906" cy="369332"/>
+            <a:ext cx="1531188" cy="369332"/>
           </a:xfrm>
           <a:prstGeom prst="rect">
             <a:avLst/>
@@ -4649,7 +5948,7 @@
                 <a:latin typeface="KoPubWorld돋움체 Medium" panose="00000600000000000000" pitchFamily="2" charset="-127"/>
                 <a:ea typeface="KoPubWorld돋움체 Medium" panose="00000600000000000000" pitchFamily="2" charset="-127"/>
               </a:rPr>
-              <a:t>개발 도구</a:t>
+              <a:t>한계 및 리스크</a:t>
             </a:r>
           </a:p>
         </p:txBody>
@@ -4825,7 +6124,7 @@
                 <a:ea typeface="KoPubWorld돋움체 Medium" panose="00000600000000000000" pitchFamily="2" charset="-127"/>
                 <a:cs typeface="KoPubWorld돋움체 Medium" panose="00000600000000000000" pitchFamily="2" charset="-127"/>
               </a:rPr>
-              <a:t>1.3 </a:t>
+              <a:t>1.6 </a:t>
             </a:r>
             <a:r>
               <a:rPr lang="ko-KR" altLang="en-US" sz="2800" b="1" dirty="0">
@@ -4836,7 +6135,7 @@
                 <a:ea typeface="KoPubWorld돋움체 Medium" panose="00000600000000000000" pitchFamily="2" charset="-127"/>
                 <a:cs typeface="KoPubWorld돋움체 Medium" panose="00000600000000000000" pitchFamily="2" charset="-127"/>
               </a:rPr>
-              <a:t>활용도구</a:t>
+              <a:t>한계 및 리스크</a:t>
             </a:r>
           </a:p>
         </p:txBody>
@@ -4951,7 +6250,7 @@
                 <a:ea typeface="KoPubWorld돋움체 Light" panose="00000300000000000000" pitchFamily="2" charset="-127"/>
                 <a:cs typeface="KoPubWorld돋움체 Light" panose="00000300000000000000" pitchFamily="2" charset="-127"/>
               </a:rPr>
-              <a:t> (Google Antigravity)</a:t>
+              <a:t> 1, 2</a:t>
             </a:r>
           </a:p>
           <a:p>
@@ -5035,10 +6334,305 @@
           </a:p>
         </p:txBody>
       </p:sp>
+      <p:sp>
+        <p:nvSpPr>
+          <p:cNvPr id="2" name="직사각형 1">
+            <a:extLst>
+              <a:ext uri="{FF2B5EF4-FFF2-40B4-BE49-F238E27FC236}">
+                <a16:creationId xmlns:a16="http://schemas.microsoft.com/office/drawing/2014/main" id="{A85F55C1-D2B6-7511-C595-22826FC91043}"/>
+              </a:ext>
+            </a:extLst>
+          </p:cNvPr>
+          <p:cNvSpPr/>
+          <p:nvPr/>
+        </p:nvSpPr>
+        <p:spPr>
+          <a:xfrm>
+            <a:off x="838393" y="3800476"/>
+            <a:ext cx="1733167" cy="369332"/>
+          </a:xfrm>
+          <a:prstGeom prst="rect">
+            <a:avLst/>
+          </a:prstGeom>
+        </p:spPr>
+        <p:txBody>
+          <a:bodyPr wrap="none">
+            <a:spAutoFit/>
+          </a:bodyPr>
+          <a:lstStyle/>
+          <a:p>
+            <a:r>
+              <a:rPr lang="ko-KR" altLang="en-US" b="1" dirty="0">
+                <a:solidFill>
+                  <a:srgbClr val="002060"/>
+                </a:solidFill>
+                <a:latin typeface="KoPubWorld돋움체 Medium" panose="00000600000000000000" pitchFamily="2" charset="-127"/>
+                <a:ea typeface="KoPubWorld돋움체 Medium" panose="00000600000000000000" pitchFamily="2" charset="-127"/>
+              </a:rPr>
+              <a:t>배포 가능성 검토</a:t>
+            </a:r>
+          </a:p>
+        </p:txBody>
+      </p:sp>
+      <p:pic>
+        <p:nvPicPr>
+          <p:cNvPr id="3" name="Picture 5" descr="그림3">
+            <a:extLst>
+              <a:ext uri="{FF2B5EF4-FFF2-40B4-BE49-F238E27FC236}">
+                <a16:creationId xmlns:a16="http://schemas.microsoft.com/office/drawing/2014/main" id="{7A1F29F3-6999-3632-CAEE-D296271A883E}"/>
+              </a:ext>
+            </a:extLst>
+          </p:cNvPr>
+          <p:cNvPicPr>
+            <a:picLocks noChangeAspect="1" noChangeArrowheads="1"/>
+          </p:cNvPicPr>
+          <p:nvPr/>
+        </p:nvPicPr>
+        <p:blipFill>
+          <a:blip r:embed="rId2" cstate="print">
+            <a:lum contrast="6000"/>
+            <a:extLst>
+              <a:ext uri="{28A0092B-C50C-407E-A947-70E740481C1C}">
+                <a14:useLocalDpi xmlns:a14="http://schemas.microsoft.com/office/drawing/2010/main" val="0"/>
+              </a:ext>
+            </a:extLst>
+          </a:blip>
+          <a:srcRect/>
+          <a:stretch>
+            <a:fillRect/>
+          </a:stretch>
+        </p:blipFill>
+        <p:spPr bwMode="auto">
+          <a:xfrm>
+            <a:off x="445634" y="3800476"/>
+            <a:ext cx="439905" cy="400110"/>
+          </a:xfrm>
+          <a:prstGeom prst="rect">
+            <a:avLst/>
+          </a:prstGeom>
+          <a:noFill/>
+          <a:ln>
+            <a:noFill/>
+          </a:ln>
+          <a:extLst>
+            <a:ext uri="{909E8E84-426E-40DD-AFC4-6F175D3DCCD1}">
+              <a14:hiddenFill xmlns:a14="http://schemas.microsoft.com/office/drawing/2010/main">
+                <a:solidFill>
+                  <a:srgbClr val="FFFFFF"/>
+                </a:solidFill>
+              </a14:hiddenFill>
+            </a:ext>
+            <a:ext uri="{91240B29-F687-4F45-9708-019B960494DF}">
+              <a14:hiddenLine xmlns:a14="http://schemas.microsoft.com/office/drawing/2010/main" w="9525">
+                <a:solidFill>
+                  <a:srgbClr val="000000"/>
+                </a:solidFill>
+                <a:miter lim="800000"/>
+                <a:headEnd/>
+                <a:tailEnd/>
+              </a14:hiddenLine>
+            </a:ext>
+          </a:extLst>
+        </p:spPr>
+      </p:pic>
+      <p:sp>
+        <p:nvSpPr>
+          <p:cNvPr id="9" name="사각형: 둥근 모서리 8">
+            <a:extLst>
+              <a:ext uri="{FF2B5EF4-FFF2-40B4-BE49-F238E27FC236}">
+                <a16:creationId xmlns:a16="http://schemas.microsoft.com/office/drawing/2014/main" id="{0043A259-5689-2B9B-87C0-7E17DE4E1347}"/>
+              </a:ext>
+            </a:extLst>
+          </p:cNvPr>
+          <p:cNvSpPr/>
+          <p:nvPr/>
+        </p:nvSpPr>
+        <p:spPr>
+          <a:xfrm>
+            <a:off x="346481" y="4229162"/>
+            <a:ext cx="8451038" cy="1875690"/>
+          </a:xfrm>
+          <a:prstGeom prst="roundRect">
+            <a:avLst/>
+          </a:prstGeom>
+          <a:solidFill>
+            <a:schemeClr val="bg1">
+              <a:lumMod val="95000"/>
+              <a:alpha val="90000"/>
+            </a:schemeClr>
+          </a:solidFill>
+          <a:ln w="19050">
+            <a:solidFill>
+              <a:schemeClr val="tx1"/>
+            </a:solidFill>
+            <a:prstDash val="sysDot"/>
+          </a:ln>
+        </p:spPr>
+        <p:style>
+          <a:lnRef idx="2">
+            <a:schemeClr val="accent1">
+              <a:shade val="15000"/>
+            </a:schemeClr>
+          </a:lnRef>
+          <a:fillRef idx="1">
+            <a:schemeClr val="accent1"/>
+          </a:fillRef>
+          <a:effectRef idx="0">
+            <a:schemeClr val="accent1"/>
+          </a:effectRef>
+          <a:fontRef idx="minor">
+            <a:schemeClr val="lt1"/>
+          </a:fontRef>
+        </p:style>
+        <p:txBody>
+          <a:bodyPr rtlCol="0" anchor="ctr"/>
+          <a:lstStyle/>
+          <a:p>
+            <a:pPr algn="ctr"/>
+            <a:endParaRPr lang="ko-KR" altLang="en-US"/>
+          </a:p>
+        </p:txBody>
+      </p:sp>
+      <p:sp>
+        <p:nvSpPr>
+          <p:cNvPr id="11" name="Rectangle 40">
+            <a:extLst>
+              <a:ext uri="{FF2B5EF4-FFF2-40B4-BE49-F238E27FC236}">
+                <a16:creationId xmlns:a16="http://schemas.microsoft.com/office/drawing/2014/main" id="{9AAFBAAA-536F-17F6-1837-3F755AFB244F}"/>
+              </a:ext>
+            </a:extLst>
+          </p:cNvPr>
+          <p:cNvSpPr>
+            <a:spLocks noChangeArrowheads="1"/>
+          </p:cNvSpPr>
+          <p:nvPr/>
+        </p:nvSpPr>
+        <p:spPr bwMode="auto">
+          <a:xfrm>
+            <a:off x="445634" y="4477981"/>
+            <a:ext cx="8466964" cy="1474471"/>
+          </a:xfrm>
+          <a:prstGeom prst="rect">
+            <a:avLst/>
+          </a:prstGeom>
+          <a:noFill/>
+          <a:ln w="9525" algn="ctr">
+            <a:noFill/>
+            <a:miter lim="800000"/>
+            <a:headEnd/>
+            <a:tailEnd/>
+          </a:ln>
+          <a:effectLst/>
+        </p:spPr>
+        <p:txBody>
+          <a:bodyPr lIns="0" tIns="0" rIns="0" bIns="0"/>
+          <a:lstStyle/>
+          <a:p>
+            <a:pPr marL="285750" indent="-104775">
+              <a:lnSpc>
+                <a:spcPct val="120000"/>
+              </a:lnSpc>
+              <a:spcBef>
+                <a:spcPct val="50000"/>
+              </a:spcBef>
+              <a:buFont typeface="Arial" panose="020B0604020202020204" pitchFamily="34" charset="0"/>
+              <a:buChar char="•"/>
+              <a:defRPr/>
+            </a:pPr>
+            <a:r>
+              <a:rPr lang="en-US" altLang="ko-KR" sz="1400" dirty="0">
+                <a:latin typeface="KoPubWorld돋움체 Light" panose="00000300000000000000" pitchFamily="2" charset="-127"/>
+                <a:ea typeface="KoPubWorld돋움체 Light" panose="00000300000000000000" pitchFamily="2" charset="-127"/>
+                <a:cs typeface="KoPubWorld돋움체 Light" panose="00000300000000000000" pitchFamily="2" charset="-127"/>
+              </a:rPr>
+              <a:t> 1, 2</a:t>
+            </a:r>
+          </a:p>
+          <a:p>
+            <a:pPr marL="285750" indent="-104775">
+              <a:lnSpc>
+                <a:spcPct val="120000"/>
+              </a:lnSpc>
+              <a:spcBef>
+                <a:spcPct val="50000"/>
+              </a:spcBef>
+              <a:buFont typeface="Arial" panose="020B0604020202020204" pitchFamily="34" charset="0"/>
+              <a:buChar char="•"/>
+              <a:defRPr/>
+            </a:pPr>
+            <a:r>
+              <a:rPr lang="en-US" altLang="ko-KR" sz="1400" b="1" dirty="0">
+                <a:latin typeface="KoPubWorld돋움체 Light" panose="00000300000000000000" pitchFamily="2" charset="-127"/>
+                <a:ea typeface="KoPubWorld돋움체 Light" panose="00000300000000000000" pitchFamily="2" charset="-127"/>
+                <a:cs typeface="KoPubWorld돋움체 Light" panose="00000300000000000000" pitchFamily="2" charset="-127"/>
+              </a:rPr>
+              <a:t> 1</a:t>
+            </a:r>
+          </a:p>
+          <a:p>
+            <a:pPr marL="285750" indent="-104775">
+              <a:lnSpc>
+                <a:spcPct val="120000"/>
+              </a:lnSpc>
+              <a:spcBef>
+                <a:spcPct val="50000"/>
+              </a:spcBef>
+              <a:buFont typeface="Arial" panose="020B0604020202020204" pitchFamily="34" charset="0"/>
+              <a:buChar char="•"/>
+              <a:defRPr/>
+            </a:pPr>
+            <a:r>
+              <a:rPr lang="en-US" altLang="ko-KR" sz="1400" b="1" dirty="0">
+                <a:latin typeface="KoPubWorld돋움체 Light" panose="00000300000000000000" pitchFamily="2" charset="-127"/>
+                <a:ea typeface="KoPubWorld돋움체 Light" panose="00000300000000000000" pitchFamily="2" charset="-127"/>
+                <a:cs typeface="KoPubWorld돋움체 Light" panose="00000300000000000000" pitchFamily="2" charset="-127"/>
+              </a:rPr>
+              <a:t> 2</a:t>
+            </a:r>
+          </a:p>
+          <a:p>
+            <a:pPr marL="285750" indent="-104775">
+              <a:lnSpc>
+                <a:spcPct val="120000"/>
+              </a:lnSpc>
+              <a:spcBef>
+                <a:spcPct val="50000"/>
+              </a:spcBef>
+              <a:buFont typeface="Arial" panose="020B0604020202020204" pitchFamily="34" charset="0"/>
+              <a:buChar char="•"/>
+              <a:defRPr/>
+            </a:pPr>
+            <a:r>
+              <a:rPr lang="en-US" altLang="ko-KR" sz="1400" b="1" dirty="0">
+                <a:latin typeface="KoPubWorld돋움체 Light" panose="00000300000000000000" pitchFamily="2" charset="-127"/>
+                <a:ea typeface="KoPubWorld돋움체 Light" panose="00000300000000000000" pitchFamily="2" charset="-127"/>
+                <a:cs typeface="KoPubWorld돋움체 Light" panose="00000300000000000000" pitchFamily="2" charset="-127"/>
+              </a:rPr>
+              <a:t> 3</a:t>
+            </a:r>
+          </a:p>
+          <a:p>
+            <a:pPr>
+              <a:lnSpc>
+                <a:spcPct val="120000"/>
+              </a:lnSpc>
+              <a:spcBef>
+                <a:spcPct val="50000"/>
+              </a:spcBef>
+              <a:defRPr/>
+            </a:pPr>
+            <a:endParaRPr lang="ko-KR" altLang="en-US" sz="1400" b="1" dirty="0">
+              <a:latin typeface="KoPubWorld돋움체 Light" panose="00000300000000000000" pitchFamily="2" charset="-127"/>
+              <a:ea typeface="KoPubWorld돋움체 Light" panose="00000300000000000000" pitchFamily="2" charset="-127"/>
+              <a:cs typeface="KoPubWorld돋움체 Light" panose="00000300000000000000" pitchFamily="2" charset="-127"/>
+            </a:endParaRPr>
+          </a:p>
+        </p:txBody>
+      </p:sp>
     </p:spTree>
     <p:extLst>
       <p:ext uri="{BB962C8B-B14F-4D97-AF65-F5344CB8AC3E}">
-        <p14:creationId xmlns:p14="http://schemas.microsoft.com/office/powerpoint/2010/main" val="4131414197"/>
+        <p14:creationId xmlns:p14="http://schemas.microsoft.com/office/powerpoint/2010/main" val="3994195237"/>
       </p:ext>
     </p:extLst>
   </p:cSld>
@@ -5048,7 +6642,7 @@
 </p:sld>
 </file>
 
-<file path=ppt/slides/slide6.xml><?xml version="1.0" encoding="utf-8"?>
+<file path=ppt/slides/slide8.xml><?xml version="1.0" encoding="utf-8"?>
 <p:sld xmlns:a="http://schemas.openxmlformats.org/drawingml/2006/main" xmlns:r="http://schemas.openxmlformats.org/officeDocument/2006/relationships" xmlns:p="http://schemas.openxmlformats.org/presentationml/2006/main">
   <p:cSld>
     <p:spTree>
@@ -5080,7 +6674,7 @@
         <p:spPr>
           <a:xfrm>
             <a:off x="838393" y="924599"/>
-            <a:ext cx="992579" cy="369332"/>
+            <a:ext cx="1261884" cy="369332"/>
           </a:xfrm>
           <a:prstGeom prst="rect">
             <a:avLst/>
@@ -5100,7 +6694,7 @@
                 <a:latin typeface="KoPubWorld돋움체 Medium" panose="00000600000000000000" pitchFamily="2" charset="-127"/>
                 <a:ea typeface="KoPubWorld돋움체 Medium" panose="00000600000000000000" pitchFamily="2" charset="-127"/>
               </a:rPr>
-              <a:t>기능설명</a:t>
+              <a:t>정량적 효과</a:t>
             </a:r>
           </a:p>
         </p:txBody>
@@ -5276,7 +6870,7 @@
                 <a:ea typeface="KoPubWorld돋움체 Medium" panose="00000600000000000000" pitchFamily="2" charset="-127"/>
                 <a:cs typeface="KoPubWorld돋움체 Medium" panose="00000600000000000000" pitchFamily="2" charset="-127"/>
               </a:rPr>
-              <a:t>1.4 </a:t>
+              <a:t>1.5 </a:t>
             </a:r>
             <a:r>
               <a:rPr lang="ko-KR" altLang="en-US" sz="2800" b="1" dirty="0">
@@ -5287,7 +6881,7 @@
                 <a:ea typeface="KoPubWorld돋움체 Medium" panose="00000600000000000000" pitchFamily="2" charset="-127"/>
                 <a:cs typeface="KoPubWorld돋움체 Medium" panose="00000600000000000000" pitchFamily="2" charset="-127"/>
               </a:rPr>
-              <a:t>기능설명</a:t>
+              <a:t>기대효과</a:t>
             </a:r>
           </a:p>
         </p:txBody>
@@ -5307,6 +6901,440 @@
         <p:spPr>
           <a:xfrm>
             <a:off x="346481" y="1353285"/>
+            <a:ext cx="8451038" cy="1466849"/>
+          </a:xfrm>
+          <a:prstGeom prst="roundRect">
+            <a:avLst/>
+          </a:prstGeom>
+          <a:solidFill>
+            <a:schemeClr val="bg1">
+              <a:lumMod val="95000"/>
+              <a:alpha val="90000"/>
+            </a:schemeClr>
+          </a:solidFill>
+          <a:ln w="19050">
+            <a:solidFill>
+              <a:schemeClr val="tx1"/>
+            </a:solidFill>
+            <a:prstDash val="sysDot"/>
+          </a:ln>
+        </p:spPr>
+        <p:style>
+          <a:lnRef idx="2">
+            <a:schemeClr val="accent1">
+              <a:shade val="15000"/>
+            </a:schemeClr>
+          </a:lnRef>
+          <a:fillRef idx="1">
+            <a:schemeClr val="accent1"/>
+          </a:fillRef>
+          <a:effectRef idx="0">
+            <a:schemeClr val="accent1"/>
+          </a:effectRef>
+          <a:fontRef idx="minor">
+            <a:schemeClr val="lt1"/>
+          </a:fontRef>
+        </p:style>
+        <p:txBody>
+          <a:bodyPr rtlCol="0" anchor="ctr"/>
+          <a:lstStyle/>
+          <a:p>
+            <a:pPr algn="ctr"/>
+            <a:endParaRPr lang="ko-KR" altLang="en-US"/>
+          </a:p>
+        </p:txBody>
+      </p:sp>
+      <p:sp>
+        <p:nvSpPr>
+          <p:cNvPr id="10" name="Rectangle 40">
+            <a:extLst>
+              <a:ext uri="{FF2B5EF4-FFF2-40B4-BE49-F238E27FC236}">
+                <a16:creationId xmlns:a16="http://schemas.microsoft.com/office/drawing/2014/main" id="{9AAFBAAA-536F-17F6-1837-3F755AFB244F}"/>
+              </a:ext>
+            </a:extLst>
+          </p:cNvPr>
+          <p:cNvSpPr>
+            <a:spLocks noChangeArrowheads="1"/>
+          </p:cNvSpPr>
+          <p:nvPr/>
+        </p:nvSpPr>
+        <p:spPr bwMode="auto">
+          <a:xfrm>
+            <a:off x="445634" y="1487804"/>
+            <a:ext cx="8117341" cy="1474471"/>
+          </a:xfrm>
+          <a:prstGeom prst="rect">
+            <a:avLst/>
+          </a:prstGeom>
+          <a:noFill/>
+          <a:ln w="9525" algn="ctr">
+            <a:noFill/>
+            <a:miter lim="800000"/>
+            <a:headEnd/>
+            <a:tailEnd/>
+          </a:ln>
+          <a:effectLst/>
+        </p:spPr>
+        <p:txBody>
+          <a:bodyPr lIns="0" tIns="0" rIns="0" bIns="0"/>
+          <a:lstStyle/>
+          <a:p>
+            <a:pPr marL="285750" indent="-104775">
+              <a:lnSpc>
+                <a:spcPct val="120000"/>
+              </a:lnSpc>
+              <a:spcBef>
+                <a:spcPct val="50000"/>
+              </a:spcBef>
+              <a:buFont typeface="Arial" panose="020B0604020202020204" pitchFamily="34" charset="0"/>
+              <a:buChar char="•"/>
+              <a:defRPr/>
+            </a:pPr>
+            <a:r>
+              <a:rPr lang="en-US" altLang="ko-KR" sz="1400" dirty="0">
+                <a:latin typeface="KoPubWorld돋움체 Light" panose="00000300000000000000" pitchFamily="2" charset="-127"/>
+                <a:ea typeface="KoPubWorld돋움체 Light" panose="00000300000000000000" pitchFamily="2" charset="-127"/>
+                <a:cs typeface="KoPubWorld돋움체 Light" panose="00000300000000000000" pitchFamily="2" charset="-127"/>
+              </a:rPr>
+              <a:t> </a:t>
+            </a:r>
+            <a:r>
+              <a:rPr lang="ko-KR" altLang="en-US" sz="1400" dirty="0">
+                <a:latin typeface="KoPubWorld돋움체 Light" panose="00000300000000000000" pitchFamily="2" charset="-127"/>
+                <a:ea typeface="KoPubWorld돋움체 Light" panose="00000300000000000000" pitchFamily="2" charset="-127"/>
+                <a:cs typeface="KoPubWorld돋움체 Light" panose="00000300000000000000" pitchFamily="2" charset="-127"/>
+              </a:rPr>
+              <a:t>시간 효율성 향상</a:t>
+            </a:r>
+            <a:r>
+              <a:rPr lang="en-US" altLang="ko-KR" sz="1400" dirty="0">
+                <a:latin typeface="KoPubWorld돋움체 Light" panose="00000300000000000000" pitchFamily="2" charset="-127"/>
+                <a:ea typeface="KoPubWorld돋움체 Light" panose="00000300000000000000" pitchFamily="2" charset="-127"/>
+                <a:cs typeface="KoPubWorld돋움체 Light" panose="00000300000000000000" pitchFamily="2" charset="-127"/>
+              </a:rPr>
+              <a:t>(</a:t>
+            </a:r>
+            <a:r>
+              <a:rPr lang="ko-KR" altLang="en-US" sz="1400" dirty="0">
+                <a:latin typeface="KoPubWorld돋움체 Light" panose="00000300000000000000" pitchFamily="2" charset="-127"/>
+                <a:ea typeface="KoPubWorld돋움체 Light" panose="00000300000000000000" pitchFamily="2" charset="-127"/>
+                <a:cs typeface="KoPubWorld돋움체 Light" panose="00000300000000000000" pitchFamily="2" charset="-127"/>
+              </a:rPr>
+              <a:t>약 </a:t>
+            </a:r>
+            <a:r>
+              <a:rPr lang="en-US" altLang="ko-KR" sz="1400" dirty="0">
+                <a:latin typeface="KoPubWorld돋움체 Light" panose="00000300000000000000" pitchFamily="2" charset="-127"/>
+                <a:ea typeface="KoPubWorld돋움체 Light" panose="00000300000000000000" pitchFamily="2" charset="-127"/>
+                <a:cs typeface="KoPubWorld돋움체 Light" panose="00000300000000000000" pitchFamily="2" charset="-127"/>
+              </a:rPr>
+              <a:t>70% </a:t>
+            </a:r>
+            <a:r>
+              <a:rPr lang="ko-KR" altLang="en-US" sz="1400" dirty="0">
+                <a:latin typeface="KoPubWorld돋움체 Light" panose="00000300000000000000" pitchFamily="2" charset="-127"/>
+                <a:ea typeface="KoPubWorld돋움체 Light" panose="00000300000000000000" pitchFamily="2" charset="-127"/>
+                <a:cs typeface="KoPubWorld돋움체 Light" panose="00000300000000000000" pitchFamily="2" charset="-127"/>
+              </a:rPr>
+              <a:t>절감</a:t>
+            </a:r>
+            <a:r>
+              <a:rPr lang="en-US" altLang="ko-KR" sz="1400" dirty="0">
+                <a:latin typeface="KoPubWorld돋움체 Light" panose="00000300000000000000" pitchFamily="2" charset="-127"/>
+                <a:ea typeface="KoPubWorld돋움체 Light" panose="00000300000000000000" pitchFamily="2" charset="-127"/>
+                <a:cs typeface="KoPubWorld돋움체 Light" panose="00000300000000000000" pitchFamily="2" charset="-127"/>
+              </a:rPr>
+              <a:t>) : </a:t>
+            </a:r>
+            <a:r>
+              <a:rPr lang="ko-KR" altLang="en-US" sz="1400" dirty="0">
+                <a:latin typeface="KoPubWorld돋움체 Light" panose="00000300000000000000" pitchFamily="2" charset="-127"/>
+                <a:ea typeface="KoPubWorld돋움체 Light" panose="00000300000000000000" pitchFamily="2" charset="-127"/>
+                <a:cs typeface="KoPubWorld돋움체 Light" panose="00000300000000000000" pitchFamily="2" charset="-127"/>
+              </a:rPr>
+              <a:t>기존 지점별 평균 </a:t>
+            </a:r>
+            <a:r>
+              <a:rPr lang="en-US" altLang="ko-KR" sz="1400" dirty="0">
+                <a:latin typeface="KoPubWorld돋움체 Light" panose="00000300000000000000" pitchFamily="2" charset="-127"/>
+                <a:ea typeface="KoPubWorld돋움체 Light" panose="00000300000000000000" pitchFamily="2" charset="-127"/>
+                <a:cs typeface="KoPubWorld돋움체 Light" panose="00000300000000000000" pitchFamily="2" charset="-127"/>
+              </a:rPr>
+              <a:t>30</a:t>
+            </a:r>
+            <a:r>
+              <a:rPr lang="ko-KR" altLang="en-US" sz="1400" dirty="0">
+                <a:latin typeface="KoPubWorld돋움체 Light" panose="00000300000000000000" pitchFamily="2" charset="-127"/>
+                <a:ea typeface="KoPubWorld돋움체 Light" panose="00000300000000000000" pitchFamily="2" charset="-127"/>
+                <a:cs typeface="KoPubWorld돋움체 Light" panose="00000300000000000000" pitchFamily="2" charset="-127"/>
+              </a:rPr>
+              <a:t>분 이상 소요되던 기상 정보 수집</a:t>
+            </a:r>
+            <a:r>
+              <a:rPr lang="en-US" altLang="ko-KR" sz="1400" dirty="0">
+                <a:latin typeface="KoPubWorld돋움체 Light" panose="00000300000000000000" pitchFamily="2" charset="-127"/>
+                <a:ea typeface="KoPubWorld돋움체 Light" panose="00000300000000000000" pitchFamily="2" charset="-127"/>
+                <a:cs typeface="KoPubWorld돋움체 Light" panose="00000300000000000000" pitchFamily="2" charset="-127"/>
+              </a:rPr>
+              <a:t>·</a:t>
+            </a:r>
+            <a:r>
+              <a:rPr lang="ko-KR" altLang="en-US" sz="1400" dirty="0">
+                <a:latin typeface="KoPubWorld돋움체 Light" panose="00000300000000000000" pitchFamily="2" charset="-127"/>
+                <a:ea typeface="KoPubWorld돋움체 Light" panose="00000300000000000000" pitchFamily="2" charset="-127"/>
+                <a:cs typeface="KoPubWorld돋움체 Light" panose="00000300000000000000" pitchFamily="2" charset="-127"/>
+              </a:rPr>
+              <a:t>분석 업무를</a:t>
+            </a:r>
+            <a:r>
+              <a:rPr lang="en-US" altLang="ko-KR" sz="1400" dirty="0">
+                <a:latin typeface="KoPubWorld돋움체 Light" panose="00000300000000000000" pitchFamily="2" charset="-127"/>
+                <a:ea typeface="KoPubWorld돋움체 Light" panose="00000300000000000000" pitchFamily="2" charset="-127"/>
+                <a:cs typeface="KoPubWorld돋움체 Light" panose="00000300000000000000" pitchFamily="2" charset="-127"/>
+              </a:rPr>
+              <a:t>, </a:t>
+            </a:r>
+            <a:r>
+              <a:rPr lang="ko-KR" altLang="en-US" sz="1400" dirty="0">
+                <a:latin typeface="KoPubWorld돋움체 Light" panose="00000300000000000000" pitchFamily="2" charset="-127"/>
+                <a:ea typeface="KoPubWorld돋움체 Light" panose="00000300000000000000" pitchFamily="2" charset="-127"/>
+                <a:cs typeface="KoPubWorld돋움체 Light" panose="00000300000000000000" pitchFamily="2" charset="-127"/>
+              </a:rPr>
+              <a:t>통합 대시보드를 통해 </a:t>
+            </a:r>
+            <a:r>
+              <a:rPr lang="en-US" altLang="ko-KR" sz="1400" dirty="0">
+                <a:latin typeface="KoPubWorld돋움체 Light" panose="00000300000000000000" pitchFamily="2" charset="-127"/>
+                <a:ea typeface="KoPubWorld돋움체 Light" panose="00000300000000000000" pitchFamily="2" charset="-127"/>
+                <a:cs typeface="KoPubWorld돋움체 Light" panose="00000300000000000000" pitchFamily="2" charset="-127"/>
+              </a:rPr>
+              <a:t>10</a:t>
+            </a:r>
+            <a:r>
+              <a:rPr lang="ko-KR" altLang="en-US" sz="1400" dirty="0">
+                <a:latin typeface="KoPubWorld돋움체 Light" panose="00000300000000000000" pitchFamily="2" charset="-127"/>
+                <a:ea typeface="KoPubWorld돋움체 Light" panose="00000300000000000000" pitchFamily="2" charset="-127"/>
+                <a:cs typeface="KoPubWorld돋움체 Light" panose="00000300000000000000" pitchFamily="2" charset="-127"/>
+              </a:rPr>
+              <a:t>분 이내로 단축</a:t>
+            </a:r>
+            <a:endParaRPr lang="en-US" altLang="ko-KR" sz="1400" dirty="0">
+              <a:latin typeface="KoPubWorld돋움체 Light" panose="00000300000000000000" pitchFamily="2" charset="-127"/>
+              <a:ea typeface="KoPubWorld돋움체 Light" panose="00000300000000000000" pitchFamily="2" charset="-127"/>
+              <a:cs typeface="KoPubWorld돋움체 Light" panose="00000300000000000000" pitchFamily="2" charset="-127"/>
+            </a:endParaRPr>
+          </a:p>
+          <a:p>
+            <a:pPr marL="285750" indent="-104775">
+              <a:lnSpc>
+                <a:spcPct val="120000"/>
+              </a:lnSpc>
+              <a:spcBef>
+                <a:spcPct val="50000"/>
+              </a:spcBef>
+              <a:buFont typeface="Arial" panose="020B0604020202020204" pitchFamily="34" charset="0"/>
+              <a:buChar char="•"/>
+              <a:defRPr/>
+            </a:pPr>
+            <a:r>
+              <a:rPr lang="en-US" altLang="ko-KR" sz="1400" dirty="0">
+                <a:latin typeface="KoPubWorld돋움체 Light" panose="00000300000000000000" pitchFamily="2" charset="-127"/>
+                <a:ea typeface="KoPubWorld돋움체 Light" panose="00000300000000000000" pitchFamily="2" charset="-127"/>
+                <a:cs typeface="KoPubWorld돋움체 Light" panose="00000300000000000000" pitchFamily="2" charset="-127"/>
+              </a:rPr>
+              <a:t> </a:t>
+            </a:r>
+            <a:r>
+              <a:rPr lang="ko-KR" altLang="en-US" sz="1400" dirty="0">
+                <a:latin typeface="KoPubWorld돋움체 Light" panose="00000300000000000000" pitchFamily="2" charset="-127"/>
+                <a:ea typeface="KoPubWorld돋움체 Light" panose="00000300000000000000" pitchFamily="2" charset="-127"/>
+                <a:cs typeface="KoPubWorld돋움체 Light" panose="00000300000000000000" pitchFamily="2" charset="-127"/>
+              </a:rPr>
+              <a:t>출동 비용 절감</a:t>
+            </a:r>
+            <a:r>
+              <a:rPr lang="en-US" altLang="ko-KR" sz="1400" dirty="0">
+                <a:latin typeface="KoPubWorld돋움체 Light" panose="00000300000000000000" pitchFamily="2" charset="-127"/>
+                <a:ea typeface="KoPubWorld돋움체 Light" panose="00000300000000000000" pitchFamily="2" charset="-127"/>
+                <a:cs typeface="KoPubWorld돋움체 Light" panose="00000300000000000000" pitchFamily="2" charset="-127"/>
+              </a:rPr>
+              <a:t>(</a:t>
+            </a:r>
+            <a:r>
+              <a:rPr lang="ko-KR" altLang="en-US" sz="1400" dirty="0">
+                <a:latin typeface="KoPubWorld돋움체 Light" panose="00000300000000000000" pitchFamily="2" charset="-127"/>
+                <a:ea typeface="KoPubWorld돋움체 Light" panose="00000300000000000000" pitchFamily="2" charset="-127"/>
+                <a:cs typeface="KoPubWorld돋움체 Light" panose="00000300000000000000" pitchFamily="2" charset="-127"/>
+              </a:rPr>
+              <a:t>약 </a:t>
+            </a:r>
+            <a:r>
+              <a:rPr lang="en-US" altLang="ko-KR" sz="1400" dirty="0">
+                <a:latin typeface="KoPubWorld돋움체 Light" panose="00000300000000000000" pitchFamily="2" charset="-127"/>
+                <a:ea typeface="KoPubWorld돋움체 Light" panose="00000300000000000000" pitchFamily="2" charset="-127"/>
+                <a:cs typeface="KoPubWorld돋움체 Light" panose="00000300000000000000" pitchFamily="2" charset="-127"/>
+              </a:rPr>
+              <a:t>20~40%) : </a:t>
+            </a:r>
+            <a:r>
+              <a:rPr lang="ko-KR" altLang="en-US" sz="1400" dirty="0">
+                <a:latin typeface="KoPubWorld돋움체 Light" panose="00000300000000000000" pitchFamily="2" charset="-127"/>
+                <a:ea typeface="KoPubWorld돋움체 Light" panose="00000300000000000000" pitchFamily="2" charset="-127"/>
+                <a:cs typeface="KoPubWorld돋움체 Light" panose="00000300000000000000" pitchFamily="2" charset="-127"/>
+              </a:rPr>
+              <a:t>다중 기상모델 현황 및 의사결정시스템으로 불필요한 출동을 약 </a:t>
+            </a:r>
+            <a:r>
+              <a:rPr lang="en-US" altLang="ko-KR" sz="1400" dirty="0">
+                <a:latin typeface="KoPubWorld돋움체 Light" panose="00000300000000000000" pitchFamily="2" charset="-127"/>
+                <a:ea typeface="KoPubWorld돋움체 Light" panose="00000300000000000000" pitchFamily="2" charset="-127"/>
+                <a:cs typeface="KoPubWorld돋움체 Light" panose="00000300000000000000" pitchFamily="2" charset="-127"/>
+              </a:rPr>
+              <a:t>35% </a:t>
+            </a:r>
+            <a:r>
+              <a:rPr lang="ko-KR" altLang="en-US" sz="1400" dirty="0">
+                <a:latin typeface="KoPubWorld돋움체 Light" panose="00000300000000000000" pitchFamily="2" charset="-127"/>
+                <a:ea typeface="KoPubWorld돋움체 Light" panose="00000300000000000000" pitchFamily="2" charset="-127"/>
+                <a:cs typeface="KoPubWorld돋움체 Light" panose="00000300000000000000" pitchFamily="2" charset="-127"/>
+              </a:rPr>
+              <a:t>감소시켜 유류비</a:t>
+            </a:r>
+            <a:r>
+              <a:rPr lang="en-US" altLang="ko-KR" sz="1400" dirty="0">
+                <a:latin typeface="KoPubWorld돋움체 Light" panose="00000300000000000000" pitchFamily="2" charset="-127"/>
+                <a:ea typeface="KoPubWorld돋움체 Light" panose="00000300000000000000" pitchFamily="2" charset="-127"/>
+                <a:cs typeface="KoPubWorld돋움체 Light" panose="00000300000000000000" pitchFamily="2" charset="-127"/>
+              </a:rPr>
+              <a:t>, </a:t>
+            </a:r>
+            <a:r>
+              <a:rPr lang="ko-KR" altLang="en-US" sz="1400" dirty="0">
+                <a:latin typeface="KoPubWorld돋움체 Light" panose="00000300000000000000" pitchFamily="2" charset="-127"/>
+                <a:ea typeface="KoPubWorld돋움체 Light" panose="00000300000000000000" pitchFamily="2" charset="-127"/>
+                <a:cs typeface="KoPubWorld돋움체 Light" panose="00000300000000000000" pitchFamily="2" charset="-127"/>
+              </a:rPr>
+              <a:t>인건비 등 운영비 절감</a:t>
+            </a:r>
+          </a:p>
+        </p:txBody>
+      </p:sp>
+      <p:sp>
+        <p:nvSpPr>
+          <p:cNvPr id="2" name="직사각형 1">
+            <a:extLst>
+              <a:ext uri="{FF2B5EF4-FFF2-40B4-BE49-F238E27FC236}">
+                <a16:creationId xmlns:a16="http://schemas.microsoft.com/office/drawing/2014/main" id="{7505F6C9-BA7E-748D-A6B3-FFF6CB8A2E03}"/>
+              </a:ext>
+            </a:extLst>
+          </p:cNvPr>
+          <p:cNvSpPr/>
+          <p:nvPr/>
+        </p:nvSpPr>
+        <p:spPr>
+          <a:xfrm>
+            <a:off x="838393" y="3018630"/>
+            <a:ext cx="1261884" cy="369332"/>
+          </a:xfrm>
+          <a:prstGeom prst="rect">
+            <a:avLst/>
+          </a:prstGeom>
+        </p:spPr>
+        <p:txBody>
+          <a:bodyPr wrap="none">
+            <a:spAutoFit/>
+          </a:bodyPr>
+          <a:lstStyle/>
+          <a:p>
+            <a:r>
+              <a:rPr lang="ko-KR" altLang="en-US" b="1" dirty="0">
+                <a:solidFill>
+                  <a:srgbClr val="002060"/>
+                </a:solidFill>
+                <a:latin typeface="KoPubWorld돋움체 Medium" panose="00000600000000000000" pitchFamily="2" charset="-127"/>
+                <a:ea typeface="KoPubWorld돋움체 Medium" panose="00000600000000000000" pitchFamily="2" charset="-127"/>
+              </a:rPr>
+              <a:t>정성적 효과</a:t>
+            </a:r>
+          </a:p>
+        </p:txBody>
+      </p:sp>
+      <p:pic>
+        <p:nvPicPr>
+          <p:cNvPr id="3" name="Picture 5" descr="그림3">
+            <a:extLst>
+              <a:ext uri="{FF2B5EF4-FFF2-40B4-BE49-F238E27FC236}">
+                <a16:creationId xmlns:a16="http://schemas.microsoft.com/office/drawing/2014/main" id="{F6C2F676-97C6-91B4-AB5E-A2826B256EFF}"/>
+              </a:ext>
+            </a:extLst>
+          </p:cNvPr>
+          <p:cNvPicPr>
+            <a:picLocks noChangeAspect="1" noChangeArrowheads="1"/>
+          </p:cNvPicPr>
+          <p:nvPr/>
+        </p:nvPicPr>
+        <p:blipFill>
+          <a:blip r:embed="rId2" cstate="print">
+            <a:lum contrast="6000"/>
+            <a:extLst>
+              <a:ext uri="{28A0092B-C50C-407E-A947-70E740481C1C}">
+                <a14:useLocalDpi xmlns:a14="http://schemas.microsoft.com/office/drawing/2010/main" val="0"/>
+              </a:ext>
+            </a:extLst>
+          </a:blip>
+          <a:srcRect/>
+          <a:stretch>
+            <a:fillRect/>
+          </a:stretch>
+        </p:blipFill>
+        <p:spPr bwMode="auto">
+          <a:xfrm>
+            <a:off x="445634" y="3018630"/>
+            <a:ext cx="439905" cy="400110"/>
+          </a:xfrm>
+          <a:prstGeom prst="rect">
+            <a:avLst/>
+          </a:prstGeom>
+          <a:noFill/>
+          <a:ln>
+            <a:noFill/>
+          </a:ln>
+          <a:extLst>
+            <a:ext uri="{909E8E84-426E-40DD-AFC4-6F175D3DCCD1}">
+              <a14:hiddenFill xmlns:a14="http://schemas.microsoft.com/office/drawing/2010/main">
+                <a:solidFill>
+                  <a:srgbClr val="FFFFFF"/>
+                </a:solidFill>
+              </a14:hiddenFill>
+            </a:ext>
+            <a:ext uri="{91240B29-F687-4F45-9708-019B960494DF}">
+              <a14:hiddenLine xmlns:a14="http://schemas.microsoft.com/office/drawing/2010/main" w="9525">
+                <a:solidFill>
+                  <a:srgbClr val="000000"/>
+                </a:solidFill>
+                <a:miter lim="800000"/>
+                <a:headEnd/>
+                <a:tailEnd/>
+              </a14:hiddenLine>
+            </a:ext>
+          </a:extLst>
+        </p:spPr>
+      </p:pic>
+      <p:sp>
+        <p:nvSpPr>
+          <p:cNvPr id="9" name="사각형: 둥근 모서리 8">
+            <a:extLst>
+              <a:ext uri="{FF2B5EF4-FFF2-40B4-BE49-F238E27FC236}">
+                <a16:creationId xmlns:a16="http://schemas.microsoft.com/office/drawing/2014/main" id="{8160C34D-3A18-B287-E874-F7006CAABFBF}"/>
+              </a:ext>
+            </a:extLst>
+          </p:cNvPr>
+          <p:cNvSpPr/>
+          <p:nvPr/>
+        </p:nvSpPr>
+        <p:spPr>
+          <a:xfrm>
+            <a:off x="346481" y="3447316"/>
             <a:ext cx="8451038" cy="1875690"/>
           </a:xfrm>
           <a:prstGeom prst="roundRect">
@@ -5352,10 +7380,10 @@
       </p:sp>
       <p:sp>
         <p:nvSpPr>
-          <p:cNvPr id="10" name="Rectangle 40">
+          <p:cNvPr id="11" name="Rectangle 40">
             <a:extLst>
               <a:ext uri="{FF2B5EF4-FFF2-40B4-BE49-F238E27FC236}">
-                <a16:creationId xmlns:a16="http://schemas.microsoft.com/office/drawing/2014/main" id="{9AAFBAAA-536F-17F6-1837-3F755AFB244F}"/>
+                <a16:creationId xmlns:a16="http://schemas.microsoft.com/office/drawing/2014/main" id="{C5C8B9B5-A5FA-F2CF-95EA-B6A121CD3B4C}"/>
               </a:ext>
             </a:extLst>
           </p:cNvPr>
@@ -5366,7 +7394,7 @@
         </p:nvSpPr>
         <p:spPr bwMode="auto">
           <a:xfrm>
-            <a:off x="445634" y="1602104"/>
+            <a:off x="445634" y="3696135"/>
             <a:ext cx="8466964" cy="1474471"/>
           </a:xfrm>
           <a:prstGeom prst="rect">
@@ -5402,8 +7430,37 @@
                 <a:ea typeface="KoPubWorld돋움체 Light" panose="00000300000000000000" pitchFamily="2" charset="-127"/>
                 <a:cs typeface="KoPubWorld돋움체 Light" panose="00000300000000000000" pitchFamily="2" charset="-127"/>
               </a:rPr>
-              <a:t> 1, 2</a:t>
-            </a:r>
+              <a:t> </a:t>
+            </a:r>
+            <a:r>
+              <a:rPr lang="ko-KR" altLang="en-US" sz="1400" dirty="0">
+                <a:latin typeface="KoPubWorld돋움체 Light" panose="00000300000000000000" pitchFamily="2" charset="-127"/>
+                <a:ea typeface="KoPubWorld돋움체 Light" panose="00000300000000000000" pitchFamily="2" charset="-127"/>
+                <a:cs typeface="KoPubWorld돋움체 Light" panose="00000300000000000000" pitchFamily="2" charset="-127"/>
+              </a:rPr>
+              <a:t>업무 효율성 향상 </a:t>
+            </a:r>
+            <a:r>
+              <a:rPr lang="en-US" altLang="ko-KR" sz="1400" dirty="0">
+                <a:latin typeface="KoPubWorld돋움체 Light" panose="00000300000000000000" pitchFamily="2" charset="-127"/>
+                <a:ea typeface="KoPubWorld돋움체 Light" panose="00000300000000000000" pitchFamily="2" charset="-127"/>
+                <a:cs typeface="KoPubWorld돋움체 Light" panose="00000300000000000000" pitchFamily="2" charset="-127"/>
+              </a:rPr>
+              <a:t>: </a:t>
+            </a:r>
+            <a:r>
+              <a:rPr lang="ko-KR" altLang="en-US" sz="1400" dirty="0">
+                <a:latin typeface="KoPubWorld돋움체 Light" panose="00000300000000000000" pitchFamily="2" charset="-127"/>
+                <a:ea typeface="KoPubWorld돋움체 Light" panose="00000300000000000000" pitchFamily="2" charset="-127"/>
+                <a:cs typeface="KoPubWorld돋움체 Light" panose="00000300000000000000" pitchFamily="2" charset="-127"/>
+              </a:rPr>
+              <a:t>정보 수집 자동화 및 불필요한 출장 감소</a:t>
+            </a:r>
+            <a:endParaRPr lang="en-US" altLang="ko-KR" sz="1400" dirty="0">
+              <a:latin typeface="KoPubWorld돋움체 Light" panose="00000300000000000000" pitchFamily="2" charset="-127"/>
+              <a:ea typeface="KoPubWorld돋움체 Light" panose="00000300000000000000" pitchFamily="2" charset="-127"/>
+              <a:cs typeface="KoPubWorld돋움체 Light" panose="00000300000000000000" pitchFamily="2" charset="-127"/>
+            </a:endParaRPr>
           </a:p>
           <a:p>
             <a:pPr marL="285750" indent="-104775">
@@ -5418,13 +7475,42 @@
               <a:defRPr/>
             </a:pPr>
             <a:r>
-              <a:rPr lang="en-US" altLang="ko-KR" sz="1400" b="1" dirty="0">
-                <a:latin typeface="KoPubWorld돋움체 Light" panose="00000300000000000000" pitchFamily="2" charset="-127"/>
-                <a:ea typeface="KoPubWorld돋움체 Light" panose="00000300000000000000" pitchFamily="2" charset="-127"/>
-                <a:cs typeface="KoPubWorld돋움체 Light" panose="00000300000000000000" pitchFamily="2" charset="-127"/>
-              </a:rPr>
-              <a:t> 1</a:t>
-            </a:r>
+              <a:rPr lang="en-US" altLang="ko-KR" sz="1400" dirty="0">
+                <a:latin typeface="KoPubWorld돋움체 Light" panose="00000300000000000000" pitchFamily="2" charset="-127"/>
+                <a:ea typeface="KoPubWorld돋움체 Light" panose="00000300000000000000" pitchFamily="2" charset="-127"/>
+                <a:cs typeface="KoPubWorld돋움체 Light" panose="00000300000000000000" pitchFamily="2" charset="-127"/>
+              </a:rPr>
+              <a:t> </a:t>
+            </a:r>
+            <a:r>
+              <a:rPr lang="ko-KR" altLang="en-US" sz="1400" dirty="0">
+                <a:latin typeface="KoPubWorld돋움체 Light" panose="00000300000000000000" pitchFamily="2" charset="-127"/>
+                <a:ea typeface="KoPubWorld돋움체 Light" panose="00000300000000000000" pitchFamily="2" charset="-127"/>
+                <a:cs typeface="KoPubWorld돋움체 Light" panose="00000300000000000000" pitchFamily="2" charset="-127"/>
+              </a:rPr>
+              <a:t>의사결정 지원 강화 </a:t>
+            </a:r>
+            <a:r>
+              <a:rPr lang="en-US" altLang="ko-KR" sz="1400" dirty="0">
+                <a:latin typeface="KoPubWorld돋움체 Light" panose="00000300000000000000" pitchFamily="2" charset="-127"/>
+                <a:ea typeface="KoPubWorld돋움체 Light" panose="00000300000000000000" pitchFamily="2" charset="-127"/>
+                <a:cs typeface="KoPubWorld돋움체 Light" panose="00000300000000000000" pitchFamily="2" charset="-127"/>
+              </a:rPr>
+              <a:t>: </a:t>
+            </a:r>
+            <a:r>
+              <a:rPr lang="ko-KR" altLang="en-US" sz="1400" dirty="0">
+                <a:latin typeface="KoPubWorld돋움체 Light" panose="00000300000000000000" pitchFamily="2" charset="-127"/>
+                <a:ea typeface="KoPubWorld돋움체 Light" panose="00000300000000000000" pitchFamily="2" charset="-127"/>
+                <a:cs typeface="KoPubWorld돋움체 Light" panose="00000300000000000000" pitchFamily="2" charset="-127"/>
+              </a:rPr>
+              <a:t>데이터 기반 객관적 판단 체계 구축</a:t>
+            </a:r>
+            <a:endParaRPr lang="en-US" altLang="ko-KR" sz="1400" dirty="0">
+              <a:latin typeface="KoPubWorld돋움체 Light" panose="00000300000000000000" pitchFamily="2" charset="-127"/>
+              <a:ea typeface="KoPubWorld돋움체 Light" panose="00000300000000000000" pitchFamily="2" charset="-127"/>
+              <a:cs typeface="KoPubWorld돋움체 Light" panose="00000300000000000000" pitchFamily="2" charset="-127"/>
+            </a:endParaRPr>
           </a:p>
           <a:p>
             <a:pPr marL="285750" indent="-104775">
@@ -5439,13 +7525,42 @@
               <a:defRPr/>
             </a:pPr>
             <a:r>
-              <a:rPr lang="en-US" altLang="ko-KR" sz="1400" b="1" dirty="0">
-                <a:latin typeface="KoPubWorld돋움체 Light" panose="00000300000000000000" pitchFamily="2" charset="-127"/>
-                <a:ea typeface="KoPubWorld돋움체 Light" panose="00000300000000000000" pitchFamily="2" charset="-127"/>
-                <a:cs typeface="KoPubWorld돋움체 Light" panose="00000300000000000000" pitchFamily="2" charset="-127"/>
-              </a:rPr>
-              <a:t> 2</a:t>
-            </a:r>
+              <a:rPr lang="en-US" altLang="ko-KR" sz="1400" dirty="0">
+                <a:latin typeface="KoPubWorld돋움체 Light" panose="00000300000000000000" pitchFamily="2" charset="-127"/>
+                <a:ea typeface="KoPubWorld돋움체 Light" panose="00000300000000000000" pitchFamily="2" charset="-127"/>
+                <a:cs typeface="KoPubWorld돋움체 Light" panose="00000300000000000000" pitchFamily="2" charset="-127"/>
+              </a:rPr>
+              <a:t> </a:t>
+            </a:r>
+            <a:r>
+              <a:rPr lang="ko-KR" altLang="en-US" sz="1400" dirty="0">
+                <a:latin typeface="KoPubWorld돋움체 Light" panose="00000300000000000000" pitchFamily="2" charset="-127"/>
+                <a:ea typeface="KoPubWorld돋움체 Light" panose="00000300000000000000" pitchFamily="2" charset="-127"/>
+                <a:cs typeface="KoPubWorld돋움체 Light" panose="00000300000000000000" pitchFamily="2" charset="-127"/>
+              </a:rPr>
+              <a:t>대응 체계 표준화 </a:t>
+            </a:r>
+            <a:r>
+              <a:rPr lang="en-US" altLang="ko-KR" sz="1400" dirty="0">
+                <a:latin typeface="KoPubWorld돋움체 Light" panose="00000300000000000000" pitchFamily="2" charset="-127"/>
+                <a:ea typeface="KoPubWorld돋움체 Light" panose="00000300000000000000" pitchFamily="2" charset="-127"/>
+                <a:cs typeface="KoPubWorld돋움체 Light" panose="00000300000000000000" pitchFamily="2" charset="-127"/>
+              </a:rPr>
+              <a:t>: </a:t>
+            </a:r>
+            <a:r>
+              <a:rPr lang="ko-KR" altLang="en-US" sz="1400" dirty="0">
+                <a:latin typeface="KoPubWorld돋움체 Light" panose="00000300000000000000" pitchFamily="2" charset="-127"/>
+                <a:ea typeface="KoPubWorld돋움체 Light" panose="00000300000000000000" pitchFamily="2" charset="-127"/>
+                <a:cs typeface="KoPubWorld돋움체 Light" panose="00000300000000000000" pitchFamily="2" charset="-127"/>
+              </a:rPr>
+              <a:t>단계별 대응 기준 정립으로 일관된 업무 수행</a:t>
+            </a:r>
+            <a:endParaRPr lang="en-US" altLang="ko-KR" sz="1400" dirty="0">
+              <a:latin typeface="KoPubWorld돋움체 Light" panose="00000300000000000000" pitchFamily="2" charset="-127"/>
+              <a:ea typeface="KoPubWorld돋움체 Light" panose="00000300000000000000" pitchFamily="2" charset="-127"/>
+              <a:cs typeface="KoPubWorld돋움체 Light" panose="00000300000000000000" pitchFamily="2" charset="-127"/>
+            </a:endParaRPr>
           </a:p>
           <a:p>
             <a:pPr marL="285750" indent="-104775">
@@ -5460,13 +7575,42 @@
               <a:defRPr/>
             </a:pPr>
             <a:r>
-              <a:rPr lang="en-US" altLang="ko-KR" sz="1400" b="1" dirty="0">
-                <a:latin typeface="KoPubWorld돋움체 Light" panose="00000300000000000000" pitchFamily="2" charset="-127"/>
-                <a:ea typeface="KoPubWorld돋움체 Light" panose="00000300000000000000" pitchFamily="2" charset="-127"/>
-                <a:cs typeface="KoPubWorld돋움체 Light" panose="00000300000000000000" pitchFamily="2" charset="-127"/>
-              </a:rPr>
-              <a:t> 3</a:t>
-            </a:r>
+              <a:rPr lang="en-US" altLang="ko-KR" sz="1400" dirty="0">
+                <a:latin typeface="KoPubWorld돋움체 Light" panose="00000300000000000000" pitchFamily="2" charset="-127"/>
+                <a:ea typeface="KoPubWorld돋움체 Light" panose="00000300000000000000" pitchFamily="2" charset="-127"/>
+                <a:cs typeface="KoPubWorld돋움체 Light" panose="00000300000000000000" pitchFamily="2" charset="-127"/>
+              </a:rPr>
+              <a:t> </a:t>
+            </a:r>
+            <a:r>
+              <a:rPr lang="ko-KR" altLang="en-US" sz="1400" dirty="0">
+                <a:latin typeface="KoPubWorld돋움체 Light" panose="00000300000000000000" pitchFamily="2" charset="-127"/>
+                <a:ea typeface="KoPubWorld돋움체 Light" panose="00000300000000000000" pitchFamily="2" charset="-127"/>
+                <a:cs typeface="KoPubWorld돋움체 Light" panose="00000300000000000000" pitchFamily="2" charset="-127"/>
+              </a:rPr>
+              <a:t>리스크 대응력 향상 </a:t>
+            </a:r>
+            <a:r>
+              <a:rPr lang="en-US" altLang="ko-KR" sz="1400" dirty="0">
+                <a:latin typeface="KoPubWorld돋움체 Light" panose="00000300000000000000" pitchFamily="2" charset="-127"/>
+                <a:ea typeface="KoPubWorld돋움체 Light" panose="00000300000000000000" pitchFamily="2" charset="-127"/>
+                <a:cs typeface="KoPubWorld돋움체 Light" panose="00000300000000000000" pitchFamily="2" charset="-127"/>
+              </a:rPr>
+              <a:t>: </a:t>
+            </a:r>
+            <a:r>
+              <a:rPr lang="ko-KR" altLang="en-US" sz="1400" dirty="0">
+                <a:latin typeface="KoPubWorld돋움체 Light" panose="00000300000000000000" pitchFamily="2" charset="-127"/>
+                <a:ea typeface="KoPubWorld돋움체 Light" panose="00000300000000000000" pitchFamily="2" charset="-127"/>
+                <a:cs typeface="KoPubWorld돋움체 Light" panose="00000300000000000000" pitchFamily="2" charset="-127"/>
+              </a:rPr>
+              <a:t>사전 대응을 통한 환경 리스크 최소화</a:t>
+            </a:r>
+            <a:endParaRPr lang="en-US" altLang="ko-KR" sz="1400" dirty="0">
+              <a:latin typeface="KoPubWorld돋움체 Light" panose="00000300000000000000" pitchFamily="2" charset="-127"/>
+              <a:ea typeface="KoPubWorld돋움체 Light" panose="00000300000000000000" pitchFamily="2" charset="-127"/>
+              <a:cs typeface="KoPubWorld돋움체 Light" panose="00000300000000000000" pitchFamily="2" charset="-127"/>
+            </a:endParaRPr>
           </a:p>
           <a:p>
             <a:pPr>
@@ -5478,7 +7622,7 @@
               </a:spcBef>
               <a:defRPr/>
             </a:pPr>
-            <a:endParaRPr lang="ko-KR" altLang="en-US" sz="1400" b="1" dirty="0">
+            <a:endParaRPr lang="ko-KR" altLang="en-US" sz="1400" dirty="0">
               <a:latin typeface="KoPubWorld돋움체 Light" panose="00000300000000000000" pitchFamily="2" charset="-127"/>
               <a:ea typeface="KoPubWorld돋움체 Light" panose="00000300000000000000" pitchFamily="2" charset="-127"/>
               <a:cs typeface="KoPubWorld돋움체 Light" panose="00000300000000000000" pitchFamily="2" charset="-127"/>
@@ -5489,7 +7633,7 @@
     </p:spTree>
     <p:extLst>
       <p:ext uri="{BB962C8B-B14F-4D97-AF65-F5344CB8AC3E}">
-        <p14:creationId xmlns:p14="http://schemas.microsoft.com/office/powerpoint/2010/main" val="3115642044"/>
+        <p14:creationId xmlns:p14="http://schemas.microsoft.com/office/powerpoint/2010/main" val="3462766124"/>
       </p:ext>
     </p:extLst>
   </p:cSld>
@@ -5499,7 +7643,7 @@
 </p:sld>
 </file>
 
-<file path=ppt/slides/slide7.xml><?xml version="1.0" encoding="utf-8"?>
+<file path=ppt/slides/slide9.xml><?xml version="1.0" encoding="utf-8"?>
 <p:sld xmlns:a="http://schemas.openxmlformats.org/drawingml/2006/main" xmlns:r="http://schemas.openxmlformats.org/officeDocument/2006/relationships" xmlns:p="http://schemas.openxmlformats.org/presentationml/2006/main">
   <p:cSld>
     <p:spTree>
@@ -5531,7 +7675,7 @@
         <p:spPr>
           <a:xfrm>
             <a:off x="838393" y="924599"/>
-            <a:ext cx="992579" cy="369332"/>
+            <a:ext cx="1059906" cy="369332"/>
           </a:xfrm>
           <a:prstGeom prst="rect">
             <a:avLst/>
@@ -5551,7 +7695,7 @@
                 <a:latin typeface="KoPubWorld돋움체 Medium" panose="00000600000000000000" pitchFamily="2" charset="-127"/>
                 <a:ea typeface="KoPubWorld돋움체 Medium" panose="00000600000000000000" pitchFamily="2" charset="-127"/>
               </a:rPr>
-              <a:t>변수설명</a:t>
+              <a:t>향후 계획</a:t>
             </a:r>
           </a:p>
         </p:txBody>
@@ -5727,7 +7871,7 @@
                 <a:ea typeface="KoPubWorld돋움체 Medium" panose="00000600000000000000" pitchFamily="2" charset="-127"/>
                 <a:cs typeface="KoPubWorld돋움체 Medium" panose="00000600000000000000" pitchFamily="2" charset="-127"/>
               </a:rPr>
-              <a:t>1.3 </a:t>
+              <a:t>1.7 </a:t>
             </a:r>
             <a:r>
               <a:rPr lang="ko-KR" altLang="en-US" sz="2800" b="1" dirty="0">
@@ -5738,7 +7882,7 @@
                 <a:ea typeface="KoPubWorld돋움체 Medium" panose="00000600000000000000" pitchFamily="2" charset="-127"/>
                 <a:cs typeface="KoPubWorld돋움체 Medium" panose="00000600000000000000" pitchFamily="2" charset="-127"/>
               </a:rPr>
-              <a:t>변수설명</a:t>
+              <a:t>향후 계획</a:t>
             </a:r>
           </a:p>
         </p:txBody>
@@ -5853,7 +7997,7 @@
                 <a:ea typeface="KoPubWorld돋움체 Light" panose="00000300000000000000" pitchFamily="2" charset="-127"/>
                 <a:cs typeface="KoPubWorld돋움체 Light" panose="00000300000000000000" pitchFamily="2" charset="-127"/>
               </a:rPr>
-              <a:t> (Google Antigravity)</a:t>
+              <a:t> 1, 2</a:t>
             </a:r>
           </a:p>
           <a:p>
@@ -5940,909 +8084,7 @@
     </p:spTree>
     <p:extLst>
       <p:ext uri="{BB962C8B-B14F-4D97-AF65-F5344CB8AC3E}">
-        <p14:creationId xmlns:p14="http://schemas.microsoft.com/office/powerpoint/2010/main" val="2446637782"/>
-      </p:ext>
-    </p:extLst>
-  </p:cSld>
-  <p:clrMapOvr>
-    <a:masterClrMapping/>
-  </p:clrMapOvr>
-</p:sld>
-</file>
-
-<file path=ppt/slides/slide8.xml><?xml version="1.0" encoding="utf-8"?>
-<p:sld xmlns:a="http://schemas.openxmlformats.org/drawingml/2006/main" xmlns:r="http://schemas.openxmlformats.org/officeDocument/2006/relationships" xmlns:p="http://schemas.openxmlformats.org/presentationml/2006/main">
-  <p:cSld>
-    <p:spTree>
-      <p:nvGrpSpPr>
-        <p:cNvPr id="1" name=""/>
-        <p:cNvGrpSpPr/>
-        <p:nvPr/>
-      </p:nvGrpSpPr>
-      <p:grpSpPr>
-        <a:xfrm>
-          <a:off x="0" y="0"/>
-          <a:ext cx="0" cy="0"/>
-          <a:chOff x="0" y="0"/>
-          <a:chExt cx="0" cy="0"/>
-        </a:xfrm>
-      </p:grpSpPr>
-      <p:sp>
-        <p:nvSpPr>
-          <p:cNvPr id="4" name="직사각형 3">
-            <a:extLst>
-              <a:ext uri="{FF2B5EF4-FFF2-40B4-BE49-F238E27FC236}">
-                <a16:creationId xmlns:a16="http://schemas.microsoft.com/office/drawing/2014/main" id="{A85F55C1-D2B6-7511-C595-22826FC91043}"/>
-              </a:ext>
-            </a:extLst>
-          </p:cNvPr>
-          <p:cNvSpPr/>
-          <p:nvPr/>
-        </p:nvSpPr>
-        <p:spPr>
-          <a:xfrm>
-            <a:off x="838393" y="924599"/>
-            <a:ext cx="992579" cy="369332"/>
-          </a:xfrm>
-          <a:prstGeom prst="rect">
-            <a:avLst/>
-          </a:prstGeom>
-        </p:spPr>
-        <p:txBody>
-          <a:bodyPr wrap="none">
-            <a:spAutoFit/>
-          </a:bodyPr>
-          <a:lstStyle/>
-          <a:p>
-            <a:r>
-              <a:rPr lang="ko-KR" altLang="en-US" b="1" dirty="0">
-                <a:solidFill>
-                  <a:srgbClr val="002060"/>
-                </a:solidFill>
-                <a:latin typeface="KoPubWorld돋움체 Medium" panose="00000600000000000000" pitchFamily="2" charset="-127"/>
-                <a:ea typeface="KoPubWorld돋움체 Medium" panose="00000600000000000000" pitchFamily="2" charset="-127"/>
-              </a:rPr>
-              <a:t>기대효과</a:t>
-            </a:r>
-          </a:p>
-        </p:txBody>
-      </p:sp>
-      <p:pic>
-        <p:nvPicPr>
-          <p:cNvPr id="5" name="Picture 5" descr="그림3">
-            <a:extLst>
-              <a:ext uri="{FF2B5EF4-FFF2-40B4-BE49-F238E27FC236}">
-                <a16:creationId xmlns:a16="http://schemas.microsoft.com/office/drawing/2014/main" id="{7A1F29F3-6999-3632-CAEE-D296271A883E}"/>
-              </a:ext>
-            </a:extLst>
-          </p:cNvPr>
-          <p:cNvPicPr>
-            <a:picLocks noChangeAspect="1" noChangeArrowheads="1"/>
-          </p:cNvPicPr>
-          <p:nvPr/>
-        </p:nvPicPr>
-        <p:blipFill>
-          <a:blip r:embed="rId2" cstate="print">
-            <a:lum contrast="6000"/>
-            <a:extLst>
-              <a:ext uri="{28A0092B-C50C-407E-A947-70E740481C1C}">
-                <a14:useLocalDpi xmlns:a14="http://schemas.microsoft.com/office/drawing/2010/main" val="0"/>
-              </a:ext>
-            </a:extLst>
-          </a:blip>
-          <a:srcRect/>
-          <a:stretch>
-            <a:fillRect/>
-          </a:stretch>
-        </p:blipFill>
-        <p:spPr bwMode="auto">
-          <a:xfrm>
-            <a:off x="445634" y="924599"/>
-            <a:ext cx="439905" cy="400110"/>
-          </a:xfrm>
-          <a:prstGeom prst="rect">
-            <a:avLst/>
-          </a:prstGeom>
-          <a:noFill/>
-          <a:ln>
-            <a:noFill/>
-          </a:ln>
-          <a:extLst>
-            <a:ext uri="{909E8E84-426E-40DD-AFC4-6F175D3DCCD1}">
-              <a14:hiddenFill xmlns:a14="http://schemas.microsoft.com/office/drawing/2010/main">
-                <a:solidFill>
-                  <a:srgbClr val="FFFFFF"/>
-                </a:solidFill>
-              </a14:hiddenFill>
-            </a:ext>
-            <a:ext uri="{91240B29-F687-4F45-9708-019B960494DF}">
-              <a14:hiddenLine xmlns:a14="http://schemas.microsoft.com/office/drawing/2010/main" w="9525">
-                <a:solidFill>
-                  <a:srgbClr val="000000"/>
-                </a:solidFill>
-                <a:miter lim="800000"/>
-                <a:headEnd/>
-                <a:tailEnd/>
-              </a14:hiddenLine>
-            </a:ext>
-          </a:extLst>
-        </p:spPr>
-      </p:pic>
-      <p:sp>
-        <p:nvSpPr>
-          <p:cNvPr id="6" name="직사각형 5">
-            <a:extLst>
-              <a:ext uri="{FF2B5EF4-FFF2-40B4-BE49-F238E27FC236}">
-                <a16:creationId xmlns:a16="http://schemas.microsoft.com/office/drawing/2014/main" id="{ED738516-87A3-7322-025E-0B9364BBFFAF}"/>
-              </a:ext>
-            </a:extLst>
-          </p:cNvPr>
-          <p:cNvSpPr/>
-          <p:nvPr/>
-        </p:nvSpPr>
-        <p:spPr>
-          <a:xfrm>
-            <a:off x="0" y="0"/>
-            <a:ext cx="9144000" cy="640813"/>
-          </a:xfrm>
-          <a:prstGeom prst="rect">
-            <a:avLst/>
-          </a:prstGeom>
-          <a:solidFill>
-            <a:srgbClr val="002060"/>
-          </a:solidFill>
-          <a:ln>
-            <a:noFill/>
-          </a:ln>
-        </p:spPr>
-        <p:style>
-          <a:lnRef idx="2">
-            <a:schemeClr val="accent1">
-              <a:shade val="15000"/>
-            </a:schemeClr>
-          </a:lnRef>
-          <a:fillRef idx="1">
-            <a:schemeClr val="accent1"/>
-          </a:fillRef>
-          <a:effectRef idx="0">
-            <a:schemeClr val="accent1"/>
-          </a:effectRef>
-          <a:fontRef idx="minor">
-            <a:schemeClr val="lt1"/>
-          </a:fontRef>
-        </p:style>
-        <p:txBody>
-          <a:bodyPr rtlCol="0" anchor="ctr"/>
-          <a:lstStyle/>
-          <a:p>
-            <a:pPr algn="ctr"/>
-            <a:endParaRPr lang="ko-KR" altLang="en-US" dirty="0">
-              <a:latin typeface="KoPubWorld돋움체 Medium" panose="00000600000000000000" pitchFamily="2" charset="-127"/>
-              <a:ea typeface="KoPubWorld돋움체 Medium" panose="00000600000000000000" pitchFamily="2" charset="-127"/>
-              <a:cs typeface="KoPubWorld돋움체 Medium" panose="00000600000000000000" pitchFamily="2" charset="-127"/>
-            </a:endParaRPr>
-          </a:p>
-        </p:txBody>
-      </p:sp>
-      <p:sp>
-        <p:nvSpPr>
-          <p:cNvPr id="7" name="제목 38">
-            <a:extLst>
-              <a:ext uri="{FF2B5EF4-FFF2-40B4-BE49-F238E27FC236}">
-                <a16:creationId xmlns:a16="http://schemas.microsoft.com/office/drawing/2014/main" id="{352451B4-0C6C-9FB5-3C59-CFF0A2031A3B}"/>
-              </a:ext>
-            </a:extLst>
-          </p:cNvPr>
-          <p:cNvSpPr txBox="1">
-            <a:spLocks/>
-          </p:cNvSpPr>
-          <p:nvPr/>
-        </p:nvSpPr>
-        <p:spPr>
-          <a:xfrm>
-            <a:off x="247328" y="128632"/>
-            <a:ext cx="6408712" cy="400110"/>
-          </a:xfrm>
-          <a:prstGeom prst="rect">
-            <a:avLst/>
-          </a:prstGeom>
-        </p:spPr>
-        <p:txBody>
-          <a:bodyPr/>
-          <a:lstStyle>
-            <a:lvl1pPr algn="l" defTabSz="914400" rtl="0" eaLnBrk="1" latinLnBrk="1" hangingPunct="1">
-              <a:lnSpc>
-                <a:spcPct val="90000"/>
-              </a:lnSpc>
-              <a:spcBef>
-                <a:spcPct val="0"/>
-              </a:spcBef>
-              <a:buNone/>
-              <a:defRPr sz="4400" kern="1200">
-                <a:solidFill>
-                  <a:schemeClr val="tx1"/>
-                </a:solidFill>
-                <a:latin typeface="+mj-lt"/>
-                <a:ea typeface="+mj-ea"/>
-                <a:cs typeface="+mj-cs"/>
-              </a:defRPr>
-            </a:lvl1pPr>
-          </a:lstStyle>
-          <a:p>
-            <a:r>
-              <a:rPr lang="en-US" altLang="ko-KR" sz="2800" b="1" dirty="0">
-                <a:solidFill>
-                  <a:schemeClr val="bg1"/>
-                </a:solidFill>
-                <a:latin typeface="KoPubWorld돋움체 Medium" panose="00000600000000000000" pitchFamily="2" charset="-127"/>
-                <a:ea typeface="KoPubWorld돋움체 Medium" panose="00000600000000000000" pitchFamily="2" charset="-127"/>
-                <a:cs typeface="KoPubWorld돋움체 Medium" panose="00000600000000000000" pitchFamily="2" charset="-127"/>
-              </a:rPr>
-              <a:t>1.5 </a:t>
-            </a:r>
-            <a:r>
-              <a:rPr lang="ko-KR" altLang="en-US" sz="2800" b="1" dirty="0">
-                <a:solidFill>
-                  <a:schemeClr val="bg1"/>
-                </a:solidFill>
-                <a:latin typeface="KoPubWorld돋움체 Medium" panose="00000600000000000000" pitchFamily="2" charset="-127"/>
-                <a:ea typeface="KoPubWorld돋움체 Medium" panose="00000600000000000000" pitchFamily="2" charset="-127"/>
-                <a:cs typeface="KoPubWorld돋움체 Medium" panose="00000600000000000000" pitchFamily="2" charset="-127"/>
-              </a:rPr>
-              <a:t>기대효과</a:t>
-            </a:r>
-          </a:p>
-        </p:txBody>
-      </p:sp>
-      <p:sp>
-        <p:nvSpPr>
-          <p:cNvPr id="8" name="사각형: 둥근 모서리 7">
-            <a:extLst>
-              <a:ext uri="{FF2B5EF4-FFF2-40B4-BE49-F238E27FC236}">
-                <a16:creationId xmlns:a16="http://schemas.microsoft.com/office/drawing/2014/main" id="{0043A259-5689-2B9B-87C0-7E17DE4E1347}"/>
-              </a:ext>
-            </a:extLst>
-          </p:cNvPr>
-          <p:cNvSpPr/>
-          <p:nvPr/>
-        </p:nvSpPr>
-        <p:spPr>
-          <a:xfrm>
-            <a:off x="346481" y="1353285"/>
-            <a:ext cx="8451038" cy="1875690"/>
-          </a:xfrm>
-          <a:prstGeom prst="roundRect">
-            <a:avLst/>
-          </a:prstGeom>
-          <a:solidFill>
-            <a:schemeClr val="bg1">
-              <a:lumMod val="95000"/>
-              <a:alpha val="90000"/>
-            </a:schemeClr>
-          </a:solidFill>
-          <a:ln w="19050">
-            <a:solidFill>
-              <a:schemeClr val="tx1"/>
-            </a:solidFill>
-            <a:prstDash val="sysDot"/>
-          </a:ln>
-        </p:spPr>
-        <p:style>
-          <a:lnRef idx="2">
-            <a:schemeClr val="accent1">
-              <a:shade val="15000"/>
-            </a:schemeClr>
-          </a:lnRef>
-          <a:fillRef idx="1">
-            <a:schemeClr val="accent1"/>
-          </a:fillRef>
-          <a:effectRef idx="0">
-            <a:schemeClr val="accent1"/>
-          </a:effectRef>
-          <a:fontRef idx="minor">
-            <a:schemeClr val="lt1"/>
-          </a:fontRef>
-        </p:style>
-        <p:txBody>
-          <a:bodyPr rtlCol="0" anchor="ctr"/>
-          <a:lstStyle/>
-          <a:p>
-            <a:pPr algn="ctr"/>
-            <a:endParaRPr lang="ko-KR" altLang="en-US"/>
-          </a:p>
-        </p:txBody>
-      </p:sp>
-      <p:sp>
-        <p:nvSpPr>
-          <p:cNvPr id="10" name="Rectangle 40">
-            <a:extLst>
-              <a:ext uri="{FF2B5EF4-FFF2-40B4-BE49-F238E27FC236}">
-                <a16:creationId xmlns:a16="http://schemas.microsoft.com/office/drawing/2014/main" id="{9AAFBAAA-536F-17F6-1837-3F755AFB244F}"/>
-              </a:ext>
-            </a:extLst>
-          </p:cNvPr>
-          <p:cNvSpPr>
-            <a:spLocks noChangeArrowheads="1"/>
-          </p:cNvSpPr>
-          <p:nvPr/>
-        </p:nvSpPr>
-        <p:spPr bwMode="auto">
-          <a:xfrm>
-            <a:off x="445634" y="1602104"/>
-            <a:ext cx="8466964" cy="1474471"/>
-          </a:xfrm>
-          <a:prstGeom prst="rect">
-            <a:avLst/>
-          </a:prstGeom>
-          <a:noFill/>
-          <a:ln w="9525" algn="ctr">
-            <a:noFill/>
-            <a:miter lim="800000"/>
-            <a:headEnd/>
-            <a:tailEnd/>
-          </a:ln>
-          <a:effectLst/>
-        </p:spPr>
-        <p:txBody>
-          <a:bodyPr lIns="0" tIns="0" rIns="0" bIns="0"/>
-          <a:lstStyle/>
-          <a:p>
-            <a:pPr marL="285750" indent="-104775">
-              <a:lnSpc>
-                <a:spcPct val="120000"/>
-              </a:lnSpc>
-              <a:spcBef>
-                <a:spcPct val="50000"/>
-              </a:spcBef>
-              <a:buFont typeface="Arial" panose="020B0604020202020204" pitchFamily="34" charset="0"/>
-              <a:buChar char="•"/>
-              <a:defRPr/>
-            </a:pPr>
-            <a:r>
-              <a:rPr lang="en-US" altLang="ko-KR" sz="1400" dirty="0">
-                <a:latin typeface="KoPubWorld돋움체 Light" panose="00000300000000000000" pitchFamily="2" charset="-127"/>
-                <a:ea typeface="KoPubWorld돋움체 Light" panose="00000300000000000000" pitchFamily="2" charset="-127"/>
-                <a:cs typeface="KoPubWorld돋움체 Light" panose="00000300000000000000" pitchFamily="2" charset="-127"/>
-              </a:rPr>
-              <a:t> 1, 2</a:t>
-            </a:r>
-          </a:p>
-          <a:p>
-            <a:pPr marL="285750" indent="-104775">
-              <a:lnSpc>
-                <a:spcPct val="120000"/>
-              </a:lnSpc>
-              <a:spcBef>
-                <a:spcPct val="50000"/>
-              </a:spcBef>
-              <a:buFont typeface="Arial" panose="020B0604020202020204" pitchFamily="34" charset="0"/>
-              <a:buChar char="•"/>
-              <a:defRPr/>
-            </a:pPr>
-            <a:r>
-              <a:rPr lang="en-US" altLang="ko-KR" sz="1400" b="1" dirty="0">
-                <a:latin typeface="KoPubWorld돋움체 Light" panose="00000300000000000000" pitchFamily="2" charset="-127"/>
-                <a:ea typeface="KoPubWorld돋움체 Light" panose="00000300000000000000" pitchFamily="2" charset="-127"/>
-                <a:cs typeface="KoPubWorld돋움체 Light" panose="00000300000000000000" pitchFamily="2" charset="-127"/>
-              </a:rPr>
-              <a:t> 1</a:t>
-            </a:r>
-          </a:p>
-          <a:p>
-            <a:pPr marL="285750" indent="-104775">
-              <a:lnSpc>
-                <a:spcPct val="120000"/>
-              </a:lnSpc>
-              <a:spcBef>
-                <a:spcPct val="50000"/>
-              </a:spcBef>
-              <a:buFont typeface="Arial" panose="020B0604020202020204" pitchFamily="34" charset="0"/>
-              <a:buChar char="•"/>
-              <a:defRPr/>
-            </a:pPr>
-            <a:r>
-              <a:rPr lang="en-US" altLang="ko-KR" sz="1400" b="1" dirty="0">
-                <a:latin typeface="KoPubWorld돋움체 Light" panose="00000300000000000000" pitchFamily="2" charset="-127"/>
-                <a:ea typeface="KoPubWorld돋움체 Light" panose="00000300000000000000" pitchFamily="2" charset="-127"/>
-                <a:cs typeface="KoPubWorld돋움체 Light" panose="00000300000000000000" pitchFamily="2" charset="-127"/>
-              </a:rPr>
-              <a:t> 2</a:t>
-            </a:r>
-          </a:p>
-          <a:p>
-            <a:pPr marL="285750" indent="-104775">
-              <a:lnSpc>
-                <a:spcPct val="120000"/>
-              </a:lnSpc>
-              <a:spcBef>
-                <a:spcPct val="50000"/>
-              </a:spcBef>
-              <a:buFont typeface="Arial" panose="020B0604020202020204" pitchFamily="34" charset="0"/>
-              <a:buChar char="•"/>
-              <a:defRPr/>
-            </a:pPr>
-            <a:r>
-              <a:rPr lang="en-US" altLang="ko-KR" sz="1400" b="1" dirty="0">
-                <a:latin typeface="KoPubWorld돋움체 Light" panose="00000300000000000000" pitchFamily="2" charset="-127"/>
-                <a:ea typeface="KoPubWorld돋움체 Light" panose="00000300000000000000" pitchFamily="2" charset="-127"/>
-                <a:cs typeface="KoPubWorld돋움체 Light" panose="00000300000000000000" pitchFamily="2" charset="-127"/>
-              </a:rPr>
-              <a:t> 3</a:t>
-            </a:r>
-          </a:p>
-          <a:p>
-            <a:pPr>
-              <a:lnSpc>
-                <a:spcPct val="120000"/>
-              </a:lnSpc>
-              <a:spcBef>
-                <a:spcPct val="50000"/>
-              </a:spcBef>
-              <a:defRPr/>
-            </a:pPr>
-            <a:endParaRPr lang="ko-KR" altLang="en-US" sz="1400" b="1" dirty="0">
-              <a:latin typeface="KoPubWorld돋움체 Light" panose="00000300000000000000" pitchFamily="2" charset="-127"/>
-              <a:ea typeface="KoPubWorld돋움체 Light" panose="00000300000000000000" pitchFamily="2" charset="-127"/>
-              <a:cs typeface="KoPubWorld돋움체 Light" panose="00000300000000000000" pitchFamily="2" charset="-127"/>
-            </a:endParaRPr>
-          </a:p>
-        </p:txBody>
-      </p:sp>
-    </p:spTree>
-    <p:extLst>
-      <p:ext uri="{BB962C8B-B14F-4D97-AF65-F5344CB8AC3E}">
-        <p14:creationId xmlns:p14="http://schemas.microsoft.com/office/powerpoint/2010/main" val="3462766124"/>
-      </p:ext>
-    </p:extLst>
-  </p:cSld>
-  <p:clrMapOvr>
-    <a:masterClrMapping/>
-  </p:clrMapOvr>
-</p:sld>
-</file>
-
-<file path=ppt/slides/slide9.xml><?xml version="1.0" encoding="utf-8"?>
-<p:sld xmlns:a="http://schemas.openxmlformats.org/drawingml/2006/main" xmlns:r="http://schemas.openxmlformats.org/officeDocument/2006/relationships" xmlns:p="http://schemas.openxmlformats.org/presentationml/2006/main">
-  <p:cSld>
-    <p:spTree>
-      <p:nvGrpSpPr>
-        <p:cNvPr id="1" name=""/>
-        <p:cNvGrpSpPr/>
-        <p:nvPr/>
-      </p:nvGrpSpPr>
-      <p:grpSpPr>
-        <a:xfrm>
-          <a:off x="0" y="0"/>
-          <a:ext cx="0" cy="0"/>
-          <a:chOff x="0" y="0"/>
-          <a:chExt cx="0" cy="0"/>
-        </a:xfrm>
-      </p:grpSpPr>
-      <p:sp>
-        <p:nvSpPr>
-          <p:cNvPr id="4" name="직사각형 3">
-            <a:extLst>
-              <a:ext uri="{FF2B5EF4-FFF2-40B4-BE49-F238E27FC236}">
-                <a16:creationId xmlns:a16="http://schemas.microsoft.com/office/drawing/2014/main" id="{A85F55C1-D2B6-7511-C595-22826FC91043}"/>
-              </a:ext>
-            </a:extLst>
-          </p:cNvPr>
-          <p:cNvSpPr/>
-          <p:nvPr/>
-        </p:nvSpPr>
-        <p:spPr>
-          <a:xfrm>
-            <a:off x="838393" y="924599"/>
-            <a:ext cx="1531188" cy="369332"/>
-          </a:xfrm>
-          <a:prstGeom prst="rect">
-            <a:avLst/>
-          </a:prstGeom>
-        </p:spPr>
-        <p:txBody>
-          <a:bodyPr wrap="none">
-            <a:spAutoFit/>
-          </a:bodyPr>
-          <a:lstStyle/>
-          <a:p>
-            <a:r>
-              <a:rPr lang="ko-KR" altLang="en-US" b="1" dirty="0">
-                <a:solidFill>
-                  <a:srgbClr val="002060"/>
-                </a:solidFill>
-                <a:latin typeface="KoPubWorld돋움체 Medium" panose="00000600000000000000" pitchFamily="2" charset="-127"/>
-                <a:ea typeface="KoPubWorld돋움체 Medium" panose="00000600000000000000" pitchFamily="2" charset="-127"/>
-              </a:rPr>
-              <a:t>한계 및 리스크</a:t>
-            </a:r>
-          </a:p>
-        </p:txBody>
-      </p:sp>
-      <p:pic>
-        <p:nvPicPr>
-          <p:cNvPr id="5" name="Picture 5" descr="그림3">
-            <a:extLst>
-              <a:ext uri="{FF2B5EF4-FFF2-40B4-BE49-F238E27FC236}">
-                <a16:creationId xmlns:a16="http://schemas.microsoft.com/office/drawing/2014/main" id="{7A1F29F3-6999-3632-CAEE-D296271A883E}"/>
-              </a:ext>
-            </a:extLst>
-          </p:cNvPr>
-          <p:cNvPicPr>
-            <a:picLocks noChangeAspect="1" noChangeArrowheads="1"/>
-          </p:cNvPicPr>
-          <p:nvPr/>
-        </p:nvPicPr>
-        <p:blipFill>
-          <a:blip r:embed="rId2" cstate="print">
-            <a:lum contrast="6000"/>
-            <a:extLst>
-              <a:ext uri="{28A0092B-C50C-407E-A947-70E740481C1C}">
-                <a14:useLocalDpi xmlns:a14="http://schemas.microsoft.com/office/drawing/2010/main" val="0"/>
-              </a:ext>
-            </a:extLst>
-          </a:blip>
-          <a:srcRect/>
-          <a:stretch>
-            <a:fillRect/>
-          </a:stretch>
-        </p:blipFill>
-        <p:spPr bwMode="auto">
-          <a:xfrm>
-            <a:off x="445634" y="924599"/>
-            <a:ext cx="439905" cy="400110"/>
-          </a:xfrm>
-          <a:prstGeom prst="rect">
-            <a:avLst/>
-          </a:prstGeom>
-          <a:noFill/>
-          <a:ln>
-            <a:noFill/>
-          </a:ln>
-          <a:extLst>
-            <a:ext uri="{909E8E84-426E-40DD-AFC4-6F175D3DCCD1}">
-              <a14:hiddenFill xmlns:a14="http://schemas.microsoft.com/office/drawing/2010/main">
-                <a:solidFill>
-                  <a:srgbClr val="FFFFFF"/>
-                </a:solidFill>
-              </a14:hiddenFill>
-            </a:ext>
-            <a:ext uri="{91240B29-F687-4F45-9708-019B960494DF}">
-              <a14:hiddenLine xmlns:a14="http://schemas.microsoft.com/office/drawing/2010/main" w="9525">
-                <a:solidFill>
-                  <a:srgbClr val="000000"/>
-                </a:solidFill>
-                <a:miter lim="800000"/>
-                <a:headEnd/>
-                <a:tailEnd/>
-              </a14:hiddenLine>
-            </a:ext>
-          </a:extLst>
-        </p:spPr>
-      </p:pic>
-      <p:sp>
-        <p:nvSpPr>
-          <p:cNvPr id="6" name="직사각형 5">
-            <a:extLst>
-              <a:ext uri="{FF2B5EF4-FFF2-40B4-BE49-F238E27FC236}">
-                <a16:creationId xmlns:a16="http://schemas.microsoft.com/office/drawing/2014/main" id="{ED738516-87A3-7322-025E-0B9364BBFFAF}"/>
-              </a:ext>
-            </a:extLst>
-          </p:cNvPr>
-          <p:cNvSpPr/>
-          <p:nvPr/>
-        </p:nvSpPr>
-        <p:spPr>
-          <a:xfrm>
-            <a:off x="0" y="0"/>
-            <a:ext cx="9144000" cy="640813"/>
-          </a:xfrm>
-          <a:prstGeom prst="rect">
-            <a:avLst/>
-          </a:prstGeom>
-          <a:solidFill>
-            <a:srgbClr val="002060"/>
-          </a:solidFill>
-          <a:ln>
-            <a:noFill/>
-          </a:ln>
-        </p:spPr>
-        <p:style>
-          <a:lnRef idx="2">
-            <a:schemeClr val="accent1">
-              <a:shade val="15000"/>
-            </a:schemeClr>
-          </a:lnRef>
-          <a:fillRef idx="1">
-            <a:schemeClr val="accent1"/>
-          </a:fillRef>
-          <a:effectRef idx="0">
-            <a:schemeClr val="accent1"/>
-          </a:effectRef>
-          <a:fontRef idx="minor">
-            <a:schemeClr val="lt1"/>
-          </a:fontRef>
-        </p:style>
-        <p:txBody>
-          <a:bodyPr rtlCol="0" anchor="ctr"/>
-          <a:lstStyle/>
-          <a:p>
-            <a:pPr algn="ctr"/>
-            <a:endParaRPr lang="ko-KR" altLang="en-US" dirty="0">
-              <a:latin typeface="KoPubWorld돋움체 Medium" panose="00000600000000000000" pitchFamily="2" charset="-127"/>
-              <a:ea typeface="KoPubWorld돋움체 Medium" panose="00000600000000000000" pitchFamily="2" charset="-127"/>
-              <a:cs typeface="KoPubWorld돋움체 Medium" panose="00000600000000000000" pitchFamily="2" charset="-127"/>
-            </a:endParaRPr>
-          </a:p>
-        </p:txBody>
-      </p:sp>
-      <p:sp>
-        <p:nvSpPr>
-          <p:cNvPr id="7" name="제목 38">
-            <a:extLst>
-              <a:ext uri="{FF2B5EF4-FFF2-40B4-BE49-F238E27FC236}">
-                <a16:creationId xmlns:a16="http://schemas.microsoft.com/office/drawing/2014/main" id="{352451B4-0C6C-9FB5-3C59-CFF0A2031A3B}"/>
-              </a:ext>
-            </a:extLst>
-          </p:cNvPr>
-          <p:cNvSpPr txBox="1">
-            <a:spLocks/>
-          </p:cNvSpPr>
-          <p:nvPr/>
-        </p:nvSpPr>
-        <p:spPr>
-          <a:xfrm>
-            <a:off x="247328" y="128632"/>
-            <a:ext cx="6408712" cy="400110"/>
-          </a:xfrm>
-          <a:prstGeom prst="rect">
-            <a:avLst/>
-          </a:prstGeom>
-        </p:spPr>
-        <p:txBody>
-          <a:bodyPr/>
-          <a:lstStyle>
-            <a:lvl1pPr algn="l" defTabSz="914400" rtl="0" eaLnBrk="1" latinLnBrk="1" hangingPunct="1">
-              <a:lnSpc>
-                <a:spcPct val="90000"/>
-              </a:lnSpc>
-              <a:spcBef>
-                <a:spcPct val="0"/>
-              </a:spcBef>
-              <a:buNone/>
-              <a:defRPr sz="4400" kern="1200">
-                <a:solidFill>
-                  <a:schemeClr val="tx1"/>
-                </a:solidFill>
-                <a:latin typeface="+mj-lt"/>
-                <a:ea typeface="+mj-ea"/>
-                <a:cs typeface="+mj-cs"/>
-              </a:defRPr>
-            </a:lvl1pPr>
-          </a:lstStyle>
-          <a:p>
-            <a:r>
-              <a:rPr lang="en-US" altLang="ko-KR" sz="2800" b="1" dirty="0">
-                <a:solidFill>
-                  <a:schemeClr val="bg1"/>
-                </a:solidFill>
-                <a:latin typeface="KoPubWorld돋움체 Medium" panose="00000600000000000000" pitchFamily="2" charset="-127"/>
-                <a:ea typeface="KoPubWorld돋움체 Medium" panose="00000600000000000000" pitchFamily="2" charset="-127"/>
-                <a:cs typeface="KoPubWorld돋움체 Medium" panose="00000600000000000000" pitchFamily="2" charset="-127"/>
-              </a:rPr>
-              <a:t>1.6 </a:t>
-            </a:r>
-            <a:r>
-              <a:rPr lang="ko-KR" altLang="en-US" sz="2800" b="1" dirty="0">
-                <a:solidFill>
-                  <a:schemeClr val="bg1"/>
-                </a:solidFill>
-                <a:latin typeface="KoPubWorld돋움체 Medium" panose="00000600000000000000" pitchFamily="2" charset="-127"/>
-                <a:ea typeface="KoPubWorld돋움체 Medium" panose="00000600000000000000" pitchFamily="2" charset="-127"/>
-                <a:cs typeface="KoPubWorld돋움체 Medium" panose="00000600000000000000" pitchFamily="2" charset="-127"/>
-              </a:rPr>
-              <a:t>한계 및 리스크</a:t>
-            </a:r>
-          </a:p>
-        </p:txBody>
-      </p:sp>
-      <p:sp>
-        <p:nvSpPr>
-          <p:cNvPr id="8" name="사각형: 둥근 모서리 7">
-            <a:extLst>
-              <a:ext uri="{FF2B5EF4-FFF2-40B4-BE49-F238E27FC236}">
-                <a16:creationId xmlns:a16="http://schemas.microsoft.com/office/drawing/2014/main" id="{0043A259-5689-2B9B-87C0-7E17DE4E1347}"/>
-              </a:ext>
-            </a:extLst>
-          </p:cNvPr>
-          <p:cNvSpPr/>
-          <p:nvPr/>
-        </p:nvSpPr>
-        <p:spPr>
-          <a:xfrm>
-            <a:off x="346481" y="1353285"/>
-            <a:ext cx="8451038" cy="1875690"/>
-          </a:xfrm>
-          <a:prstGeom prst="roundRect">
-            <a:avLst/>
-          </a:prstGeom>
-          <a:solidFill>
-            <a:schemeClr val="bg1">
-              <a:lumMod val="95000"/>
-              <a:alpha val="90000"/>
-            </a:schemeClr>
-          </a:solidFill>
-          <a:ln w="19050">
-            <a:solidFill>
-              <a:schemeClr val="tx1"/>
-            </a:solidFill>
-            <a:prstDash val="sysDot"/>
-          </a:ln>
-        </p:spPr>
-        <p:style>
-          <a:lnRef idx="2">
-            <a:schemeClr val="accent1">
-              <a:shade val="15000"/>
-            </a:schemeClr>
-          </a:lnRef>
-          <a:fillRef idx="1">
-            <a:schemeClr val="accent1"/>
-          </a:fillRef>
-          <a:effectRef idx="0">
-            <a:schemeClr val="accent1"/>
-          </a:effectRef>
-          <a:fontRef idx="minor">
-            <a:schemeClr val="lt1"/>
-          </a:fontRef>
-        </p:style>
-        <p:txBody>
-          <a:bodyPr rtlCol="0" anchor="ctr"/>
-          <a:lstStyle/>
-          <a:p>
-            <a:pPr algn="ctr"/>
-            <a:endParaRPr lang="ko-KR" altLang="en-US"/>
-          </a:p>
-        </p:txBody>
-      </p:sp>
-      <p:sp>
-        <p:nvSpPr>
-          <p:cNvPr id="10" name="Rectangle 40">
-            <a:extLst>
-              <a:ext uri="{FF2B5EF4-FFF2-40B4-BE49-F238E27FC236}">
-                <a16:creationId xmlns:a16="http://schemas.microsoft.com/office/drawing/2014/main" id="{9AAFBAAA-536F-17F6-1837-3F755AFB244F}"/>
-              </a:ext>
-            </a:extLst>
-          </p:cNvPr>
-          <p:cNvSpPr>
-            <a:spLocks noChangeArrowheads="1"/>
-          </p:cNvSpPr>
-          <p:nvPr/>
-        </p:nvSpPr>
-        <p:spPr bwMode="auto">
-          <a:xfrm>
-            <a:off x="445634" y="1602104"/>
-            <a:ext cx="8466964" cy="1474471"/>
-          </a:xfrm>
-          <a:prstGeom prst="rect">
-            <a:avLst/>
-          </a:prstGeom>
-          <a:noFill/>
-          <a:ln w="9525" algn="ctr">
-            <a:noFill/>
-            <a:miter lim="800000"/>
-            <a:headEnd/>
-            <a:tailEnd/>
-          </a:ln>
-          <a:effectLst/>
-        </p:spPr>
-        <p:txBody>
-          <a:bodyPr lIns="0" tIns="0" rIns="0" bIns="0"/>
-          <a:lstStyle/>
-          <a:p>
-            <a:pPr marL="285750" indent="-104775">
-              <a:lnSpc>
-                <a:spcPct val="120000"/>
-              </a:lnSpc>
-              <a:spcBef>
-                <a:spcPct val="50000"/>
-              </a:spcBef>
-              <a:buFont typeface="Arial" panose="020B0604020202020204" pitchFamily="34" charset="0"/>
-              <a:buChar char="•"/>
-              <a:defRPr/>
-            </a:pPr>
-            <a:r>
-              <a:rPr lang="en-US" altLang="ko-KR" sz="1400" dirty="0">
-                <a:latin typeface="KoPubWorld돋움체 Light" panose="00000300000000000000" pitchFamily="2" charset="-127"/>
-                <a:ea typeface="KoPubWorld돋움체 Light" panose="00000300000000000000" pitchFamily="2" charset="-127"/>
-                <a:cs typeface="KoPubWorld돋움체 Light" panose="00000300000000000000" pitchFamily="2" charset="-127"/>
-              </a:rPr>
-              <a:t> 1, 2</a:t>
-            </a:r>
-          </a:p>
-          <a:p>
-            <a:pPr marL="285750" indent="-104775">
-              <a:lnSpc>
-                <a:spcPct val="120000"/>
-              </a:lnSpc>
-              <a:spcBef>
-                <a:spcPct val="50000"/>
-              </a:spcBef>
-              <a:buFont typeface="Arial" panose="020B0604020202020204" pitchFamily="34" charset="0"/>
-              <a:buChar char="•"/>
-              <a:defRPr/>
-            </a:pPr>
-            <a:r>
-              <a:rPr lang="en-US" altLang="ko-KR" sz="1400" b="1" dirty="0">
-                <a:latin typeface="KoPubWorld돋움체 Light" panose="00000300000000000000" pitchFamily="2" charset="-127"/>
-                <a:ea typeface="KoPubWorld돋움체 Light" panose="00000300000000000000" pitchFamily="2" charset="-127"/>
-                <a:cs typeface="KoPubWorld돋움체 Light" panose="00000300000000000000" pitchFamily="2" charset="-127"/>
-              </a:rPr>
-              <a:t> 1</a:t>
-            </a:r>
-          </a:p>
-          <a:p>
-            <a:pPr marL="285750" indent="-104775">
-              <a:lnSpc>
-                <a:spcPct val="120000"/>
-              </a:lnSpc>
-              <a:spcBef>
-                <a:spcPct val="50000"/>
-              </a:spcBef>
-              <a:buFont typeface="Arial" panose="020B0604020202020204" pitchFamily="34" charset="0"/>
-              <a:buChar char="•"/>
-              <a:defRPr/>
-            </a:pPr>
-            <a:r>
-              <a:rPr lang="en-US" altLang="ko-KR" sz="1400" b="1" dirty="0">
-                <a:latin typeface="KoPubWorld돋움체 Light" panose="00000300000000000000" pitchFamily="2" charset="-127"/>
-                <a:ea typeface="KoPubWorld돋움체 Light" panose="00000300000000000000" pitchFamily="2" charset="-127"/>
-                <a:cs typeface="KoPubWorld돋움체 Light" panose="00000300000000000000" pitchFamily="2" charset="-127"/>
-              </a:rPr>
-              <a:t> 2</a:t>
-            </a:r>
-          </a:p>
-          <a:p>
-            <a:pPr marL="285750" indent="-104775">
-              <a:lnSpc>
-                <a:spcPct val="120000"/>
-              </a:lnSpc>
-              <a:spcBef>
-                <a:spcPct val="50000"/>
-              </a:spcBef>
-              <a:buFont typeface="Arial" panose="020B0604020202020204" pitchFamily="34" charset="0"/>
-              <a:buChar char="•"/>
-              <a:defRPr/>
-            </a:pPr>
-            <a:r>
-              <a:rPr lang="en-US" altLang="ko-KR" sz="1400" b="1" dirty="0">
-                <a:latin typeface="KoPubWorld돋움체 Light" panose="00000300000000000000" pitchFamily="2" charset="-127"/>
-                <a:ea typeface="KoPubWorld돋움체 Light" panose="00000300000000000000" pitchFamily="2" charset="-127"/>
-                <a:cs typeface="KoPubWorld돋움체 Light" panose="00000300000000000000" pitchFamily="2" charset="-127"/>
-              </a:rPr>
-              <a:t> 3</a:t>
-            </a:r>
-          </a:p>
-          <a:p>
-            <a:pPr>
-              <a:lnSpc>
-                <a:spcPct val="120000"/>
-              </a:lnSpc>
-              <a:spcBef>
-                <a:spcPct val="50000"/>
-              </a:spcBef>
-              <a:defRPr/>
-            </a:pPr>
-            <a:endParaRPr lang="ko-KR" altLang="en-US" sz="1400" b="1" dirty="0">
-              <a:latin typeface="KoPubWorld돋움체 Light" panose="00000300000000000000" pitchFamily="2" charset="-127"/>
-              <a:ea typeface="KoPubWorld돋움체 Light" panose="00000300000000000000" pitchFamily="2" charset="-127"/>
-              <a:cs typeface="KoPubWorld돋움체 Light" panose="00000300000000000000" pitchFamily="2" charset="-127"/>
-            </a:endParaRPr>
-          </a:p>
-        </p:txBody>
-      </p:sp>
-    </p:spTree>
-    <p:extLst>
-      <p:ext uri="{BB962C8B-B14F-4D97-AF65-F5344CB8AC3E}">
-        <p14:creationId xmlns:p14="http://schemas.microsoft.com/office/powerpoint/2010/main" val="3994195237"/>
+        <p14:creationId xmlns:p14="http://schemas.microsoft.com/office/powerpoint/2010/main" val="1556603261"/>
       </p:ext>
     </p:extLst>
   </p:cSld>
